--- a/docs/plots/carbo/jx_carbo_linsubhr_ratio_akikdigo.pptx
+++ b/docs/plots/carbo/jx_carbo_linsubhr_ratio_akikdigo.pptx
@@ -3003,533 +3003,521 @@
           <p:spPr>
             <a:xfrm>
               <a:off x="817517" y="1896563"/>
-              <a:ext cx="7370972" cy="3605243"/>
+              <a:ext cx="7370972" cy="3627349"/>
             </a:xfrm>
             <a:custGeom>
               <a:avLst/>
               <a:pathLst>
-                <a:path w="7370972" h="3605243">
+                <a:path w="7370972" h="3627349">
                   <a:moveTo>
-                    <a:pt x="1421184" y="0"/>
+                    <a:pt x="1769971" y="0"/>
                   </a:moveTo>
                   <a:lnTo>
-                    <a:pt x="1470785" y="131214"/>
-                  </a:lnTo>
-                  <a:lnTo>
-                    <a:pt x="1548419" y="325272"/>
-                  </a:lnTo>
-                  <a:lnTo>
-                    <a:pt x="1626053" y="508635"/>
-                  </a:lnTo>
-                  <a:lnTo>
-                    <a:pt x="1703687" y="681894"/>
-                  </a:lnTo>
-                  <a:lnTo>
-                    <a:pt x="1781321" y="845605"/>
-                  </a:lnTo>
-                  <a:lnTo>
-                    <a:pt x="1858955" y="1000294"/>
-                  </a:lnTo>
-                  <a:lnTo>
-                    <a:pt x="1936589" y="1146458"/>
-                  </a:lnTo>
-                  <a:lnTo>
-                    <a:pt x="2014223" y="1284568"/>
-                  </a:lnTo>
-                  <a:lnTo>
-                    <a:pt x="2091857" y="1415067"/>
-                  </a:lnTo>
-                  <a:lnTo>
-                    <a:pt x="2169491" y="1538375"/>
-                  </a:lnTo>
-                  <a:lnTo>
-                    <a:pt x="2247125" y="1654887"/>
-                  </a:lnTo>
-                  <a:lnTo>
-                    <a:pt x="2324759" y="1764978"/>
-                  </a:lnTo>
-                  <a:lnTo>
-                    <a:pt x="2402393" y="1869003"/>
-                  </a:lnTo>
-                  <a:lnTo>
-                    <a:pt x="2480027" y="1967295"/>
-                  </a:lnTo>
-                  <a:lnTo>
-                    <a:pt x="2557661" y="2060171"/>
-                  </a:lnTo>
-                  <a:lnTo>
-                    <a:pt x="2635295" y="2147928"/>
-                  </a:lnTo>
-                  <a:lnTo>
-                    <a:pt x="2712930" y="2230849"/>
-                  </a:lnTo>
-                  <a:lnTo>
-                    <a:pt x="2790564" y="2309201"/>
-                  </a:lnTo>
-                  <a:lnTo>
-                    <a:pt x="2868198" y="2383235"/>
-                  </a:lnTo>
-                  <a:lnTo>
-                    <a:pt x="2945832" y="2453189"/>
-                  </a:lnTo>
-                  <a:lnTo>
-                    <a:pt x="3023466" y="2519288"/>
-                  </a:lnTo>
-                  <a:lnTo>
-                    <a:pt x="3101100" y="2581744"/>
-                  </a:lnTo>
-                  <a:lnTo>
-                    <a:pt x="3178734" y="2640759"/>
-                  </a:lnTo>
-                  <a:lnTo>
-                    <a:pt x="3256368" y="2696521"/>
-                  </a:lnTo>
-                  <a:lnTo>
-                    <a:pt x="3334002" y="2749211"/>
-                  </a:lnTo>
-                  <a:lnTo>
-                    <a:pt x="3411636" y="2785098"/>
-                  </a:lnTo>
-                  <a:lnTo>
-                    <a:pt x="3489270" y="2791559"/>
-                  </a:lnTo>
-                  <a:lnTo>
-                    <a:pt x="3566904" y="2797972"/>
-                  </a:lnTo>
-                  <a:lnTo>
-                    <a:pt x="3644538" y="2804338"/>
-                  </a:lnTo>
-                  <a:lnTo>
-                    <a:pt x="3722172" y="2810656"/>
-                  </a:lnTo>
-                  <a:lnTo>
-                    <a:pt x="3799806" y="2816927"/>
-                  </a:lnTo>
-                  <a:lnTo>
-                    <a:pt x="3877440" y="2823152"/>
-                  </a:lnTo>
-                  <a:lnTo>
-                    <a:pt x="3955074" y="2829330"/>
-                  </a:lnTo>
-                  <a:lnTo>
-                    <a:pt x="4032708" y="2835462"/>
-                  </a:lnTo>
-                  <a:lnTo>
-                    <a:pt x="4110342" y="2841548"/>
-                  </a:lnTo>
-                  <a:lnTo>
-                    <a:pt x="4187976" y="2847589"/>
-                  </a:lnTo>
-                  <a:lnTo>
-                    <a:pt x="4265610" y="2853585"/>
-                  </a:lnTo>
-                  <a:lnTo>
-                    <a:pt x="4343244" y="2859537"/>
-                  </a:lnTo>
-                  <a:lnTo>
-                    <a:pt x="4420879" y="2865444"/>
-                  </a:lnTo>
-                  <a:lnTo>
-                    <a:pt x="4498513" y="2871307"/>
-                  </a:lnTo>
-                  <a:lnTo>
-                    <a:pt x="4576147" y="2877126"/>
-                  </a:lnTo>
-                  <a:lnTo>
-                    <a:pt x="4653781" y="2882902"/>
-                  </a:lnTo>
-                  <a:lnTo>
-                    <a:pt x="4731415" y="2888635"/>
-                  </a:lnTo>
-                  <a:lnTo>
-                    <a:pt x="4809049" y="2894326"/>
-                  </a:lnTo>
-                  <a:lnTo>
-                    <a:pt x="4886683" y="2899974"/>
-                  </a:lnTo>
-                  <a:lnTo>
-                    <a:pt x="4964317" y="2905579"/>
-                  </a:lnTo>
-                  <a:lnTo>
-                    <a:pt x="5041951" y="2911144"/>
-                  </a:lnTo>
-                  <a:lnTo>
-                    <a:pt x="5119585" y="2916666"/>
-                  </a:lnTo>
-                  <a:lnTo>
-                    <a:pt x="5197219" y="2922148"/>
-                  </a:lnTo>
-                  <a:lnTo>
-                    <a:pt x="5274853" y="2927589"/>
-                  </a:lnTo>
-                  <a:lnTo>
-                    <a:pt x="5352487" y="2932989"/>
-                  </a:lnTo>
-                  <a:lnTo>
-                    <a:pt x="5430121" y="2938349"/>
-                  </a:lnTo>
-                  <a:lnTo>
-                    <a:pt x="5507755" y="2943669"/>
-                  </a:lnTo>
-                  <a:lnTo>
-                    <a:pt x="5585389" y="2948949"/>
-                  </a:lnTo>
-                  <a:lnTo>
-                    <a:pt x="5663023" y="2954190"/>
-                  </a:lnTo>
-                  <a:lnTo>
-                    <a:pt x="5740657" y="2959392"/>
-                  </a:lnTo>
-                  <a:lnTo>
-                    <a:pt x="5818291" y="2964556"/>
-                  </a:lnTo>
-                  <a:lnTo>
-                    <a:pt x="5895925" y="2969681"/>
-                  </a:lnTo>
-                  <a:lnTo>
-                    <a:pt x="5973559" y="2974767"/>
-                  </a:lnTo>
-                  <a:lnTo>
-                    <a:pt x="6051193" y="2979816"/>
-                  </a:lnTo>
-                  <a:lnTo>
-                    <a:pt x="6128827" y="2984827"/>
-                  </a:lnTo>
-                  <a:lnTo>
-                    <a:pt x="6206462" y="2989801"/>
-                  </a:lnTo>
-                  <a:lnTo>
-                    <a:pt x="6284096" y="2994738"/>
-                  </a:lnTo>
-                  <a:lnTo>
-                    <a:pt x="6361730" y="2999638"/>
-                  </a:lnTo>
-                  <a:lnTo>
-                    <a:pt x="6439364" y="3004502"/>
-                  </a:lnTo>
-                  <a:lnTo>
-                    <a:pt x="6516998" y="3009329"/>
-                  </a:lnTo>
-                  <a:lnTo>
-                    <a:pt x="6594632" y="3014121"/>
-                  </a:lnTo>
-                  <a:lnTo>
-                    <a:pt x="6672266" y="3018876"/>
-                  </a:lnTo>
-                  <a:lnTo>
-                    <a:pt x="6749900" y="3023597"/>
-                  </a:lnTo>
-                  <a:lnTo>
-                    <a:pt x="6827534" y="3028282"/>
-                  </a:lnTo>
-                  <a:lnTo>
-                    <a:pt x="6905168" y="3032932"/>
-                  </a:lnTo>
-                  <a:lnTo>
-                    <a:pt x="6982802" y="3037548"/>
-                  </a:lnTo>
-                  <a:lnTo>
-                    <a:pt x="7060436" y="3042129"/>
-                  </a:lnTo>
-                  <a:lnTo>
-                    <a:pt x="7138070" y="3046676"/>
-                  </a:lnTo>
-                  <a:lnTo>
-                    <a:pt x="7215704" y="3051189"/>
-                  </a:lnTo>
-                  <a:lnTo>
-                    <a:pt x="7293338" y="3055669"/>
-                  </a:lnTo>
-                  <a:lnTo>
-                    <a:pt x="7370972" y="3060115"/>
-                  </a:lnTo>
-                  <a:lnTo>
-                    <a:pt x="7370972" y="3605243"/>
-                  </a:lnTo>
-                  <a:lnTo>
-                    <a:pt x="7293338" y="3602479"/>
-                  </a:lnTo>
-                  <a:lnTo>
-                    <a:pt x="7215704" y="3599553"/>
-                  </a:lnTo>
-                  <a:lnTo>
-                    <a:pt x="7138070" y="3596457"/>
-                  </a:lnTo>
-                  <a:lnTo>
-                    <a:pt x="7060436" y="3593180"/>
-                  </a:lnTo>
-                  <a:lnTo>
-                    <a:pt x="6982802" y="3589712"/>
-                  </a:lnTo>
-                  <a:lnTo>
-                    <a:pt x="6905168" y="3586042"/>
-                  </a:lnTo>
-                  <a:lnTo>
-                    <a:pt x="6827534" y="3582157"/>
-                  </a:lnTo>
-                  <a:lnTo>
-                    <a:pt x="6749900" y="3578047"/>
-                  </a:lnTo>
-                  <a:lnTo>
-                    <a:pt x="6672266" y="3573696"/>
-                  </a:lnTo>
-                  <a:lnTo>
-                    <a:pt x="6594632" y="3569092"/>
-                  </a:lnTo>
-                  <a:lnTo>
-                    <a:pt x="6516998" y="3564219"/>
-                  </a:lnTo>
-                  <a:lnTo>
-                    <a:pt x="6439364" y="3559062"/>
-                  </a:lnTo>
-                  <a:lnTo>
-                    <a:pt x="6361730" y="3553604"/>
-                  </a:lnTo>
-                  <a:lnTo>
-                    <a:pt x="6284096" y="3547828"/>
-                  </a:lnTo>
-                  <a:lnTo>
-                    <a:pt x="6206462" y="3541715"/>
-                  </a:lnTo>
-                  <a:lnTo>
-                    <a:pt x="6128827" y="3535245"/>
-                  </a:lnTo>
-                  <a:lnTo>
-                    <a:pt x="6051193" y="3528398"/>
-                  </a:lnTo>
-                  <a:lnTo>
-                    <a:pt x="5973559" y="3521152"/>
-                  </a:lnTo>
-                  <a:lnTo>
-                    <a:pt x="5895925" y="3513484"/>
-                  </a:lnTo>
-                  <a:lnTo>
-                    <a:pt x="5818291" y="3505368"/>
-                  </a:lnTo>
-                  <a:lnTo>
-                    <a:pt x="5740657" y="3496778"/>
-                  </a:lnTo>
-                  <a:lnTo>
-                    <a:pt x="5663023" y="3487688"/>
-                  </a:lnTo>
-                  <a:lnTo>
-                    <a:pt x="5585389" y="3478067"/>
-                  </a:lnTo>
-                  <a:lnTo>
-                    <a:pt x="5507755" y="3467886"/>
-                  </a:lnTo>
-                  <a:lnTo>
-                    <a:pt x="5430121" y="3457111"/>
-                  </a:lnTo>
-                  <a:lnTo>
-                    <a:pt x="5352487" y="3445707"/>
-                  </a:lnTo>
-                  <a:lnTo>
-                    <a:pt x="5274853" y="3433638"/>
-                  </a:lnTo>
-                  <a:lnTo>
-                    <a:pt x="5197219" y="3420865"/>
-                  </a:lnTo>
-                  <a:lnTo>
-                    <a:pt x="5119585" y="3407348"/>
-                  </a:lnTo>
-                  <a:lnTo>
-                    <a:pt x="5041951" y="3393042"/>
-                  </a:lnTo>
-                  <a:lnTo>
-                    <a:pt x="4964317" y="3377901"/>
-                  </a:lnTo>
-                  <a:lnTo>
-                    <a:pt x="4886683" y="3361878"/>
-                  </a:lnTo>
-                  <a:lnTo>
-                    <a:pt x="4809049" y="3344920"/>
-                  </a:lnTo>
-                  <a:lnTo>
-                    <a:pt x="4731415" y="3326973"/>
-                  </a:lnTo>
-                  <a:lnTo>
-                    <a:pt x="4653781" y="3307979"/>
-                  </a:lnTo>
-                  <a:lnTo>
-                    <a:pt x="4576147" y="3287878"/>
-                  </a:lnTo>
-                  <a:lnTo>
-                    <a:pt x="4498513" y="3266604"/>
-                  </a:lnTo>
-                  <a:lnTo>
-                    <a:pt x="4420879" y="3244090"/>
-                  </a:lnTo>
-                  <a:lnTo>
-                    <a:pt x="4343244" y="3220263"/>
-                  </a:lnTo>
-                  <a:lnTo>
-                    <a:pt x="4265610" y="3195045"/>
-                  </a:lnTo>
-                  <a:lnTo>
-                    <a:pt x="4187976" y="3168358"/>
-                  </a:lnTo>
-                  <a:lnTo>
-                    <a:pt x="4110342" y="3140113"/>
-                  </a:lnTo>
-                  <a:lnTo>
-                    <a:pt x="4032708" y="3110222"/>
-                  </a:lnTo>
-                  <a:lnTo>
-                    <a:pt x="3955074" y="3078587"/>
-                  </a:lnTo>
-                  <a:lnTo>
-                    <a:pt x="3877440" y="3045107"/>
-                  </a:lnTo>
-                  <a:lnTo>
-                    <a:pt x="3799806" y="3009675"/>
-                  </a:lnTo>
-                  <a:lnTo>
-                    <a:pt x="3722172" y="2972176"/>
-                  </a:lnTo>
-                  <a:lnTo>
-                    <a:pt x="3644538" y="2932490"/>
-                  </a:lnTo>
-                  <a:lnTo>
-                    <a:pt x="3566904" y="2890489"/>
-                  </a:lnTo>
-                  <a:lnTo>
-                    <a:pt x="3489270" y="2846039"/>
-                  </a:lnTo>
-                  <a:lnTo>
-                    <a:pt x="3411636" y="2798997"/>
-                  </a:lnTo>
-                  <a:lnTo>
-                    <a:pt x="3334002" y="2778588"/>
-                  </a:lnTo>
-                  <a:lnTo>
-                    <a:pt x="3256368" y="2772029"/>
-                  </a:lnTo>
-                  <a:lnTo>
-                    <a:pt x="3178734" y="2765421"/>
-                  </a:lnTo>
-                  <a:lnTo>
-                    <a:pt x="3101100" y="2758763"/>
-                  </a:lnTo>
-                  <a:lnTo>
-                    <a:pt x="3023466" y="2752056"/>
-                  </a:lnTo>
-                  <a:lnTo>
-                    <a:pt x="2945832" y="2745298"/>
-                  </a:lnTo>
-                  <a:lnTo>
-                    <a:pt x="2868198" y="2738489"/>
-                  </a:lnTo>
-                  <a:lnTo>
-                    <a:pt x="2790564" y="2731629"/>
-                  </a:lnTo>
-                  <a:lnTo>
-                    <a:pt x="2712930" y="2724718"/>
-                  </a:lnTo>
-                  <a:lnTo>
-                    <a:pt x="2635295" y="2717755"/>
-                  </a:lnTo>
-                  <a:lnTo>
-                    <a:pt x="2557661" y="2710740"/>
-                  </a:lnTo>
-                  <a:lnTo>
-                    <a:pt x="2480027" y="2703672"/>
-                  </a:lnTo>
-                  <a:lnTo>
-                    <a:pt x="2402393" y="2696551"/>
-                  </a:lnTo>
-                  <a:lnTo>
-                    <a:pt x="2324759" y="2689376"/>
-                  </a:lnTo>
-                  <a:lnTo>
-                    <a:pt x="2247125" y="2682148"/>
-                  </a:lnTo>
-                  <a:lnTo>
-                    <a:pt x="2169491" y="2674866"/>
-                  </a:lnTo>
-                  <a:lnTo>
-                    <a:pt x="2091857" y="2667529"/>
-                  </a:lnTo>
-                  <a:lnTo>
-                    <a:pt x="2014223" y="2660136"/>
-                  </a:lnTo>
-                  <a:lnTo>
-                    <a:pt x="1936589" y="2652689"/>
-                  </a:lnTo>
-                  <a:lnTo>
-                    <a:pt x="1858955" y="2645185"/>
-                  </a:lnTo>
-                  <a:lnTo>
-                    <a:pt x="1781321" y="2637625"/>
-                  </a:lnTo>
-                  <a:lnTo>
-                    <a:pt x="1703687" y="2630009"/>
-                  </a:lnTo>
-                  <a:lnTo>
-                    <a:pt x="1626053" y="2622335"/>
-                  </a:lnTo>
-                  <a:lnTo>
-                    <a:pt x="1548419" y="2614604"/>
-                  </a:lnTo>
-                  <a:lnTo>
-                    <a:pt x="1470785" y="2606814"/>
-                  </a:lnTo>
-                  <a:lnTo>
-                    <a:pt x="1393151" y="2598966"/>
-                  </a:lnTo>
-                  <a:lnTo>
-                    <a:pt x="1315517" y="2591060"/>
-                  </a:lnTo>
-                  <a:lnTo>
-                    <a:pt x="1237883" y="2583094"/>
-                  </a:lnTo>
-                  <a:lnTo>
-                    <a:pt x="1160249" y="2575068"/>
-                  </a:lnTo>
-                  <a:lnTo>
-                    <a:pt x="1082615" y="2566982"/>
-                  </a:lnTo>
-                  <a:lnTo>
-                    <a:pt x="1004981" y="2558835"/>
-                  </a:lnTo>
-                  <a:lnTo>
-                    <a:pt x="927346" y="2550627"/>
-                  </a:lnTo>
-                  <a:lnTo>
-                    <a:pt x="849712" y="2542358"/>
-                  </a:lnTo>
-                  <a:lnTo>
-                    <a:pt x="772078" y="2534027"/>
-                  </a:lnTo>
-                  <a:lnTo>
-                    <a:pt x="694444" y="2525633"/>
-                  </a:lnTo>
-                  <a:lnTo>
-                    <a:pt x="616810" y="2517176"/>
-                  </a:lnTo>
-                  <a:lnTo>
-                    <a:pt x="539176" y="2508655"/>
-                  </a:lnTo>
-                  <a:lnTo>
-                    <a:pt x="461542" y="2500071"/>
-                  </a:lnTo>
-                  <a:lnTo>
-                    <a:pt x="383908" y="2491422"/>
-                  </a:lnTo>
-                  <a:lnTo>
-                    <a:pt x="306274" y="2482708"/>
-                  </a:lnTo>
-                  <a:lnTo>
-                    <a:pt x="228640" y="2473929"/>
-                  </a:lnTo>
-                  <a:lnTo>
-                    <a:pt x="151006" y="2465084"/>
-                  </a:lnTo>
-                  <a:lnTo>
-                    <a:pt x="73372" y="2456173"/>
-                  </a:lnTo>
-                  <a:lnTo>
-                    <a:pt x="0" y="2447688"/>
+                    <a:pt x="1781321" y="37708"/>
+                  </a:lnTo>
+                  <a:lnTo>
+                    <a:pt x="1858955" y="278459"/>
+                  </a:lnTo>
+                  <a:lnTo>
+                    <a:pt x="1936589" y="503177"/>
+                  </a:lnTo>
+                  <a:lnTo>
+                    <a:pt x="2014223" y="712928"/>
+                  </a:lnTo>
+                  <a:lnTo>
+                    <a:pt x="2091857" y="908710"/>
+                  </a:lnTo>
+                  <a:lnTo>
+                    <a:pt x="2169491" y="1091453"/>
+                  </a:lnTo>
+                  <a:lnTo>
+                    <a:pt x="2247125" y="1262026"/>
+                  </a:lnTo>
+                  <a:lnTo>
+                    <a:pt x="2324759" y="1421239"/>
+                  </a:lnTo>
+                  <a:lnTo>
+                    <a:pt x="2402393" y="1569848"/>
+                  </a:lnTo>
+                  <a:lnTo>
+                    <a:pt x="2480027" y="1708560"/>
+                  </a:lnTo>
+                  <a:lnTo>
+                    <a:pt x="2557661" y="1838034"/>
+                  </a:lnTo>
+                  <a:lnTo>
+                    <a:pt x="2635295" y="1958886"/>
+                  </a:lnTo>
+                  <a:lnTo>
+                    <a:pt x="2712930" y="2071688"/>
+                  </a:lnTo>
+                  <a:lnTo>
+                    <a:pt x="2790564" y="2176978"/>
+                  </a:lnTo>
+                  <a:lnTo>
+                    <a:pt x="2868198" y="2275256"/>
+                  </a:lnTo>
+                  <a:lnTo>
+                    <a:pt x="2945832" y="2366989"/>
+                  </a:lnTo>
+                  <a:lnTo>
+                    <a:pt x="3023466" y="2452612"/>
+                  </a:lnTo>
+                  <a:lnTo>
+                    <a:pt x="3101100" y="2532533"/>
+                  </a:lnTo>
+                  <a:lnTo>
+                    <a:pt x="3178734" y="2607131"/>
+                  </a:lnTo>
+                  <a:lnTo>
+                    <a:pt x="3256368" y="2676761"/>
+                  </a:lnTo>
+                  <a:lnTo>
+                    <a:pt x="3334002" y="2741754"/>
+                  </a:lnTo>
+                  <a:lnTo>
+                    <a:pt x="3411636" y="2780750"/>
+                  </a:lnTo>
+                  <a:lnTo>
+                    <a:pt x="3489270" y="2773963"/>
+                  </a:lnTo>
+                  <a:lnTo>
+                    <a:pt x="3566904" y="2767123"/>
+                  </a:lnTo>
+                  <a:lnTo>
+                    <a:pt x="3644538" y="2760230"/>
+                  </a:lnTo>
+                  <a:lnTo>
+                    <a:pt x="3722172" y="2753283"/>
+                  </a:lnTo>
+                  <a:lnTo>
+                    <a:pt x="3799806" y="2746282"/>
+                  </a:lnTo>
+                  <a:lnTo>
+                    <a:pt x="3877440" y="2739227"/>
+                  </a:lnTo>
+                  <a:lnTo>
+                    <a:pt x="3955074" y="2732116"/>
+                  </a:lnTo>
+                  <a:lnTo>
+                    <a:pt x="4032708" y="2724951"/>
+                  </a:lnTo>
+                  <a:lnTo>
+                    <a:pt x="4110342" y="2717729"/>
+                  </a:lnTo>
+                  <a:lnTo>
+                    <a:pt x="4187976" y="2710452"/>
+                  </a:lnTo>
+                  <a:lnTo>
+                    <a:pt x="4265610" y="2703117"/>
+                  </a:lnTo>
+                  <a:lnTo>
+                    <a:pt x="4343244" y="2695726"/>
+                  </a:lnTo>
+                  <a:lnTo>
+                    <a:pt x="4420879" y="2688277"/>
+                  </a:lnTo>
+                  <a:lnTo>
+                    <a:pt x="4498513" y="2680770"/>
+                  </a:lnTo>
+                  <a:lnTo>
+                    <a:pt x="4576147" y="2673205"/>
+                  </a:lnTo>
+                  <a:lnTo>
+                    <a:pt x="4653781" y="2665580"/>
+                  </a:lnTo>
+                  <a:lnTo>
+                    <a:pt x="4731415" y="2657897"/>
+                  </a:lnTo>
+                  <a:lnTo>
+                    <a:pt x="4809049" y="2650153"/>
+                  </a:lnTo>
+                  <a:lnTo>
+                    <a:pt x="4886683" y="2642350"/>
+                  </a:lnTo>
+                  <a:lnTo>
+                    <a:pt x="4964317" y="2634485"/>
+                  </a:lnTo>
+                  <a:lnTo>
+                    <a:pt x="5041951" y="2626560"/>
+                  </a:lnTo>
+                  <a:lnTo>
+                    <a:pt x="5119585" y="2618572"/>
+                  </a:lnTo>
+                  <a:lnTo>
+                    <a:pt x="5197219" y="2610523"/>
+                  </a:lnTo>
+                  <a:lnTo>
+                    <a:pt x="5274853" y="2602410"/>
+                  </a:lnTo>
+                  <a:lnTo>
+                    <a:pt x="5352487" y="2594235"/>
+                  </a:lnTo>
+                  <a:lnTo>
+                    <a:pt x="5430121" y="2585996"/>
+                  </a:lnTo>
+                  <a:lnTo>
+                    <a:pt x="5507755" y="2577693"/>
+                  </a:lnTo>
+                  <a:lnTo>
+                    <a:pt x="5585389" y="2569325"/>
+                  </a:lnTo>
+                  <a:lnTo>
+                    <a:pt x="5663023" y="2560892"/>
+                  </a:lnTo>
+                  <a:lnTo>
+                    <a:pt x="5740657" y="2552394"/>
+                  </a:lnTo>
+                  <a:lnTo>
+                    <a:pt x="5818291" y="2543829"/>
+                  </a:lnTo>
+                  <a:lnTo>
+                    <a:pt x="5895925" y="2535198"/>
+                  </a:lnTo>
+                  <a:lnTo>
+                    <a:pt x="5973559" y="2526499"/>
+                  </a:lnTo>
+                  <a:lnTo>
+                    <a:pt x="6051193" y="2517733"/>
+                  </a:lnTo>
+                  <a:lnTo>
+                    <a:pt x="6128827" y="2508899"/>
+                  </a:lnTo>
+                  <a:lnTo>
+                    <a:pt x="6206462" y="2499995"/>
+                  </a:lnTo>
+                  <a:lnTo>
+                    <a:pt x="6284096" y="2491023"/>
+                  </a:lnTo>
+                  <a:lnTo>
+                    <a:pt x="6361730" y="2481980"/>
+                  </a:lnTo>
+                  <a:lnTo>
+                    <a:pt x="6439364" y="2472868"/>
+                  </a:lnTo>
+                  <a:lnTo>
+                    <a:pt x="6516998" y="2463684"/>
+                  </a:lnTo>
+                  <a:lnTo>
+                    <a:pt x="6594632" y="2454429"/>
+                  </a:lnTo>
+                  <a:lnTo>
+                    <a:pt x="6672266" y="2445101"/>
+                  </a:lnTo>
+                  <a:lnTo>
+                    <a:pt x="6749900" y="2435701"/>
+                  </a:lnTo>
+                  <a:lnTo>
+                    <a:pt x="6827534" y="2426228"/>
+                  </a:lnTo>
+                  <a:lnTo>
+                    <a:pt x="6905168" y="2416682"/>
+                  </a:lnTo>
+                  <a:lnTo>
+                    <a:pt x="6982802" y="2407060"/>
+                  </a:lnTo>
+                  <a:lnTo>
+                    <a:pt x="7060436" y="2397364"/>
+                  </a:lnTo>
+                  <a:lnTo>
+                    <a:pt x="7138070" y="2387593"/>
+                  </a:lnTo>
+                  <a:lnTo>
+                    <a:pt x="7215704" y="2377745"/>
+                  </a:lnTo>
+                  <a:lnTo>
+                    <a:pt x="7293338" y="2367821"/>
+                  </a:lnTo>
+                  <a:lnTo>
+                    <a:pt x="7370972" y="2357820"/>
+                  </a:lnTo>
+                  <a:lnTo>
+                    <a:pt x="7370972" y="3627349"/>
+                  </a:lnTo>
+                  <a:lnTo>
+                    <a:pt x="7293338" y="3625545"/>
+                  </a:lnTo>
+                  <a:lnTo>
+                    <a:pt x="7215704" y="3623611"/>
+                  </a:lnTo>
+                  <a:lnTo>
+                    <a:pt x="7138070" y="3621540"/>
+                  </a:lnTo>
+                  <a:lnTo>
+                    <a:pt x="7060436" y="3619320"/>
+                  </a:lnTo>
+                  <a:lnTo>
+                    <a:pt x="6982802" y="3616943"/>
+                  </a:lnTo>
+                  <a:lnTo>
+                    <a:pt x="6905168" y="3614396"/>
+                  </a:lnTo>
+                  <a:lnTo>
+                    <a:pt x="6827534" y="3611667"/>
+                  </a:lnTo>
+                  <a:lnTo>
+                    <a:pt x="6749900" y="3608743"/>
+                  </a:lnTo>
+                  <a:lnTo>
+                    <a:pt x="6672266" y="3605611"/>
+                  </a:lnTo>
+                  <a:lnTo>
+                    <a:pt x="6594632" y="3602255"/>
+                  </a:lnTo>
+                  <a:lnTo>
+                    <a:pt x="6516998" y="3598659"/>
+                  </a:lnTo>
+                  <a:lnTo>
+                    <a:pt x="6439364" y="3594808"/>
+                  </a:lnTo>
+                  <a:lnTo>
+                    <a:pt x="6361730" y="3590681"/>
+                  </a:lnTo>
+                  <a:lnTo>
+                    <a:pt x="6284096" y="3586260"/>
+                  </a:lnTo>
+                  <a:lnTo>
+                    <a:pt x="6206462" y="3581523"/>
+                  </a:lnTo>
+                  <a:lnTo>
+                    <a:pt x="6128827" y="3576449"/>
+                  </a:lnTo>
+                  <a:lnTo>
+                    <a:pt x="6051193" y="3571012"/>
+                  </a:lnTo>
+                  <a:lnTo>
+                    <a:pt x="5973559" y="3565188"/>
+                  </a:lnTo>
+                  <a:lnTo>
+                    <a:pt x="5895925" y="3558948"/>
+                  </a:lnTo>
+                  <a:lnTo>
+                    <a:pt x="5818291" y="3552263"/>
+                  </a:lnTo>
+                  <a:lnTo>
+                    <a:pt x="5740657" y="3545100"/>
+                  </a:lnTo>
+                  <a:lnTo>
+                    <a:pt x="5663023" y="3537427"/>
+                  </a:lnTo>
+                  <a:lnTo>
+                    <a:pt x="5585389" y="3529206"/>
+                  </a:lnTo>
+                  <a:lnTo>
+                    <a:pt x="5507755" y="3520399"/>
+                  </a:lnTo>
+                  <a:lnTo>
+                    <a:pt x="5430121" y="3510963"/>
+                  </a:lnTo>
+                  <a:lnTo>
+                    <a:pt x="5352487" y="3500854"/>
+                  </a:lnTo>
+                  <a:lnTo>
+                    <a:pt x="5274853" y="3490024"/>
+                  </a:lnTo>
+                  <a:lnTo>
+                    <a:pt x="5197219" y="3478421"/>
+                  </a:lnTo>
+                  <a:lnTo>
+                    <a:pt x="5119585" y="3465990"/>
+                  </a:lnTo>
+                  <a:lnTo>
+                    <a:pt x="5041951" y="3452672"/>
+                  </a:lnTo>
+                  <a:lnTo>
+                    <a:pt x="4964317" y="3438404"/>
+                  </a:lnTo>
+                  <a:lnTo>
+                    <a:pt x="4886683" y="3423118"/>
+                  </a:lnTo>
+                  <a:lnTo>
+                    <a:pt x="4809049" y="3406741"/>
+                  </a:lnTo>
+                  <a:lnTo>
+                    <a:pt x="4731415" y="3389196"/>
+                  </a:lnTo>
+                  <a:lnTo>
+                    <a:pt x="4653781" y="3370399"/>
+                  </a:lnTo>
+                  <a:lnTo>
+                    <a:pt x="4576147" y="3350260"/>
+                  </a:lnTo>
+                  <a:lnTo>
+                    <a:pt x="4498513" y="3328685"/>
+                  </a:lnTo>
+                  <a:lnTo>
+                    <a:pt x="4420879" y="3305570"/>
+                  </a:lnTo>
+                  <a:lnTo>
+                    <a:pt x="4343244" y="3280806"/>
+                  </a:lnTo>
+                  <a:lnTo>
+                    <a:pt x="4265610" y="3254275"/>
+                  </a:lnTo>
+                  <a:lnTo>
+                    <a:pt x="4187976" y="3225851"/>
+                  </a:lnTo>
+                  <a:lnTo>
+                    <a:pt x="4110342" y="3195399"/>
+                  </a:lnTo>
+                  <a:lnTo>
+                    <a:pt x="4032708" y="3162774"/>
+                  </a:lnTo>
+                  <a:lnTo>
+                    <a:pt x="3955074" y="3127822"/>
+                  </a:lnTo>
+                  <a:lnTo>
+                    <a:pt x="3877440" y="3090375"/>
+                  </a:lnTo>
+                  <a:lnTo>
+                    <a:pt x="3799806" y="3050257"/>
+                  </a:lnTo>
+                  <a:lnTo>
+                    <a:pt x="3722172" y="3007276"/>
+                  </a:lnTo>
+                  <a:lnTo>
+                    <a:pt x="3644538" y="2961229"/>
+                  </a:lnTo>
+                  <a:lnTo>
+                    <a:pt x="3566904" y="2911896"/>
+                  </a:lnTo>
+                  <a:lnTo>
+                    <a:pt x="3489270" y="2859043"/>
+                  </a:lnTo>
+                  <a:lnTo>
+                    <a:pt x="3411636" y="2802418"/>
+                  </a:lnTo>
+                  <a:lnTo>
+                    <a:pt x="3334002" y="2787485"/>
+                  </a:lnTo>
+                  <a:lnTo>
+                    <a:pt x="3256368" y="2794167"/>
+                  </a:lnTo>
+                  <a:lnTo>
+                    <a:pt x="3178734" y="2800798"/>
+                  </a:lnTo>
+                  <a:lnTo>
+                    <a:pt x="3101100" y="2807378"/>
+                  </a:lnTo>
+                  <a:lnTo>
+                    <a:pt x="3023466" y="2813907"/>
+                  </a:lnTo>
+                  <a:lnTo>
+                    <a:pt x="2945832" y="2820386"/>
+                  </a:lnTo>
+                  <a:lnTo>
+                    <a:pt x="2868198" y="2826814"/>
+                  </a:lnTo>
+                  <a:lnTo>
+                    <a:pt x="2790564" y="2833193"/>
+                  </a:lnTo>
+                  <a:lnTo>
+                    <a:pt x="2712930" y="2839523"/>
+                  </a:lnTo>
+                  <a:lnTo>
+                    <a:pt x="2635295" y="2845803"/>
+                  </a:lnTo>
+                  <a:lnTo>
+                    <a:pt x="2557661" y="2852035"/>
+                  </a:lnTo>
+                  <a:lnTo>
+                    <a:pt x="2480027" y="2858220"/>
+                  </a:lnTo>
+                  <a:lnTo>
+                    <a:pt x="2402393" y="2864356"/>
+                  </a:lnTo>
+                  <a:lnTo>
+                    <a:pt x="2324759" y="2870445"/>
+                  </a:lnTo>
+                  <a:lnTo>
+                    <a:pt x="2247125" y="2876487"/>
+                  </a:lnTo>
+                  <a:lnTo>
+                    <a:pt x="2169491" y="2882482"/>
+                  </a:lnTo>
+                  <a:lnTo>
+                    <a:pt x="2091857" y="2888431"/>
+                  </a:lnTo>
+                  <a:lnTo>
+                    <a:pt x="2014223" y="2894333"/>
+                  </a:lnTo>
+                  <a:lnTo>
+                    <a:pt x="1936589" y="2900191"/>
+                  </a:lnTo>
+                  <a:lnTo>
+                    <a:pt x="1858955" y="2906003"/>
+                  </a:lnTo>
+                  <a:lnTo>
+                    <a:pt x="1781321" y="2911770"/>
+                  </a:lnTo>
+                  <a:lnTo>
+                    <a:pt x="1703687" y="2917493"/>
+                  </a:lnTo>
+                  <a:lnTo>
+                    <a:pt x="1626053" y="2923171"/>
+                  </a:lnTo>
+                  <a:lnTo>
+                    <a:pt x="1548419" y="2928806"/>
+                  </a:lnTo>
+                  <a:lnTo>
+                    <a:pt x="1470785" y="2934397"/>
+                  </a:lnTo>
+                  <a:lnTo>
+                    <a:pt x="1393151" y="2939945"/>
+                  </a:lnTo>
+                  <a:lnTo>
+                    <a:pt x="1315517" y="2945450"/>
+                  </a:lnTo>
+                  <a:lnTo>
+                    <a:pt x="1237883" y="2950912"/>
+                  </a:lnTo>
+                  <a:lnTo>
+                    <a:pt x="1160249" y="2956332"/>
+                  </a:lnTo>
+                  <a:lnTo>
+                    <a:pt x="1082615" y="2961711"/>
+                  </a:lnTo>
+                  <a:lnTo>
+                    <a:pt x="1004981" y="2967048"/>
+                  </a:lnTo>
+                  <a:lnTo>
+                    <a:pt x="927346" y="2972343"/>
+                  </a:lnTo>
+                  <a:lnTo>
+                    <a:pt x="849712" y="2977598"/>
+                  </a:lnTo>
+                  <a:lnTo>
+                    <a:pt x="772078" y="2982812"/>
+                  </a:lnTo>
+                  <a:lnTo>
+                    <a:pt x="694444" y="2987986"/>
+                  </a:lnTo>
+                  <a:lnTo>
+                    <a:pt x="616810" y="2993120"/>
+                  </a:lnTo>
+                  <a:lnTo>
+                    <a:pt x="539176" y="2998215"/>
+                  </a:lnTo>
+                  <a:lnTo>
+                    <a:pt x="461542" y="3003269"/>
+                  </a:lnTo>
+                  <a:lnTo>
+                    <a:pt x="383908" y="3008285"/>
+                  </a:lnTo>
+                  <a:lnTo>
+                    <a:pt x="306274" y="3013262"/>
+                  </a:lnTo>
+                  <a:lnTo>
+                    <a:pt x="228640" y="3018201"/>
+                  </a:lnTo>
+                  <a:lnTo>
+                    <a:pt x="151006" y="3023102"/>
+                  </a:lnTo>
+                  <a:lnTo>
+                    <a:pt x="73372" y="3027964"/>
+                  </a:lnTo>
+                  <a:lnTo>
+                    <a:pt x="0" y="3032525"/>
                   </a:lnTo>
                   <a:close/>
                 </a:path>
@@ -3555,246 +3543,234 @@
           </p:nvSpPr>
           <p:spPr>
             <a:xfrm>
-              <a:off x="2238702" y="1896563"/>
-              <a:ext cx="5949788" cy="3060115"/>
+              <a:off x="2587489" y="1896563"/>
+              <a:ext cx="5601001" cy="2780750"/>
             </a:xfrm>
             <a:custGeom>
               <a:avLst/>
               <a:pathLst>
-                <a:path w="5949788" h="3060115">
+                <a:path w="5601001" h="2780750">
                   <a:moveTo>
                     <a:pt x="0" y="0"/>
                   </a:moveTo>
                   <a:lnTo>
-                    <a:pt x="49600" y="131214"/>
-                  </a:lnTo>
-                  <a:lnTo>
-                    <a:pt x="127234" y="325272"/>
-                  </a:lnTo>
-                  <a:lnTo>
-                    <a:pt x="204868" y="508635"/>
-                  </a:lnTo>
-                  <a:lnTo>
-                    <a:pt x="282502" y="681894"/>
-                  </a:lnTo>
-                  <a:lnTo>
-                    <a:pt x="360136" y="845605"/>
-                  </a:lnTo>
-                  <a:lnTo>
-                    <a:pt x="437770" y="1000294"/>
-                  </a:lnTo>
-                  <a:lnTo>
-                    <a:pt x="515404" y="1146458"/>
-                  </a:lnTo>
-                  <a:lnTo>
-                    <a:pt x="593038" y="1284568"/>
-                  </a:lnTo>
-                  <a:lnTo>
-                    <a:pt x="670673" y="1415067"/>
-                  </a:lnTo>
-                  <a:lnTo>
-                    <a:pt x="748307" y="1538375"/>
-                  </a:lnTo>
-                  <a:lnTo>
-                    <a:pt x="825941" y="1654887"/>
-                  </a:lnTo>
-                  <a:lnTo>
-                    <a:pt x="903575" y="1764978"/>
-                  </a:lnTo>
-                  <a:lnTo>
-                    <a:pt x="981209" y="1869003"/>
-                  </a:lnTo>
-                  <a:lnTo>
-                    <a:pt x="1058843" y="1967295"/>
-                  </a:lnTo>
-                  <a:lnTo>
-                    <a:pt x="1136477" y="2060171"/>
-                  </a:lnTo>
-                  <a:lnTo>
-                    <a:pt x="1214111" y="2147928"/>
-                  </a:lnTo>
-                  <a:lnTo>
-                    <a:pt x="1291745" y="2230849"/>
-                  </a:lnTo>
-                  <a:lnTo>
-                    <a:pt x="1369379" y="2309201"/>
-                  </a:lnTo>
-                  <a:lnTo>
-                    <a:pt x="1447013" y="2383235"/>
-                  </a:lnTo>
-                  <a:lnTo>
-                    <a:pt x="1524647" y="2453189"/>
-                  </a:lnTo>
-                  <a:lnTo>
-                    <a:pt x="1602281" y="2519288"/>
-                  </a:lnTo>
-                  <a:lnTo>
-                    <a:pt x="1679915" y="2581744"/>
-                  </a:lnTo>
-                  <a:lnTo>
-                    <a:pt x="1757549" y="2640759"/>
-                  </a:lnTo>
-                  <a:lnTo>
-                    <a:pt x="1835183" y="2696521"/>
-                  </a:lnTo>
-                  <a:lnTo>
-                    <a:pt x="1912817" y="2749211"/>
-                  </a:lnTo>
-                  <a:lnTo>
-                    <a:pt x="1990451" y="2785098"/>
-                  </a:lnTo>
-                  <a:lnTo>
-                    <a:pt x="2068085" y="2791559"/>
-                  </a:lnTo>
-                  <a:lnTo>
-                    <a:pt x="2145719" y="2797972"/>
-                  </a:lnTo>
-                  <a:lnTo>
-                    <a:pt x="2223353" y="2804338"/>
-                  </a:lnTo>
-                  <a:lnTo>
-                    <a:pt x="2300987" y="2810656"/>
-                  </a:lnTo>
-                  <a:lnTo>
-                    <a:pt x="2378621" y="2816927"/>
-                  </a:lnTo>
-                  <a:lnTo>
-                    <a:pt x="2456256" y="2823152"/>
-                  </a:lnTo>
-                  <a:lnTo>
-                    <a:pt x="2533890" y="2829330"/>
-                  </a:lnTo>
-                  <a:lnTo>
-                    <a:pt x="2611524" y="2835462"/>
-                  </a:lnTo>
-                  <a:lnTo>
-                    <a:pt x="2689158" y="2841548"/>
-                  </a:lnTo>
-                  <a:lnTo>
-                    <a:pt x="2766792" y="2847589"/>
-                  </a:lnTo>
-                  <a:lnTo>
-                    <a:pt x="2844426" y="2853585"/>
-                  </a:lnTo>
-                  <a:lnTo>
-                    <a:pt x="2922060" y="2859537"/>
-                  </a:lnTo>
-                  <a:lnTo>
-                    <a:pt x="2999694" y="2865444"/>
-                  </a:lnTo>
-                  <a:lnTo>
-                    <a:pt x="3077328" y="2871307"/>
-                  </a:lnTo>
-                  <a:lnTo>
-                    <a:pt x="3154962" y="2877126"/>
-                  </a:lnTo>
-                  <a:lnTo>
-                    <a:pt x="3232596" y="2882902"/>
-                  </a:lnTo>
-                  <a:lnTo>
-                    <a:pt x="3310230" y="2888635"/>
-                  </a:lnTo>
-                  <a:lnTo>
-                    <a:pt x="3387864" y="2894326"/>
-                  </a:lnTo>
-                  <a:lnTo>
-                    <a:pt x="3465498" y="2899974"/>
-                  </a:lnTo>
-                  <a:lnTo>
-                    <a:pt x="3543132" y="2905579"/>
-                  </a:lnTo>
-                  <a:lnTo>
-                    <a:pt x="3620766" y="2911144"/>
-                  </a:lnTo>
-                  <a:lnTo>
-                    <a:pt x="3698400" y="2916666"/>
-                  </a:lnTo>
-                  <a:lnTo>
-                    <a:pt x="3776034" y="2922148"/>
-                  </a:lnTo>
-                  <a:lnTo>
-                    <a:pt x="3853668" y="2927589"/>
-                  </a:lnTo>
-                  <a:lnTo>
-                    <a:pt x="3931302" y="2932989"/>
-                  </a:lnTo>
-                  <a:lnTo>
-                    <a:pt x="4008936" y="2938349"/>
-                  </a:lnTo>
-                  <a:lnTo>
-                    <a:pt x="4086570" y="2943669"/>
-                  </a:lnTo>
-                  <a:lnTo>
-                    <a:pt x="4164205" y="2948949"/>
-                  </a:lnTo>
-                  <a:lnTo>
-                    <a:pt x="4241839" y="2954190"/>
-                  </a:lnTo>
-                  <a:lnTo>
-                    <a:pt x="4319473" y="2959392"/>
-                  </a:lnTo>
-                  <a:lnTo>
-                    <a:pt x="4397107" y="2964556"/>
-                  </a:lnTo>
-                  <a:lnTo>
-                    <a:pt x="4474741" y="2969681"/>
-                  </a:lnTo>
-                  <a:lnTo>
-                    <a:pt x="4552375" y="2974767"/>
-                  </a:lnTo>
-                  <a:lnTo>
-                    <a:pt x="4630009" y="2979816"/>
-                  </a:lnTo>
-                  <a:lnTo>
-                    <a:pt x="4707643" y="2984827"/>
-                  </a:lnTo>
-                  <a:lnTo>
-                    <a:pt x="4785277" y="2989801"/>
-                  </a:lnTo>
-                  <a:lnTo>
-                    <a:pt x="4862911" y="2994738"/>
-                  </a:lnTo>
-                  <a:lnTo>
-                    <a:pt x="4940545" y="2999638"/>
-                  </a:lnTo>
-                  <a:lnTo>
-                    <a:pt x="5018179" y="3004502"/>
-                  </a:lnTo>
-                  <a:lnTo>
-                    <a:pt x="5095813" y="3009329"/>
-                  </a:lnTo>
-                  <a:lnTo>
-                    <a:pt x="5173447" y="3014121"/>
-                  </a:lnTo>
-                  <a:lnTo>
-                    <a:pt x="5251081" y="3018876"/>
-                  </a:lnTo>
-                  <a:lnTo>
-                    <a:pt x="5328715" y="3023597"/>
-                  </a:lnTo>
-                  <a:lnTo>
-                    <a:pt x="5406349" y="3028282"/>
-                  </a:lnTo>
-                  <a:lnTo>
-                    <a:pt x="5483983" y="3032932"/>
-                  </a:lnTo>
-                  <a:lnTo>
-                    <a:pt x="5561617" y="3037548"/>
-                  </a:lnTo>
-                  <a:lnTo>
-                    <a:pt x="5639251" y="3042129"/>
-                  </a:lnTo>
-                  <a:lnTo>
-                    <a:pt x="5716885" y="3046676"/>
-                  </a:lnTo>
-                  <a:lnTo>
-                    <a:pt x="5794519" y="3051189"/>
-                  </a:lnTo>
-                  <a:lnTo>
-                    <a:pt x="5872154" y="3055669"/>
-                  </a:lnTo>
-                  <a:lnTo>
-                    <a:pt x="5949788" y="3060115"/>
+                    <a:pt x="11349" y="37708"/>
+                  </a:lnTo>
+                  <a:lnTo>
+                    <a:pt x="88983" y="278459"/>
+                  </a:lnTo>
+                  <a:lnTo>
+                    <a:pt x="166618" y="503177"/>
+                  </a:lnTo>
+                  <a:lnTo>
+                    <a:pt x="244252" y="712928"/>
+                  </a:lnTo>
+                  <a:lnTo>
+                    <a:pt x="321886" y="908710"/>
+                  </a:lnTo>
+                  <a:lnTo>
+                    <a:pt x="399520" y="1091453"/>
+                  </a:lnTo>
+                  <a:lnTo>
+                    <a:pt x="477154" y="1262026"/>
+                  </a:lnTo>
+                  <a:lnTo>
+                    <a:pt x="554788" y="1421239"/>
+                  </a:lnTo>
+                  <a:lnTo>
+                    <a:pt x="632422" y="1569848"/>
+                  </a:lnTo>
+                  <a:lnTo>
+                    <a:pt x="710056" y="1708560"/>
+                  </a:lnTo>
+                  <a:lnTo>
+                    <a:pt x="787690" y="1838034"/>
+                  </a:lnTo>
+                  <a:lnTo>
+                    <a:pt x="865324" y="1958886"/>
+                  </a:lnTo>
+                  <a:lnTo>
+                    <a:pt x="942958" y="2071688"/>
+                  </a:lnTo>
+                  <a:lnTo>
+                    <a:pt x="1020592" y="2176978"/>
+                  </a:lnTo>
+                  <a:lnTo>
+                    <a:pt x="1098226" y="2275256"/>
+                  </a:lnTo>
+                  <a:lnTo>
+                    <a:pt x="1175860" y="2366989"/>
+                  </a:lnTo>
+                  <a:lnTo>
+                    <a:pt x="1253494" y="2452612"/>
+                  </a:lnTo>
+                  <a:lnTo>
+                    <a:pt x="1331128" y="2532533"/>
+                  </a:lnTo>
+                  <a:lnTo>
+                    <a:pt x="1408762" y="2607131"/>
+                  </a:lnTo>
+                  <a:lnTo>
+                    <a:pt x="1486396" y="2676761"/>
+                  </a:lnTo>
+                  <a:lnTo>
+                    <a:pt x="1564030" y="2741754"/>
+                  </a:lnTo>
+                  <a:lnTo>
+                    <a:pt x="1641664" y="2780750"/>
+                  </a:lnTo>
+                  <a:lnTo>
+                    <a:pt x="1719298" y="2773963"/>
+                  </a:lnTo>
+                  <a:lnTo>
+                    <a:pt x="1796932" y="2767123"/>
+                  </a:lnTo>
+                  <a:lnTo>
+                    <a:pt x="1874567" y="2760230"/>
+                  </a:lnTo>
+                  <a:lnTo>
+                    <a:pt x="1952201" y="2753283"/>
+                  </a:lnTo>
+                  <a:lnTo>
+                    <a:pt x="2029835" y="2746282"/>
+                  </a:lnTo>
+                  <a:lnTo>
+                    <a:pt x="2107469" y="2739227"/>
+                  </a:lnTo>
+                  <a:lnTo>
+                    <a:pt x="2185103" y="2732116"/>
+                  </a:lnTo>
+                  <a:lnTo>
+                    <a:pt x="2262737" y="2724951"/>
+                  </a:lnTo>
+                  <a:lnTo>
+                    <a:pt x="2340371" y="2717729"/>
+                  </a:lnTo>
+                  <a:lnTo>
+                    <a:pt x="2418005" y="2710452"/>
+                  </a:lnTo>
+                  <a:lnTo>
+                    <a:pt x="2495639" y="2703117"/>
+                  </a:lnTo>
+                  <a:lnTo>
+                    <a:pt x="2573273" y="2695726"/>
+                  </a:lnTo>
+                  <a:lnTo>
+                    <a:pt x="2650907" y="2688277"/>
+                  </a:lnTo>
+                  <a:lnTo>
+                    <a:pt x="2728541" y="2680770"/>
+                  </a:lnTo>
+                  <a:lnTo>
+                    <a:pt x="2806175" y="2673205"/>
+                  </a:lnTo>
+                  <a:lnTo>
+                    <a:pt x="2883809" y="2665580"/>
+                  </a:lnTo>
+                  <a:lnTo>
+                    <a:pt x="2961443" y="2657897"/>
+                  </a:lnTo>
+                  <a:lnTo>
+                    <a:pt x="3039077" y="2650153"/>
+                  </a:lnTo>
+                  <a:lnTo>
+                    <a:pt x="3116711" y="2642350"/>
+                  </a:lnTo>
+                  <a:lnTo>
+                    <a:pt x="3194345" y="2634485"/>
+                  </a:lnTo>
+                  <a:lnTo>
+                    <a:pt x="3271979" y="2626560"/>
+                  </a:lnTo>
+                  <a:lnTo>
+                    <a:pt x="3349613" y="2618572"/>
+                  </a:lnTo>
+                  <a:lnTo>
+                    <a:pt x="3427247" y="2610523"/>
+                  </a:lnTo>
+                  <a:lnTo>
+                    <a:pt x="3504881" y="2602410"/>
+                  </a:lnTo>
+                  <a:lnTo>
+                    <a:pt x="3582516" y="2594235"/>
+                  </a:lnTo>
+                  <a:lnTo>
+                    <a:pt x="3660150" y="2585996"/>
+                  </a:lnTo>
+                  <a:lnTo>
+                    <a:pt x="3737784" y="2577693"/>
+                  </a:lnTo>
+                  <a:lnTo>
+                    <a:pt x="3815418" y="2569325"/>
+                  </a:lnTo>
+                  <a:lnTo>
+                    <a:pt x="3893052" y="2560892"/>
+                  </a:lnTo>
+                  <a:lnTo>
+                    <a:pt x="3970686" y="2552394"/>
+                  </a:lnTo>
+                  <a:lnTo>
+                    <a:pt x="4048320" y="2543829"/>
+                  </a:lnTo>
+                  <a:lnTo>
+                    <a:pt x="4125954" y="2535198"/>
+                  </a:lnTo>
+                  <a:lnTo>
+                    <a:pt x="4203588" y="2526499"/>
+                  </a:lnTo>
+                  <a:lnTo>
+                    <a:pt x="4281222" y="2517733"/>
+                  </a:lnTo>
+                  <a:lnTo>
+                    <a:pt x="4358856" y="2508899"/>
+                  </a:lnTo>
+                  <a:lnTo>
+                    <a:pt x="4436490" y="2499995"/>
+                  </a:lnTo>
+                  <a:lnTo>
+                    <a:pt x="4514124" y="2491023"/>
+                  </a:lnTo>
+                  <a:lnTo>
+                    <a:pt x="4591758" y="2481980"/>
+                  </a:lnTo>
+                  <a:lnTo>
+                    <a:pt x="4669392" y="2472868"/>
+                  </a:lnTo>
+                  <a:lnTo>
+                    <a:pt x="4747026" y="2463684"/>
+                  </a:lnTo>
+                  <a:lnTo>
+                    <a:pt x="4824660" y="2454429"/>
+                  </a:lnTo>
+                  <a:lnTo>
+                    <a:pt x="4902294" y="2445101"/>
+                  </a:lnTo>
+                  <a:lnTo>
+                    <a:pt x="4979928" y="2435701"/>
+                  </a:lnTo>
+                  <a:lnTo>
+                    <a:pt x="5057562" y="2426228"/>
+                  </a:lnTo>
+                  <a:lnTo>
+                    <a:pt x="5135196" y="2416682"/>
+                  </a:lnTo>
+                  <a:lnTo>
+                    <a:pt x="5212830" y="2407060"/>
+                  </a:lnTo>
+                  <a:lnTo>
+                    <a:pt x="5290464" y="2397364"/>
+                  </a:lnTo>
+                  <a:lnTo>
+                    <a:pt x="5368099" y="2387593"/>
+                  </a:lnTo>
+                  <a:lnTo>
+                    <a:pt x="5445733" y="2377745"/>
+                  </a:lnTo>
+                  <a:lnTo>
+                    <a:pt x="5523367" y="2367821"/>
+                  </a:lnTo>
+                  <a:lnTo>
+                    <a:pt x="5601001" y="2357820"/>
                   </a:lnTo>
                 </a:path>
               </a:pathLst>
@@ -3814,300 +3790,300 @@
           </p:nvSpPr>
           <p:spPr>
             <a:xfrm>
-              <a:off x="817517" y="4344251"/>
-              <a:ext cx="7370972" cy="1157555"/>
+              <a:off x="817517" y="4684048"/>
+              <a:ext cx="7370972" cy="839864"/>
             </a:xfrm>
             <a:custGeom>
               <a:avLst/>
               <a:pathLst>
-                <a:path w="7370972" h="1157555">
+                <a:path w="7370972" h="839864">
                   <a:moveTo>
-                    <a:pt x="7370972" y="1157555"/>
+                    <a:pt x="7370972" y="839864"/>
                   </a:moveTo>
                   <a:lnTo>
-                    <a:pt x="7293338" y="1154791"/>
-                  </a:lnTo>
-                  <a:lnTo>
-                    <a:pt x="7215704" y="1151865"/>
-                  </a:lnTo>
-                  <a:lnTo>
-                    <a:pt x="7138070" y="1148769"/>
-                  </a:lnTo>
-                  <a:lnTo>
-                    <a:pt x="7060436" y="1145492"/>
-                  </a:lnTo>
-                  <a:lnTo>
-                    <a:pt x="6982802" y="1142024"/>
-                  </a:lnTo>
-                  <a:lnTo>
-                    <a:pt x="6905168" y="1138353"/>
-                  </a:lnTo>
-                  <a:lnTo>
-                    <a:pt x="6827534" y="1134469"/>
-                  </a:lnTo>
-                  <a:lnTo>
-                    <a:pt x="6749900" y="1130358"/>
-                  </a:lnTo>
-                  <a:lnTo>
-                    <a:pt x="6672266" y="1126008"/>
-                  </a:lnTo>
-                  <a:lnTo>
-                    <a:pt x="6594632" y="1121403"/>
-                  </a:lnTo>
-                  <a:lnTo>
-                    <a:pt x="6516998" y="1116531"/>
-                  </a:lnTo>
-                  <a:lnTo>
-                    <a:pt x="6439364" y="1111373"/>
-                  </a:lnTo>
-                  <a:lnTo>
-                    <a:pt x="6361730" y="1105916"/>
-                  </a:lnTo>
-                  <a:lnTo>
-                    <a:pt x="6284096" y="1100140"/>
-                  </a:lnTo>
-                  <a:lnTo>
-                    <a:pt x="6206462" y="1094027"/>
-                  </a:lnTo>
-                  <a:lnTo>
-                    <a:pt x="6128827" y="1087557"/>
-                  </a:lnTo>
-                  <a:lnTo>
-                    <a:pt x="6051193" y="1080710"/>
-                  </a:lnTo>
-                  <a:lnTo>
-                    <a:pt x="5973559" y="1073464"/>
-                  </a:lnTo>
-                  <a:lnTo>
-                    <a:pt x="5895925" y="1065795"/>
-                  </a:lnTo>
-                  <a:lnTo>
-                    <a:pt x="5818291" y="1057679"/>
-                  </a:lnTo>
-                  <a:lnTo>
-                    <a:pt x="5740657" y="1049090"/>
-                  </a:lnTo>
-                  <a:lnTo>
-                    <a:pt x="5663023" y="1040000"/>
-                  </a:lnTo>
-                  <a:lnTo>
-                    <a:pt x="5585389" y="1030379"/>
-                  </a:lnTo>
-                  <a:lnTo>
-                    <a:pt x="5507755" y="1020198"/>
-                  </a:lnTo>
-                  <a:lnTo>
-                    <a:pt x="5430121" y="1009422"/>
-                  </a:lnTo>
-                  <a:lnTo>
-                    <a:pt x="5352487" y="998019"/>
-                  </a:lnTo>
-                  <a:lnTo>
-                    <a:pt x="5274853" y="985950"/>
-                  </a:lnTo>
-                  <a:lnTo>
-                    <a:pt x="5197219" y="973177"/>
-                  </a:lnTo>
-                  <a:lnTo>
-                    <a:pt x="5119585" y="959659"/>
-                  </a:lnTo>
-                  <a:lnTo>
-                    <a:pt x="5041951" y="945353"/>
-                  </a:lnTo>
-                  <a:lnTo>
-                    <a:pt x="4964317" y="930213"/>
-                  </a:lnTo>
-                  <a:lnTo>
-                    <a:pt x="4886683" y="914189"/>
-                  </a:lnTo>
-                  <a:lnTo>
-                    <a:pt x="4809049" y="897232"/>
-                  </a:lnTo>
-                  <a:lnTo>
-                    <a:pt x="4731415" y="879285"/>
-                  </a:lnTo>
-                  <a:lnTo>
-                    <a:pt x="4653781" y="860291"/>
-                  </a:lnTo>
-                  <a:lnTo>
-                    <a:pt x="4576147" y="840190"/>
-                  </a:lnTo>
-                  <a:lnTo>
-                    <a:pt x="4498513" y="818916"/>
-                  </a:lnTo>
-                  <a:lnTo>
-                    <a:pt x="4420879" y="796402"/>
-                  </a:lnTo>
-                  <a:lnTo>
-                    <a:pt x="4343244" y="772574"/>
-                  </a:lnTo>
-                  <a:lnTo>
-                    <a:pt x="4265610" y="747357"/>
-                  </a:lnTo>
-                  <a:lnTo>
-                    <a:pt x="4187976" y="720669"/>
-                  </a:lnTo>
-                  <a:lnTo>
-                    <a:pt x="4110342" y="692425"/>
-                  </a:lnTo>
-                  <a:lnTo>
-                    <a:pt x="4032708" y="662533"/>
-                  </a:lnTo>
-                  <a:lnTo>
-                    <a:pt x="3955074" y="630899"/>
-                  </a:lnTo>
-                  <a:lnTo>
-                    <a:pt x="3877440" y="597419"/>
-                  </a:lnTo>
-                  <a:lnTo>
-                    <a:pt x="3799806" y="561986"/>
-                  </a:lnTo>
-                  <a:lnTo>
-                    <a:pt x="3722172" y="524487"/>
-                  </a:lnTo>
-                  <a:lnTo>
-                    <a:pt x="3644538" y="484801"/>
-                  </a:lnTo>
-                  <a:lnTo>
-                    <a:pt x="3566904" y="442801"/>
-                  </a:lnTo>
-                  <a:lnTo>
-                    <a:pt x="3489270" y="398351"/>
-                  </a:lnTo>
-                  <a:lnTo>
-                    <a:pt x="3411636" y="351309"/>
-                  </a:lnTo>
-                  <a:lnTo>
-                    <a:pt x="3334002" y="330899"/>
-                  </a:lnTo>
-                  <a:lnTo>
-                    <a:pt x="3256368" y="324340"/>
-                  </a:lnTo>
-                  <a:lnTo>
-                    <a:pt x="3178734" y="317732"/>
-                  </a:lnTo>
-                  <a:lnTo>
-                    <a:pt x="3101100" y="311075"/>
-                  </a:lnTo>
-                  <a:lnTo>
-                    <a:pt x="3023466" y="304367"/>
-                  </a:lnTo>
-                  <a:lnTo>
-                    <a:pt x="2945832" y="297609"/>
-                  </a:lnTo>
-                  <a:lnTo>
-                    <a:pt x="2868198" y="290801"/>
-                  </a:lnTo>
-                  <a:lnTo>
-                    <a:pt x="2790564" y="283941"/>
-                  </a:lnTo>
-                  <a:lnTo>
-                    <a:pt x="2712930" y="277030"/>
-                  </a:lnTo>
-                  <a:lnTo>
-                    <a:pt x="2635295" y="270067"/>
-                  </a:lnTo>
-                  <a:lnTo>
-                    <a:pt x="2557661" y="263051"/>
-                  </a:lnTo>
-                  <a:lnTo>
-                    <a:pt x="2480027" y="255984"/>
-                  </a:lnTo>
-                  <a:lnTo>
-                    <a:pt x="2402393" y="248863"/>
-                  </a:lnTo>
-                  <a:lnTo>
-                    <a:pt x="2324759" y="241688"/>
-                  </a:lnTo>
-                  <a:lnTo>
-                    <a:pt x="2247125" y="234460"/>
-                  </a:lnTo>
-                  <a:lnTo>
-                    <a:pt x="2169491" y="227177"/>
-                  </a:lnTo>
-                  <a:lnTo>
-                    <a:pt x="2091857" y="219840"/>
-                  </a:lnTo>
-                  <a:lnTo>
-                    <a:pt x="2014223" y="212448"/>
-                  </a:lnTo>
-                  <a:lnTo>
-                    <a:pt x="1936589" y="205000"/>
-                  </a:lnTo>
-                  <a:lnTo>
-                    <a:pt x="1858955" y="197497"/>
-                  </a:lnTo>
-                  <a:lnTo>
-                    <a:pt x="1781321" y="189937"/>
-                  </a:lnTo>
-                  <a:lnTo>
-                    <a:pt x="1703687" y="182320"/>
-                  </a:lnTo>
-                  <a:lnTo>
-                    <a:pt x="1626053" y="174647"/>
-                  </a:lnTo>
-                  <a:lnTo>
-                    <a:pt x="1548419" y="166915"/>
-                  </a:lnTo>
-                  <a:lnTo>
-                    <a:pt x="1470785" y="159126"/>
-                  </a:lnTo>
-                  <a:lnTo>
-                    <a:pt x="1393151" y="151278"/>
-                  </a:lnTo>
-                  <a:lnTo>
-                    <a:pt x="1315517" y="143372"/>
-                  </a:lnTo>
-                  <a:lnTo>
-                    <a:pt x="1237883" y="135406"/>
-                  </a:lnTo>
-                  <a:lnTo>
-                    <a:pt x="1160249" y="127380"/>
-                  </a:lnTo>
-                  <a:lnTo>
-                    <a:pt x="1082615" y="119294"/>
-                  </a:lnTo>
-                  <a:lnTo>
-                    <a:pt x="1004981" y="111147"/>
-                  </a:lnTo>
-                  <a:lnTo>
-                    <a:pt x="927346" y="102939"/>
-                  </a:lnTo>
-                  <a:lnTo>
-                    <a:pt x="849712" y="94670"/>
-                  </a:lnTo>
-                  <a:lnTo>
-                    <a:pt x="772078" y="86338"/>
-                  </a:lnTo>
-                  <a:lnTo>
-                    <a:pt x="694444" y="77944"/>
-                  </a:lnTo>
-                  <a:lnTo>
-                    <a:pt x="616810" y="69487"/>
-                  </a:lnTo>
-                  <a:lnTo>
-                    <a:pt x="539176" y="60967"/>
-                  </a:lnTo>
-                  <a:lnTo>
-                    <a:pt x="461542" y="52383"/>
-                  </a:lnTo>
-                  <a:lnTo>
-                    <a:pt x="383908" y="43734"/>
-                  </a:lnTo>
-                  <a:lnTo>
-                    <a:pt x="306274" y="35020"/>
-                  </a:lnTo>
-                  <a:lnTo>
-                    <a:pt x="228640" y="26241"/>
-                  </a:lnTo>
-                  <a:lnTo>
-                    <a:pt x="151006" y="17396"/>
-                  </a:lnTo>
-                  <a:lnTo>
-                    <a:pt x="73372" y="8485"/>
-                  </a:lnTo>
-                  <a:lnTo>
-                    <a:pt x="0" y="0"/>
+                    <a:pt x="7293338" y="838060"/>
+                  </a:lnTo>
+                  <a:lnTo>
+                    <a:pt x="7215704" y="836126"/>
+                  </a:lnTo>
+                  <a:lnTo>
+                    <a:pt x="7138070" y="834055"/>
+                  </a:lnTo>
+                  <a:lnTo>
+                    <a:pt x="7060436" y="831835"/>
+                  </a:lnTo>
+                  <a:lnTo>
+                    <a:pt x="6982802" y="829458"/>
+                  </a:lnTo>
+                  <a:lnTo>
+                    <a:pt x="6905168" y="826910"/>
+                  </a:lnTo>
+                  <a:lnTo>
+                    <a:pt x="6827534" y="824181"/>
+                  </a:lnTo>
+                  <a:lnTo>
+                    <a:pt x="6749900" y="821258"/>
+                  </a:lnTo>
+                  <a:lnTo>
+                    <a:pt x="6672266" y="818125"/>
+                  </a:lnTo>
+                  <a:lnTo>
+                    <a:pt x="6594632" y="814770"/>
+                  </a:lnTo>
+                  <a:lnTo>
+                    <a:pt x="6516998" y="811174"/>
+                  </a:lnTo>
+                  <a:lnTo>
+                    <a:pt x="6439364" y="807322"/>
+                  </a:lnTo>
+                  <a:lnTo>
+                    <a:pt x="6361730" y="803196"/>
+                  </a:lnTo>
+                  <a:lnTo>
+                    <a:pt x="6284096" y="798775"/>
+                  </a:lnTo>
+                  <a:lnTo>
+                    <a:pt x="6206462" y="794038"/>
+                  </a:lnTo>
+                  <a:lnTo>
+                    <a:pt x="6128827" y="788964"/>
+                  </a:lnTo>
+                  <a:lnTo>
+                    <a:pt x="6051193" y="783527"/>
+                  </a:lnTo>
+                  <a:lnTo>
+                    <a:pt x="5973559" y="777703"/>
+                  </a:lnTo>
+                  <a:lnTo>
+                    <a:pt x="5895925" y="771463"/>
+                  </a:lnTo>
+                  <a:lnTo>
+                    <a:pt x="5818291" y="764778"/>
+                  </a:lnTo>
+                  <a:lnTo>
+                    <a:pt x="5740657" y="757615"/>
+                  </a:lnTo>
+                  <a:lnTo>
+                    <a:pt x="5663023" y="749942"/>
+                  </a:lnTo>
+                  <a:lnTo>
+                    <a:pt x="5585389" y="741721"/>
+                  </a:lnTo>
+                  <a:lnTo>
+                    <a:pt x="5507755" y="732914"/>
+                  </a:lnTo>
+                  <a:lnTo>
+                    <a:pt x="5430121" y="723478"/>
+                  </a:lnTo>
+                  <a:lnTo>
+                    <a:pt x="5352487" y="713369"/>
+                  </a:lnTo>
+                  <a:lnTo>
+                    <a:pt x="5274853" y="702539"/>
+                  </a:lnTo>
+                  <a:lnTo>
+                    <a:pt x="5197219" y="690936"/>
+                  </a:lnTo>
+                  <a:lnTo>
+                    <a:pt x="5119585" y="678505"/>
+                  </a:lnTo>
+                  <a:lnTo>
+                    <a:pt x="5041951" y="665187"/>
+                  </a:lnTo>
+                  <a:lnTo>
+                    <a:pt x="4964317" y="650919"/>
+                  </a:lnTo>
+                  <a:lnTo>
+                    <a:pt x="4886683" y="635633"/>
+                  </a:lnTo>
+                  <a:lnTo>
+                    <a:pt x="4809049" y="619256"/>
+                  </a:lnTo>
+                  <a:lnTo>
+                    <a:pt x="4731415" y="601711"/>
+                  </a:lnTo>
+                  <a:lnTo>
+                    <a:pt x="4653781" y="582913"/>
+                  </a:lnTo>
+                  <a:lnTo>
+                    <a:pt x="4576147" y="562775"/>
+                  </a:lnTo>
+                  <a:lnTo>
+                    <a:pt x="4498513" y="541200"/>
+                  </a:lnTo>
+                  <a:lnTo>
+                    <a:pt x="4420879" y="518085"/>
+                  </a:lnTo>
+                  <a:lnTo>
+                    <a:pt x="4343244" y="493321"/>
+                  </a:lnTo>
+                  <a:lnTo>
+                    <a:pt x="4265610" y="466790"/>
+                  </a:lnTo>
+                  <a:lnTo>
+                    <a:pt x="4187976" y="438366"/>
+                  </a:lnTo>
+                  <a:lnTo>
+                    <a:pt x="4110342" y="407914"/>
+                  </a:lnTo>
+                  <a:lnTo>
+                    <a:pt x="4032708" y="375289"/>
+                  </a:lnTo>
+                  <a:lnTo>
+                    <a:pt x="3955074" y="340337"/>
+                  </a:lnTo>
+                  <a:lnTo>
+                    <a:pt x="3877440" y="302890"/>
+                  </a:lnTo>
+                  <a:lnTo>
+                    <a:pt x="3799806" y="262772"/>
+                  </a:lnTo>
+                  <a:lnTo>
+                    <a:pt x="3722172" y="219791"/>
+                  </a:lnTo>
+                  <a:lnTo>
+                    <a:pt x="3644538" y="173744"/>
+                  </a:lnTo>
+                  <a:lnTo>
+                    <a:pt x="3566904" y="124410"/>
+                  </a:lnTo>
+                  <a:lnTo>
+                    <a:pt x="3489270" y="71557"/>
+                  </a:lnTo>
+                  <a:lnTo>
+                    <a:pt x="3411636" y="14933"/>
+                  </a:lnTo>
+                  <a:lnTo>
+                    <a:pt x="3334002" y="0"/>
+                  </a:lnTo>
+                  <a:lnTo>
+                    <a:pt x="3256368" y="6682"/>
+                  </a:lnTo>
+                  <a:lnTo>
+                    <a:pt x="3178734" y="13313"/>
+                  </a:lnTo>
+                  <a:lnTo>
+                    <a:pt x="3101100" y="19893"/>
+                  </a:lnTo>
+                  <a:lnTo>
+                    <a:pt x="3023466" y="26422"/>
+                  </a:lnTo>
+                  <a:lnTo>
+                    <a:pt x="2945832" y="32901"/>
+                  </a:lnTo>
+                  <a:lnTo>
+                    <a:pt x="2868198" y="39329"/>
+                  </a:lnTo>
+                  <a:lnTo>
+                    <a:pt x="2790564" y="45708"/>
+                  </a:lnTo>
+                  <a:lnTo>
+                    <a:pt x="2712930" y="52037"/>
+                  </a:lnTo>
+                  <a:lnTo>
+                    <a:pt x="2635295" y="58318"/>
+                  </a:lnTo>
+                  <a:lnTo>
+                    <a:pt x="2557661" y="64550"/>
+                  </a:lnTo>
+                  <a:lnTo>
+                    <a:pt x="2480027" y="70734"/>
+                  </a:lnTo>
+                  <a:lnTo>
+                    <a:pt x="2402393" y="76871"/>
+                  </a:lnTo>
+                  <a:lnTo>
+                    <a:pt x="2324759" y="82960"/>
+                  </a:lnTo>
+                  <a:lnTo>
+                    <a:pt x="2247125" y="89001"/>
+                  </a:lnTo>
+                  <a:lnTo>
+                    <a:pt x="2169491" y="94997"/>
+                  </a:lnTo>
+                  <a:lnTo>
+                    <a:pt x="2091857" y="100945"/>
+                  </a:lnTo>
+                  <a:lnTo>
+                    <a:pt x="2014223" y="106848"/>
+                  </a:lnTo>
+                  <a:lnTo>
+                    <a:pt x="1936589" y="112706"/>
+                  </a:lnTo>
+                  <a:lnTo>
+                    <a:pt x="1858955" y="118518"/>
+                  </a:lnTo>
+                  <a:lnTo>
+                    <a:pt x="1781321" y="124285"/>
+                  </a:lnTo>
+                  <a:lnTo>
+                    <a:pt x="1703687" y="130008"/>
+                  </a:lnTo>
+                  <a:lnTo>
+                    <a:pt x="1626053" y="135686"/>
+                  </a:lnTo>
+                  <a:lnTo>
+                    <a:pt x="1548419" y="141321"/>
+                  </a:lnTo>
+                  <a:lnTo>
+                    <a:pt x="1470785" y="146912"/>
+                  </a:lnTo>
+                  <a:lnTo>
+                    <a:pt x="1393151" y="152460"/>
+                  </a:lnTo>
+                  <a:lnTo>
+                    <a:pt x="1315517" y="157965"/>
+                  </a:lnTo>
+                  <a:lnTo>
+                    <a:pt x="1237883" y="163427"/>
+                  </a:lnTo>
+                  <a:lnTo>
+                    <a:pt x="1160249" y="168847"/>
+                  </a:lnTo>
+                  <a:lnTo>
+                    <a:pt x="1082615" y="174226"/>
+                  </a:lnTo>
+                  <a:lnTo>
+                    <a:pt x="1004981" y="179563"/>
+                  </a:lnTo>
+                  <a:lnTo>
+                    <a:pt x="927346" y="184858"/>
+                  </a:lnTo>
+                  <a:lnTo>
+                    <a:pt x="849712" y="190113"/>
+                  </a:lnTo>
+                  <a:lnTo>
+                    <a:pt x="772078" y="195327"/>
+                  </a:lnTo>
+                  <a:lnTo>
+                    <a:pt x="694444" y="200501"/>
+                  </a:lnTo>
+                  <a:lnTo>
+                    <a:pt x="616810" y="205635"/>
+                  </a:lnTo>
+                  <a:lnTo>
+                    <a:pt x="539176" y="210729"/>
+                  </a:lnTo>
+                  <a:lnTo>
+                    <a:pt x="461542" y="215784"/>
+                  </a:lnTo>
+                  <a:lnTo>
+                    <a:pt x="383908" y="220800"/>
+                  </a:lnTo>
+                  <a:lnTo>
+                    <a:pt x="306274" y="225777"/>
+                  </a:lnTo>
+                  <a:lnTo>
+                    <a:pt x="228640" y="230716"/>
+                  </a:lnTo>
+                  <a:lnTo>
+                    <a:pt x="151006" y="235617"/>
+                  </a:lnTo>
+                  <a:lnTo>
+                    <a:pt x="73372" y="240479"/>
+                  </a:lnTo>
+                  <a:lnTo>
+                    <a:pt x="0" y="245040"/>
                   </a:lnTo>
                 </a:path>
               </a:pathLst>
@@ -4127,300 +4103,300 @@
           </p:nvSpPr>
           <p:spPr>
             <a:xfrm>
-              <a:off x="817517" y="2025108"/>
-              <a:ext cx="7370972" cy="3356510"/>
+              <a:off x="817517" y="2247859"/>
+              <a:ext cx="7370972" cy="3120375"/>
             </a:xfrm>
             <a:custGeom>
               <a:avLst/>
               <a:pathLst>
-                <a:path w="7370972" h="3356510">
+                <a:path w="7370972" h="3120375">
                   <a:moveTo>
                     <a:pt x="0" y="0"/>
                   </a:moveTo>
                   <a:lnTo>
-                    <a:pt x="73372" y="105334"/>
-                  </a:lnTo>
-                  <a:lnTo>
-                    <a:pt x="151006" y="213267"/>
-                  </a:lnTo>
-                  <a:lnTo>
-                    <a:pt x="228640" y="317793"/>
-                  </a:lnTo>
-                  <a:lnTo>
-                    <a:pt x="306274" y="419019"/>
-                  </a:lnTo>
-                  <a:lnTo>
-                    <a:pt x="383908" y="517050"/>
-                  </a:lnTo>
-                  <a:lnTo>
-                    <a:pt x="461542" y="611985"/>
-                  </a:lnTo>
-                  <a:lnTo>
-                    <a:pt x="539176" y="703923"/>
-                  </a:lnTo>
-                  <a:lnTo>
-                    <a:pt x="616810" y="792959"/>
-                  </a:lnTo>
-                  <a:lnTo>
-                    <a:pt x="694444" y="879183"/>
-                  </a:lnTo>
-                  <a:lnTo>
-                    <a:pt x="772078" y="962686"/>
-                  </a:lnTo>
-                  <a:lnTo>
-                    <a:pt x="849712" y="1043552"/>
-                  </a:lnTo>
-                  <a:lnTo>
-                    <a:pt x="927346" y="1121865"/>
-                  </a:lnTo>
-                  <a:lnTo>
-                    <a:pt x="1004981" y="1197706"/>
-                  </a:lnTo>
-                  <a:lnTo>
-                    <a:pt x="1082615" y="1271152"/>
-                  </a:lnTo>
-                  <a:lnTo>
-                    <a:pt x="1160249" y="1342280"/>
-                  </a:lnTo>
-                  <a:lnTo>
-                    <a:pt x="1237883" y="1411162"/>
-                  </a:lnTo>
-                  <a:lnTo>
-                    <a:pt x="1315517" y="1477869"/>
-                  </a:lnTo>
-                  <a:lnTo>
-                    <a:pt x="1393151" y="1542470"/>
-                  </a:lnTo>
-                  <a:lnTo>
-                    <a:pt x="1470785" y="1605032"/>
-                  </a:lnTo>
-                  <a:lnTo>
-                    <a:pt x="1548419" y="1665619"/>
-                  </a:lnTo>
-                  <a:lnTo>
-                    <a:pt x="1626053" y="1724293"/>
-                  </a:lnTo>
-                  <a:lnTo>
-                    <a:pt x="1703687" y="1781114"/>
-                  </a:lnTo>
-                  <a:lnTo>
-                    <a:pt x="1781321" y="1836142"/>
-                  </a:lnTo>
-                  <a:lnTo>
-                    <a:pt x="1858955" y="1889432"/>
-                  </a:lnTo>
-                  <a:lnTo>
-                    <a:pt x="1936589" y="1941040"/>
-                  </a:lnTo>
-                  <a:lnTo>
-                    <a:pt x="2014223" y="1991019"/>
-                  </a:lnTo>
-                  <a:lnTo>
-                    <a:pt x="2091857" y="2039420"/>
-                  </a:lnTo>
-                  <a:lnTo>
-                    <a:pt x="2169491" y="2086292"/>
-                  </a:lnTo>
-                  <a:lnTo>
-                    <a:pt x="2247125" y="2131685"/>
-                  </a:lnTo>
-                  <a:lnTo>
-                    <a:pt x="2324759" y="2175645"/>
-                  </a:lnTo>
-                  <a:lnTo>
-                    <a:pt x="2402393" y="2218217"/>
-                  </a:lnTo>
-                  <a:lnTo>
-                    <a:pt x="2480027" y="2259445"/>
-                  </a:lnTo>
-                  <a:lnTo>
-                    <a:pt x="2557661" y="2299371"/>
-                  </a:lnTo>
-                  <a:lnTo>
-                    <a:pt x="2635295" y="2338037"/>
-                  </a:lnTo>
-                  <a:lnTo>
-                    <a:pt x="2712930" y="2375482"/>
-                  </a:lnTo>
-                  <a:lnTo>
-                    <a:pt x="2790564" y="2411745"/>
-                  </a:lnTo>
-                  <a:lnTo>
-                    <a:pt x="2868198" y="2446863"/>
-                  </a:lnTo>
-                  <a:lnTo>
-                    <a:pt x="2945832" y="2480872"/>
-                  </a:lnTo>
-                  <a:lnTo>
-                    <a:pt x="3023466" y="2513808"/>
-                  </a:lnTo>
-                  <a:lnTo>
-                    <a:pt x="3101100" y="2545704"/>
-                  </a:lnTo>
-                  <a:lnTo>
-                    <a:pt x="3178734" y="2576592"/>
-                  </a:lnTo>
-                  <a:lnTo>
-                    <a:pt x="3256368" y="2606506"/>
-                  </a:lnTo>
-                  <a:lnTo>
-                    <a:pt x="3334002" y="2635475"/>
-                  </a:lnTo>
-                  <a:lnTo>
-                    <a:pt x="3411636" y="2663530"/>
-                  </a:lnTo>
-                  <a:lnTo>
-                    <a:pt x="3489270" y="2690699"/>
-                  </a:lnTo>
-                  <a:lnTo>
-                    <a:pt x="3566904" y="2717010"/>
-                  </a:lnTo>
-                  <a:lnTo>
-                    <a:pt x="3644538" y="2742491"/>
-                  </a:lnTo>
-                  <a:lnTo>
-                    <a:pt x="3722172" y="2767167"/>
-                  </a:lnTo>
-                  <a:lnTo>
-                    <a:pt x="3799806" y="2791064"/>
-                  </a:lnTo>
-                  <a:lnTo>
-                    <a:pt x="3877440" y="2814206"/>
-                  </a:lnTo>
-                  <a:lnTo>
-                    <a:pt x="3955074" y="2836618"/>
-                  </a:lnTo>
-                  <a:lnTo>
-                    <a:pt x="4032708" y="2858323"/>
-                  </a:lnTo>
-                  <a:lnTo>
-                    <a:pt x="4110342" y="2879342"/>
-                  </a:lnTo>
-                  <a:lnTo>
-                    <a:pt x="4187976" y="2899697"/>
-                  </a:lnTo>
-                  <a:lnTo>
-                    <a:pt x="4265610" y="2919410"/>
-                  </a:lnTo>
-                  <a:lnTo>
-                    <a:pt x="4343244" y="2938501"/>
-                  </a:lnTo>
-                  <a:lnTo>
-                    <a:pt x="4420879" y="2956989"/>
-                  </a:lnTo>
-                  <a:lnTo>
-                    <a:pt x="4498513" y="2974893"/>
-                  </a:lnTo>
-                  <a:lnTo>
-                    <a:pt x="4576147" y="2992232"/>
-                  </a:lnTo>
-                  <a:lnTo>
-                    <a:pt x="4653781" y="3009023"/>
-                  </a:lnTo>
-                  <a:lnTo>
-                    <a:pt x="4731415" y="3025285"/>
-                  </a:lnTo>
-                  <a:lnTo>
-                    <a:pt x="4809049" y="3041033"/>
-                  </a:lnTo>
-                  <a:lnTo>
-                    <a:pt x="4886683" y="3056283"/>
-                  </a:lnTo>
-                  <a:lnTo>
-                    <a:pt x="4964317" y="3071053"/>
-                  </a:lnTo>
-                  <a:lnTo>
-                    <a:pt x="5041951" y="3085356"/>
-                  </a:lnTo>
-                  <a:lnTo>
-                    <a:pt x="5119585" y="3099207"/>
-                  </a:lnTo>
-                  <a:lnTo>
-                    <a:pt x="5197219" y="3112621"/>
-                  </a:lnTo>
-                  <a:lnTo>
-                    <a:pt x="5274853" y="3125612"/>
-                  </a:lnTo>
-                  <a:lnTo>
-                    <a:pt x="5352487" y="3138193"/>
-                  </a:lnTo>
-                  <a:lnTo>
-                    <a:pt x="5430121" y="3150376"/>
-                  </a:lnTo>
-                  <a:lnTo>
-                    <a:pt x="5507755" y="3162175"/>
-                  </a:lnTo>
-                  <a:lnTo>
-                    <a:pt x="5585389" y="3173601"/>
-                  </a:lnTo>
-                  <a:lnTo>
-                    <a:pt x="5663023" y="3184667"/>
-                  </a:lnTo>
-                  <a:lnTo>
-                    <a:pt x="5740657" y="3195383"/>
-                  </a:lnTo>
-                  <a:lnTo>
-                    <a:pt x="5818291" y="3205761"/>
-                  </a:lnTo>
-                  <a:lnTo>
-                    <a:pt x="5895925" y="3215811"/>
-                  </a:lnTo>
-                  <a:lnTo>
-                    <a:pt x="5973559" y="3225544"/>
-                  </a:lnTo>
-                  <a:lnTo>
-                    <a:pt x="6051193" y="3234969"/>
-                  </a:lnTo>
-                  <a:lnTo>
-                    <a:pt x="6128827" y="3244097"/>
-                  </a:lnTo>
-                  <a:lnTo>
-                    <a:pt x="6206462" y="3252937"/>
-                  </a:lnTo>
-                  <a:lnTo>
-                    <a:pt x="6284096" y="3261498"/>
-                  </a:lnTo>
-                  <a:lnTo>
-                    <a:pt x="6361730" y="3269789"/>
-                  </a:lnTo>
-                  <a:lnTo>
-                    <a:pt x="6439364" y="3277817"/>
-                  </a:lnTo>
-                  <a:lnTo>
-                    <a:pt x="6516998" y="3285593"/>
-                  </a:lnTo>
-                  <a:lnTo>
-                    <a:pt x="6594632" y="3293123"/>
-                  </a:lnTo>
-                  <a:lnTo>
-                    <a:pt x="6672266" y="3300415"/>
-                  </a:lnTo>
-                  <a:lnTo>
-                    <a:pt x="6749900" y="3307477"/>
-                  </a:lnTo>
-                  <a:lnTo>
-                    <a:pt x="6827534" y="3314315"/>
-                  </a:lnTo>
-                  <a:lnTo>
-                    <a:pt x="6905168" y="3320938"/>
-                  </a:lnTo>
-                  <a:lnTo>
-                    <a:pt x="6982802" y="3327352"/>
-                  </a:lnTo>
-                  <a:lnTo>
-                    <a:pt x="7060436" y="3333564"/>
-                  </a:lnTo>
-                  <a:lnTo>
-                    <a:pt x="7138070" y="3339579"/>
-                  </a:lnTo>
-                  <a:lnTo>
-                    <a:pt x="7215704" y="3345405"/>
-                  </a:lnTo>
-                  <a:lnTo>
-                    <a:pt x="7293338" y="3351046"/>
-                  </a:lnTo>
-                  <a:lnTo>
-                    <a:pt x="7370972" y="3356510"/>
+                    <a:pt x="73372" y="94134"/>
+                  </a:lnTo>
+                  <a:lnTo>
+                    <a:pt x="151006" y="190736"/>
+                  </a:lnTo>
+                  <a:lnTo>
+                    <a:pt x="228640" y="284428"/>
+                  </a:lnTo>
+                  <a:lnTo>
+                    <a:pt x="306274" y="375298"/>
+                  </a:lnTo>
+                  <a:lnTo>
+                    <a:pt x="383908" y="463431"/>
+                  </a:lnTo>
+                  <a:lnTo>
+                    <a:pt x="461542" y="548910"/>
+                  </a:lnTo>
+                  <a:lnTo>
+                    <a:pt x="539176" y="631814"/>
+                  </a:lnTo>
+                  <a:lnTo>
+                    <a:pt x="616810" y="712221"/>
+                  </a:lnTo>
+                  <a:lnTo>
+                    <a:pt x="694444" y="790206"/>
+                  </a:lnTo>
+                  <a:lnTo>
+                    <a:pt x="772078" y="865842"/>
+                  </a:lnTo>
+                  <a:lnTo>
+                    <a:pt x="849712" y="939200"/>
+                  </a:lnTo>
+                  <a:lnTo>
+                    <a:pt x="927346" y="1010348"/>
+                  </a:lnTo>
+                  <a:lnTo>
+                    <a:pt x="1004981" y="1079353"/>
+                  </a:lnTo>
+                  <a:lnTo>
+                    <a:pt x="1082615" y="1146280"/>
+                  </a:lnTo>
+                  <a:lnTo>
+                    <a:pt x="1160249" y="1211191"/>
+                  </a:lnTo>
+                  <a:lnTo>
+                    <a:pt x="1237883" y="1274147"/>
+                  </a:lnTo>
+                  <a:lnTo>
+                    <a:pt x="1315517" y="1335207"/>
+                  </a:lnTo>
+                  <a:lnTo>
+                    <a:pt x="1393151" y="1394427"/>
+                  </a:lnTo>
+                  <a:lnTo>
+                    <a:pt x="1470785" y="1451864"/>
+                  </a:lnTo>
+                  <a:lnTo>
+                    <a:pt x="1548419" y="1507571"/>
+                  </a:lnTo>
+                  <a:lnTo>
+                    <a:pt x="1626053" y="1561600"/>
+                  </a:lnTo>
+                  <a:lnTo>
+                    <a:pt x="1703687" y="1614001"/>
+                  </a:lnTo>
+                  <a:lnTo>
+                    <a:pt x="1781321" y="1664824"/>
+                  </a:lnTo>
+                  <a:lnTo>
+                    <a:pt x="1858955" y="1714117"/>
+                  </a:lnTo>
+                  <a:lnTo>
+                    <a:pt x="1936589" y="1761924"/>
+                  </a:lnTo>
+                  <a:lnTo>
+                    <a:pt x="2014223" y="1808292"/>
+                  </a:lnTo>
+                  <a:lnTo>
+                    <a:pt x="2091857" y="1853263"/>
+                  </a:lnTo>
+                  <a:lnTo>
+                    <a:pt x="2169491" y="1896880"/>
+                  </a:lnTo>
+                  <a:lnTo>
+                    <a:pt x="2247125" y="1939183"/>
+                  </a:lnTo>
+                  <a:lnTo>
+                    <a:pt x="2324759" y="1980211"/>
+                  </a:lnTo>
+                  <a:lnTo>
+                    <a:pt x="2402393" y="2020004"/>
+                  </a:lnTo>
+                  <a:lnTo>
+                    <a:pt x="2480027" y="2058598"/>
+                  </a:lnTo>
+                  <a:lnTo>
+                    <a:pt x="2557661" y="2096030"/>
+                  </a:lnTo>
+                  <a:lnTo>
+                    <a:pt x="2635295" y="2132335"/>
+                  </a:lnTo>
+                  <a:lnTo>
+                    <a:pt x="2712930" y="2167545"/>
+                  </a:lnTo>
+                  <a:lnTo>
+                    <a:pt x="2790564" y="2201696"/>
+                  </a:lnTo>
+                  <a:lnTo>
+                    <a:pt x="2868198" y="2234818"/>
+                  </a:lnTo>
+                  <a:lnTo>
+                    <a:pt x="2945832" y="2266942"/>
+                  </a:lnTo>
+                  <a:lnTo>
+                    <a:pt x="3023466" y="2298098"/>
+                  </a:lnTo>
+                  <a:lnTo>
+                    <a:pt x="3101100" y="2328316"/>
+                  </a:lnTo>
+                  <a:lnTo>
+                    <a:pt x="3178734" y="2357624"/>
+                  </a:lnTo>
+                  <a:lnTo>
+                    <a:pt x="3256368" y="2386049"/>
+                  </a:lnTo>
+                  <a:lnTo>
+                    <a:pt x="3334002" y="2413618"/>
+                  </a:lnTo>
+                  <a:lnTo>
+                    <a:pt x="3411636" y="2440357"/>
+                  </a:lnTo>
+                  <a:lnTo>
+                    <a:pt x="3489270" y="2466290"/>
+                  </a:lnTo>
+                  <a:lnTo>
+                    <a:pt x="3566904" y="2491442"/>
+                  </a:lnTo>
+                  <a:lnTo>
+                    <a:pt x="3644538" y="2515837"/>
+                  </a:lnTo>
+                  <a:lnTo>
+                    <a:pt x="3722172" y="2539496"/>
+                  </a:lnTo>
+                  <a:lnTo>
+                    <a:pt x="3799806" y="2562443"/>
+                  </a:lnTo>
+                  <a:lnTo>
+                    <a:pt x="3877440" y="2584699"/>
+                  </a:lnTo>
+                  <a:lnTo>
+                    <a:pt x="3955074" y="2606285"/>
+                  </a:lnTo>
+                  <a:lnTo>
+                    <a:pt x="4032708" y="2627220"/>
+                  </a:lnTo>
+                  <a:lnTo>
+                    <a:pt x="4110342" y="2647525"/>
+                  </a:lnTo>
+                  <a:lnTo>
+                    <a:pt x="4187976" y="2667218"/>
+                  </a:lnTo>
+                  <a:lnTo>
+                    <a:pt x="4265610" y="2686318"/>
+                  </a:lnTo>
+                  <a:lnTo>
+                    <a:pt x="4343244" y="2704843"/>
+                  </a:lnTo>
+                  <a:lnTo>
+                    <a:pt x="4420879" y="2722810"/>
+                  </a:lnTo>
+                  <a:lnTo>
+                    <a:pt x="4498513" y="2740236"/>
+                  </a:lnTo>
+                  <a:lnTo>
+                    <a:pt x="4576147" y="2757137"/>
+                  </a:lnTo>
+                  <a:lnTo>
+                    <a:pt x="4653781" y="2773528"/>
+                  </a:lnTo>
+                  <a:lnTo>
+                    <a:pt x="4731415" y="2789426"/>
+                  </a:lnTo>
+                  <a:lnTo>
+                    <a:pt x="4809049" y="2804845"/>
+                  </a:lnTo>
+                  <a:lnTo>
+                    <a:pt x="4886683" y="2819800"/>
+                  </a:lnTo>
+                  <a:lnTo>
+                    <a:pt x="4964317" y="2834304"/>
+                  </a:lnTo>
+                  <a:lnTo>
+                    <a:pt x="5041951" y="2848372"/>
+                  </a:lnTo>
+                  <a:lnTo>
+                    <a:pt x="5119585" y="2862016"/>
+                  </a:lnTo>
+                  <a:lnTo>
+                    <a:pt x="5197219" y="2875248"/>
+                  </a:lnTo>
+                  <a:lnTo>
+                    <a:pt x="5274853" y="2888083"/>
+                  </a:lnTo>
+                  <a:lnTo>
+                    <a:pt x="5352487" y="2900530"/>
+                  </a:lnTo>
+                  <a:lnTo>
+                    <a:pt x="5430121" y="2912603"/>
+                  </a:lnTo>
+                  <a:lnTo>
+                    <a:pt x="5507755" y="2924312"/>
+                  </a:lnTo>
+                  <a:lnTo>
+                    <a:pt x="5585389" y="2935668"/>
+                  </a:lnTo>
+                  <a:lnTo>
+                    <a:pt x="5663023" y="2946683"/>
+                  </a:lnTo>
+                  <a:lnTo>
+                    <a:pt x="5740657" y="2957365"/>
+                  </a:lnTo>
+                  <a:lnTo>
+                    <a:pt x="5818291" y="2967726"/>
+                  </a:lnTo>
+                  <a:lnTo>
+                    <a:pt x="5895925" y="2977775"/>
+                  </a:lnTo>
+                  <a:lnTo>
+                    <a:pt x="5973559" y="2987521"/>
+                  </a:lnTo>
+                  <a:lnTo>
+                    <a:pt x="6051193" y="2996973"/>
+                  </a:lnTo>
+                  <a:lnTo>
+                    <a:pt x="6128827" y="3006141"/>
+                  </a:lnTo>
+                  <a:lnTo>
+                    <a:pt x="6206462" y="3015033"/>
+                  </a:lnTo>
+                  <a:lnTo>
+                    <a:pt x="6284096" y="3023657"/>
+                  </a:lnTo>
+                  <a:lnTo>
+                    <a:pt x="6361730" y="3032021"/>
+                  </a:lnTo>
+                  <a:lnTo>
+                    <a:pt x="6439364" y="3040133"/>
+                  </a:lnTo>
+                  <a:lnTo>
+                    <a:pt x="6516998" y="3048001"/>
+                  </a:lnTo>
+                  <a:lnTo>
+                    <a:pt x="6594632" y="3055632"/>
+                  </a:lnTo>
+                  <a:lnTo>
+                    <a:pt x="6672266" y="3063033"/>
+                  </a:lnTo>
+                  <a:lnTo>
+                    <a:pt x="6749900" y="3070211"/>
+                  </a:lnTo>
+                  <a:lnTo>
+                    <a:pt x="6827534" y="3077173"/>
+                  </a:lnTo>
+                  <a:lnTo>
+                    <a:pt x="6905168" y="3083925"/>
+                  </a:lnTo>
+                  <a:lnTo>
+                    <a:pt x="6982802" y="3090474"/>
+                  </a:lnTo>
+                  <a:lnTo>
+                    <a:pt x="7060436" y="3096825"/>
+                  </a:lnTo>
+                  <a:lnTo>
+                    <a:pt x="7138070" y="3102985"/>
+                  </a:lnTo>
+                  <a:lnTo>
+                    <a:pt x="7215704" y="3108960"/>
+                  </a:lnTo>
+                  <a:lnTo>
+                    <a:pt x="7293338" y="3114755"/>
+                  </a:lnTo>
+                  <a:lnTo>
+                    <a:pt x="7370972" y="3120375"/>
                   </a:lnTo>
                 </a:path>
               </a:pathLst>

--- a/docs/plots/carbo/jx_carbo_linsubhr_ratio_akikdigo.pptx
+++ b/docs/plots/carbo/jx_carbo_linsubhr_ratio_akikdigo.pptx
@@ -3003,521 +3003,530 @@
           <p:spPr>
             <a:xfrm>
               <a:off x="817517" y="1896563"/>
-              <a:ext cx="7370972" cy="3627349"/>
+              <a:ext cx="7370972" cy="3611907"/>
             </a:xfrm>
             <a:custGeom>
               <a:avLst/>
               <a:pathLst>
-                <a:path w="7370972" h="3627349">
+                <a:path w="7370972" h="3611907">
                   <a:moveTo>
-                    <a:pt x="1769971" y="0"/>
+                    <a:pt x="1518511" y="0"/>
                   </a:moveTo>
                   <a:lnTo>
-                    <a:pt x="1781321" y="37708"/>
-                  </a:lnTo>
-                  <a:lnTo>
-                    <a:pt x="1858955" y="278459"/>
-                  </a:lnTo>
-                  <a:lnTo>
-                    <a:pt x="1936589" y="503177"/>
-                  </a:lnTo>
-                  <a:lnTo>
-                    <a:pt x="2014223" y="712928"/>
-                  </a:lnTo>
-                  <a:lnTo>
-                    <a:pt x="2091857" y="908710"/>
-                  </a:lnTo>
-                  <a:lnTo>
-                    <a:pt x="2169491" y="1091453"/>
-                  </a:lnTo>
-                  <a:lnTo>
-                    <a:pt x="2247125" y="1262026"/>
-                  </a:lnTo>
-                  <a:lnTo>
-                    <a:pt x="2324759" y="1421239"/>
-                  </a:lnTo>
-                  <a:lnTo>
-                    <a:pt x="2402393" y="1569848"/>
-                  </a:lnTo>
-                  <a:lnTo>
-                    <a:pt x="2480027" y="1708560"/>
-                  </a:lnTo>
-                  <a:lnTo>
-                    <a:pt x="2557661" y="1838034"/>
-                  </a:lnTo>
-                  <a:lnTo>
-                    <a:pt x="2635295" y="1958886"/>
-                  </a:lnTo>
-                  <a:lnTo>
-                    <a:pt x="2712930" y="2071688"/>
-                  </a:lnTo>
-                  <a:lnTo>
-                    <a:pt x="2790564" y="2176978"/>
-                  </a:lnTo>
-                  <a:lnTo>
-                    <a:pt x="2868198" y="2275256"/>
-                  </a:lnTo>
-                  <a:lnTo>
-                    <a:pt x="2945832" y="2366989"/>
-                  </a:lnTo>
-                  <a:lnTo>
-                    <a:pt x="3023466" y="2452612"/>
-                  </a:lnTo>
-                  <a:lnTo>
-                    <a:pt x="3101100" y="2532533"/>
-                  </a:lnTo>
-                  <a:lnTo>
-                    <a:pt x="3178734" y="2607131"/>
-                  </a:lnTo>
-                  <a:lnTo>
-                    <a:pt x="3256368" y="2676761"/>
-                  </a:lnTo>
-                  <a:lnTo>
-                    <a:pt x="3334002" y="2741754"/>
-                  </a:lnTo>
-                  <a:lnTo>
-                    <a:pt x="3411636" y="2780750"/>
-                  </a:lnTo>
-                  <a:lnTo>
-                    <a:pt x="3489270" y="2773963"/>
-                  </a:lnTo>
-                  <a:lnTo>
-                    <a:pt x="3566904" y="2767123"/>
-                  </a:lnTo>
-                  <a:lnTo>
-                    <a:pt x="3644538" y="2760230"/>
-                  </a:lnTo>
-                  <a:lnTo>
-                    <a:pt x="3722172" y="2753283"/>
-                  </a:lnTo>
-                  <a:lnTo>
-                    <a:pt x="3799806" y="2746282"/>
-                  </a:lnTo>
-                  <a:lnTo>
-                    <a:pt x="3877440" y="2739227"/>
-                  </a:lnTo>
-                  <a:lnTo>
-                    <a:pt x="3955074" y="2732116"/>
-                  </a:lnTo>
-                  <a:lnTo>
-                    <a:pt x="4032708" y="2724951"/>
-                  </a:lnTo>
-                  <a:lnTo>
-                    <a:pt x="4110342" y="2717729"/>
-                  </a:lnTo>
-                  <a:lnTo>
-                    <a:pt x="4187976" y="2710452"/>
-                  </a:lnTo>
-                  <a:lnTo>
-                    <a:pt x="4265610" y="2703117"/>
-                  </a:lnTo>
-                  <a:lnTo>
-                    <a:pt x="4343244" y="2695726"/>
-                  </a:lnTo>
-                  <a:lnTo>
-                    <a:pt x="4420879" y="2688277"/>
-                  </a:lnTo>
-                  <a:lnTo>
-                    <a:pt x="4498513" y="2680770"/>
-                  </a:lnTo>
-                  <a:lnTo>
-                    <a:pt x="4576147" y="2673205"/>
-                  </a:lnTo>
-                  <a:lnTo>
-                    <a:pt x="4653781" y="2665580"/>
-                  </a:lnTo>
-                  <a:lnTo>
-                    <a:pt x="4731415" y="2657897"/>
-                  </a:lnTo>
-                  <a:lnTo>
-                    <a:pt x="4809049" y="2650153"/>
-                  </a:lnTo>
-                  <a:lnTo>
-                    <a:pt x="4886683" y="2642350"/>
-                  </a:lnTo>
-                  <a:lnTo>
-                    <a:pt x="4964317" y="2634485"/>
-                  </a:lnTo>
-                  <a:lnTo>
-                    <a:pt x="5041951" y="2626560"/>
-                  </a:lnTo>
-                  <a:lnTo>
-                    <a:pt x="5119585" y="2618572"/>
-                  </a:lnTo>
-                  <a:lnTo>
-                    <a:pt x="5197219" y="2610523"/>
-                  </a:lnTo>
-                  <a:lnTo>
-                    <a:pt x="5274853" y="2602410"/>
-                  </a:lnTo>
-                  <a:lnTo>
-                    <a:pt x="5352487" y="2594235"/>
-                  </a:lnTo>
-                  <a:lnTo>
-                    <a:pt x="5430121" y="2585996"/>
-                  </a:lnTo>
-                  <a:lnTo>
-                    <a:pt x="5507755" y="2577693"/>
-                  </a:lnTo>
-                  <a:lnTo>
-                    <a:pt x="5585389" y="2569325"/>
-                  </a:lnTo>
-                  <a:lnTo>
-                    <a:pt x="5663023" y="2560892"/>
-                  </a:lnTo>
-                  <a:lnTo>
-                    <a:pt x="5740657" y="2552394"/>
-                  </a:lnTo>
-                  <a:lnTo>
-                    <a:pt x="5818291" y="2543829"/>
-                  </a:lnTo>
-                  <a:lnTo>
-                    <a:pt x="5895925" y="2535198"/>
-                  </a:lnTo>
-                  <a:lnTo>
-                    <a:pt x="5973559" y="2526499"/>
-                  </a:lnTo>
-                  <a:lnTo>
-                    <a:pt x="6051193" y="2517733"/>
-                  </a:lnTo>
-                  <a:lnTo>
-                    <a:pt x="6128827" y="2508899"/>
-                  </a:lnTo>
-                  <a:lnTo>
-                    <a:pt x="6206462" y="2499995"/>
-                  </a:lnTo>
-                  <a:lnTo>
-                    <a:pt x="6284096" y="2491023"/>
-                  </a:lnTo>
-                  <a:lnTo>
-                    <a:pt x="6361730" y="2481980"/>
-                  </a:lnTo>
-                  <a:lnTo>
-                    <a:pt x="6439364" y="2472868"/>
-                  </a:lnTo>
-                  <a:lnTo>
-                    <a:pt x="6516998" y="2463684"/>
-                  </a:lnTo>
-                  <a:lnTo>
-                    <a:pt x="6594632" y="2454429"/>
-                  </a:lnTo>
-                  <a:lnTo>
-                    <a:pt x="6672266" y="2445101"/>
-                  </a:lnTo>
-                  <a:lnTo>
-                    <a:pt x="6749900" y="2435701"/>
-                  </a:lnTo>
-                  <a:lnTo>
-                    <a:pt x="6827534" y="2426228"/>
-                  </a:lnTo>
-                  <a:lnTo>
-                    <a:pt x="6905168" y="2416682"/>
-                  </a:lnTo>
-                  <a:lnTo>
-                    <a:pt x="6982802" y="2407060"/>
-                  </a:lnTo>
-                  <a:lnTo>
-                    <a:pt x="7060436" y="2397364"/>
-                  </a:lnTo>
-                  <a:lnTo>
-                    <a:pt x="7138070" y="2387593"/>
-                  </a:lnTo>
-                  <a:lnTo>
-                    <a:pt x="7215704" y="2377745"/>
-                  </a:lnTo>
-                  <a:lnTo>
-                    <a:pt x="7293338" y="2367821"/>
-                  </a:lnTo>
-                  <a:lnTo>
-                    <a:pt x="7370972" y="2357820"/>
-                  </a:lnTo>
-                  <a:lnTo>
-                    <a:pt x="7370972" y="3627349"/>
-                  </a:lnTo>
-                  <a:lnTo>
-                    <a:pt x="7293338" y="3625545"/>
-                  </a:lnTo>
-                  <a:lnTo>
-                    <a:pt x="7215704" y="3623611"/>
-                  </a:lnTo>
-                  <a:lnTo>
-                    <a:pt x="7138070" y="3621540"/>
-                  </a:lnTo>
-                  <a:lnTo>
-                    <a:pt x="7060436" y="3619320"/>
-                  </a:lnTo>
-                  <a:lnTo>
-                    <a:pt x="6982802" y="3616943"/>
-                  </a:lnTo>
-                  <a:lnTo>
-                    <a:pt x="6905168" y="3614396"/>
-                  </a:lnTo>
-                  <a:lnTo>
-                    <a:pt x="6827534" y="3611667"/>
-                  </a:lnTo>
-                  <a:lnTo>
-                    <a:pt x="6749900" y="3608743"/>
-                  </a:lnTo>
-                  <a:lnTo>
-                    <a:pt x="6672266" y="3605611"/>
-                  </a:lnTo>
-                  <a:lnTo>
-                    <a:pt x="6594632" y="3602255"/>
-                  </a:lnTo>
-                  <a:lnTo>
-                    <a:pt x="6516998" y="3598659"/>
-                  </a:lnTo>
-                  <a:lnTo>
-                    <a:pt x="6439364" y="3594808"/>
-                  </a:lnTo>
-                  <a:lnTo>
-                    <a:pt x="6361730" y="3590681"/>
-                  </a:lnTo>
-                  <a:lnTo>
-                    <a:pt x="6284096" y="3586260"/>
-                  </a:lnTo>
-                  <a:lnTo>
-                    <a:pt x="6206462" y="3581523"/>
-                  </a:lnTo>
-                  <a:lnTo>
-                    <a:pt x="6128827" y="3576449"/>
-                  </a:lnTo>
-                  <a:lnTo>
-                    <a:pt x="6051193" y="3571012"/>
-                  </a:lnTo>
-                  <a:lnTo>
-                    <a:pt x="5973559" y="3565188"/>
-                  </a:lnTo>
-                  <a:lnTo>
-                    <a:pt x="5895925" y="3558948"/>
-                  </a:lnTo>
-                  <a:lnTo>
-                    <a:pt x="5818291" y="3552263"/>
-                  </a:lnTo>
-                  <a:lnTo>
-                    <a:pt x="5740657" y="3545100"/>
-                  </a:lnTo>
-                  <a:lnTo>
-                    <a:pt x="5663023" y="3537427"/>
-                  </a:lnTo>
-                  <a:lnTo>
-                    <a:pt x="5585389" y="3529206"/>
-                  </a:lnTo>
-                  <a:lnTo>
-                    <a:pt x="5507755" y="3520399"/>
-                  </a:lnTo>
-                  <a:lnTo>
-                    <a:pt x="5430121" y="3510963"/>
-                  </a:lnTo>
-                  <a:lnTo>
-                    <a:pt x="5352487" y="3500854"/>
-                  </a:lnTo>
-                  <a:lnTo>
-                    <a:pt x="5274853" y="3490024"/>
-                  </a:lnTo>
-                  <a:lnTo>
-                    <a:pt x="5197219" y="3478421"/>
-                  </a:lnTo>
-                  <a:lnTo>
-                    <a:pt x="5119585" y="3465990"/>
-                  </a:lnTo>
-                  <a:lnTo>
-                    <a:pt x="5041951" y="3452672"/>
-                  </a:lnTo>
-                  <a:lnTo>
-                    <a:pt x="4964317" y="3438404"/>
-                  </a:lnTo>
-                  <a:lnTo>
-                    <a:pt x="4886683" y="3423118"/>
-                  </a:lnTo>
-                  <a:lnTo>
-                    <a:pt x="4809049" y="3406741"/>
-                  </a:lnTo>
-                  <a:lnTo>
-                    <a:pt x="4731415" y="3389196"/>
-                  </a:lnTo>
-                  <a:lnTo>
-                    <a:pt x="4653781" y="3370399"/>
-                  </a:lnTo>
-                  <a:lnTo>
-                    <a:pt x="4576147" y="3350260"/>
-                  </a:lnTo>
-                  <a:lnTo>
-                    <a:pt x="4498513" y="3328685"/>
-                  </a:lnTo>
-                  <a:lnTo>
-                    <a:pt x="4420879" y="3305570"/>
-                  </a:lnTo>
-                  <a:lnTo>
-                    <a:pt x="4343244" y="3280806"/>
-                  </a:lnTo>
-                  <a:lnTo>
-                    <a:pt x="4265610" y="3254275"/>
-                  </a:lnTo>
-                  <a:lnTo>
-                    <a:pt x="4187976" y="3225851"/>
-                  </a:lnTo>
-                  <a:lnTo>
-                    <a:pt x="4110342" y="3195399"/>
-                  </a:lnTo>
-                  <a:lnTo>
-                    <a:pt x="4032708" y="3162774"/>
-                  </a:lnTo>
-                  <a:lnTo>
-                    <a:pt x="3955074" y="3127822"/>
-                  </a:lnTo>
-                  <a:lnTo>
-                    <a:pt x="3877440" y="3090375"/>
-                  </a:lnTo>
-                  <a:lnTo>
-                    <a:pt x="3799806" y="3050257"/>
-                  </a:lnTo>
-                  <a:lnTo>
-                    <a:pt x="3722172" y="3007276"/>
-                  </a:lnTo>
-                  <a:lnTo>
-                    <a:pt x="3644538" y="2961229"/>
-                  </a:lnTo>
-                  <a:lnTo>
-                    <a:pt x="3566904" y="2911896"/>
-                  </a:lnTo>
-                  <a:lnTo>
-                    <a:pt x="3489270" y="2859043"/>
-                  </a:lnTo>
-                  <a:lnTo>
-                    <a:pt x="3411636" y="2802418"/>
-                  </a:lnTo>
-                  <a:lnTo>
-                    <a:pt x="3334002" y="2787485"/>
-                  </a:lnTo>
-                  <a:lnTo>
-                    <a:pt x="3256368" y="2794167"/>
-                  </a:lnTo>
-                  <a:lnTo>
-                    <a:pt x="3178734" y="2800798"/>
-                  </a:lnTo>
-                  <a:lnTo>
-                    <a:pt x="3101100" y="2807378"/>
-                  </a:lnTo>
-                  <a:lnTo>
-                    <a:pt x="3023466" y="2813907"/>
-                  </a:lnTo>
-                  <a:lnTo>
-                    <a:pt x="2945832" y="2820386"/>
-                  </a:lnTo>
-                  <a:lnTo>
-                    <a:pt x="2868198" y="2826814"/>
-                  </a:lnTo>
-                  <a:lnTo>
-                    <a:pt x="2790564" y="2833193"/>
-                  </a:lnTo>
-                  <a:lnTo>
-                    <a:pt x="2712930" y="2839523"/>
-                  </a:lnTo>
-                  <a:lnTo>
-                    <a:pt x="2635295" y="2845803"/>
-                  </a:lnTo>
-                  <a:lnTo>
-                    <a:pt x="2557661" y="2852035"/>
-                  </a:lnTo>
-                  <a:lnTo>
-                    <a:pt x="2480027" y="2858220"/>
-                  </a:lnTo>
-                  <a:lnTo>
-                    <a:pt x="2402393" y="2864356"/>
-                  </a:lnTo>
-                  <a:lnTo>
-                    <a:pt x="2324759" y="2870445"/>
-                  </a:lnTo>
-                  <a:lnTo>
-                    <a:pt x="2247125" y="2876487"/>
-                  </a:lnTo>
-                  <a:lnTo>
-                    <a:pt x="2169491" y="2882482"/>
-                  </a:lnTo>
-                  <a:lnTo>
-                    <a:pt x="2091857" y="2888431"/>
-                  </a:lnTo>
-                  <a:lnTo>
-                    <a:pt x="2014223" y="2894333"/>
-                  </a:lnTo>
-                  <a:lnTo>
-                    <a:pt x="1936589" y="2900191"/>
-                  </a:lnTo>
-                  <a:lnTo>
-                    <a:pt x="1858955" y="2906003"/>
-                  </a:lnTo>
-                  <a:lnTo>
-                    <a:pt x="1781321" y="2911770"/>
-                  </a:lnTo>
-                  <a:lnTo>
-                    <a:pt x="1703687" y="2917493"/>
-                  </a:lnTo>
-                  <a:lnTo>
-                    <a:pt x="1626053" y="2923171"/>
-                  </a:lnTo>
-                  <a:lnTo>
-                    <a:pt x="1548419" y="2928806"/>
-                  </a:lnTo>
-                  <a:lnTo>
-                    <a:pt x="1470785" y="2934397"/>
-                  </a:lnTo>
-                  <a:lnTo>
-                    <a:pt x="1393151" y="2939945"/>
-                  </a:lnTo>
-                  <a:lnTo>
-                    <a:pt x="1315517" y="2945450"/>
-                  </a:lnTo>
-                  <a:lnTo>
-                    <a:pt x="1237883" y="2950912"/>
-                  </a:lnTo>
-                  <a:lnTo>
-                    <a:pt x="1160249" y="2956332"/>
-                  </a:lnTo>
-                  <a:lnTo>
-                    <a:pt x="1082615" y="2961711"/>
-                  </a:lnTo>
-                  <a:lnTo>
-                    <a:pt x="1004981" y="2967048"/>
-                  </a:lnTo>
-                  <a:lnTo>
-                    <a:pt x="927346" y="2972343"/>
-                  </a:lnTo>
-                  <a:lnTo>
-                    <a:pt x="849712" y="2977598"/>
-                  </a:lnTo>
-                  <a:lnTo>
-                    <a:pt x="772078" y="2982812"/>
-                  </a:lnTo>
-                  <a:lnTo>
-                    <a:pt x="694444" y="2987986"/>
-                  </a:lnTo>
-                  <a:lnTo>
-                    <a:pt x="616810" y="2993120"/>
-                  </a:lnTo>
-                  <a:lnTo>
-                    <a:pt x="539176" y="2998215"/>
-                  </a:lnTo>
-                  <a:lnTo>
-                    <a:pt x="461542" y="3003269"/>
-                  </a:lnTo>
-                  <a:lnTo>
-                    <a:pt x="383908" y="3008285"/>
-                  </a:lnTo>
-                  <a:lnTo>
-                    <a:pt x="306274" y="3013262"/>
-                  </a:lnTo>
-                  <a:lnTo>
-                    <a:pt x="228640" y="3018201"/>
-                  </a:lnTo>
-                  <a:lnTo>
-                    <a:pt x="151006" y="3023102"/>
-                  </a:lnTo>
-                  <a:lnTo>
-                    <a:pt x="73372" y="3027964"/>
-                  </a:lnTo>
-                  <a:lnTo>
-                    <a:pt x="0" y="3032525"/>
+                    <a:pt x="1548419" y="84468"/>
+                  </a:lnTo>
+                  <a:lnTo>
+                    <a:pt x="1626053" y="291039"/>
+                  </a:lnTo>
+                  <a:lnTo>
+                    <a:pt x="1703687" y="485651"/>
+                  </a:lnTo>
+                  <a:lnTo>
+                    <a:pt x="1781321" y="668996"/>
+                  </a:lnTo>
+                  <a:lnTo>
+                    <a:pt x="1858955" y="841726"/>
+                  </a:lnTo>
+                  <a:lnTo>
+                    <a:pt x="1936589" y="1004457"/>
+                  </a:lnTo>
+                  <a:lnTo>
+                    <a:pt x="2014223" y="1157768"/>
+                  </a:lnTo>
+                  <a:lnTo>
+                    <a:pt x="2091857" y="1302202"/>
+                  </a:lnTo>
+                  <a:lnTo>
+                    <a:pt x="2169491" y="1438275"/>
+                  </a:lnTo>
+                  <a:lnTo>
+                    <a:pt x="2247125" y="1566470"/>
+                  </a:lnTo>
+                  <a:lnTo>
+                    <a:pt x="2324759" y="1687244"/>
+                  </a:lnTo>
+                  <a:lnTo>
+                    <a:pt x="2402393" y="1801026"/>
+                  </a:lnTo>
+                  <a:lnTo>
+                    <a:pt x="2480027" y="1908221"/>
+                  </a:lnTo>
+                  <a:lnTo>
+                    <a:pt x="2557661" y="2009210"/>
+                  </a:lnTo>
+                  <a:lnTo>
+                    <a:pt x="2635295" y="2104352"/>
+                  </a:lnTo>
+                  <a:lnTo>
+                    <a:pt x="2712930" y="2193987"/>
+                  </a:lnTo>
+                  <a:lnTo>
+                    <a:pt x="2790564" y="2278432"/>
+                  </a:lnTo>
+                  <a:lnTo>
+                    <a:pt x="2868198" y="2357988"/>
+                  </a:lnTo>
+                  <a:lnTo>
+                    <a:pt x="2945832" y="2432939"/>
+                  </a:lnTo>
+                  <a:lnTo>
+                    <a:pt x="3023466" y="2503551"/>
+                  </a:lnTo>
+                  <a:lnTo>
+                    <a:pt x="3101100" y="2570075"/>
+                  </a:lnTo>
+                  <a:lnTo>
+                    <a:pt x="3178734" y="2632747"/>
+                  </a:lnTo>
+                  <a:lnTo>
+                    <a:pt x="3256368" y="2691792"/>
+                  </a:lnTo>
+                  <a:lnTo>
+                    <a:pt x="3334002" y="2747418"/>
+                  </a:lnTo>
+                  <a:lnTo>
+                    <a:pt x="3411636" y="2783481"/>
+                  </a:lnTo>
+                  <a:lnTo>
+                    <a:pt x="3489270" y="2785049"/>
+                  </a:lnTo>
+                  <a:lnTo>
+                    <a:pt x="3566904" y="2786614"/>
+                  </a:lnTo>
+                  <a:lnTo>
+                    <a:pt x="3644538" y="2788176"/>
+                  </a:lnTo>
+                  <a:lnTo>
+                    <a:pt x="3722172" y="2789736"/>
+                  </a:lnTo>
+                  <a:lnTo>
+                    <a:pt x="3799806" y="2791292"/>
+                  </a:lnTo>
+                  <a:lnTo>
+                    <a:pt x="3877440" y="2792846"/>
+                  </a:lnTo>
+                  <a:lnTo>
+                    <a:pt x="3955074" y="2794397"/>
+                  </a:lnTo>
+                  <a:lnTo>
+                    <a:pt x="4032708" y="2795945"/>
+                  </a:lnTo>
+                  <a:lnTo>
+                    <a:pt x="4110342" y="2797491"/>
+                  </a:lnTo>
+                  <a:lnTo>
+                    <a:pt x="4187976" y="2799033"/>
+                  </a:lnTo>
+                  <a:lnTo>
+                    <a:pt x="4265610" y="2800573"/>
+                  </a:lnTo>
+                  <a:lnTo>
+                    <a:pt x="4343244" y="2802110"/>
+                  </a:lnTo>
+                  <a:lnTo>
+                    <a:pt x="4420879" y="2803644"/>
+                  </a:lnTo>
+                  <a:lnTo>
+                    <a:pt x="4498513" y="2805176"/>
+                  </a:lnTo>
+                  <a:lnTo>
+                    <a:pt x="4576147" y="2806704"/>
+                  </a:lnTo>
+                  <a:lnTo>
+                    <a:pt x="4653781" y="2808230"/>
+                  </a:lnTo>
+                  <a:lnTo>
+                    <a:pt x="4731415" y="2809753"/>
+                  </a:lnTo>
+                  <a:lnTo>
+                    <a:pt x="4809049" y="2811274"/>
+                  </a:lnTo>
+                  <a:lnTo>
+                    <a:pt x="4886683" y="2812792"/>
+                  </a:lnTo>
+                  <a:lnTo>
+                    <a:pt x="4964317" y="2814306"/>
+                  </a:lnTo>
+                  <a:lnTo>
+                    <a:pt x="5041951" y="2815819"/>
+                  </a:lnTo>
+                  <a:lnTo>
+                    <a:pt x="5119585" y="2817328"/>
+                  </a:lnTo>
+                  <a:lnTo>
+                    <a:pt x="5197219" y="2818835"/>
+                  </a:lnTo>
+                  <a:lnTo>
+                    <a:pt x="5274853" y="2820339"/>
+                  </a:lnTo>
+                  <a:lnTo>
+                    <a:pt x="5352487" y="2821840"/>
+                  </a:lnTo>
+                  <a:lnTo>
+                    <a:pt x="5430121" y="2823339"/>
+                  </a:lnTo>
+                  <a:lnTo>
+                    <a:pt x="5507755" y="2824835"/>
+                  </a:lnTo>
+                  <a:lnTo>
+                    <a:pt x="5585389" y="2826328"/>
+                  </a:lnTo>
+                  <a:lnTo>
+                    <a:pt x="5663023" y="2827819"/>
+                  </a:lnTo>
+                  <a:lnTo>
+                    <a:pt x="5740657" y="2829307"/>
+                  </a:lnTo>
+                  <a:lnTo>
+                    <a:pt x="5818291" y="2830792"/>
+                  </a:lnTo>
+                  <a:lnTo>
+                    <a:pt x="5895925" y="2832274"/>
+                  </a:lnTo>
+                  <a:lnTo>
+                    <a:pt x="5973559" y="2833754"/>
+                  </a:lnTo>
+                  <a:lnTo>
+                    <a:pt x="6051193" y="2835231"/>
+                  </a:lnTo>
+                  <a:lnTo>
+                    <a:pt x="6128827" y="2836706"/>
+                  </a:lnTo>
+                  <a:lnTo>
+                    <a:pt x="6206462" y="2838178"/>
+                  </a:lnTo>
+                  <a:lnTo>
+                    <a:pt x="6284096" y="2839647"/>
+                  </a:lnTo>
+                  <a:lnTo>
+                    <a:pt x="6361730" y="2841113"/>
+                  </a:lnTo>
+                  <a:lnTo>
+                    <a:pt x="6439364" y="2842577"/>
+                  </a:lnTo>
+                  <a:lnTo>
+                    <a:pt x="6516998" y="2844038"/>
+                  </a:lnTo>
+                  <a:lnTo>
+                    <a:pt x="6594632" y="2845497"/>
+                  </a:lnTo>
+                  <a:lnTo>
+                    <a:pt x="6672266" y="2846953"/>
+                  </a:lnTo>
+                  <a:lnTo>
+                    <a:pt x="6749900" y="2848406"/>
+                  </a:lnTo>
+                  <a:lnTo>
+                    <a:pt x="6827534" y="2849857"/>
+                  </a:lnTo>
+                  <a:lnTo>
+                    <a:pt x="6905168" y="2851305"/>
+                  </a:lnTo>
+                  <a:lnTo>
+                    <a:pt x="6982802" y="2852750"/>
+                  </a:lnTo>
+                  <a:lnTo>
+                    <a:pt x="7060436" y="2854193"/>
+                  </a:lnTo>
+                  <a:lnTo>
+                    <a:pt x="7138070" y="2855634"/>
+                  </a:lnTo>
+                  <a:lnTo>
+                    <a:pt x="7215704" y="2857071"/>
+                  </a:lnTo>
+                  <a:lnTo>
+                    <a:pt x="7293338" y="2858506"/>
+                  </a:lnTo>
+                  <a:lnTo>
+                    <a:pt x="7370972" y="2859939"/>
+                  </a:lnTo>
+                  <a:lnTo>
+                    <a:pt x="7370972" y="3611907"/>
+                  </a:lnTo>
+                  <a:lnTo>
+                    <a:pt x="7293338" y="3609404"/>
+                  </a:lnTo>
+                  <a:lnTo>
+                    <a:pt x="7215704" y="3606747"/>
+                  </a:lnTo>
+                  <a:lnTo>
+                    <a:pt x="7138070" y="3603926"/>
+                  </a:lnTo>
+                  <a:lnTo>
+                    <a:pt x="7060436" y="3600933"/>
+                  </a:lnTo>
+                  <a:lnTo>
+                    <a:pt x="6982802" y="3597755"/>
+                  </a:lnTo>
+                  <a:lnTo>
+                    <a:pt x="6905168" y="3594382"/>
+                  </a:lnTo>
+                  <a:lnTo>
+                    <a:pt x="6827534" y="3590802"/>
+                  </a:lnTo>
+                  <a:lnTo>
+                    <a:pt x="6749900" y="3587002"/>
+                  </a:lnTo>
+                  <a:lnTo>
+                    <a:pt x="6672266" y="3582968"/>
+                  </a:lnTo>
+                  <a:lnTo>
+                    <a:pt x="6594632" y="3578687"/>
+                  </a:lnTo>
+                  <a:lnTo>
+                    <a:pt x="6516998" y="3574142"/>
+                  </a:lnTo>
+                  <a:lnTo>
+                    <a:pt x="6439364" y="3569318"/>
+                  </a:lnTo>
+                  <a:lnTo>
+                    <a:pt x="6361730" y="3564198"/>
+                  </a:lnTo>
+                  <a:lnTo>
+                    <a:pt x="6284096" y="3558763"/>
+                  </a:lnTo>
+                  <a:lnTo>
+                    <a:pt x="6206462" y="3552994"/>
+                  </a:lnTo>
+                  <a:lnTo>
+                    <a:pt x="6128827" y="3546871"/>
+                  </a:lnTo>
+                  <a:lnTo>
+                    <a:pt x="6051193" y="3540371"/>
+                  </a:lnTo>
+                  <a:lnTo>
+                    <a:pt x="5973559" y="3533472"/>
+                  </a:lnTo>
+                  <a:lnTo>
+                    <a:pt x="5895925" y="3526149"/>
+                  </a:lnTo>
+                  <a:lnTo>
+                    <a:pt x="5818291" y="3518376"/>
+                  </a:lnTo>
+                  <a:lnTo>
+                    <a:pt x="5740657" y="3510125"/>
+                  </a:lnTo>
+                  <a:lnTo>
+                    <a:pt x="5663023" y="3501367"/>
+                  </a:lnTo>
+                  <a:lnTo>
+                    <a:pt x="5585389" y="3492071"/>
+                  </a:lnTo>
+                  <a:lnTo>
+                    <a:pt x="5507755" y="3482204"/>
+                  </a:lnTo>
+                  <a:lnTo>
+                    <a:pt x="5430121" y="3471730"/>
+                  </a:lnTo>
+                  <a:lnTo>
+                    <a:pt x="5352487" y="3460613"/>
+                  </a:lnTo>
+                  <a:lnTo>
+                    <a:pt x="5274853" y="3448813"/>
+                  </a:lnTo>
+                  <a:lnTo>
+                    <a:pt x="5197219" y="3436288"/>
+                  </a:lnTo>
+                  <a:lnTo>
+                    <a:pt x="5119585" y="3422993"/>
+                  </a:lnTo>
+                  <a:lnTo>
+                    <a:pt x="5041951" y="3408881"/>
+                  </a:lnTo>
+                  <a:lnTo>
+                    <a:pt x="4964317" y="3393902"/>
+                  </a:lnTo>
+                  <a:lnTo>
+                    <a:pt x="4886683" y="3378002"/>
+                  </a:lnTo>
+                  <a:lnTo>
+                    <a:pt x="4809049" y="3361125"/>
+                  </a:lnTo>
+                  <a:lnTo>
+                    <a:pt x="4731415" y="3343211"/>
+                  </a:lnTo>
+                  <a:lnTo>
+                    <a:pt x="4653781" y="3324197"/>
+                  </a:lnTo>
+                  <a:lnTo>
+                    <a:pt x="4576147" y="3304014"/>
+                  </a:lnTo>
+                  <a:lnTo>
+                    <a:pt x="4498513" y="3282590"/>
+                  </a:lnTo>
+                  <a:lnTo>
+                    <a:pt x="4420879" y="3259851"/>
+                  </a:lnTo>
+                  <a:lnTo>
+                    <a:pt x="4343244" y="3235714"/>
+                  </a:lnTo>
+                  <a:lnTo>
+                    <a:pt x="4265610" y="3210093"/>
+                  </a:lnTo>
+                  <a:lnTo>
+                    <a:pt x="4187976" y="3182899"/>
+                  </a:lnTo>
+                  <a:lnTo>
+                    <a:pt x="4110342" y="3154033"/>
+                  </a:lnTo>
+                  <a:lnTo>
+                    <a:pt x="4032708" y="3123393"/>
+                  </a:lnTo>
+                  <a:lnTo>
+                    <a:pt x="3955074" y="3090871"/>
+                  </a:lnTo>
+                  <a:lnTo>
+                    <a:pt x="3877440" y="3056350"/>
+                  </a:lnTo>
+                  <a:lnTo>
+                    <a:pt x="3799806" y="3019708"/>
+                  </a:lnTo>
+                  <a:lnTo>
+                    <a:pt x="3722172" y="2980814"/>
+                  </a:lnTo>
+                  <a:lnTo>
+                    <a:pt x="3644538" y="2939530"/>
+                  </a:lnTo>
+                  <a:lnTo>
+                    <a:pt x="3566904" y="2895709"/>
+                  </a:lnTo>
+                  <a:lnTo>
+                    <a:pt x="3489270" y="2849195"/>
+                  </a:lnTo>
+                  <a:lnTo>
+                    <a:pt x="3411636" y="2799824"/>
+                  </a:lnTo>
+                  <a:lnTo>
+                    <a:pt x="3334002" y="2781911"/>
+                  </a:lnTo>
+                  <a:lnTo>
+                    <a:pt x="3256368" y="2780337"/>
+                  </a:lnTo>
+                  <a:lnTo>
+                    <a:pt x="3178734" y="2778761"/>
+                  </a:lnTo>
+                  <a:lnTo>
+                    <a:pt x="3101100" y="2777182"/>
+                  </a:lnTo>
+                  <a:lnTo>
+                    <a:pt x="3023466" y="2775600"/>
+                  </a:lnTo>
+                  <a:lnTo>
+                    <a:pt x="2945832" y="2774015"/>
+                  </a:lnTo>
+                  <a:lnTo>
+                    <a:pt x="2868198" y="2772427"/>
+                  </a:lnTo>
+                  <a:lnTo>
+                    <a:pt x="2790564" y="2770836"/>
+                  </a:lnTo>
+                  <a:lnTo>
+                    <a:pt x="2712930" y="2769243"/>
+                  </a:lnTo>
+                  <a:lnTo>
+                    <a:pt x="2635295" y="2767646"/>
+                  </a:lnTo>
+                  <a:lnTo>
+                    <a:pt x="2557661" y="2766047"/>
+                  </a:lnTo>
+                  <a:lnTo>
+                    <a:pt x="2480027" y="2764445"/>
+                  </a:lnTo>
+                  <a:lnTo>
+                    <a:pt x="2402393" y="2762840"/>
+                  </a:lnTo>
+                  <a:lnTo>
+                    <a:pt x="2324759" y="2761232"/>
+                  </a:lnTo>
+                  <a:lnTo>
+                    <a:pt x="2247125" y="2759621"/>
+                  </a:lnTo>
+                  <a:lnTo>
+                    <a:pt x="2169491" y="2758007"/>
+                  </a:lnTo>
+                  <a:lnTo>
+                    <a:pt x="2091857" y="2756391"/>
+                  </a:lnTo>
+                  <a:lnTo>
+                    <a:pt x="2014223" y="2754771"/>
+                  </a:lnTo>
+                  <a:lnTo>
+                    <a:pt x="1936589" y="2753148"/>
+                  </a:lnTo>
+                  <a:lnTo>
+                    <a:pt x="1858955" y="2751523"/>
+                  </a:lnTo>
+                  <a:lnTo>
+                    <a:pt x="1781321" y="2749895"/>
+                  </a:lnTo>
+                  <a:lnTo>
+                    <a:pt x="1703687" y="2748263"/>
+                  </a:lnTo>
+                  <a:lnTo>
+                    <a:pt x="1626053" y="2746629"/>
+                  </a:lnTo>
+                  <a:lnTo>
+                    <a:pt x="1548419" y="2744992"/>
+                  </a:lnTo>
+                  <a:lnTo>
+                    <a:pt x="1470785" y="2743351"/>
+                  </a:lnTo>
+                  <a:lnTo>
+                    <a:pt x="1393151" y="2741708"/>
+                  </a:lnTo>
+                  <a:lnTo>
+                    <a:pt x="1315517" y="2740062"/>
+                  </a:lnTo>
+                  <a:lnTo>
+                    <a:pt x="1237883" y="2738413"/>
+                  </a:lnTo>
+                  <a:lnTo>
+                    <a:pt x="1160249" y="2736761"/>
+                  </a:lnTo>
+                  <a:lnTo>
+                    <a:pt x="1082615" y="2735106"/>
+                  </a:lnTo>
+                  <a:lnTo>
+                    <a:pt x="1004981" y="2733448"/>
+                  </a:lnTo>
+                  <a:lnTo>
+                    <a:pt x="927346" y="2731787"/>
+                  </a:lnTo>
+                  <a:lnTo>
+                    <a:pt x="849712" y="2730122"/>
+                  </a:lnTo>
+                  <a:lnTo>
+                    <a:pt x="772078" y="2728455"/>
+                  </a:lnTo>
+                  <a:lnTo>
+                    <a:pt x="694444" y="2726785"/>
+                  </a:lnTo>
+                  <a:lnTo>
+                    <a:pt x="616810" y="2725112"/>
+                  </a:lnTo>
+                  <a:lnTo>
+                    <a:pt x="539176" y="2723436"/>
+                  </a:lnTo>
+                  <a:lnTo>
+                    <a:pt x="461542" y="2721757"/>
+                  </a:lnTo>
+                  <a:lnTo>
+                    <a:pt x="383908" y="2720075"/>
+                  </a:lnTo>
+                  <a:lnTo>
+                    <a:pt x="306274" y="2718389"/>
+                  </a:lnTo>
+                  <a:lnTo>
+                    <a:pt x="228640" y="2716701"/>
+                  </a:lnTo>
+                  <a:lnTo>
+                    <a:pt x="151006" y="2715010"/>
+                  </a:lnTo>
+                  <a:lnTo>
+                    <a:pt x="73372" y="2713315"/>
+                  </a:lnTo>
+                  <a:lnTo>
+                    <a:pt x="0" y="2711711"/>
                   </a:lnTo>
                   <a:close/>
                 </a:path>
@@ -3543,234 +3552,243 @@
           </p:nvSpPr>
           <p:spPr>
             <a:xfrm>
-              <a:off x="2587489" y="1896563"/>
-              <a:ext cx="5601001" cy="2780750"/>
+              <a:off x="2336029" y="1896563"/>
+              <a:ext cx="5852460" cy="2859939"/>
             </a:xfrm>
             <a:custGeom>
               <a:avLst/>
               <a:pathLst>
-                <a:path w="5601001" h="2780750">
+                <a:path w="5852460" h="2859939">
                   <a:moveTo>
                     <a:pt x="0" y="0"/>
                   </a:moveTo>
                   <a:lnTo>
-                    <a:pt x="11349" y="37708"/>
-                  </a:lnTo>
-                  <a:lnTo>
-                    <a:pt x="88983" y="278459"/>
-                  </a:lnTo>
-                  <a:lnTo>
-                    <a:pt x="166618" y="503177"/>
-                  </a:lnTo>
-                  <a:lnTo>
-                    <a:pt x="244252" y="712928"/>
-                  </a:lnTo>
-                  <a:lnTo>
-                    <a:pt x="321886" y="908710"/>
-                  </a:lnTo>
-                  <a:lnTo>
-                    <a:pt x="399520" y="1091453"/>
-                  </a:lnTo>
-                  <a:lnTo>
-                    <a:pt x="477154" y="1262026"/>
-                  </a:lnTo>
-                  <a:lnTo>
-                    <a:pt x="554788" y="1421239"/>
-                  </a:lnTo>
-                  <a:lnTo>
-                    <a:pt x="632422" y="1569848"/>
-                  </a:lnTo>
-                  <a:lnTo>
-                    <a:pt x="710056" y="1708560"/>
-                  </a:lnTo>
-                  <a:lnTo>
-                    <a:pt x="787690" y="1838034"/>
-                  </a:lnTo>
-                  <a:lnTo>
-                    <a:pt x="865324" y="1958886"/>
-                  </a:lnTo>
-                  <a:lnTo>
-                    <a:pt x="942958" y="2071688"/>
-                  </a:lnTo>
-                  <a:lnTo>
-                    <a:pt x="1020592" y="2176978"/>
-                  </a:lnTo>
-                  <a:lnTo>
-                    <a:pt x="1098226" y="2275256"/>
-                  </a:lnTo>
-                  <a:lnTo>
-                    <a:pt x="1175860" y="2366989"/>
-                  </a:lnTo>
-                  <a:lnTo>
-                    <a:pt x="1253494" y="2452612"/>
-                  </a:lnTo>
-                  <a:lnTo>
-                    <a:pt x="1331128" y="2532533"/>
-                  </a:lnTo>
-                  <a:lnTo>
-                    <a:pt x="1408762" y="2607131"/>
-                  </a:lnTo>
-                  <a:lnTo>
-                    <a:pt x="1486396" y="2676761"/>
-                  </a:lnTo>
-                  <a:lnTo>
-                    <a:pt x="1564030" y="2741754"/>
-                  </a:lnTo>
-                  <a:lnTo>
-                    <a:pt x="1641664" y="2780750"/>
-                  </a:lnTo>
-                  <a:lnTo>
-                    <a:pt x="1719298" y="2773963"/>
-                  </a:lnTo>
-                  <a:lnTo>
-                    <a:pt x="1796932" y="2767123"/>
-                  </a:lnTo>
-                  <a:lnTo>
-                    <a:pt x="1874567" y="2760230"/>
-                  </a:lnTo>
-                  <a:lnTo>
-                    <a:pt x="1952201" y="2753283"/>
-                  </a:lnTo>
-                  <a:lnTo>
-                    <a:pt x="2029835" y="2746282"/>
-                  </a:lnTo>
-                  <a:lnTo>
-                    <a:pt x="2107469" y="2739227"/>
-                  </a:lnTo>
-                  <a:lnTo>
-                    <a:pt x="2185103" y="2732116"/>
-                  </a:lnTo>
-                  <a:lnTo>
-                    <a:pt x="2262737" y="2724951"/>
-                  </a:lnTo>
-                  <a:lnTo>
-                    <a:pt x="2340371" y="2717729"/>
-                  </a:lnTo>
-                  <a:lnTo>
-                    <a:pt x="2418005" y="2710452"/>
-                  </a:lnTo>
-                  <a:lnTo>
-                    <a:pt x="2495639" y="2703117"/>
-                  </a:lnTo>
-                  <a:lnTo>
-                    <a:pt x="2573273" y="2695726"/>
-                  </a:lnTo>
-                  <a:lnTo>
-                    <a:pt x="2650907" y="2688277"/>
-                  </a:lnTo>
-                  <a:lnTo>
-                    <a:pt x="2728541" y="2680770"/>
-                  </a:lnTo>
-                  <a:lnTo>
-                    <a:pt x="2806175" y="2673205"/>
-                  </a:lnTo>
-                  <a:lnTo>
-                    <a:pt x="2883809" y="2665580"/>
-                  </a:lnTo>
-                  <a:lnTo>
-                    <a:pt x="2961443" y="2657897"/>
-                  </a:lnTo>
-                  <a:lnTo>
-                    <a:pt x="3039077" y="2650153"/>
-                  </a:lnTo>
-                  <a:lnTo>
-                    <a:pt x="3116711" y="2642350"/>
-                  </a:lnTo>
-                  <a:lnTo>
-                    <a:pt x="3194345" y="2634485"/>
-                  </a:lnTo>
-                  <a:lnTo>
-                    <a:pt x="3271979" y="2626560"/>
-                  </a:lnTo>
-                  <a:lnTo>
-                    <a:pt x="3349613" y="2618572"/>
-                  </a:lnTo>
-                  <a:lnTo>
-                    <a:pt x="3427247" y="2610523"/>
-                  </a:lnTo>
-                  <a:lnTo>
-                    <a:pt x="3504881" y="2602410"/>
-                  </a:lnTo>
-                  <a:lnTo>
-                    <a:pt x="3582516" y="2594235"/>
-                  </a:lnTo>
-                  <a:lnTo>
-                    <a:pt x="3660150" y="2585996"/>
-                  </a:lnTo>
-                  <a:lnTo>
-                    <a:pt x="3737784" y="2577693"/>
-                  </a:lnTo>
-                  <a:lnTo>
-                    <a:pt x="3815418" y="2569325"/>
-                  </a:lnTo>
-                  <a:lnTo>
-                    <a:pt x="3893052" y="2560892"/>
-                  </a:lnTo>
-                  <a:lnTo>
-                    <a:pt x="3970686" y="2552394"/>
-                  </a:lnTo>
-                  <a:lnTo>
-                    <a:pt x="4048320" y="2543829"/>
-                  </a:lnTo>
-                  <a:lnTo>
-                    <a:pt x="4125954" y="2535198"/>
-                  </a:lnTo>
-                  <a:lnTo>
-                    <a:pt x="4203588" y="2526499"/>
-                  </a:lnTo>
-                  <a:lnTo>
-                    <a:pt x="4281222" y="2517733"/>
-                  </a:lnTo>
-                  <a:lnTo>
-                    <a:pt x="4358856" y="2508899"/>
-                  </a:lnTo>
-                  <a:lnTo>
-                    <a:pt x="4436490" y="2499995"/>
-                  </a:lnTo>
-                  <a:lnTo>
-                    <a:pt x="4514124" y="2491023"/>
-                  </a:lnTo>
-                  <a:lnTo>
-                    <a:pt x="4591758" y="2481980"/>
-                  </a:lnTo>
-                  <a:lnTo>
-                    <a:pt x="4669392" y="2472868"/>
-                  </a:lnTo>
-                  <a:lnTo>
-                    <a:pt x="4747026" y="2463684"/>
-                  </a:lnTo>
-                  <a:lnTo>
-                    <a:pt x="4824660" y="2454429"/>
-                  </a:lnTo>
-                  <a:lnTo>
-                    <a:pt x="4902294" y="2445101"/>
-                  </a:lnTo>
-                  <a:lnTo>
-                    <a:pt x="4979928" y="2435701"/>
-                  </a:lnTo>
-                  <a:lnTo>
-                    <a:pt x="5057562" y="2426228"/>
-                  </a:lnTo>
-                  <a:lnTo>
-                    <a:pt x="5135196" y="2416682"/>
-                  </a:lnTo>
-                  <a:lnTo>
-                    <a:pt x="5212830" y="2407060"/>
-                  </a:lnTo>
-                  <a:lnTo>
-                    <a:pt x="5290464" y="2397364"/>
-                  </a:lnTo>
-                  <a:lnTo>
-                    <a:pt x="5368099" y="2387593"/>
-                  </a:lnTo>
-                  <a:lnTo>
-                    <a:pt x="5445733" y="2377745"/>
-                  </a:lnTo>
-                  <a:lnTo>
-                    <a:pt x="5523367" y="2367821"/>
-                  </a:lnTo>
-                  <a:lnTo>
-                    <a:pt x="5601001" y="2357820"/>
+                    <a:pt x="29907" y="84468"/>
+                  </a:lnTo>
+                  <a:lnTo>
+                    <a:pt x="107541" y="291039"/>
+                  </a:lnTo>
+                  <a:lnTo>
+                    <a:pt x="185175" y="485651"/>
+                  </a:lnTo>
+                  <a:lnTo>
+                    <a:pt x="262809" y="668996"/>
+                  </a:lnTo>
+                  <a:lnTo>
+                    <a:pt x="340443" y="841726"/>
+                  </a:lnTo>
+                  <a:lnTo>
+                    <a:pt x="418077" y="1004457"/>
+                  </a:lnTo>
+                  <a:lnTo>
+                    <a:pt x="495711" y="1157768"/>
+                  </a:lnTo>
+                  <a:lnTo>
+                    <a:pt x="573345" y="1302202"/>
+                  </a:lnTo>
+                  <a:lnTo>
+                    <a:pt x="650979" y="1438275"/>
+                  </a:lnTo>
+                  <a:lnTo>
+                    <a:pt x="728613" y="1566470"/>
+                  </a:lnTo>
+                  <a:lnTo>
+                    <a:pt x="806247" y="1687244"/>
+                  </a:lnTo>
+                  <a:lnTo>
+                    <a:pt x="883882" y="1801026"/>
+                  </a:lnTo>
+                  <a:lnTo>
+                    <a:pt x="961516" y="1908221"/>
+                  </a:lnTo>
+                  <a:lnTo>
+                    <a:pt x="1039150" y="2009210"/>
+                  </a:lnTo>
+                  <a:lnTo>
+                    <a:pt x="1116784" y="2104352"/>
+                  </a:lnTo>
+                  <a:lnTo>
+                    <a:pt x="1194418" y="2193987"/>
+                  </a:lnTo>
+                  <a:lnTo>
+                    <a:pt x="1272052" y="2278432"/>
+                  </a:lnTo>
+                  <a:lnTo>
+                    <a:pt x="1349686" y="2357988"/>
+                  </a:lnTo>
+                  <a:lnTo>
+                    <a:pt x="1427320" y="2432939"/>
+                  </a:lnTo>
+                  <a:lnTo>
+                    <a:pt x="1504954" y="2503551"/>
+                  </a:lnTo>
+                  <a:lnTo>
+                    <a:pt x="1582588" y="2570075"/>
+                  </a:lnTo>
+                  <a:lnTo>
+                    <a:pt x="1660222" y="2632747"/>
+                  </a:lnTo>
+                  <a:lnTo>
+                    <a:pt x="1737856" y="2691792"/>
+                  </a:lnTo>
+                  <a:lnTo>
+                    <a:pt x="1815490" y="2747418"/>
+                  </a:lnTo>
+                  <a:lnTo>
+                    <a:pt x="1893124" y="2783481"/>
+                  </a:lnTo>
+                  <a:lnTo>
+                    <a:pt x="1970758" y="2785049"/>
+                  </a:lnTo>
+                  <a:lnTo>
+                    <a:pt x="2048392" y="2786614"/>
+                  </a:lnTo>
+                  <a:lnTo>
+                    <a:pt x="2126026" y="2788176"/>
+                  </a:lnTo>
+                  <a:lnTo>
+                    <a:pt x="2203660" y="2789736"/>
+                  </a:lnTo>
+                  <a:lnTo>
+                    <a:pt x="2281294" y="2791292"/>
+                  </a:lnTo>
+                  <a:lnTo>
+                    <a:pt x="2358928" y="2792846"/>
+                  </a:lnTo>
+                  <a:lnTo>
+                    <a:pt x="2436562" y="2794397"/>
+                  </a:lnTo>
+                  <a:lnTo>
+                    <a:pt x="2514196" y="2795945"/>
+                  </a:lnTo>
+                  <a:lnTo>
+                    <a:pt x="2591831" y="2797491"/>
+                  </a:lnTo>
+                  <a:lnTo>
+                    <a:pt x="2669465" y="2799033"/>
+                  </a:lnTo>
+                  <a:lnTo>
+                    <a:pt x="2747099" y="2800573"/>
+                  </a:lnTo>
+                  <a:lnTo>
+                    <a:pt x="2824733" y="2802110"/>
+                  </a:lnTo>
+                  <a:lnTo>
+                    <a:pt x="2902367" y="2803644"/>
+                  </a:lnTo>
+                  <a:lnTo>
+                    <a:pt x="2980001" y="2805176"/>
+                  </a:lnTo>
+                  <a:lnTo>
+                    <a:pt x="3057635" y="2806704"/>
+                  </a:lnTo>
+                  <a:lnTo>
+                    <a:pt x="3135269" y="2808230"/>
+                  </a:lnTo>
+                  <a:lnTo>
+                    <a:pt x="3212903" y="2809753"/>
+                  </a:lnTo>
+                  <a:lnTo>
+                    <a:pt x="3290537" y="2811274"/>
+                  </a:lnTo>
+                  <a:lnTo>
+                    <a:pt x="3368171" y="2812792"/>
+                  </a:lnTo>
+                  <a:lnTo>
+                    <a:pt x="3445805" y="2814306"/>
+                  </a:lnTo>
+                  <a:lnTo>
+                    <a:pt x="3523439" y="2815819"/>
+                  </a:lnTo>
+                  <a:lnTo>
+                    <a:pt x="3601073" y="2817328"/>
+                  </a:lnTo>
+                  <a:lnTo>
+                    <a:pt x="3678707" y="2818835"/>
+                  </a:lnTo>
+                  <a:lnTo>
+                    <a:pt x="3756341" y="2820339"/>
+                  </a:lnTo>
+                  <a:lnTo>
+                    <a:pt x="3833975" y="2821840"/>
+                  </a:lnTo>
+                  <a:lnTo>
+                    <a:pt x="3911609" y="2823339"/>
+                  </a:lnTo>
+                  <a:lnTo>
+                    <a:pt x="3989243" y="2824835"/>
+                  </a:lnTo>
+                  <a:lnTo>
+                    <a:pt x="4066877" y="2826328"/>
+                  </a:lnTo>
+                  <a:lnTo>
+                    <a:pt x="4144511" y="2827819"/>
+                  </a:lnTo>
+                  <a:lnTo>
+                    <a:pt x="4222145" y="2829307"/>
+                  </a:lnTo>
+                  <a:lnTo>
+                    <a:pt x="4299780" y="2830792"/>
+                  </a:lnTo>
+                  <a:lnTo>
+                    <a:pt x="4377414" y="2832274"/>
+                  </a:lnTo>
+                  <a:lnTo>
+                    <a:pt x="4455048" y="2833754"/>
+                  </a:lnTo>
+                  <a:lnTo>
+                    <a:pt x="4532682" y="2835231"/>
+                  </a:lnTo>
+                  <a:lnTo>
+                    <a:pt x="4610316" y="2836706"/>
+                  </a:lnTo>
+                  <a:lnTo>
+                    <a:pt x="4687950" y="2838178"/>
+                  </a:lnTo>
+                  <a:lnTo>
+                    <a:pt x="4765584" y="2839647"/>
+                  </a:lnTo>
+                  <a:lnTo>
+                    <a:pt x="4843218" y="2841113"/>
+                  </a:lnTo>
+                  <a:lnTo>
+                    <a:pt x="4920852" y="2842577"/>
+                  </a:lnTo>
+                  <a:lnTo>
+                    <a:pt x="4998486" y="2844038"/>
+                  </a:lnTo>
+                  <a:lnTo>
+                    <a:pt x="5076120" y="2845497"/>
+                  </a:lnTo>
+                  <a:lnTo>
+                    <a:pt x="5153754" y="2846953"/>
+                  </a:lnTo>
+                  <a:lnTo>
+                    <a:pt x="5231388" y="2848406"/>
+                  </a:lnTo>
+                  <a:lnTo>
+                    <a:pt x="5309022" y="2849857"/>
+                  </a:lnTo>
+                  <a:lnTo>
+                    <a:pt x="5386656" y="2851305"/>
+                  </a:lnTo>
+                  <a:lnTo>
+                    <a:pt x="5464290" y="2852750"/>
+                  </a:lnTo>
+                  <a:lnTo>
+                    <a:pt x="5541924" y="2854193"/>
+                  </a:lnTo>
+                  <a:lnTo>
+                    <a:pt x="5619558" y="2855634"/>
+                  </a:lnTo>
+                  <a:lnTo>
+                    <a:pt x="5697192" y="2857071"/>
+                  </a:lnTo>
+                  <a:lnTo>
+                    <a:pt x="5774826" y="2858506"/>
+                  </a:lnTo>
+                  <a:lnTo>
+                    <a:pt x="5852460" y="2859939"/>
                   </a:lnTo>
                 </a:path>
               </a:pathLst>
@@ -3790,300 +3808,300 @@
           </p:nvSpPr>
           <p:spPr>
             <a:xfrm>
-              <a:off x="817517" y="4684048"/>
-              <a:ext cx="7370972" cy="839864"/>
+              <a:off x="817517" y="4608275"/>
+              <a:ext cx="7370972" cy="900195"/>
             </a:xfrm>
             <a:custGeom>
               <a:avLst/>
               <a:pathLst>
-                <a:path w="7370972" h="839864">
+                <a:path w="7370972" h="900195">
                   <a:moveTo>
-                    <a:pt x="7370972" y="839864"/>
+                    <a:pt x="7370972" y="900195"/>
                   </a:moveTo>
                   <a:lnTo>
-                    <a:pt x="7293338" y="838060"/>
-                  </a:lnTo>
-                  <a:lnTo>
-                    <a:pt x="7215704" y="836126"/>
-                  </a:lnTo>
-                  <a:lnTo>
-                    <a:pt x="7138070" y="834055"/>
-                  </a:lnTo>
-                  <a:lnTo>
-                    <a:pt x="7060436" y="831835"/>
-                  </a:lnTo>
-                  <a:lnTo>
-                    <a:pt x="6982802" y="829458"/>
-                  </a:lnTo>
-                  <a:lnTo>
-                    <a:pt x="6905168" y="826910"/>
-                  </a:lnTo>
-                  <a:lnTo>
-                    <a:pt x="6827534" y="824181"/>
-                  </a:lnTo>
-                  <a:lnTo>
-                    <a:pt x="6749900" y="821258"/>
-                  </a:lnTo>
-                  <a:lnTo>
-                    <a:pt x="6672266" y="818125"/>
-                  </a:lnTo>
-                  <a:lnTo>
-                    <a:pt x="6594632" y="814770"/>
-                  </a:lnTo>
-                  <a:lnTo>
-                    <a:pt x="6516998" y="811174"/>
-                  </a:lnTo>
-                  <a:lnTo>
-                    <a:pt x="6439364" y="807322"/>
-                  </a:lnTo>
-                  <a:lnTo>
-                    <a:pt x="6361730" y="803196"/>
-                  </a:lnTo>
-                  <a:lnTo>
-                    <a:pt x="6284096" y="798775"/>
-                  </a:lnTo>
-                  <a:lnTo>
-                    <a:pt x="6206462" y="794038"/>
-                  </a:lnTo>
-                  <a:lnTo>
-                    <a:pt x="6128827" y="788964"/>
-                  </a:lnTo>
-                  <a:lnTo>
-                    <a:pt x="6051193" y="783527"/>
-                  </a:lnTo>
-                  <a:lnTo>
-                    <a:pt x="5973559" y="777703"/>
-                  </a:lnTo>
-                  <a:lnTo>
-                    <a:pt x="5895925" y="771463"/>
-                  </a:lnTo>
-                  <a:lnTo>
-                    <a:pt x="5818291" y="764778"/>
-                  </a:lnTo>
-                  <a:lnTo>
-                    <a:pt x="5740657" y="757615"/>
-                  </a:lnTo>
-                  <a:lnTo>
-                    <a:pt x="5663023" y="749942"/>
-                  </a:lnTo>
-                  <a:lnTo>
-                    <a:pt x="5585389" y="741721"/>
-                  </a:lnTo>
-                  <a:lnTo>
-                    <a:pt x="5507755" y="732914"/>
-                  </a:lnTo>
-                  <a:lnTo>
-                    <a:pt x="5430121" y="723478"/>
-                  </a:lnTo>
-                  <a:lnTo>
-                    <a:pt x="5352487" y="713369"/>
-                  </a:lnTo>
-                  <a:lnTo>
-                    <a:pt x="5274853" y="702539"/>
-                  </a:lnTo>
-                  <a:lnTo>
-                    <a:pt x="5197219" y="690936"/>
-                  </a:lnTo>
-                  <a:lnTo>
-                    <a:pt x="5119585" y="678505"/>
-                  </a:lnTo>
-                  <a:lnTo>
-                    <a:pt x="5041951" y="665187"/>
-                  </a:lnTo>
-                  <a:lnTo>
-                    <a:pt x="4964317" y="650919"/>
-                  </a:lnTo>
-                  <a:lnTo>
-                    <a:pt x="4886683" y="635633"/>
-                  </a:lnTo>
-                  <a:lnTo>
-                    <a:pt x="4809049" y="619256"/>
-                  </a:lnTo>
-                  <a:lnTo>
-                    <a:pt x="4731415" y="601711"/>
-                  </a:lnTo>
-                  <a:lnTo>
-                    <a:pt x="4653781" y="582913"/>
-                  </a:lnTo>
-                  <a:lnTo>
-                    <a:pt x="4576147" y="562775"/>
-                  </a:lnTo>
-                  <a:lnTo>
-                    <a:pt x="4498513" y="541200"/>
-                  </a:lnTo>
-                  <a:lnTo>
-                    <a:pt x="4420879" y="518085"/>
-                  </a:lnTo>
-                  <a:lnTo>
-                    <a:pt x="4343244" y="493321"/>
-                  </a:lnTo>
-                  <a:lnTo>
-                    <a:pt x="4265610" y="466790"/>
-                  </a:lnTo>
-                  <a:lnTo>
-                    <a:pt x="4187976" y="438366"/>
-                  </a:lnTo>
-                  <a:lnTo>
-                    <a:pt x="4110342" y="407914"/>
-                  </a:lnTo>
-                  <a:lnTo>
-                    <a:pt x="4032708" y="375289"/>
-                  </a:lnTo>
-                  <a:lnTo>
-                    <a:pt x="3955074" y="340337"/>
-                  </a:lnTo>
-                  <a:lnTo>
-                    <a:pt x="3877440" y="302890"/>
-                  </a:lnTo>
-                  <a:lnTo>
-                    <a:pt x="3799806" y="262772"/>
-                  </a:lnTo>
-                  <a:lnTo>
-                    <a:pt x="3722172" y="219791"/>
-                  </a:lnTo>
-                  <a:lnTo>
-                    <a:pt x="3644538" y="173744"/>
-                  </a:lnTo>
-                  <a:lnTo>
-                    <a:pt x="3566904" y="124410"/>
-                  </a:lnTo>
-                  <a:lnTo>
-                    <a:pt x="3489270" y="71557"/>
-                  </a:lnTo>
-                  <a:lnTo>
-                    <a:pt x="3411636" y="14933"/>
-                  </a:lnTo>
-                  <a:lnTo>
-                    <a:pt x="3334002" y="0"/>
-                  </a:lnTo>
-                  <a:lnTo>
-                    <a:pt x="3256368" y="6682"/>
-                  </a:lnTo>
-                  <a:lnTo>
-                    <a:pt x="3178734" y="13313"/>
-                  </a:lnTo>
-                  <a:lnTo>
-                    <a:pt x="3101100" y="19893"/>
-                  </a:lnTo>
-                  <a:lnTo>
-                    <a:pt x="3023466" y="26422"/>
-                  </a:lnTo>
-                  <a:lnTo>
-                    <a:pt x="2945832" y="32901"/>
-                  </a:lnTo>
-                  <a:lnTo>
-                    <a:pt x="2868198" y="39329"/>
-                  </a:lnTo>
-                  <a:lnTo>
-                    <a:pt x="2790564" y="45708"/>
-                  </a:lnTo>
-                  <a:lnTo>
-                    <a:pt x="2712930" y="52037"/>
-                  </a:lnTo>
-                  <a:lnTo>
-                    <a:pt x="2635295" y="58318"/>
-                  </a:lnTo>
-                  <a:lnTo>
-                    <a:pt x="2557661" y="64550"/>
-                  </a:lnTo>
-                  <a:lnTo>
-                    <a:pt x="2480027" y="70734"/>
-                  </a:lnTo>
-                  <a:lnTo>
-                    <a:pt x="2402393" y="76871"/>
-                  </a:lnTo>
-                  <a:lnTo>
-                    <a:pt x="2324759" y="82960"/>
-                  </a:lnTo>
-                  <a:lnTo>
-                    <a:pt x="2247125" y="89001"/>
-                  </a:lnTo>
-                  <a:lnTo>
-                    <a:pt x="2169491" y="94997"/>
-                  </a:lnTo>
-                  <a:lnTo>
-                    <a:pt x="2091857" y="100945"/>
-                  </a:lnTo>
-                  <a:lnTo>
-                    <a:pt x="2014223" y="106848"/>
-                  </a:lnTo>
-                  <a:lnTo>
-                    <a:pt x="1936589" y="112706"/>
-                  </a:lnTo>
-                  <a:lnTo>
-                    <a:pt x="1858955" y="118518"/>
-                  </a:lnTo>
-                  <a:lnTo>
-                    <a:pt x="1781321" y="124285"/>
-                  </a:lnTo>
-                  <a:lnTo>
-                    <a:pt x="1703687" y="130008"/>
-                  </a:lnTo>
-                  <a:lnTo>
-                    <a:pt x="1626053" y="135686"/>
-                  </a:lnTo>
-                  <a:lnTo>
-                    <a:pt x="1548419" y="141321"/>
-                  </a:lnTo>
-                  <a:lnTo>
-                    <a:pt x="1470785" y="146912"/>
-                  </a:lnTo>
-                  <a:lnTo>
-                    <a:pt x="1393151" y="152460"/>
-                  </a:lnTo>
-                  <a:lnTo>
-                    <a:pt x="1315517" y="157965"/>
-                  </a:lnTo>
-                  <a:lnTo>
-                    <a:pt x="1237883" y="163427"/>
-                  </a:lnTo>
-                  <a:lnTo>
-                    <a:pt x="1160249" y="168847"/>
-                  </a:lnTo>
-                  <a:lnTo>
-                    <a:pt x="1082615" y="174226"/>
-                  </a:lnTo>
-                  <a:lnTo>
-                    <a:pt x="1004981" y="179563"/>
-                  </a:lnTo>
-                  <a:lnTo>
-                    <a:pt x="927346" y="184858"/>
-                  </a:lnTo>
-                  <a:lnTo>
-                    <a:pt x="849712" y="190113"/>
-                  </a:lnTo>
-                  <a:lnTo>
-                    <a:pt x="772078" y="195327"/>
-                  </a:lnTo>
-                  <a:lnTo>
-                    <a:pt x="694444" y="200501"/>
-                  </a:lnTo>
-                  <a:lnTo>
-                    <a:pt x="616810" y="205635"/>
-                  </a:lnTo>
-                  <a:lnTo>
-                    <a:pt x="539176" y="210729"/>
-                  </a:lnTo>
-                  <a:lnTo>
-                    <a:pt x="461542" y="215784"/>
-                  </a:lnTo>
-                  <a:lnTo>
-                    <a:pt x="383908" y="220800"/>
-                  </a:lnTo>
-                  <a:lnTo>
-                    <a:pt x="306274" y="225777"/>
-                  </a:lnTo>
-                  <a:lnTo>
-                    <a:pt x="228640" y="230716"/>
-                  </a:lnTo>
-                  <a:lnTo>
-                    <a:pt x="151006" y="235617"/>
-                  </a:lnTo>
-                  <a:lnTo>
-                    <a:pt x="73372" y="240479"/>
-                  </a:lnTo>
-                  <a:lnTo>
-                    <a:pt x="0" y="245040"/>
+                    <a:pt x="7293338" y="897692"/>
+                  </a:lnTo>
+                  <a:lnTo>
+                    <a:pt x="7215704" y="895035"/>
+                  </a:lnTo>
+                  <a:lnTo>
+                    <a:pt x="7138070" y="892215"/>
+                  </a:lnTo>
+                  <a:lnTo>
+                    <a:pt x="7060436" y="889221"/>
+                  </a:lnTo>
+                  <a:lnTo>
+                    <a:pt x="6982802" y="886044"/>
+                  </a:lnTo>
+                  <a:lnTo>
+                    <a:pt x="6905168" y="882671"/>
+                  </a:lnTo>
+                  <a:lnTo>
+                    <a:pt x="6827534" y="879091"/>
+                  </a:lnTo>
+                  <a:lnTo>
+                    <a:pt x="6749900" y="875290"/>
+                  </a:lnTo>
+                  <a:lnTo>
+                    <a:pt x="6672266" y="871257"/>
+                  </a:lnTo>
+                  <a:lnTo>
+                    <a:pt x="6594632" y="866975"/>
+                  </a:lnTo>
+                  <a:lnTo>
+                    <a:pt x="6516998" y="862431"/>
+                  </a:lnTo>
+                  <a:lnTo>
+                    <a:pt x="6439364" y="857607"/>
+                  </a:lnTo>
+                  <a:lnTo>
+                    <a:pt x="6361730" y="852486"/>
+                  </a:lnTo>
+                  <a:lnTo>
+                    <a:pt x="6284096" y="847051"/>
+                  </a:lnTo>
+                  <a:lnTo>
+                    <a:pt x="6206462" y="841282"/>
+                  </a:lnTo>
+                  <a:lnTo>
+                    <a:pt x="6128827" y="835159"/>
+                  </a:lnTo>
+                  <a:lnTo>
+                    <a:pt x="6051193" y="828659"/>
+                  </a:lnTo>
+                  <a:lnTo>
+                    <a:pt x="5973559" y="821760"/>
+                  </a:lnTo>
+                  <a:lnTo>
+                    <a:pt x="5895925" y="814437"/>
+                  </a:lnTo>
+                  <a:lnTo>
+                    <a:pt x="5818291" y="806664"/>
+                  </a:lnTo>
+                  <a:lnTo>
+                    <a:pt x="5740657" y="798413"/>
+                  </a:lnTo>
+                  <a:lnTo>
+                    <a:pt x="5663023" y="789655"/>
+                  </a:lnTo>
+                  <a:lnTo>
+                    <a:pt x="5585389" y="780360"/>
+                  </a:lnTo>
+                  <a:lnTo>
+                    <a:pt x="5507755" y="770492"/>
+                  </a:lnTo>
+                  <a:lnTo>
+                    <a:pt x="5430121" y="760019"/>
+                  </a:lnTo>
+                  <a:lnTo>
+                    <a:pt x="5352487" y="748902"/>
+                  </a:lnTo>
+                  <a:lnTo>
+                    <a:pt x="5274853" y="737102"/>
+                  </a:lnTo>
+                  <a:lnTo>
+                    <a:pt x="5197219" y="724576"/>
+                  </a:lnTo>
+                  <a:lnTo>
+                    <a:pt x="5119585" y="711281"/>
+                  </a:lnTo>
+                  <a:lnTo>
+                    <a:pt x="5041951" y="697169"/>
+                  </a:lnTo>
+                  <a:lnTo>
+                    <a:pt x="4964317" y="682190"/>
+                  </a:lnTo>
+                  <a:lnTo>
+                    <a:pt x="4886683" y="666290"/>
+                  </a:lnTo>
+                  <a:lnTo>
+                    <a:pt x="4809049" y="649414"/>
+                  </a:lnTo>
+                  <a:lnTo>
+                    <a:pt x="4731415" y="631500"/>
+                  </a:lnTo>
+                  <a:lnTo>
+                    <a:pt x="4653781" y="612485"/>
+                  </a:lnTo>
+                  <a:lnTo>
+                    <a:pt x="4576147" y="592302"/>
+                  </a:lnTo>
+                  <a:lnTo>
+                    <a:pt x="4498513" y="570879"/>
+                  </a:lnTo>
+                  <a:lnTo>
+                    <a:pt x="4420879" y="548139"/>
+                  </a:lnTo>
+                  <a:lnTo>
+                    <a:pt x="4343244" y="524002"/>
+                  </a:lnTo>
+                  <a:lnTo>
+                    <a:pt x="4265610" y="498382"/>
+                  </a:lnTo>
+                  <a:lnTo>
+                    <a:pt x="4187976" y="471187"/>
+                  </a:lnTo>
+                  <a:lnTo>
+                    <a:pt x="4110342" y="442321"/>
+                  </a:lnTo>
+                  <a:lnTo>
+                    <a:pt x="4032708" y="411682"/>
+                  </a:lnTo>
+                  <a:lnTo>
+                    <a:pt x="3955074" y="379159"/>
+                  </a:lnTo>
+                  <a:lnTo>
+                    <a:pt x="3877440" y="344638"/>
+                  </a:lnTo>
+                  <a:lnTo>
+                    <a:pt x="3799806" y="307996"/>
+                  </a:lnTo>
+                  <a:lnTo>
+                    <a:pt x="3722172" y="269102"/>
+                  </a:lnTo>
+                  <a:lnTo>
+                    <a:pt x="3644538" y="227818"/>
+                  </a:lnTo>
+                  <a:lnTo>
+                    <a:pt x="3566904" y="183997"/>
+                  </a:lnTo>
+                  <a:lnTo>
+                    <a:pt x="3489270" y="137484"/>
+                  </a:lnTo>
+                  <a:lnTo>
+                    <a:pt x="3411636" y="88112"/>
+                  </a:lnTo>
+                  <a:lnTo>
+                    <a:pt x="3334002" y="70199"/>
+                  </a:lnTo>
+                  <a:lnTo>
+                    <a:pt x="3256368" y="68626"/>
+                  </a:lnTo>
+                  <a:lnTo>
+                    <a:pt x="3178734" y="67049"/>
+                  </a:lnTo>
+                  <a:lnTo>
+                    <a:pt x="3101100" y="65470"/>
+                  </a:lnTo>
+                  <a:lnTo>
+                    <a:pt x="3023466" y="63888"/>
+                  </a:lnTo>
+                  <a:lnTo>
+                    <a:pt x="2945832" y="62303"/>
+                  </a:lnTo>
+                  <a:lnTo>
+                    <a:pt x="2868198" y="60715"/>
+                  </a:lnTo>
+                  <a:lnTo>
+                    <a:pt x="2790564" y="59125"/>
+                  </a:lnTo>
+                  <a:lnTo>
+                    <a:pt x="2712930" y="57531"/>
+                  </a:lnTo>
+                  <a:lnTo>
+                    <a:pt x="2635295" y="55935"/>
+                  </a:lnTo>
+                  <a:lnTo>
+                    <a:pt x="2557661" y="54336"/>
+                  </a:lnTo>
+                  <a:lnTo>
+                    <a:pt x="2480027" y="52733"/>
+                  </a:lnTo>
+                  <a:lnTo>
+                    <a:pt x="2402393" y="51128"/>
+                  </a:lnTo>
+                  <a:lnTo>
+                    <a:pt x="2324759" y="49520"/>
+                  </a:lnTo>
+                  <a:lnTo>
+                    <a:pt x="2247125" y="47909"/>
+                  </a:lnTo>
+                  <a:lnTo>
+                    <a:pt x="2169491" y="46296"/>
+                  </a:lnTo>
+                  <a:lnTo>
+                    <a:pt x="2091857" y="44679"/>
+                  </a:lnTo>
+                  <a:lnTo>
+                    <a:pt x="2014223" y="43059"/>
+                  </a:lnTo>
+                  <a:lnTo>
+                    <a:pt x="1936589" y="41437"/>
+                  </a:lnTo>
+                  <a:lnTo>
+                    <a:pt x="1858955" y="39811"/>
+                  </a:lnTo>
+                  <a:lnTo>
+                    <a:pt x="1781321" y="38183"/>
+                  </a:lnTo>
+                  <a:lnTo>
+                    <a:pt x="1703687" y="36552"/>
+                  </a:lnTo>
+                  <a:lnTo>
+                    <a:pt x="1626053" y="34917"/>
+                  </a:lnTo>
+                  <a:lnTo>
+                    <a:pt x="1548419" y="33280"/>
+                  </a:lnTo>
+                  <a:lnTo>
+                    <a:pt x="1470785" y="31640"/>
+                  </a:lnTo>
+                  <a:lnTo>
+                    <a:pt x="1393151" y="29997"/>
+                  </a:lnTo>
+                  <a:lnTo>
+                    <a:pt x="1315517" y="28350"/>
+                  </a:lnTo>
+                  <a:lnTo>
+                    <a:pt x="1237883" y="26701"/>
+                  </a:lnTo>
+                  <a:lnTo>
+                    <a:pt x="1160249" y="25049"/>
+                  </a:lnTo>
+                  <a:lnTo>
+                    <a:pt x="1082615" y="23394"/>
+                  </a:lnTo>
+                  <a:lnTo>
+                    <a:pt x="1004981" y="21736"/>
+                  </a:lnTo>
+                  <a:lnTo>
+                    <a:pt x="927346" y="20075"/>
+                  </a:lnTo>
+                  <a:lnTo>
+                    <a:pt x="849712" y="18411"/>
+                  </a:lnTo>
+                  <a:lnTo>
+                    <a:pt x="772078" y="16744"/>
+                  </a:lnTo>
+                  <a:lnTo>
+                    <a:pt x="694444" y="15074"/>
+                  </a:lnTo>
+                  <a:lnTo>
+                    <a:pt x="616810" y="13401"/>
+                  </a:lnTo>
+                  <a:lnTo>
+                    <a:pt x="539176" y="11724"/>
+                  </a:lnTo>
+                  <a:lnTo>
+                    <a:pt x="461542" y="10045"/>
+                  </a:lnTo>
+                  <a:lnTo>
+                    <a:pt x="383908" y="8363"/>
+                  </a:lnTo>
+                  <a:lnTo>
+                    <a:pt x="306274" y="6678"/>
+                  </a:lnTo>
+                  <a:lnTo>
+                    <a:pt x="228640" y="4990"/>
+                  </a:lnTo>
+                  <a:lnTo>
+                    <a:pt x="151006" y="3298"/>
+                  </a:lnTo>
+                  <a:lnTo>
+                    <a:pt x="73372" y="1604"/>
+                  </a:lnTo>
+                  <a:lnTo>
+                    <a:pt x="0" y="0"/>
                   </a:lnTo>
                 </a:path>
               </a:pathLst>
@@ -4103,300 +4121,300 @@
           </p:nvSpPr>
           <p:spPr>
             <a:xfrm>
-              <a:off x="817517" y="2247859"/>
-              <a:ext cx="7370972" cy="3120375"/>
+              <a:off x="817517" y="2227990"/>
+              <a:ext cx="7370972" cy="3141518"/>
             </a:xfrm>
             <a:custGeom>
               <a:avLst/>
               <a:pathLst>
-                <a:path w="7370972" h="3120375">
+                <a:path w="7370972" h="3141518">
                   <a:moveTo>
                     <a:pt x="0" y="0"/>
                   </a:moveTo>
                   <a:lnTo>
-                    <a:pt x="73372" y="94134"/>
-                  </a:lnTo>
-                  <a:lnTo>
-                    <a:pt x="151006" y="190736"/>
-                  </a:lnTo>
-                  <a:lnTo>
-                    <a:pt x="228640" y="284428"/>
-                  </a:lnTo>
-                  <a:lnTo>
-                    <a:pt x="306274" y="375298"/>
-                  </a:lnTo>
-                  <a:lnTo>
-                    <a:pt x="383908" y="463431"/>
-                  </a:lnTo>
-                  <a:lnTo>
-                    <a:pt x="461542" y="548910"/>
-                  </a:lnTo>
-                  <a:lnTo>
-                    <a:pt x="539176" y="631814"/>
-                  </a:lnTo>
-                  <a:lnTo>
-                    <a:pt x="616810" y="712221"/>
-                  </a:lnTo>
-                  <a:lnTo>
-                    <a:pt x="694444" y="790206"/>
-                  </a:lnTo>
-                  <a:lnTo>
-                    <a:pt x="772078" y="865842"/>
-                  </a:lnTo>
-                  <a:lnTo>
-                    <a:pt x="849712" y="939200"/>
-                  </a:lnTo>
-                  <a:lnTo>
-                    <a:pt x="927346" y="1010348"/>
-                  </a:lnTo>
-                  <a:lnTo>
-                    <a:pt x="1004981" y="1079353"/>
-                  </a:lnTo>
-                  <a:lnTo>
-                    <a:pt x="1082615" y="1146280"/>
-                  </a:lnTo>
-                  <a:lnTo>
-                    <a:pt x="1160249" y="1211191"/>
-                  </a:lnTo>
-                  <a:lnTo>
-                    <a:pt x="1237883" y="1274147"/>
-                  </a:lnTo>
-                  <a:lnTo>
-                    <a:pt x="1315517" y="1335207"/>
-                  </a:lnTo>
-                  <a:lnTo>
-                    <a:pt x="1393151" y="1394427"/>
-                  </a:lnTo>
-                  <a:lnTo>
-                    <a:pt x="1470785" y="1451864"/>
-                  </a:lnTo>
-                  <a:lnTo>
-                    <a:pt x="1548419" y="1507571"/>
-                  </a:lnTo>
-                  <a:lnTo>
-                    <a:pt x="1626053" y="1561600"/>
-                  </a:lnTo>
-                  <a:lnTo>
-                    <a:pt x="1703687" y="1614001"/>
-                  </a:lnTo>
-                  <a:lnTo>
-                    <a:pt x="1781321" y="1664824"/>
-                  </a:lnTo>
-                  <a:lnTo>
-                    <a:pt x="1858955" y="1714117"/>
-                  </a:lnTo>
-                  <a:lnTo>
-                    <a:pt x="1936589" y="1761924"/>
-                  </a:lnTo>
-                  <a:lnTo>
-                    <a:pt x="2014223" y="1808292"/>
-                  </a:lnTo>
-                  <a:lnTo>
-                    <a:pt x="2091857" y="1853263"/>
-                  </a:lnTo>
-                  <a:lnTo>
-                    <a:pt x="2169491" y="1896880"/>
-                  </a:lnTo>
-                  <a:lnTo>
-                    <a:pt x="2247125" y="1939183"/>
-                  </a:lnTo>
-                  <a:lnTo>
-                    <a:pt x="2324759" y="1980211"/>
-                  </a:lnTo>
-                  <a:lnTo>
-                    <a:pt x="2402393" y="2020004"/>
-                  </a:lnTo>
-                  <a:lnTo>
-                    <a:pt x="2480027" y="2058598"/>
-                  </a:lnTo>
-                  <a:lnTo>
-                    <a:pt x="2557661" y="2096030"/>
-                  </a:lnTo>
-                  <a:lnTo>
-                    <a:pt x="2635295" y="2132335"/>
-                  </a:lnTo>
-                  <a:lnTo>
-                    <a:pt x="2712930" y="2167545"/>
-                  </a:lnTo>
-                  <a:lnTo>
-                    <a:pt x="2790564" y="2201696"/>
-                  </a:lnTo>
-                  <a:lnTo>
-                    <a:pt x="2868198" y="2234818"/>
-                  </a:lnTo>
-                  <a:lnTo>
-                    <a:pt x="2945832" y="2266942"/>
-                  </a:lnTo>
-                  <a:lnTo>
-                    <a:pt x="3023466" y="2298098"/>
-                  </a:lnTo>
-                  <a:lnTo>
-                    <a:pt x="3101100" y="2328316"/>
-                  </a:lnTo>
-                  <a:lnTo>
-                    <a:pt x="3178734" y="2357624"/>
-                  </a:lnTo>
-                  <a:lnTo>
-                    <a:pt x="3256368" y="2386049"/>
-                  </a:lnTo>
-                  <a:lnTo>
-                    <a:pt x="3334002" y="2413618"/>
-                  </a:lnTo>
-                  <a:lnTo>
-                    <a:pt x="3411636" y="2440357"/>
-                  </a:lnTo>
-                  <a:lnTo>
-                    <a:pt x="3489270" y="2466290"/>
-                  </a:lnTo>
-                  <a:lnTo>
-                    <a:pt x="3566904" y="2491442"/>
-                  </a:lnTo>
-                  <a:lnTo>
-                    <a:pt x="3644538" y="2515837"/>
-                  </a:lnTo>
-                  <a:lnTo>
-                    <a:pt x="3722172" y="2539496"/>
-                  </a:lnTo>
-                  <a:lnTo>
-                    <a:pt x="3799806" y="2562443"/>
-                  </a:lnTo>
-                  <a:lnTo>
-                    <a:pt x="3877440" y="2584699"/>
-                  </a:lnTo>
-                  <a:lnTo>
-                    <a:pt x="3955074" y="2606285"/>
-                  </a:lnTo>
-                  <a:lnTo>
-                    <a:pt x="4032708" y="2627220"/>
-                  </a:lnTo>
-                  <a:lnTo>
-                    <a:pt x="4110342" y="2647525"/>
-                  </a:lnTo>
-                  <a:lnTo>
-                    <a:pt x="4187976" y="2667218"/>
-                  </a:lnTo>
-                  <a:lnTo>
-                    <a:pt x="4265610" y="2686318"/>
-                  </a:lnTo>
-                  <a:lnTo>
-                    <a:pt x="4343244" y="2704843"/>
-                  </a:lnTo>
-                  <a:lnTo>
-                    <a:pt x="4420879" y="2722810"/>
-                  </a:lnTo>
-                  <a:lnTo>
-                    <a:pt x="4498513" y="2740236"/>
-                  </a:lnTo>
-                  <a:lnTo>
-                    <a:pt x="4576147" y="2757137"/>
-                  </a:lnTo>
-                  <a:lnTo>
-                    <a:pt x="4653781" y="2773528"/>
-                  </a:lnTo>
-                  <a:lnTo>
-                    <a:pt x="4731415" y="2789426"/>
-                  </a:lnTo>
-                  <a:lnTo>
-                    <a:pt x="4809049" y="2804845"/>
-                  </a:lnTo>
-                  <a:lnTo>
-                    <a:pt x="4886683" y="2819800"/>
-                  </a:lnTo>
-                  <a:lnTo>
-                    <a:pt x="4964317" y="2834304"/>
-                  </a:lnTo>
-                  <a:lnTo>
-                    <a:pt x="5041951" y="2848372"/>
-                  </a:lnTo>
-                  <a:lnTo>
-                    <a:pt x="5119585" y="2862016"/>
-                  </a:lnTo>
-                  <a:lnTo>
-                    <a:pt x="5197219" y="2875248"/>
-                  </a:lnTo>
-                  <a:lnTo>
-                    <a:pt x="5274853" y="2888083"/>
-                  </a:lnTo>
-                  <a:lnTo>
-                    <a:pt x="5352487" y="2900530"/>
-                  </a:lnTo>
-                  <a:lnTo>
-                    <a:pt x="5430121" y="2912603"/>
-                  </a:lnTo>
-                  <a:lnTo>
-                    <a:pt x="5507755" y="2924312"/>
-                  </a:lnTo>
-                  <a:lnTo>
-                    <a:pt x="5585389" y="2935668"/>
-                  </a:lnTo>
-                  <a:lnTo>
-                    <a:pt x="5663023" y="2946683"/>
-                  </a:lnTo>
-                  <a:lnTo>
-                    <a:pt x="5740657" y="2957365"/>
-                  </a:lnTo>
-                  <a:lnTo>
-                    <a:pt x="5818291" y="2967726"/>
-                  </a:lnTo>
-                  <a:lnTo>
-                    <a:pt x="5895925" y="2977775"/>
-                  </a:lnTo>
-                  <a:lnTo>
-                    <a:pt x="5973559" y="2987521"/>
-                  </a:lnTo>
-                  <a:lnTo>
-                    <a:pt x="6051193" y="2996973"/>
-                  </a:lnTo>
-                  <a:lnTo>
-                    <a:pt x="6128827" y="3006141"/>
-                  </a:lnTo>
-                  <a:lnTo>
-                    <a:pt x="6206462" y="3015033"/>
-                  </a:lnTo>
-                  <a:lnTo>
-                    <a:pt x="6284096" y="3023657"/>
-                  </a:lnTo>
-                  <a:lnTo>
-                    <a:pt x="6361730" y="3032021"/>
-                  </a:lnTo>
-                  <a:lnTo>
-                    <a:pt x="6439364" y="3040133"/>
-                  </a:lnTo>
-                  <a:lnTo>
-                    <a:pt x="6516998" y="3048001"/>
-                  </a:lnTo>
-                  <a:lnTo>
-                    <a:pt x="6594632" y="3055632"/>
-                  </a:lnTo>
-                  <a:lnTo>
-                    <a:pt x="6672266" y="3063033"/>
-                  </a:lnTo>
-                  <a:lnTo>
-                    <a:pt x="6749900" y="3070211"/>
-                  </a:lnTo>
-                  <a:lnTo>
-                    <a:pt x="6827534" y="3077173"/>
-                  </a:lnTo>
-                  <a:lnTo>
-                    <a:pt x="6905168" y="3083925"/>
-                  </a:lnTo>
-                  <a:lnTo>
-                    <a:pt x="6982802" y="3090474"/>
-                  </a:lnTo>
-                  <a:lnTo>
-                    <a:pt x="7060436" y="3096825"/>
-                  </a:lnTo>
-                  <a:lnTo>
-                    <a:pt x="7138070" y="3102985"/>
-                  </a:lnTo>
-                  <a:lnTo>
-                    <a:pt x="7215704" y="3108960"/>
-                  </a:lnTo>
-                  <a:lnTo>
-                    <a:pt x="7293338" y="3114755"/>
-                  </a:lnTo>
-                  <a:lnTo>
-                    <a:pt x="7370972" y="3120375"/>
+                    <a:pt x="73372" y="95121"/>
+                  </a:lnTo>
+                  <a:lnTo>
+                    <a:pt x="151006" y="192722"/>
+                  </a:lnTo>
+                  <a:lnTo>
+                    <a:pt x="228640" y="287370"/>
+                  </a:lnTo>
+                  <a:lnTo>
+                    <a:pt x="306274" y="379155"/>
+                  </a:lnTo>
+                  <a:lnTo>
+                    <a:pt x="383908" y="468163"/>
+                  </a:lnTo>
+                  <a:lnTo>
+                    <a:pt x="461542" y="554478"/>
+                  </a:lnTo>
+                  <a:lnTo>
+                    <a:pt x="539176" y="638182"/>
+                  </a:lnTo>
+                  <a:lnTo>
+                    <a:pt x="616810" y="719353"/>
+                  </a:lnTo>
+                  <a:lnTo>
+                    <a:pt x="694444" y="798069"/>
+                  </a:lnTo>
+                  <a:lnTo>
+                    <a:pt x="772078" y="874403"/>
+                  </a:lnTo>
+                  <a:lnTo>
+                    <a:pt x="849712" y="948428"/>
+                  </a:lnTo>
+                  <a:lnTo>
+                    <a:pt x="927346" y="1020213"/>
+                  </a:lnTo>
+                  <a:lnTo>
+                    <a:pt x="1004981" y="1089827"/>
+                  </a:lnTo>
+                  <a:lnTo>
+                    <a:pt x="1082615" y="1157334"/>
+                  </a:lnTo>
+                  <a:lnTo>
+                    <a:pt x="1160249" y="1222800"/>
+                  </a:lnTo>
+                  <a:lnTo>
+                    <a:pt x="1237883" y="1286284"/>
+                  </a:lnTo>
+                  <a:lnTo>
+                    <a:pt x="1315517" y="1347848"/>
+                  </a:lnTo>
+                  <a:lnTo>
+                    <a:pt x="1393151" y="1407550"/>
+                  </a:lnTo>
+                  <a:lnTo>
+                    <a:pt x="1470785" y="1465445"/>
+                  </a:lnTo>
+                  <a:lnTo>
+                    <a:pt x="1548419" y="1521589"/>
+                  </a:lnTo>
+                  <a:lnTo>
+                    <a:pt x="1626053" y="1576034"/>
+                  </a:lnTo>
+                  <a:lnTo>
+                    <a:pt x="1703687" y="1628832"/>
+                  </a:lnTo>
+                  <a:lnTo>
+                    <a:pt x="1781321" y="1680033"/>
+                  </a:lnTo>
+                  <a:lnTo>
+                    <a:pt x="1858955" y="1729685"/>
+                  </a:lnTo>
+                  <a:lnTo>
+                    <a:pt x="1936589" y="1777834"/>
+                  </a:lnTo>
+                  <a:lnTo>
+                    <a:pt x="2014223" y="1824527"/>
+                  </a:lnTo>
+                  <a:lnTo>
+                    <a:pt x="2091857" y="1869807"/>
+                  </a:lnTo>
+                  <a:lnTo>
+                    <a:pt x="2169491" y="1913718"/>
+                  </a:lnTo>
+                  <a:lnTo>
+                    <a:pt x="2247125" y="1956300"/>
+                  </a:lnTo>
+                  <a:lnTo>
+                    <a:pt x="2324759" y="1997593"/>
+                  </a:lnTo>
+                  <a:lnTo>
+                    <a:pt x="2402393" y="2037638"/>
+                  </a:lnTo>
+                  <a:lnTo>
+                    <a:pt x="2480027" y="2076470"/>
+                  </a:lnTo>
+                  <a:lnTo>
+                    <a:pt x="2557661" y="2114128"/>
+                  </a:lnTo>
+                  <a:lnTo>
+                    <a:pt x="2635295" y="2150647"/>
+                  </a:lnTo>
+                  <a:lnTo>
+                    <a:pt x="2712930" y="2186061"/>
+                  </a:lnTo>
+                  <a:lnTo>
+                    <a:pt x="2790564" y="2220404"/>
+                  </a:lnTo>
+                  <a:lnTo>
+                    <a:pt x="2868198" y="2253707"/>
+                  </a:lnTo>
+                  <a:lnTo>
+                    <a:pt x="2945832" y="2286003"/>
+                  </a:lnTo>
+                  <a:lnTo>
+                    <a:pt x="3023466" y="2317322"/>
+                  </a:lnTo>
+                  <a:lnTo>
+                    <a:pt x="3101100" y="2347694"/>
+                  </a:lnTo>
+                  <a:lnTo>
+                    <a:pt x="3178734" y="2377146"/>
+                  </a:lnTo>
+                  <a:lnTo>
+                    <a:pt x="3256368" y="2405708"/>
+                  </a:lnTo>
+                  <a:lnTo>
+                    <a:pt x="3334002" y="2433405"/>
+                  </a:lnTo>
+                  <a:lnTo>
+                    <a:pt x="3411636" y="2460265"/>
+                  </a:lnTo>
+                  <a:lnTo>
+                    <a:pt x="3489270" y="2486312"/>
+                  </a:lnTo>
+                  <a:lnTo>
+                    <a:pt x="3566904" y="2511570"/>
+                  </a:lnTo>
+                  <a:lnTo>
+                    <a:pt x="3644538" y="2536065"/>
+                  </a:lnTo>
+                  <a:lnTo>
+                    <a:pt x="3722172" y="2559819"/>
+                  </a:lnTo>
+                  <a:lnTo>
+                    <a:pt x="3799806" y="2582854"/>
+                  </a:lnTo>
+                  <a:lnTo>
+                    <a:pt x="3877440" y="2605192"/>
+                  </a:lnTo>
+                  <a:lnTo>
+                    <a:pt x="3955074" y="2626854"/>
+                  </a:lnTo>
+                  <a:lnTo>
+                    <a:pt x="4032708" y="2647861"/>
+                  </a:lnTo>
+                  <a:lnTo>
+                    <a:pt x="4110342" y="2668233"/>
+                  </a:lnTo>
+                  <a:lnTo>
+                    <a:pt x="4187976" y="2687988"/>
+                  </a:lnTo>
+                  <a:lnTo>
+                    <a:pt x="4265610" y="2707145"/>
+                  </a:lnTo>
+                  <a:lnTo>
+                    <a:pt x="4343244" y="2725723"/>
+                  </a:lnTo>
+                  <a:lnTo>
+                    <a:pt x="4420879" y="2743739"/>
+                  </a:lnTo>
+                  <a:lnTo>
+                    <a:pt x="4498513" y="2761210"/>
+                  </a:lnTo>
+                  <a:lnTo>
+                    <a:pt x="4576147" y="2778152"/>
+                  </a:lnTo>
+                  <a:lnTo>
+                    <a:pt x="4653781" y="2794582"/>
+                  </a:lnTo>
+                  <a:lnTo>
+                    <a:pt x="4731415" y="2810514"/>
+                  </a:lnTo>
+                  <a:lnTo>
+                    <a:pt x="4809049" y="2825965"/>
+                  </a:lnTo>
+                  <a:lnTo>
+                    <a:pt x="4886683" y="2840948"/>
+                  </a:lnTo>
+                  <a:lnTo>
+                    <a:pt x="4964317" y="2855478"/>
+                  </a:lnTo>
+                  <a:lnTo>
+                    <a:pt x="5041951" y="2869568"/>
+                  </a:lnTo>
+                  <a:lnTo>
+                    <a:pt x="5119585" y="2883232"/>
+                  </a:lnTo>
+                  <a:lnTo>
+                    <a:pt x="5197219" y="2896483"/>
+                  </a:lnTo>
+                  <a:lnTo>
+                    <a:pt x="5274853" y="2909332"/>
+                  </a:lnTo>
+                  <a:lnTo>
+                    <a:pt x="5352487" y="2921793"/>
+                  </a:lnTo>
+                  <a:lnTo>
+                    <a:pt x="5430121" y="2933877"/>
+                  </a:lnTo>
+                  <a:lnTo>
+                    <a:pt x="5507755" y="2945596"/>
+                  </a:lnTo>
+                  <a:lnTo>
+                    <a:pt x="5585389" y="2956960"/>
+                  </a:lnTo>
+                  <a:lnTo>
+                    <a:pt x="5663023" y="2967980"/>
+                  </a:lnTo>
+                  <a:lnTo>
+                    <a:pt x="5740657" y="2978666"/>
+                  </a:lnTo>
+                  <a:lnTo>
+                    <a:pt x="5818291" y="2989030"/>
+                  </a:lnTo>
+                  <a:lnTo>
+                    <a:pt x="5895925" y="2999080"/>
+                  </a:lnTo>
+                  <a:lnTo>
+                    <a:pt x="5973559" y="3008825"/>
+                  </a:lnTo>
+                  <a:lnTo>
+                    <a:pt x="6051193" y="3018276"/>
+                  </a:lnTo>
+                  <a:lnTo>
+                    <a:pt x="6128827" y="3027441"/>
+                  </a:lnTo>
+                  <a:lnTo>
+                    <a:pt x="6206462" y="3036329"/>
+                  </a:lnTo>
+                  <a:lnTo>
+                    <a:pt x="6284096" y="3044948"/>
+                  </a:lnTo>
+                  <a:lnTo>
+                    <a:pt x="6361730" y="3053306"/>
+                  </a:lnTo>
+                  <a:lnTo>
+                    <a:pt x="6439364" y="3061411"/>
+                  </a:lnTo>
+                  <a:lnTo>
+                    <a:pt x="6516998" y="3069271"/>
+                  </a:lnTo>
+                  <a:lnTo>
+                    <a:pt x="6594632" y="3076894"/>
+                  </a:lnTo>
+                  <a:lnTo>
+                    <a:pt x="6672266" y="3084285"/>
+                  </a:lnTo>
+                  <a:lnTo>
+                    <a:pt x="6749900" y="3091453"/>
+                  </a:lnTo>
+                  <a:lnTo>
+                    <a:pt x="6827534" y="3098405"/>
+                  </a:lnTo>
+                  <a:lnTo>
+                    <a:pt x="6905168" y="3105145"/>
+                  </a:lnTo>
+                  <a:lnTo>
+                    <a:pt x="6982802" y="3111682"/>
+                  </a:lnTo>
+                  <a:lnTo>
+                    <a:pt x="7060436" y="3118022"/>
+                  </a:lnTo>
+                  <a:lnTo>
+                    <a:pt x="7138070" y="3124169"/>
+                  </a:lnTo>
+                  <a:lnTo>
+                    <a:pt x="7215704" y="3130130"/>
+                  </a:lnTo>
+                  <a:lnTo>
+                    <a:pt x="7293338" y="3135911"/>
+                  </a:lnTo>
+                  <a:lnTo>
+                    <a:pt x="7370972" y="3141518"/>
                   </a:lnTo>
                 </a:path>
               </a:pathLst>

--- a/docs/plots/carbo/jx_carbo_linsubhr_ratio_akikdigo.pptx
+++ b/docs/plots/carbo/jx_carbo_linsubhr_ratio_akikdigo.pptx
@@ -3003,530 +3003,521 @@
           <p:spPr>
             <a:xfrm>
               <a:off x="817517" y="1896563"/>
-              <a:ext cx="7370972" cy="3611907"/>
+              <a:ext cx="7370972" cy="3627349"/>
             </a:xfrm>
             <a:custGeom>
               <a:avLst/>
               <a:pathLst>
-                <a:path w="7370972" h="3611907">
+                <a:path w="7370972" h="3627349">
                   <a:moveTo>
-                    <a:pt x="1518511" y="0"/>
+                    <a:pt x="1769971" y="0"/>
                   </a:moveTo>
                   <a:lnTo>
-                    <a:pt x="1548419" y="84468"/>
-                  </a:lnTo>
-                  <a:lnTo>
-                    <a:pt x="1626053" y="291039"/>
-                  </a:lnTo>
-                  <a:lnTo>
-                    <a:pt x="1703687" y="485651"/>
-                  </a:lnTo>
-                  <a:lnTo>
-                    <a:pt x="1781321" y="668996"/>
-                  </a:lnTo>
-                  <a:lnTo>
-                    <a:pt x="1858955" y="841726"/>
-                  </a:lnTo>
-                  <a:lnTo>
-                    <a:pt x="1936589" y="1004457"/>
-                  </a:lnTo>
-                  <a:lnTo>
-                    <a:pt x="2014223" y="1157768"/>
-                  </a:lnTo>
-                  <a:lnTo>
-                    <a:pt x="2091857" y="1302202"/>
-                  </a:lnTo>
-                  <a:lnTo>
-                    <a:pt x="2169491" y="1438275"/>
-                  </a:lnTo>
-                  <a:lnTo>
-                    <a:pt x="2247125" y="1566470"/>
-                  </a:lnTo>
-                  <a:lnTo>
-                    <a:pt x="2324759" y="1687244"/>
-                  </a:lnTo>
-                  <a:lnTo>
-                    <a:pt x="2402393" y="1801026"/>
-                  </a:lnTo>
-                  <a:lnTo>
-                    <a:pt x="2480027" y="1908221"/>
-                  </a:lnTo>
-                  <a:lnTo>
-                    <a:pt x="2557661" y="2009210"/>
-                  </a:lnTo>
-                  <a:lnTo>
-                    <a:pt x="2635295" y="2104352"/>
-                  </a:lnTo>
-                  <a:lnTo>
-                    <a:pt x="2712930" y="2193987"/>
-                  </a:lnTo>
-                  <a:lnTo>
-                    <a:pt x="2790564" y="2278432"/>
-                  </a:lnTo>
-                  <a:lnTo>
-                    <a:pt x="2868198" y="2357988"/>
-                  </a:lnTo>
-                  <a:lnTo>
-                    <a:pt x="2945832" y="2432939"/>
-                  </a:lnTo>
-                  <a:lnTo>
-                    <a:pt x="3023466" y="2503551"/>
-                  </a:lnTo>
-                  <a:lnTo>
-                    <a:pt x="3101100" y="2570075"/>
-                  </a:lnTo>
-                  <a:lnTo>
-                    <a:pt x="3178734" y="2632747"/>
-                  </a:lnTo>
-                  <a:lnTo>
-                    <a:pt x="3256368" y="2691792"/>
-                  </a:lnTo>
-                  <a:lnTo>
-                    <a:pt x="3334002" y="2747418"/>
-                  </a:lnTo>
-                  <a:lnTo>
-                    <a:pt x="3411636" y="2783481"/>
-                  </a:lnTo>
-                  <a:lnTo>
-                    <a:pt x="3489270" y="2785049"/>
-                  </a:lnTo>
-                  <a:lnTo>
-                    <a:pt x="3566904" y="2786614"/>
-                  </a:lnTo>
-                  <a:lnTo>
-                    <a:pt x="3644538" y="2788176"/>
-                  </a:lnTo>
-                  <a:lnTo>
-                    <a:pt x="3722172" y="2789736"/>
-                  </a:lnTo>
-                  <a:lnTo>
-                    <a:pt x="3799806" y="2791292"/>
-                  </a:lnTo>
-                  <a:lnTo>
-                    <a:pt x="3877440" y="2792846"/>
-                  </a:lnTo>
-                  <a:lnTo>
-                    <a:pt x="3955074" y="2794397"/>
-                  </a:lnTo>
-                  <a:lnTo>
-                    <a:pt x="4032708" y="2795945"/>
-                  </a:lnTo>
-                  <a:lnTo>
-                    <a:pt x="4110342" y="2797491"/>
-                  </a:lnTo>
-                  <a:lnTo>
-                    <a:pt x="4187976" y="2799033"/>
-                  </a:lnTo>
-                  <a:lnTo>
-                    <a:pt x="4265610" y="2800573"/>
-                  </a:lnTo>
-                  <a:lnTo>
-                    <a:pt x="4343244" y="2802110"/>
-                  </a:lnTo>
-                  <a:lnTo>
-                    <a:pt x="4420879" y="2803644"/>
-                  </a:lnTo>
-                  <a:lnTo>
-                    <a:pt x="4498513" y="2805176"/>
-                  </a:lnTo>
-                  <a:lnTo>
-                    <a:pt x="4576147" y="2806704"/>
-                  </a:lnTo>
-                  <a:lnTo>
-                    <a:pt x="4653781" y="2808230"/>
-                  </a:lnTo>
-                  <a:lnTo>
-                    <a:pt x="4731415" y="2809753"/>
-                  </a:lnTo>
-                  <a:lnTo>
-                    <a:pt x="4809049" y="2811274"/>
-                  </a:lnTo>
-                  <a:lnTo>
-                    <a:pt x="4886683" y="2812792"/>
-                  </a:lnTo>
-                  <a:lnTo>
-                    <a:pt x="4964317" y="2814306"/>
-                  </a:lnTo>
-                  <a:lnTo>
-                    <a:pt x="5041951" y="2815819"/>
-                  </a:lnTo>
-                  <a:lnTo>
-                    <a:pt x="5119585" y="2817328"/>
-                  </a:lnTo>
-                  <a:lnTo>
-                    <a:pt x="5197219" y="2818835"/>
-                  </a:lnTo>
-                  <a:lnTo>
-                    <a:pt x="5274853" y="2820339"/>
-                  </a:lnTo>
-                  <a:lnTo>
-                    <a:pt x="5352487" y="2821840"/>
-                  </a:lnTo>
-                  <a:lnTo>
-                    <a:pt x="5430121" y="2823339"/>
-                  </a:lnTo>
-                  <a:lnTo>
-                    <a:pt x="5507755" y="2824835"/>
-                  </a:lnTo>
-                  <a:lnTo>
-                    <a:pt x="5585389" y="2826328"/>
-                  </a:lnTo>
-                  <a:lnTo>
-                    <a:pt x="5663023" y="2827819"/>
-                  </a:lnTo>
-                  <a:lnTo>
-                    <a:pt x="5740657" y="2829307"/>
-                  </a:lnTo>
-                  <a:lnTo>
-                    <a:pt x="5818291" y="2830792"/>
-                  </a:lnTo>
-                  <a:lnTo>
-                    <a:pt x="5895925" y="2832274"/>
-                  </a:lnTo>
-                  <a:lnTo>
-                    <a:pt x="5973559" y="2833754"/>
-                  </a:lnTo>
-                  <a:lnTo>
-                    <a:pt x="6051193" y="2835231"/>
-                  </a:lnTo>
-                  <a:lnTo>
-                    <a:pt x="6128827" y="2836706"/>
-                  </a:lnTo>
-                  <a:lnTo>
-                    <a:pt x="6206462" y="2838178"/>
-                  </a:lnTo>
-                  <a:lnTo>
-                    <a:pt x="6284096" y="2839647"/>
-                  </a:lnTo>
-                  <a:lnTo>
-                    <a:pt x="6361730" y="2841113"/>
-                  </a:lnTo>
-                  <a:lnTo>
-                    <a:pt x="6439364" y="2842577"/>
-                  </a:lnTo>
-                  <a:lnTo>
-                    <a:pt x="6516998" y="2844038"/>
-                  </a:lnTo>
-                  <a:lnTo>
-                    <a:pt x="6594632" y="2845497"/>
-                  </a:lnTo>
-                  <a:lnTo>
-                    <a:pt x="6672266" y="2846953"/>
-                  </a:lnTo>
-                  <a:lnTo>
-                    <a:pt x="6749900" y="2848406"/>
-                  </a:lnTo>
-                  <a:lnTo>
-                    <a:pt x="6827534" y="2849857"/>
-                  </a:lnTo>
-                  <a:lnTo>
-                    <a:pt x="6905168" y="2851305"/>
-                  </a:lnTo>
-                  <a:lnTo>
-                    <a:pt x="6982802" y="2852750"/>
-                  </a:lnTo>
-                  <a:lnTo>
-                    <a:pt x="7060436" y="2854193"/>
-                  </a:lnTo>
-                  <a:lnTo>
-                    <a:pt x="7138070" y="2855634"/>
-                  </a:lnTo>
-                  <a:lnTo>
-                    <a:pt x="7215704" y="2857071"/>
-                  </a:lnTo>
-                  <a:lnTo>
-                    <a:pt x="7293338" y="2858506"/>
-                  </a:lnTo>
-                  <a:lnTo>
-                    <a:pt x="7370972" y="2859939"/>
-                  </a:lnTo>
-                  <a:lnTo>
-                    <a:pt x="7370972" y="3611907"/>
-                  </a:lnTo>
-                  <a:lnTo>
-                    <a:pt x="7293338" y="3609404"/>
-                  </a:lnTo>
-                  <a:lnTo>
-                    <a:pt x="7215704" y="3606747"/>
-                  </a:lnTo>
-                  <a:lnTo>
-                    <a:pt x="7138070" y="3603926"/>
-                  </a:lnTo>
-                  <a:lnTo>
-                    <a:pt x="7060436" y="3600933"/>
-                  </a:lnTo>
-                  <a:lnTo>
-                    <a:pt x="6982802" y="3597755"/>
-                  </a:lnTo>
-                  <a:lnTo>
-                    <a:pt x="6905168" y="3594382"/>
-                  </a:lnTo>
-                  <a:lnTo>
-                    <a:pt x="6827534" y="3590802"/>
-                  </a:lnTo>
-                  <a:lnTo>
-                    <a:pt x="6749900" y="3587002"/>
-                  </a:lnTo>
-                  <a:lnTo>
-                    <a:pt x="6672266" y="3582968"/>
-                  </a:lnTo>
-                  <a:lnTo>
-                    <a:pt x="6594632" y="3578687"/>
-                  </a:lnTo>
-                  <a:lnTo>
-                    <a:pt x="6516998" y="3574142"/>
-                  </a:lnTo>
-                  <a:lnTo>
-                    <a:pt x="6439364" y="3569318"/>
-                  </a:lnTo>
-                  <a:lnTo>
-                    <a:pt x="6361730" y="3564198"/>
-                  </a:lnTo>
-                  <a:lnTo>
-                    <a:pt x="6284096" y="3558763"/>
-                  </a:lnTo>
-                  <a:lnTo>
-                    <a:pt x="6206462" y="3552994"/>
-                  </a:lnTo>
-                  <a:lnTo>
-                    <a:pt x="6128827" y="3546871"/>
-                  </a:lnTo>
-                  <a:lnTo>
-                    <a:pt x="6051193" y="3540371"/>
-                  </a:lnTo>
-                  <a:lnTo>
-                    <a:pt x="5973559" y="3533472"/>
-                  </a:lnTo>
-                  <a:lnTo>
-                    <a:pt x="5895925" y="3526149"/>
-                  </a:lnTo>
-                  <a:lnTo>
-                    <a:pt x="5818291" y="3518376"/>
-                  </a:lnTo>
-                  <a:lnTo>
-                    <a:pt x="5740657" y="3510125"/>
-                  </a:lnTo>
-                  <a:lnTo>
-                    <a:pt x="5663023" y="3501367"/>
-                  </a:lnTo>
-                  <a:lnTo>
-                    <a:pt x="5585389" y="3492071"/>
-                  </a:lnTo>
-                  <a:lnTo>
-                    <a:pt x="5507755" y="3482204"/>
-                  </a:lnTo>
-                  <a:lnTo>
-                    <a:pt x="5430121" y="3471730"/>
-                  </a:lnTo>
-                  <a:lnTo>
-                    <a:pt x="5352487" y="3460613"/>
-                  </a:lnTo>
-                  <a:lnTo>
-                    <a:pt x="5274853" y="3448813"/>
-                  </a:lnTo>
-                  <a:lnTo>
-                    <a:pt x="5197219" y="3436288"/>
-                  </a:lnTo>
-                  <a:lnTo>
-                    <a:pt x="5119585" y="3422993"/>
-                  </a:lnTo>
-                  <a:lnTo>
-                    <a:pt x="5041951" y="3408881"/>
-                  </a:lnTo>
-                  <a:lnTo>
-                    <a:pt x="4964317" y="3393902"/>
-                  </a:lnTo>
-                  <a:lnTo>
-                    <a:pt x="4886683" y="3378002"/>
-                  </a:lnTo>
-                  <a:lnTo>
-                    <a:pt x="4809049" y="3361125"/>
-                  </a:lnTo>
-                  <a:lnTo>
-                    <a:pt x="4731415" y="3343211"/>
-                  </a:lnTo>
-                  <a:lnTo>
-                    <a:pt x="4653781" y="3324197"/>
-                  </a:lnTo>
-                  <a:lnTo>
-                    <a:pt x="4576147" y="3304014"/>
-                  </a:lnTo>
-                  <a:lnTo>
-                    <a:pt x="4498513" y="3282590"/>
-                  </a:lnTo>
-                  <a:lnTo>
-                    <a:pt x="4420879" y="3259851"/>
-                  </a:lnTo>
-                  <a:lnTo>
-                    <a:pt x="4343244" y="3235714"/>
-                  </a:lnTo>
-                  <a:lnTo>
-                    <a:pt x="4265610" y="3210093"/>
-                  </a:lnTo>
-                  <a:lnTo>
-                    <a:pt x="4187976" y="3182899"/>
-                  </a:lnTo>
-                  <a:lnTo>
-                    <a:pt x="4110342" y="3154033"/>
-                  </a:lnTo>
-                  <a:lnTo>
-                    <a:pt x="4032708" y="3123393"/>
-                  </a:lnTo>
-                  <a:lnTo>
-                    <a:pt x="3955074" y="3090871"/>
-                  </a:lnTo>
-                  <a:lnTo>
-                    <a:pt x="3877440" y="3056350"/>
-                  </a:lnTo>
-                  <a:lnTo>
-                    <a:pt x="3799806" y="3019708"/>
-                  </a:lnTo>
-                  <a:lnTo>
-                    <a:pt x="3722172" y="2980814"/>
-                  </a:lnTo>
-                  <a:lnTo>
-                    <a:pt x="3644538" y="2939530"/>
-                  </a:lnTo>
-                  <a:lnTo>
-                    <a:pt x="3566904" y="2895709"/>
-                  </a:lnTo>
-                  <a:lnTo>
-                    <a:pt x="3489270" y="2849195"/>
-                  </a:lnTo>
-                  <a:lnTo>
-                    <a:pt x="3411636" y="2799824"/>
-                  </a:lnTo>
-                  <a:lnTo>
-                    <a:pt x="3334002" y="2781911"/>
-                  </a:lnTo>
-                  <a:lnTo>
-                    <a:pt x="3256368" y="2780337"/>
-                  </a:lnTo>
-                  <a:lnTo>
-                    <a:pt x="3178734" y="2778761"/>
-                  </a:lnTo>
-                  <a:lnTo>
-                    <a:pt x="3101100" y="2777182"/>
-                  </a:lnTo>
-                  <a:lnTo>
-                    <a:pt x="3023466" y="2775600"/>
-                  </a:lnTo>
-                  <a:lnTo>
-                    <a:pt x="2945832" y="2774015"/>
-                  </a:lnTo>
-                  <a:lnTo>
-                    <a:pt x="2868198" y="2772427"/>
-                  </a:lnTo>
-                  <a:lnTo>
-                    <a:pt x="2790564" y="2770836"/>
-                  </a:lnTo>
-                  <a:lnTo>
-                    <a:pt x="2712930" y="2769243"/>
-                  </a:lnTo>
-                  <a:lnTo>
-                    <a:pt x="2635295" y="2767646"/>
-                  </a:lnTo>
-                  <a:lnTo>
-                    <a:pt x="2557661" y="2766047"/>
-                  </a:lnTo>
-                  <a:lnTo>
-                    <a:pt x="2480027" y="2764445"/>
-                  </a:lnTo>
-                  <a:lnTo>
-                    <a:pt x="2402393" y="2762840"/>
-                  </a:lnTo>
-                  <a:lnTo>
-                    <a:pt x="2324759" y="2761232"/>
-                  </a:lnTo>
-                  <a:lnTo>
-                    <a:pt x="2247125" y="2759621"/>
-                  </a:lnTo>
-                  <a:lnTo>
-                    <a:pt x="2169491" y="2758007"/>
-                  </a:lnTo>
-                  <a:lnTo>
-                    <a:pt x="2091857" y="2756391"/>
-                  </a:lnTo>
-                  <a:lnTo>
-                    <a:pt x="2014223" y="2754771"/>
-                  </a:lnTo>
-                  <a:lnTo>
-                    <a:pt x="1936589" y="2753148"/>
-                  </a:lnTo>
-                  <a:lnTo>
-                    <a:pt x="1858955" y="2751523"/>
-                  </a:lnTo>
-                  <a:lnTo>
-                    <a:pt x="1781321" y="2749895"/>
-                  </a:lnTo>
-                  <a:lnTo>
-                    <a:pt x="1703687" y="2748263"/>
-                  </a:lnTo>
-                  <a:lnTo>
-                    <a:pt x="1626053" y="2746629"/>
-                  </a:lnTo>
-                  <a:lnTo>
-                    <a:pt x="1548419" y="2744992"/>
-                  </a:lnTo>
-                  <a:lnTo>
-                    <a:pt x="1470785" y="2743351"/>
-                  </a:lnTo>
-                  <a:lnTo>
-                    <a:pt x="1393151" y="2741708"/>
-                  </a:lnTo>
-                  <a:lnTo>
-                    <a:pt x="1315517" y="2740062"/>
-                  </a:lnTo>
-                  <a:lnTo>
-                    <a:pt x="1237883" y="2738413"/>
-                  </a:lnTo>
-                  <a:lnTo>
-                    <a:pt x="1160249" y="2736761"/>
-                  </a:lnTo>
-                  <a:lnTo>
-                    <a:pt x="1082615" y="2735106"/>
-                  </a:lnTo>
-                  <a:lnTo>
-                    <a:pt x="1004981" y="2733448"/>
-                  </a:lnTo>
-                  <a:lnTo>
-                    <a:pt x="927346" y="2731787"/>
-                  </a:lnTo>
-                  <a:lnTo>
-                    <a:pt x="849712" y="2730122"/>
-                  </a:lnTo>
-                  <a:lnTo>
-                    <a:pt x="772078" y="2728455"/>
-                  </a:lnTo>
-                  <a:lnTo>
-                    <a:pt x="694444" y="2726785"/>
-                  </a:lnTo>
-                  <a:lnTo>
-                    <a:pt x="616810" y="2725112"/>
-                  </a:lnTo>
-                  <a:lnTo>
-                    <a:pt x="539176" y="2723436"/>
-                  </a:lnTo>
-                  <a:lnTo>
-                    <a:pt x="461542" y="2721757"/>
-                  </a:lnTo>
-                  <a:lnTo>
-                    <a:pt x="383908" y="2720075"/>
-                  </a:lnTo>
-                  <a:lnTo>
-                    <a:pt x="306274" y="2718389"/>
-                  </a:lnTo>
-                  <a:lnTo>
-                    <a:pt x="228640" y="2716701"/>
-                  </a:lnTo>
-                  <a:lnTo>
-                    <a:pt x="151006" y="2715010"/>
-                  </a:lnTo>
-                  <a:lnTo>
-                    <a:pt x="73372" y="2713315"/>
-                  </a:lnTo>
-                  <a:lnTo>
-                    <a:pt x="0" y="2711711"/>
+                    <a:pt x="1781321" y="37708"/>
+                  </a:lnTo>
+                  <a:lnTo>
+                    <a:pt x="1858955" y="278459"/>
+                  </a:lnTo>
+                  <a:lnTo>
+                    <a:pt x="1936589" y="503177"/>
+                  </a:lnTo>
+                  <a:lnTo>
+                    <a:pt x="2014223" y="712928"/>
+                  </a:lnTo>
+                  <a:lnTo>
+                    <a:pt x="2091857" y="908710"/>
+                  </a:lnTo>
+                  <a:lnTo>
+                    <a:pt x="2169491" y="1091453"/>
+                  </a:lnTo>
+                  <a:lnTo>
+                    <a:pt x="2247125" y="1262026"/>
+                  </a:lnTo>
+                  <a:lnTo>
+                    <a:pt x="2324759" y="1421239"/>
+                  </a:lnTo>
+                  <a:lnTo>
+                    <a:pt x="2402393" y="1569848"/>
+                  </a:lnTo>
+                  <a:lnTo>
+                    <a:pt x="2480027" y="1708560"/>
+                  </a:lnTo>
+                  <a:lnTo>
+                    <a:pt x="2557661" y="1838034"/>
+                  </a:lnTo>
+                  <a:lnTo>
+                    <a:pt x="2635295" y="1958886"/>
+                  </a:lnTo>
+                  <a:lnTo>
+                    <a:pt x="2712930" y="2071688"/>
+                  </a:lnTo>
+                  <a:lnTo>
+                    <a:pt x="2790564" y="2176978"/>
+                  </a:lnTo>
+                  <a:lnTo>
+                    <a:pt x="2868198" y="2275256"/>
+                  </a:lnTo>
+                  <a:lnTo>
+                    <a:pt x="2945832" y="2366989"/>
+                  </a:lnTo>
+                  <a:lnTo>
+                    <a:pt x="3023466" y="2452612"/>
+                  </a:lnTo>
+                  <a:lnTo>
+                    <a:pt x="3101100" y="2532533"/>
+                  </a:lnTo>
+                  <a:lnTo>
+                    <a:pt x="3178734" y="2607131"/>
+                  </a:lnTo>
+                  <a:lnTo>
+                    <a:pt x="3256368" y="2676761"/>
+                  </a:lnTo>
+                  <a:lnTo>
+                    <a:pt x="3334002" y="2741754"/>
+                  </a:lnTo>
+                  <a:lnTo>
+                    <a:pt x="3411636" y="2780750"/>
+                  </a:lnTo>
+                  <a:lnTo>
+                    <a:pt x="3489270" y="2773963"/>
+                  </a:lnTo>
+                  <a:lnTo>
+                    <a:pt x="3566904" y="2767123"/>
+                  </a:lnTo>
+                  <a:lnTo>
+                    <a:pt x="3644538" y="2760230"/>
+                  </a:lnTo>
+                  <a:lnTo>
+                    <a:pt x="3722172" y="2753283"/>
+                  </a:lnTo>
+                  <a:lnTo>
+                    <a:pt x="3799806" y="2746282"/>
+                  </a:lnTo>
+                  <a:lnTo>
+                    <a:pt x="3877440" y="2739227"/>
+                  </a:lnTo>
+                  <a:lnTo>
+                    <a:pt x="3955074" y="2732116"/>
+                  </a:lnTo>
+                  <a:lnTo>
+                    <a:pt x="4032708" y="2724951"/>
+                  </a:lnTo>
+                  <a:lnTo>
+                    <a:pt x="4110342" y="2717729"/>
+                  </a:lnTo>
+                  <a:lnTo>
+                    <a:pt x="4187976" y="2710452"/>
+                  </a:lnTo>
+                  <a:lnTo>
+                    <a:pt x="4265610" y="2703117"/>
+                  </a:lnTo>
+                  <a:lnTo>
+                    <a:pt x="4343244" y="2695726"/>
+                  </a:lnTo>
+                  <a:lnTo>
+                    <a:pt x="4420879" y="2688277"/>
+                  </a:lnTo>
+                  <a:lnTo>
+                    <a:pt x="4498513" y="2680770"/>
+                  </a:lnTo>
+                  <a:lnTo>
+                    <a:pt x="4576147" y="2673205"/>
+                  </a:lnTo>
+                  <a:lnTo>
+                    <a:pt x="4653781" y="2665580"/>
+                  </a:lnTo>
+                  <a:lnTo>
+                    <a:pt x="4731415" y="2657897"/>
+                  </a:lnTo>
+                  <a:lnTo>
+                    <a:pt x="4809049" y="2650153"/>
+                  </a:lnTo>
+                  <a:lnTo>
+                    <a:pt x="4886683" y="2642350"/>
+                  </a:lnTo>
+                  <a:lnTo>
+                    <a:pt x="4964317" y="2634485"/>
+                  </a:lnTo>
+                  <a:lnTo>
+                    <a:pt x="5041951" y="2626560"/>
+                  </a:lnTo>
+                  <a:lnTo>
+                    <a:pt x="5119585" y="2618572"/>
+                  </a:lnTo>
+                  <a:lnTo>
+                    <a:pt x="5197219" y="2610523"/>
+                  </a:lnTo>
+                  <a:lnTo>
+                    <a:pt x="5274853" y="2602410"/>
+                  </a:lnTo>
+                  <a:lnTo>
+                    <a:pt x="5352487" y="2594235"/>
+                  </a:lnTo>
+                  <a:lnTo>
+                    <a:pt x="5430121" y="2585996"/>
+                  </a:lnTo>
+                  <a:lnTo>
+                    <a:pt x="5507755" y="2577693"/>
+                  </a:lnTo>
+                  <a:lnTo>
+                    <a:pt x="5585389" y="2569325"/>
+                  </a:lnTo>
+                  <a:lnTo>
+                    <a:pt x="5663023" y="2560892"/>
+                  </a:lnTo>
+                  <a:lnTo>
+                    <a:pt x="5740657" y="2552394"/>
+                  </a:lnTo>
+                  <a:lnTo>
+                    <a:pt x="5818291" y="2543829"/>
+                  </a:lnTo>
+                  <a:lnTo>
+                    <a:pt x="5895925" y="2535198"/>
+                  </a:lnTo>
+                  <a:lnTo>
+                    <a:pt x="5973559" y="2526499"/>
+                  </a:lnTo>
+                  <a:lnTo>
+                    <a:pt x="6051193" y="2517733"/>
+                  </a:lnTo>
+                  <a:lnTo>
+                    <a:pt x="6128827" y="2508899"/>
+                  </a:lnTo>
+                  <a:lnTo>
+                    <a:pt x="6206462" y="2499995"/>
+                  </a:lnTo>
+                  <a:lnTo>
+                    <a:pt x="6284096" y="2491023"/>
+                  </a:lnTo>
+                  <a:lnTo>
+                    <a:pt x="6361730" y="2481980"/>
+                  </a:lnTo>
+                  <a:lnTo>
+                    <a:pt x="6439364" y="2472868"/>
+                  </a:lnTo>
+                  <a:lnTo>
+                    <a:pt x="6516998" y="2463684"/>
+                  </a:lnTo>
+                  <a:lnTo>
+                    <a:pt x="6594632" y="2454429"/>
+                  </a:lnTo>
+                  <a:lnTo>
+                    <a:pt x="6672266" y="2445101"/>
+                  </a:lnTo>
+                  <a:lnTo>
+                    <a:pt x="6749900" y="2435701"/>
+                  </a:lnTo>
+                  <a:lnTo>
+                    <a:pt x="6827534" y="2426228"/>
+                  </a:lnTo>
+                  <a:lnTo>
+                    <a:pt x="6905168" y="2416682"/>
+                  </a:lnTo>
+                  <a:lnTo>
+                    <a:pt x="6982802" y="2407060"/>
+                  </a:lnTo>
+                  <a:lnTo>
+                    <a:pt x="7060436" y="2397364"/>
+                  </a:lnTo>
+                  <a:lnTo>
+                    <a:pt x="7138070" y="2387593"/>
+                  </a:lnTo>
+                  <a:lnTo>
+                    <a:pt x="7215704" y="2377745"/>
+                  </a:lnTo>
+                  <a:lnTo>
+                    <a:pt x="7293338" y="2367821"/>
+                  </a:lnTo>
+                  <a:lnTo>
+                    <a:pt x="7370972" y="2357820"/>
+                  </a:lnTo>
+                  <a:lnTo>
+                    <a:pt x="7370972" y="3627349"/>
+                  </a:lnTo>
+                  <a:lnTo>
+                    <a:pt x="7293338" y="3625545"/>
+                  </a:lnTo>
+                  <a:lnTo>
+                    <a:pt x="7215704" y="3623611"/>
+                  </a:lnTo>
+                  <a:lnTo>
+                    <a:pt x="7138070" y="3621540"/>
+                  </a:lnTo>
+                  <a:lnTo>
+                    <a:pt x="7060436" y="3619320"/>
+                  </a:lnTo>
+                  <a:lnTo>
+                    <a:pt x="6982802" y="3616943"/>
+                  </a:lnTo>
+                  <a:lnTo>
+                    <a:pt x="6905168" y="3614396"/>
+                  </a:lnTo>
+                  <a:lnTo>
+                    <a:pt x="6827534" y="3611667"/>
+                  </a:lnTo>
+                  <a:lnTo>
+                    <a:pt x="6749900" y="3608743"/>
+                  </a:lnTo>
+                  <a:lnTo>
+                    <a:pt x="6672266" y="3605611"/>
+                  </a:lnTo>
+                  <a:lnTo>
+                    <a:pt x="6594632" y="3602255"/>
+                  </a:lnTo>
+                  <a:lnTo>
+                    <a:pt x="6516998" y="3598659"/>
+                  </a:lnTo>
+                  <a:lnTo>
+                    <a:pt x="6439364" y="3594808"/>
+                  </a:lnTo>
+                  <a:lnTo>
+                    <a:pt x="6361730" y="3590681"/>
+                  </a:lnTo>
+                  <a:lnTo>
+                    <a:pt x="6284096" y="3586260"/>
+                  </a:lnTo>
+                  <a:lnTo>
+                    <a:pt x="6206462" y="3581523"/>
+                  </a:lnTo>
+                  <a:lnTo>
+                    <a:pt x="6128827" y="3576449"/>
+                  </a:lnTo>
+                  <a:lnTo>
+                    <a:pt x="6051193" y="3571012"/>
+                  </a:lnTo>
+                  <a:lnTo>
+                    <a:pt x="5973559" y="3565188"/>
+                  </a:lnTo>
+                  <a:lnTo>
+                    <a:pt x="5895925" y="3558948"/>
+                  </a:lnTo>
+                  <a:lnTo>
+                    <a:pt x="5818291" y="3552263"/>
+                  </a:lnTo>
+                  <a:lnTo>
+                    <a:pt x="5740657" y="3545100"/>
+                  </a:lnTo>
+                  <a:lnTo>
+                    <a:pt x="5663023" y="3537427"/>
+                  </a:lnTo>
+                  <a:lnTo>
+                    <a:pt x="5585389" y="3529206"/>
+                  </a:lnTo>
+                  <a:lnTo>
+                    <a:pt x="5507755" y="3520399"/>
+                  </a:lnTo>
+                  <a:lnTo>
+                    <a:pt x="5430121" y="3510963"/>
+                  </a:lnTo>
+                  <a:lnTo>
+                    <a:pt x="5352487" y="3500854"/>
+                  </a:lnTo>
+                  <a:lnTo>
+                    <a:pt x="5274853" y="3490024"/>
+                  </a:lnTo>
+                  <a:lnTo>
+                    <a:pt x="5197219" y="3478421"/>
+                  </a:lnTo>
+                  <a:lnTo>
+                    <a:pt x="5119585" y="3465990"/>
+                  </a:lnTo>
+                  <a:lnTo>
+                    <a:pt x="5041951" y="3452672"/>
+                  </a:lnTo>
+                  <a:lnTo>
+                    <a:pt x="4964317" y="3438404"/>
+                  </a:lnTo>
+                  <a:lnTo>
+                    <a:pt x="4886683" y="3423118"/>
+                  </a:lnTo>
+                  <a:lnTo>
+                    <a:pt x="4809049" y="3406741"/>
+                  </a:lnTo>
+                  <a:lnTo>
+                    <a:pt x="4731415" y="3389196"/>
+                  </a:lnTo>
+                  <a:lnTo>
+                    <a:pt x="4653781" y="3370399"/>
+                  </a:lnTo>
+                  <a:lnTo>
+                    <a:pt x="4576147" y="3350260"/>
+                  </a:lnTo>
+                  <a:lnTo>
+                    <a:pt x="4498513" y="3328685"/>
+                  </a:lnTo>
+                  <a:lnTo>
+                    <a:pt x="4420879" y="3305570"/>
+                  </a:lnTo>
+                  <a:lnTo>
+                    <a:pt x="4343244" y="3280806"/>
+                  </a:lnTo>
+                  <a:lnTo>
+                    <a:pt x="4265610" y="3254275"/>
+                  </a:lnTo>
+                  <a:lnTo>
+                    <a:pt x="4187976" y="3225851"/>
+                  </a:lnTo>
+                  <a:lnTo>
+                    <a:pt x="4110342" y="3195399"/>
+                  </a:lnTo>
+                  <a:lnTo>
+                    <a:pt x="4032708" y="3162774"/>
+                  </a:lnTo>
+                  <a:lnTo>
+                    <a:pt x="3955074" y="3127822"/>
+                  </a:lnTo>
+                  <a:lnTo>
+                    <a:pt x="3877440" y="3090375"/>
+                  </a:lnTo>
+                  <a:lnTo>
+                    <a:pt x="3799806" y="3050257"/>
+                  </a:lnTo>
+                  <a:lnTo>
+                    <a:pt x="3722172" y="3007276"/>
+                  </a:lnTo>
+                  <a:lnTo>
+                    <a:pt x="3644538" y="2961229"/>
+                  </a:lnTo>
+                  <a:lnTo>
+                    <a:pt x="3566904" y="2911896"/>
+                  </a:lnTo>
+                  <a:lnTo>
+                    <a:pt x="3489270" y="2859043"/>
+                  </a:lnTo>
+                  <a:lnTo>
+                    <a:pt x="3411636" y="2802418"/>
+                  </a:lnTo>
+                  <a:lnTo>
+                    <a:pt x="3334002" y="2787485"/>
+                  </a:lnTo>
+                  <a:lnTo>
+                    <a:pt x="3256368" y="2794167"/>
+                  </a:lnTo>
+                  <a:lnTo>
+                    <a:pt x="3178734" y="2800798"/>
+                  </a:lnTo>
+                  <a:lnTo>
+                    <a:pt x="3101100" y="2807378"/>
+                  </a:lnTo>
+                  <a:lnTo>
+                    <a:pt x="3023466" y="2813907"/>
+                  </a:lnTo>
+                  <a:lnTo>
+                    <a:pt x="2945832" y="2820386"/>
+                  </a:lnTo>
+                  <a:lnTo>
+                    <a:pt x="2868198" y="2826814"/>
+                  </a:lnTo>
+                  <a:lnTo>
+                    <a:pt x="2790564" y="2833193"/>
+                  </a:lnTo>
+                  <a:lnTo>
+                    <a:pt x="2712930" y="2839523"/>
+                  </a:lnTo>
+                  <a:lnTo>
+                    <a:pt x="2635295" y="2845803"/>
+                  </a:lnTo>
+                  <a:lnTo>
+                    <a:pt x="2557661" y="2852035"/>
+                  </a:lnTo>
+                  <a:lnTo>
+                    <a:pt x="2480027" y="2858220"/>
+                  </a:lnTo>
+                  <a:lnTo>
+                    <a:pt x="2402393" y="2864356"/>
+                  </a:lnTo>
+                  <a:lnTo>
+                    <a:pt x="2324759" y="2870445"/>
+                  </a:lnTo>
+                  <a:lnTo>
+                    <a:pt x="2247125" y="2876487"/>
+                  </a:lnTo>
+                  <a:lnTo>
+                    <a:pt x="2169491" y="2882482"/>
+                  </a:lnTo>
+                  <a:lnTo>
+                    <a:pt x="2091857" y="2888431"/>
+                  </a:lnTo>
+                  <a:lnTo>
+                    <a:pt x="2014223" y="2894333"/>
+                  </a:lnTo>
+                  <a:lnTo>
+                    <a:pt x="1936589" y="2900191"/>
+                  </a:lnTo>
+                  <a:lnTo>
+                    <a:pt x="1858955" y="2906003"/>
+                  </a:lnTo>
+                  <a:lnTo>
+                    <a:pt x="1781321" y="2911770"/>
+                  </a:lnTo>
+                  <a:lnTo>
+                    <a:pt x="1703687" y="2917493"/>
+                  </a:lnTo>
+                  <a:lnTo>
+                    <a:pt x="1626053" y="2923171"/>
+                  </a:lnTo>
+                  <a:lnTo>
+                    <a:pt x="1548419" y="2928806"/>
+                  </a:lnTo>
+                  <a:lnTo>
+                    <a:pt x="1470785" y="2934397"/>
+                  </a:lnTo>
+                  <a:lnTo>
+                    <a:pt x="1393151" y="2939945"/>
+                  </a:lnTo>
+                  <a:lnTo>
+                    <a:pt x="1315517" y="2945450"/>
+                  </a:lnTo>
+                  <a:lnTo>
+                    <a:pt x="1237883" y="2950912"/>
+                  </a:lnTo>
+                  <a:lnTo>
+                    <a:pt x="1160249" y="2956332"/>
+                  </a:lnTo>
+                  <a:lnTo>
+                    <a:pt x="1082615" y="2961711"/>
+                  </a:lnTo>
+                  <a:lnTo>
+                    <a:pt x="1004981" y="2967048"/>
+                  </a:lnTo>
+                  <a:lnTo>
+                    <a:pt x="927346" y="2972343"/>
+                  </a:lnTo>
+                  <a:lnTo>
+                    <a:pt x="849712" y="2977598"/>
+                  </a:lnTo>
+                  <a:lnTo>
+                    <a:pt x="772078" y="2982812"/>
+                  </a:lnTo>
+                  <a:lnTo>
+                    <a:pt x="694444" y="2987986"/>
+                  </a:lnTo>
+                  <a:lnTo>
+                    <a:pt x="616810" y="2993120"/>
+                  </a:lnTo>
+                  <a:lnTo>
+                    <a:pt x="539176" y="2998215"/>
+                  </a:lnTo>
+                  <a:lnTo>
+                    <a:pt x="461542" y="3003269"/>
+                  </a:lnTo>
+                  <a:lnTo>
+                    <a:pt x="383908" y="3008285"/>
+                  </a:lnTo>
+                  <a:lnTo>
+                    <a:pt x="306274" y="3013262"/>
+                  </a:lnTo>
+                  <a:lnTo>
+                    <a:pt x="228640" y="3018201"/>
+                  </a:lnTo>
+                  <a:lnTo>
+                    <a:pt x="151006" y="3023102"/>
+                  </a:lnTo>
+                  <a:lnTo>
+                    <a:pt x="73372" y="3027964"/>
+                  </a:lnTo>
+                  <a:lnTo>
+                    <a:pt x="0" y="3032525"/>
                   </a:lnTo>
                   <a:close/>
                 </a:path>
@@ -3552,243 +3543,234 @@
           </p:nvSpPr>
           <p:spPr>
             <a:xfrm>
-              <a:off x="2336029" y="1896563"/>
-              <a:ext cx="5852460" cy="2859939"/>
+              <a:off x="2587489" y="1896563"/>
+              <a:ext cx="5601001" cy="2780750"/>
             </a:xfrm>
             <a:custGeom>
               <a:avLst/>
               <a:pathLst>
-                <a:path w="5852460" h="2859939">
+                <a:path w="5601001" h="2780750">
                   <a:moveTo>
                     <a:pt x="0" y="0"/>
                   </a:moveTo>
                   <a:lnTo>
-                    <a:pt x="29907" y="84468"/>
-                  </a:lnTo>
-                  <a:lnTo>
-                    <a:pt x="107541" y="291039"/>
-                  </a:lnTo>
-                  <a:lnTo>
-                    <a:pt x="185175" y="485651"/>
-                  </a:lnTo>
-                  <a:lnTo>
-                    <a:pt x="262809" y="668996"/>
-                  </a:lnTo>
-                  <a:lnTo>
-                    <a:pt x="340443" y="841726"/>
-                  </a:lnTo>
-                  <a:lnTo>
-                    <a:pt x="418077" y="1004457"/>
-                  </a:lnTo>
-                  <a:lnTo>
-                    <a:pt x="495711" y="1157768"/>
-                  </a:lnTo>
-                  <a:lnTo>
-                    <a:pt x="573345" y="1302202"/>
-                  </a:lnTo>
-                  <a:lnTo>
-                    <a:pt x="650979" y="1438275"/>
-                  </a:lnTo>
-                  <a:lnTo>
-                    <a:pt x="728613" y="1566470"/>
-                  </a:lnTo>
-                  <a:lnTo>
-                    <a:pt x="806247" y="1687244"/>
-                  </a:lnTo>
-                  <a:lnTo>
-                    <a:pt x="883882" y="1801026"/>
-                  </a:lnTo>
-                  <a:lnTo>
-                    <a:pt x="961516" y="1908221"/>
-                  </a:lnTo>
-                  <a:lnTo>
-                    <a:pt x="1039150" y="2009210"/>
-                  </a:lnTo>
-                  <a:lnTo>
-                    <a:pt x="1116784" y="2104352"/>
-                  </a:lnTo>
-                  <a:lnTo>
-                    <a:pt x="1194418" y="2193987"/>
-                  </a:lnTo>
-                  <a:lnTo>
-                    <a:pt x="1272052" y="2278432"/>
-                  </a:lnTo>
-                  <a:lnTo>
-                    <a:pt x="1349686" y="2357988"/>
-                  </a:lnTo>
-                  <a:lnTo>
-                    <a:pt x="1427320" y="2432939"/>
-                  </a:lnTo>
-                  <a:lnTo>
-                    <a:pt x="1504954" y="2503551"/>
-                  </a:lnTo>
-                  <a:lnTo>
-                    <a:pt x="1582588" y="2570075"/>
-                  </a:lnTo>
-                  <a:lnTo>
-                    <a:pt x="1660222" y="2632747"/>
-                  </a:lnTo>
-                  <a:lnTo>
-                    <a:pt x="1737856" y="2691792"/>
-                  </a:lnTo>
-                  <a:lnTo>
-                    <a:pt x="1815490" y="2747418"/>
-                  </a:lnTo>
-                  <a:lnTo>
-                    <a:pt x="1893124" y="2783481"/>
-                  </a:lnTo>
-                  <a:lnTo>
-                    <a:pt x="1970758" y="2785049"/>
-                  </a:lnTo>
-                  <a:lnTo>
-                    <a:pt x="2048392" y="2786614"/>
-                  </a:lnTo>
-                  <a:lnTo>
-                    <a:pt x="2126026" y="2788176"/>
-                  </a:lnTo>
-                  <a:lnTo>
-                    <a:pt x="2203660" y="2789736"/>
-                  </a:lnTo>
-                  <a:lnTo>
-                    <a:pt x="2281294" y="2791292"/>
-                  </a:lnTo>
-                  <a:lnTo>
-                    <a:pt x="2358928" y="2792846"/>
-                  </a:lnTo>
-                  <a:lnTo>
-                    <a:pt x="2436562" y="2794397"/>
-                  </a:lnTo>
-                  <a:lnTo>
-                    <a:pt x="2514196" y="2795945"/>
-                  </a:lnTo>
-                  <a:lnTo>
-                    <a:pt x="2591831" y="2797491"/>
-                  </a:lnTo>
-                  <a:lnTo>
-                    <a:pt x="2669465" y="2799033"/>
-                  </a:lnTo>
-                  <a:lnTo>
-                    <a:pt x="2747099" y="2800573"/>
-                  </a:lnTo>
-                  <a:lnTo>
-                    <a:pt x="2824733" y="2802110"/>
-                  </a:lnTo>
-                  <a:lnTo>
-                    <a:pt x="2902367" y="2803644"/>
-                  </a:lnTo>
-                  <a:lnTo>
-                    <a:pt x="2980001" y="2805176"/>
-                  </a:lnTo>
-                  <a:lnTo>
-                    <a:pt x="3057635" y="2806704"/>
-                  </a:lnTo>
-                  <a:lnTo>
-                    <a:pt x="3135269" y="2808230"/>
-                  </a:lnTo>
-                  <a:lnTo>
-                    <a:pt x="3212903" y="2809753"/>
-                  </a:lnTo>
-                  <a:lnTo>
-                    <a:pt x="3290537" y="2811274"/>
-                  </a:lnTo>
-                  <a:lnTo>
-                    <a:pt x="3368171" y="2812792"/>
-                  </a:lnTo>
-                  <a:lnTo>
-                    <a:pt x="3445805" y="2814306"/>
-                  </a:lnTo>
-                  <a:lnTo>
-                    <a:pt x="3523439" y="2815819"/>
-                  </a:lnTo>
-                  <a:lnTo>
-                    <a:pt x="3601073" y="2817328"/>
-                  </a:lnTo>
-                  <a:lnTo>
-                    <a:pt x="3678707" y="2818835"/>
-                  </a:lnTo>
-                  <a:lnTo>
-                    <a:pt x="3756341" y="2820339"/>
-                  </a:lnTo>
-                  <a:lnTo>
-                    <a:pt x="3833975" y="2821840"/>
-                  </a:lnTo>
-                  <a:lnTo>
-                    <a:pt x="3911609" y="2823339"/>
-                  </a:lnTo>
-                  <a:lnTo>
-                    <a:pt x="3989243" y="2824835"/>
-                  </a:lnTo>
-                  <a:lnTo>
-                    <a:pt x="4066877" y="2826328"/>
-                  </a:lnTo>
-                  <a:lnTo>
-                    <a:pt x="4144511" y="2827819"/>
-                  </a:lnTo>
-                  <a:lnTo>
-                    <a:pt x="4222145" y="2829307"/>
-                  </a:lnTo>
-                  <a:lnTo>
-                    <a:pt x="4299780" y="2830792"/>
-                  </a:lnTo>
-                  <a:lnTo>
-                    <a:pt x="4377414" y="2832274"/>
-                  </a:lnTo>
-                  <a:lnTo>
-                    <a:pt x="4455048" y="2833754"/>
-                  </a:lnTo>
-                  <a:lnTo>
-                    <a:pt x="4532682" y="2835231"/>
-                  </a:lnTo>
-                  <a:lnTo>
-                    <a:pt x="4610316" y="2836706"/>
-                  </a:lnTo>
-                  <a:lnTo>
-                    <a:pt x="4687950" y="2838178"/>
-                  </a:lnTo>
-                  <a:lnTo>
-                    <a:pt x="4765584" y="2839647"/>
-                  </a:lnTo>
-                  <a:lnTo>
-                    <a:pt x="4843218" y="2841113"/>
-                  </a:lnTo>
-                  <a:lnTo>
-                    <a:pt x="4920852" y="2842577"/>
-                  </a:lnTo>
-                  <a:lnTo>
-                    <a:pt x="4998486" y="2844038"/>
-                  </a:lnTo>
-                  <a:lnTo>
-                    <a:pt x="5076120" y="2845497"/>
-                  </a:lnTo>
-                  <a:lnTo>
-                    <a:pt x="5153754" y="2846953"/>
-                  </a:lnTo>
-                  <a:lnTo>
-                    <a:pt x="5231388" y="2848406"/>
-                  </a:lnTo>
-                  <a:lnTo>
-                    <a:pt x="5309022" y="2849857"/>
-                  </a:lnTo>
-                  <a:lnTo>
-                    <a:pt x="5386656" y="2851305"/>
-                  </a:lnTo>
-                  <a:lnTo>
-                    <a:pt x="5464290" y="2852750"/>
-                  </a:lnTo>
-                  <a:lnTo>
-                    <a:pt x="5541924" y="2854193"/>
-                  </a:lnTo>
-                  <a:lnTo>
-                    <a:pt x="5619558" y="2855634"/>
-                  </a:lnTo>
-                  <a:lnTo>
-                    <a:pt x="5697192" y="2857071"/>
-                  </a:lnTo>
-                  <a:lnTo>
-                    <a:pt x="5774826" y="2858506"/>
-                  </a:lnTo>
-                  <a:lnTo>
-                    <a:pt x="5852460" y="2859939"/>
+                    <a:pt x="11349" y="37708"/>
+                  </a:lnTo>
+                  <a:lnTo>
+                    <a:pt x="88983" y="278459"/>
+                  </a:lnTo>
+                  <a:lnTo>
+                    <a:pt x="166618" y="503177"/>
+                  </a:lnTo>
+                  <a:lnTo>
+                    <a:pt x="244252" y="712928"/>
+                  </a:lnTo>
+                  <a:lnTo>
+                    <a:pt x="321886" y="908710"/>
+                  </a:lnTo>
+                  <a:lnTo>
+                    <a:pt x="399520" y="1091453"/>
+                  </a:lnTo>
+                  <a:lnTo>
+                    <a:pt x="477154" y="1262026"/>
+                  </a:lnTo>
+                  <a:lnTo>
+                    <a:pt x="554788" y="1421239"/>
+                  </a:lnTo>
+                  <a:lnTo>
+                    <a:pt x="632422" y="1569848"/>
+                  </a:lnTo>
+                  <a:lnTo>
+                    <a:pt x="710056" y="1708560"/>
+                  </a:lnTo>
+                  <a:lnTo>
+                    <a:pt x="787690" y="1838034"/>
+                  </a:lnTo>
+                  <a:lnTo>
+                    <a:pt x="865324" y="1958886"/>
+                  </a:lnTo>
+                  <a:lnTo>
+                    <a:pt x="942958" y="2071688"/>
+                  </a:lnTo>
+                  <a:lnTo>
+                    <a:pt x="1020592" y="2176978"/>
+                  </a:lnTo>
+                  <a:lnTo>
+                    <a:pt x="1098226" y="2275256"/>
+                  </a:lnTo>
+                  <a:lnTo>
+                    <a:pt x="1175860" y="2366989"/>
+                  </a:lnTo>
+                  <a:lnTo>
+                    <a:pt x="1253494" y="2452612"/>
+                  </a:lnTo>
+                  <a:lnTo>
+                    <a:pt x="1331128" y="2532533"/>
+                  </a:lnTo>
+                  <a:lnTo>
+                    <a:pt x="1408762" y="2607131"/>
+                  </a:lnTo>
+                  <a:lnTo>
+                    <a:pt x="1486396" y="2676761"/>
+                  </a:lnTo>
+                  <a:lnTo>
+                    <a:pt x="1564030" y="2741754"/>
+                  </a:lnTo>
+                  <a:lnTo>
+                    <a:pt x="1641664" y="2780750"/>
+                  </a:lnTo>
+                  <a:lnTo>
+                    <a:pt x="1719298" y="2773963"/>
+                  </a:lnTo>
+                  <a:lnTo>
+                    <a:pt x="1796932" y="2767123"/>
+                  </a:lnTo>
+                  <a:lnTo>
+                    <a:pt x="1874567" y="2760230"/>
+                  </a:lnTo>
+                  <a:lnTo>
+                    <a:pt x="1952201" y="2753283"/>
+                  </a:lnTo>
+                  <a:lnTo>
+                    <a:pt x="2029835" y="2746282"/>
+                  </a:lnTo>
+                  <a:lnTo>
+                    <a:pt x="2107469" y="2739227"/>
+                  </a:lnTo>
+                  <a:lnTo>
+                    <a:pt x="2185103" y="2732116"/>
+                  </a:lnTo>
+                  <a:lnTo>
+                    <a:pt x="2262737" y="2724951"/>
+                  </a:lnTo>
+                  <a:lnTo>
+                    <a:pt x="2340371" y="2717729"/>
+                  </a:lnTo>
+                  <a:lnTo>
+                    <a:pt x="2418005" y="2710452"/>
+                  </a:lnTo>
+                  <a:lnTo>
+                    <a:pt x="2495639" y="2703117"/>
+                  </a:lnTo>
+                  <a:lnTo>
+                    <a:pt x="2573273" y="2695726"/>
+                  </a:lnTo>
+                  <a:lnTo>
+                    <a:pt x="2650907" y="2688277"/>
+                  </a:lnTo>
+                  <a:lnTo>
+                    <a:pt x="2728541" y="2680770"/>
+                  </a:lnTo>
+                  <a:lnTo>
+                    <a:pt x="2806175" y="2673205"/>
+                  </a:lnTo>
+                  <a:lnTo>
+                    <a:pt x="2883809" y="2665580"/>
+                  </a:lnTo>
+                  <a:lnTo>
+                    <a:pt x="2961443" y="2657897"/>
+                  </a:lnTo>
+                  <a:lnTo>
+                    <a:pt x="3039077" y="2650153"/>
+                  </a:lnTo>
+                  <a:lnTo>
+                    <a:pt x="3116711" y="2642350"/>
+                  </a:lnTo>
+                  <a:lnTo>
+                    <a:pt x="3194345" y="2634485"/>
+                  </a:lnTo>
+                  <a:lnTo>
+                    <a:pt x="3271979" y="2626560"/>
+                  </a:lnTo>
+                  <a:lnTo>
+                    <a:pt x="3349613" y="2618572"/>
+                  </a:lnTo>
+                  <a:lnTo>
+                    <a:pt x="3427247" y="2610523"/>
+                  </a:lnTo>
+                  <a:lnTo>
+                    <a:pt x="3504881" y="2602410"/>
+                  </a:lnTo>
+                  <a:lnTo>
+                    <a:pt x="3582516" y="2594235"/>
+                  </a:lnTo>
+                  <a:lnTo>
+                    <a:pt x="3660150" y="2585996"/>
+                  </a:lnTo>
+                  <a:lnTo>
+                    <a:pt x="3737784" y="2577693"/>
+                  </a:lnTo>
+                  <a:lnTo>
+                    <a:pt x="3815418" y="2569325"/>
+                  </a:lnTo>
+                  <a:lnTo>
+                    <a:pt x="3893052" y="2560892"/>
+                  </a:lnTo>
+                  <a:lnTo>
+                    <a:pt x="3970686" y="2552394"/>
+                  </a:lnTo>
+                  <a:lnTo>
+                    <a:pt x="4048320" y="2543829"/>
+                  </a:lnTo>
+                  <a:lnTo>
+                    <a:pt x="4125954" y="2535198"/>
+                  </a:lnTo>
+                  <a:lnTo>
+                    <a:pt x="4203588" y="2526499"/>
+                  </a:lnTo>
+                  <a:lnTo>
+                    <a:pt x="4281222" y="2517733"/>
+                  </a:lnTo>
+                  <a:lnTo>
+                    <a:pt x="4358856" y="2508899"/>
+                  </a:lnTo>
+                  <a:lnTo>
+                    <a:pt x="4436490" y="2499995"/>
+                  </a:lnTo>
+                  <a:lnTo>
+                    <a:pt x="4514124" y="2491023"/>
+                  </a:lnTo>
+                  <a:lnTo>
+                    <a:pt x="4591758" y="2481980"/>
+                  </a:lnTo>
+                  <a:lnTo>
+                    <a:pt x="4669392" y="2472868"/>
+                  </a:lnTo>
+                  <a:lnTo>
+                    <a:pt x="4747026" y="2463684"/>
+                  </a:lnTo>
+                  <a:lnTo>
+                    <a:pt x="4824660" y="2454429"/>
+                  </a:lnTo>
+                  <a:lnTo>
+                    <a:pt x="4902294" y="2445101"/>
+                  </a:lnTo>
+                  <a:lnTo>
+                    <a:pt x="4979928" y="2435701"/>
+                  </a:lnTo>
+                  <a:lnTo>
+                    <a:pt x="5057562" y="2426228"/>
+                  </a:lnTo>
+                  <a:lnTo>
+                    <a:pt x="5135196" y="2416682"/>
+                  </a:lnTo>
+                  <a:lnTo>
+                    <a:pt x="5212830" y="2407060"/>
+                  </a:lnTo>
+                  <a:lnTo>
+                    <a:pt x="5290464" y="2397364"/>
+                  </a:lnTo>
+                  <a:lnTo>
+                    <a:pt x="5368099" y="2387593"/>
+                  </a:lnTo>
+                  <a:lnTo>
+                    <a:pt x="5445733" y="2377745"/>
+                  </a:lnTo>
+                  <a:lnTo>
+                    <a:pt x="5523367" y="2367821"/>
+                  </a:lnTo>
+                  <a:lnTo>
+                    <a:pt x="5601001" y="2357820"/>
                   </a:lnTo>
                 </a:path>
               </a:pathLst>
@@ -3808,300 +3790,300 @@
           </p:nvSpPr>
           <p:spPr>
             <a:xfrm>
-              <a:off x="817517" y="4608275"/>
-              <a:ext cx="7370972" cy="900195"/>
+              <a:off x="817517" y="4684048"/>
+              <a:ext cx="7370972" cy="839864"/>
             </a:xfrm>
             <a:custGeom>
               <a:avLst/>
               <a:pathLst>
-                <a:path w="7370972" h="900195">
+                <a:path w="7370972" h="839864">
                   <a:moveTo>
-                    <a:pt x="7370972" y="900195"/>
+                    <a:pt x="7370972" y="839864"/>
                   </a:moveTo>
                   <a:lnTo>
-                    <a:pt x="7293338" y="897692"/>
-                  </a:lnTo>
-                  <a:lnTo>
-                    <a:pt x="7215704" y="895035"/>
-                  </a:lnTo>
-                  <a:lnTo>
-                    <a:pt x="7138070" y="892215"/>
-                  </a:lnTo>
-                  <a:lnTo>
-                    <a:pt x="7060436" y="889221"/>
-                  </a:lnTo>
-                  <a:lnTo>
-                    <a:pt x="6982802" y="886044"/>
-                  </a:lnTo>
-                  <a:lnTo>
-                    <a:pt x="6905168" y="882671"/>
-                  </a:lnTo>
-                  <a:lnTo>
-                    <a:pt x="6827534" y="879091"/>
-                  </a:lnTo>
-                  <a:lnTo>
-                    <a:pt x="6749900" y="875290"/>
-                  </a:lnTo>
-                  <a:lnTo>
-                    <a:pt x="6672266" y="871257"/>
-                  </a:lnTo>
-                  <a:lnTo>
-                    <a:pt x="6594632" y="866975"/>
-                  </a:lnTo>
-                  <a:lnTo>
-                    <a:pt x="6516998" y="862431"/>
-                  </a:lnTo>
-                  <a:lnTo>
-                    <a:pt x="6439364" y="857607"/>
-                  </a:lnTo>
-                  <a:lnTo>
-                    <a:pt x="6361730" y="852486"/>
-                  </a:lnTo>
-                  <a:lnTo>
-                    <a:pt x="6284096" y="847051"/>
-                  </a:lnTo>
-                  <a:lnTo>
-                    <a:pt x="6206462" y="841282"/>
-                  </a:lnTo>
-                  <a:lnTo>
-                    <a:pt x="6128827" y="835159"/>
-                  </a:lnTo>
-                  <a:lnTo>
-                    <a:pt x="6051193" y="828659"/>
-                  </a:lnTo>
-                  <a:lnTo>
-                    <a:pt x="5973559" y="821760"/>
-                  </a:lnTo>
-                  <a:lnTo>
-                    <a:pt x="5895925" y="814437"/>
-                  </a:lnTo>
-                  <a:lnTo>
-                    <a:pt x="5818291" y="806664"/>
-                  </a:lnTo>
-                  <a:lnTo>
-                    <a:pt x="5740657" y="798413"/>
-                  </a:lnTo>
-                  <a:lnTo>
-                    <a:pt x="5663023" y="789655"/>
-                  </a:lnTo>
-                  <a:lnTo>
-                    <a:pt x="5585389" y="780360"/>
-                  </a:lnTo>
-                  <a:lnTo>
-                    <a:pt x="5507755" y="770492"/>
-                  </a:lnTo>
-                  <a:lnTo>
-                    <a:pt x="5430121" y="760019"/>
-                  </a:lnTo>
-                  <a:lnTo>
-                    <a:pt x="5352487" y="748902"/>
-                  </a:lnTo>
-                  <a:lnTo>
-                    <a:pt x="5274853" y="737102"/>
-                  </a:lnTo>
-                  <a:lnTo>
-                    <a:pt x="5197219" y="724576"/>
-                  </a:lnTo>
-                  <a:lnTo>
-                    <a:pt x="5119585" y="711281"/>
-                  </a:lnTo>
-                  <a:lnTo>
-                    <a:pt x="5041951" y="697169"/>
-                  </a:lnTo>
-                  <a:lnTo>
-                    <a:pt x="4964317" y="682190"/>
-                  </a:lnTo>
-                  <a:lnTo>
-                    <a:pt x="4886683" y="666290"/>
-                  </a:lnTo>
-                  <a:lnTo>
-                    <a:pt x="4809049" y="649414"/>
-                  </a:lnTo>
-                  <a:lnTo>
-                    <a:pt x="4731415" y="631500"/>
-                  </a:lnTo>
-                  <a:lnTo>
-                    <a:pt x="4653781" y="612485"/>
-                  </a:lnTo>
-                  <a:lnTo>
-                    <a:pt x="4576147" y="592302"/>
-                  </a:lnTo>
-                  <a:lnTo>
-                    <a:pt x="4498513" y="570879"/>
-                  </a:lnTo>
-                  <a:lnTo>
-                    <a:pt x="4420879" y="548139"/>
-                  </a:lnTo>
-                  <a:lnTo>
-                    <a:pt x="4343244" y="524002"/>
-                  </a:lnTo>
-                  <a:lnTo>
-                    <a:pt x="4265610" y="498382"/>
-                  </a:lnTo>
-                  <a:lnTo>
-                    <a:pt x="4187976" y="471187"/>
-                  </a:lnTo>
-                  <a:lnTo>
-                    <a:pt x="4110342" y="442321"/>
-                  </a:lnTo>
-                  <a:lnTo>
-                    <a:pt x="4032708" y="411682"/>
-                  </a:lnTo>
-                  <a:lnTo>
-                    <a:pt x="3955074" y="379159"/>
-                  </a:lnTo>
-                  <a:lnTo>
-                    <a:pt x="3877440" y="344638"/>
-                  </a:lnTo>
-                  <a:lnTo>
-                    <a:pt x="3799806" y="307996"/>
-                  </a:lnTo>
-                  <a:lnTo>
-                    <a:pt x="3722172" y="269102"/>
-                  </a:lnTo>
-                  <a:lnTo>
-                    <a:pt x="3644538" y="227818"/>
-                  </a:lnTo>
-                  <a:lnTo>
-                    <a:pt x="3566904" y="183997"/>
-                  </a:lnTo>
-                  <a:lnTo>
-                    <a:pt x="3489270" y="137484"/>
-                  </a:lnTo>
-                  <a:lnTo>
-                    <a:pt x="3411636" y="88112"/>
-                  </a:lnTo>
-                  <a:lnTo>
-                    <a:pt x="3334002" y="70199"/>
-                  </a:lnTo>
-                  <a:lnTo>
-                    <a:pt x="3256368" y="68626"/>
-                  </a:lnTo>
-                  <a:lnTo>
-                    <a:pt x="3178734" y="67049"/>
-                  </a:lnTo>
-                  <a:lnTo>
-                    <a:pt x="3101100" y="65470"/>
-                  </a:lnTo>
-                  <a:lnTo>
-                    <a:pt x="3023466" y="63888"/>
-                  </a:lnTo>
-                  <a:lnTo>
-                    <a:pt x="2945832" y="62303"/>
-                  </a:lnTo>
-                  <a:lnTo>
-                    <a:pt x="2868198" y="60715"/>
-                  </a:lnTo>
-                  <a:lnTo>
-                    <a:pt x="2790564" y="59125"/>
-                  </a:lnTo>
-                  <a:lnTo>
-                    <a:pt x="2712930" y="57531"/>
-                  </a:lnTo>
-                  <a:lnTo>
-                    <a:pt x="2635295" y="55935"/>
-                  </a:lnTo>
-                  <a:lnTo>
-                    <a:pt x="2557661" y="54336"/>
-                  </a:lnTo>
-                  <a:lnTo>
-                    <a:pt x="2480027" y="52733"/>
-                  </a:lnTo>
-                  <a:lnTo>
-                    <a:pt x="2402393" y="51128"/>
-                  </a:lnTo>
-                  <a:lnTo>
-                    <a:pt x="2324759" y="49520"/>
-                  </a:lnTo>
-                  <a:lnTo>
-                    <a:pt x="2247125" y="47909"/>
-                  </a:lnTo>
-                  <a:lnTo>
-                    <a:pt x="2169491" y="46296"/>
-                  </a:lnTo>
-                  <a:lnTo>
-                    <a:pt x="2091857" y="44679"/>
-                  </a:lnTo>
-                  <a:lnTo>
-                    <a:pt x="2014223" y="43059"/>
-                  </a:lnTo>
-                  <a:lnTo>
-                    <a:pt x="1936589" y="41437"/>
-                  </a:lnTo>
-                  <a:lnTo>
-                    <a:pt x="1858955" y="39811"/>
-                  </a:lnTo>
-                  <a:lnTo>
-                    <a:pt x="1781321" y="38183"/>
-                  </a:lnTo>
-                  <a:lnTo>
-                    <a:pt x="1703687" y="36552"/>
-                  </a:lnTo>
-                  <a:lnTo>
-                    <a:pt x="1626053" y="34917"/>
-                  </a:lnTo>
-                  <a:lnTo>
-                    <a:pt x="1548419" y="33280"/>
-                  </a:lnTo>
-                  <a:lnTo>
-                    <a:pt x="1470785" y="31640"/>
-                  </a:lnTo>
-                  <a:lnTo>
-                    <a:pt x="1393151" y="29997"/>
-                  </a:lnTo>
-                  <a:lnTo>
-                    <a:pt x="1315517" y="28350"/>
-                  </a:lnTo>
-                  <a:lnTo>
-                    <a:pt x="1237883" y="26701"/>
-                  </a:lnTo>
-                  <a:lnTo>
-                    <a:pt x="1160249" y="25049"/>
-                  </a:lnTo>
-                  <a:lnTo>
-                    <a:pt x="1082615" y="23394"/>
-                  </a:lnTo>
-                  <a:lnTo>
-                    <a:pt x="1004981" y="21736"/>
-                  </a:lnTo>
-                  <a:lnTo>
-                    <a:pt x="927346" y="20075"/>
-                  </a:lnTo>
-                  <a:lnTo>
-                    <a:pt x="849712" y="18411"/>
-                  </a:lnTo>
-                  <a:lnTo>
-                    <a:pt x="772078" y="16744"/>
-                  </a:lnTo>
-                  <a:lnTo>
-                    <a:pt x="694444" y="15074"/>
-                  </a:lnTo>
-                  <a:lnTo>
-                    <a:pt x="616810" y="13401"/>
-                  </a:lnTo>
-                  <a:lnTo>
-                    <a:pt x="539176" y="11724"/>
-                  </a:lnTo>
-                  <a:lnTo>
-                    <a:pt x="461542" y="10045"/>
-                  </a:lnTo>
-                  <a:lnTo>
-                    <a:pt x="383908" y="8363"/>
-                  </a:lnTo>
-                  <a:lnTo>
-                    <a:pt x="306274" y="6678"/>
-                  </a:lnTo>
-                  <a:lnTo>
-                    <a:pt x="228640" y="4990"/>
-                  </a:lnTo>
-                  <a:lnTo>
-                    <a:pt x="151006" y="3298"/>
-                  </a:lnTo>
-                  <a:lnTo>
-                    <a:pt x="73372" y="1604"/>
-                  </a:lnTo>
-                  <a:lnTo>
-                    <a:pt x="0" y="0"/>
+                    <a:pt x="7293338" y="838060"/>
+                  </a:lnTo>
+                  <a:lnTo>
+                    <a:pt x="7215704" y="836126"/>
+                  </a:lnTo>
+                  <a:lnTo>
+                    <a:pt x="7138070" y="834055"/>
+                  </a:lnTo>
+                  <a:lnTo>
+                    <a:pt x="7060436" y="831835"/>
+                  </a:lnTo>
+                  <a:lnTo>
+                    <a:pt x="6982802" y="829458"/>
+                  </a:lnTo>
+                  <a:lnTo>
+                    <a:pt x="6905168" y="826910"/>
+                  </a:lnTo>
+                  <a:lnTo>
+                    <a:pt x="6827534" y="824181"/>
+                  </a:lnTo>
+                  <a:lnTo>
+                    <a:pt x="6749900" y="821258"/>
+                  </a:lnTo>
+                  <a:lnTo>
+                    <a:pt x="6672266" y="818125"/>
+                  </a:lnTo>
+                  <a:lnTo>
+                    <a:pt x="6594632" y="814770"/>
+                  </a:lnTo>
+                  <a:lnTo>
+                    <a:pt x="6516998" y="811174"/>
+                  </a:lnTo>
+                  <a:lnTo>
+                    <a:pt x="6439364" y="807322"/>
+                  </a:lnTo>
+                  <a:lnTo>
+                    <a:pt x="6361730" y="803196"/>
+                  </a:lnTo>
+                  <a:lnTo>
+                    <a:pt x="6284096" y="798775"/>
+                  </a:lnTo>
+                  <a:lnTo>
+                    <a:pt x="6206462" y="794038"/>
+                  </a:lnTo>
+                  <a:lnTo>
+                    <a:pt x="6128827" y="788964"/>
+                  </a:lnTo>
+                  <a:lnTo>
+                    <a:pt x="6051193" y="783527"/>
+                  </a:lnTo>
+                  <a:lnTo>
+                    <a:pt x="5973559" y="777703"/>
+                  </a:lnTo>
+                  <a:lnTo>
+                    <a:pt x="5895925" y="771463"/>
+                  </a:lnTo>
+                  <a:lnTo>
+                    <a:pt x="5818291" y="764778"/>
+                  </a:lnTo>
+                  <a:lnTo>
+                    <a:pt x="5740657" y="757615"/>
+                  </a:lnTo>
+                  <a:lnTo>
+                    <a:pt x="5663023" y="749942"/>
+                  </a:lnTo>
+                  <a:lnTo>
+                    <a:pt x="5585389" y="741721"/>
+                  </a:lnTo>
+                  <a:lnTo>
+                    <a:pt x="5507755" y="732914"/>
+                  </a:lnTo>
+                  <a:lnTo>
+                    <a:pt x="5430121" y="723478"/>
+                  </a:lnTo>
+                  <a:lnTo>
+                    <a:pt x="5352487" y="713369"/>
+                  </a:lnTo>
+                  <a:lnTo>
+                    <a:pt x="5274853" y="702539"/>
+                  </a:lnTo>
+                  <a:lnTo>
+                    <a:pt x="5197219" y="690936"/>
+                  </a:lnTo>
+                  <a:lnTo>
+                    <a:pt x="5119585" y="678505"/>
+                  </a:lnTo>
+                  <a:lnTo>
+                    <a:pt x="5041951" y="665187"/>
+                  </a:lnTo>
+                  <a:lnTo>
+                    <a:pt x="4964317" y="650919"/>
+                  </a:lnTo>
+                  <a:lnTo>
+                    <a:pt x="4886683" y="635633"/>
+                  </a:lnTo>
+                  <a:lnTo>
+                    <a:pt x="4809049" y="619256"/>
+                  </a:lnTo>
+                  <a:lnTo>
+                    <a:pt x="4731415" y="601711"/>
+                  </a:lnTo>
+                  <a:lnTo>
+                    <a:pt x="4653781" y="582913"/>
+                  </a:lnTo>
+                  <a:lnTo>
+                    <a:pt x="4576147" y="562775"/>
+                  </a:lnTo>
+                  <a:lnTo>
+                    <a:pt x="4498513" y="541200"/>
+                  </a:lnTo>
+                  <a:lnTo>
+                    <a:pt x="4420879" y="518085"/>
+                  </a:lnTo>
+                  <a:lnTo>
+                    <a:pt x="4343244" y="493321"/>
+                  </a:lnTo>
+                  <a:lnTo>
+                    <a:pt x="4265610" y="466790"/>
+                  </a:lnTo>
+                  <a:lnTo>
+                    <a:pt x="4187976" y="438366"/>
+                  </a:lnTo>
+                  <a:lnTo>
+                    <a:pt x="4110342" y="407914"/>
+                  </a:lnTo>
+                  <a:lnTo>
+                    <a:pt x="4032708" y="375289"/>
+                  </a:lnTo>
+                  <a:lnTo>
+                    <a:pt x="3955074" y="340337"/>
+                  </a:lnTo>
+                  <a:lnTo>
+                    <a:pt x="3877440" y="302890"/>
+                  </a:lnTo>
+                  <a:lnTo>
+                    <a:pt x="3799806" y="262772"/>
+                  </a:lnTo>
+                  <a:lnTo>
+                    <a:pt x="3722172" y="219791"/>
+                  </a:lnTo>
+                  <a:lnTo>
+                    <a:pt x="3644538" y="173744"/>
+                  </a:lnTo>
+                  <a:lnTo>
+                    <a:pt x="3566904" y="124410"/>
+                  </a:lnTo>
+                  <a:lnTo>
+                    <a:pt x="3489270" y="71557"/>
+                  </a:lnTo>
+                  <a:lnTo>
+                    <a:pt x="3411636" y="14933"/>
+                  </a:lnTo>
+                  <a:lnTo>
+                    <a:pt x="3334002" y="0"/>
+                  </a:lnTo>
+                  <a:lnTo>
+                    <a:pt x="3256368" y="6682"/>
+                  </a:lnTo>
+                  <a:lnTo>
+                    <a:pt x="3178734" y="13313"/>
+                  </a:lnTo>
+                  <a:lnTo>
+                    <a:pt x="3101100" y="19893"/>
+                  </a:lnTo>
+                  <a:lnTo>
+                    <a:pt x="3023466" y="26422"/>
+                  </a:lnTo>
+                  <a:lnTo>
+                    <a:pt x="2945832" y="32901"/>
+                  </a:lnTo>
+                  <a:lnTo>
+                    <a:pt x="2868198" y="39329"/>
+                  </a:lnTo>
+                  <a:lnTo>
+                    <a:pt x="2790564" y="45708"/>
+                  </a:lnTo>
+                  <a:lnTo>
+                    <a:pt x="2712930" y="52037"/>
+                  </a:lnTo>
+                  <a:lnTo>
+                    <a:pt x="2635295" y="58318"/>
+                  </a:lnTo>
+                  <a:lnTo>
+                    <a:pt x="2557661" y="64550"/>
+                  </a:lnTo>
+                  <a:lnTo>
+                    <a:pt x="2480027" y="70734"/>
+                  </a:lnTo>
+                  <a:lnTo>
+                    <a:pt x="2402393" y="76871"/>
+                  </a:lnTo>
+                  <a:lnTo>
+                    <a:pt x="2324759" y="82960"/>
+                  </a:lnTo>
+                  <a:lnTo>
+                    <a:pt x="2247125" y="89001"/>
+                  </a:lnTo>
+                  <a:lnTo>
+                    <a:pt x="2169491" y="94997"/>
+                  </a:lnTo>
+                  <a:lnTo>
+                    <a:pt x="2091857" y="100945"/>
+                  </a:lnTo>
+                  <a:lnTo>
+                    <a:pt x="2014223" y="106848"/>
+                  </a:lnTo>
+                  <a:lnTo>
+                    <a:pt x="1936589" y="112706"/>
+                  </a:lnTo>
+                  <a:lnTo>
+                    <a:pt x="1858955" y="118518"/>
+                  </a:lnTo>
+                  <a:lnTo>
+                    <a:pt x="1781321" y="124285"/>
+                  </a:lnTo>
+                  <a:lnTo>
+                    <a:pt x="1703687" y="130008"/>
+                  </a:lnTo>
+                  <a:lnTo>
+                    <a:pt x="1626053" y="135686"/>
+                  </a:lnTo>
+                  <a:lnTo>
+                    <a:pt x="1548419" y="141321"/>
+                  </a:lnTo>
+                  <a:lnTo>
+                    <a:pt x="1470785" y="146912"/>
+                  </a:lnTo>
+                  <a:lnTo>
+                    <a:pt x="1393151" y="152460"/>
+                  </a:lnTo>
+                  <a:lnTo>
+                    <a:pt x="1315517" y="157965"/>
+                  </a:lnTo>
+                  <a:lnTo>
+                    <a:pt x="1237883" y="163427"/>
+                  </a:lnTo>
+                  <a:lnTo>
+                    <a:pt x="1160249" y="168847"/>
+                  </a:lnTo>
+                  <a:lnTo>
+                    <a:pt x="1082615" y="174226"/>
+                  </a:lnTo>
+                  <a:lnTo>
+                    <a:pt x="1004981" y="179563"/>
+                  </a:lnTo>
+                  <a:lnTo>
+                    <a:pt x="927346" y="184858"/>
+                  </a:lnTo>
+                  <a:lnTo>
+                    <a:pt x="849712" y="190113"/>
+                  </a:lnTo>
+                  <a:lnTo>
+                    <a:pt x="772078" y="195327"/>
+                  </a:lnTo>
+                  <a:lnTo>
+                    <a:pt x="694444" y="200501"/>
+                  </a:lnTo>
+                  <a:lnTo>
+                    <a:pt x="616810" y="205635"/>
+                  </a:lnTo>
+                  <a:lnTo>
+                    <a:pt x="539176" y="210729"/>
+                  </a:lnTo>
+                  <a:lnTo>
+                    <a:pt x="461542" y="215784"/>
+                  </a:lnTo>
+                  <a:lnTo>
+                    <a:pt x="383908" y="220800"/>
+                  </a:lnTo>
+                  <a:lnTo>
+                    <a:pt x="306274" y="225777"/>
+                  </a:lnTo>
+                  <a:lnTo>
+                    <a:pt x="228640" y="230716"/>
+                  </a:lnTo>
+                  <a:lnTo>
+                    <a:pt x="151006" y="235617"/>
+                  </a:lnTo>
+                  <a:lnTo>
+                    <a:pt x="73372" y="240479"/>
+                  </a:lnTo>
+                  <a:lnTo>
+                    <a:pt x="0" y="245040"/>
                   </a:lnTo>
                 </a:path>
               </a:pathLst>
@@ -4121,300 +4103,300 @@
           </p:nvSpPr>
           <p:spPr>
             <a:xfrm>
-              <a:off x="817517" y="2227990"/>
-              <a:ext cx="7370972" cy="3141518"/>
+              <a:off x="817517" y="2247859"/>
+              <a:ext cx="7370972" cy="3120375"/>
             </a:xfrm>
             <a:custGeom>
               <a:avLst/>
               <a:pathLst>
-                <a:path w="7370972" h="3141518">
+                <a:path w="7370972" h="3120375">
                   <a:moveTo>
                     <a:pt x="0" y="0"/>
                   </a:moveTo>
                   <a:lnTo>
-                    <a:pt x="73372" y="95121"/>
-                  </a:lnTo>
-                  <a:lnTo>
-                    <a:pt x="151006" y="192722"/>
-                  </a:lnTo>
-                  <a:lnTo>
-                    <a:pt x="228640" y="287370"/>
-                  </a:lnTo>
-                  <a:lnTo>
-                    <a:pt x="306274" y="379155"/>
-                  </a:lnTo>
-                  <a:lnTo>
-                    <a:pt x="383908" y="468163"/>
-                  </a:lnTo>
-                  <a:lnTo>
-                    <a:pt x="461542" y="554478"/>
-                  </a:lnTo>
-                  <a:lnTo>
-                    <a:pt x="539176" y="638182"/>
-                  </a:lnTo>
-                  <a:lnTo>
-                    <a:pt x="616810" y="719353"/>
-                  </a:lnTo>
-                  <a:lnTo>
-                    <a:pt x="694444" y="798069"/>
-                  </a:lnTo>
-                  <a:lnTo>
-                    <a:pt x="772078" y="874403"/>
-                  </a:lnTo>
-                  <a:lnTo>
-                    <a:pt x="849712" y="948428"/>
-                  </a:lnTo>
-                  <a:lnTo>
-                    <a:pt x="927346" y="1020213"/>
-                  </a:lnTo>
-                  <a:lnTo>
-                    <a:pt x="1004981" y="1089827"/>
-                  </a:lnTo>
-                  <a:lnTo>
-                    <a:pt x="1082615" y="1157334"/>
-                  </a:lnTo>
-                  <a:lnTo>
-                    <a:pt x="1160249" y="1222800"/>
-                  </a:lnTo>
-                  <a:lnTo>
-                    <a:pt x="1237883" y="1286284"/>
-                  </a:lnTo>
-                  <a:lnTo>
-                    <a:pt x="1315517" y="1347848"/>
-                  </a:lnTo>
-                  <a:lnTo>
-                    <a:pt x="1393151" y="1407550"/>
-                  </a:lnTo>
-                  <a:lnTo>
-                    <a:pt x="1470785" y="1465445"/>
-                  </a:lnTo>
-                  <a:lnTo>
-                    <a:pt x="1548419" y="1521589"/>
-                  </a:lnTo>
-                  <a:lnTo>
-                    <a:pt x="1626053" y="1576034"/>
-                  </a:lnTo>
-                  <a:lnTo>
-                    <a:pt x="1703687" y="1628832"/>
-                  </a:lnTo>
-                  <a:lnTo>
-                    <a:pt x="1781321" y="1680033"/>
-                  </a:lnTo>
-                  <a:lnTo>
-                    <a:pt x="1858955" y="1729685"/>
-                  </a:lnTo>
-                  <a:lnTo>
-                    <a:pt x="1936589" y="1777834"/>
-                  </a:lnTo>
-                  <a:lnTo>
-                    <a:pt x="2014223" y="1824527"/>
-                  </a:lnTo>
-                  <a:lnTo>
-                    <a:pt x="2091857" y="1869807"/>
-                  </a:lnTo>
-                  <a:lnTo>
-                    <a:pt x="2169491" y="1913718"/>
-                  </a:lnTo>
-                  <a:lnTo>
-                    <a:pt x="2247125" y="1956300"/>
-                  </a:lnTo>
-                  <a:lnTo>
-                    <a:pt x="2324759" y="1997593"/>
-                  </a:lnTo>
-                  <a:lnTo>
-                    <a:pt x="2402393" y="2037638"/>
-                  </a:lnTo>
-                  <a:lnTo>
-                    <a:pt x="2480027" y="2076470"/>
-                  </a:lnTo>
-                  <a:lnTo>
-                    <a:pt x="2557661" y="2114128"/>
-                  </a:lnTo>
-                  <a:lnTo>
-                    <a:pt x="2635295" y="2150647"/>
-                  </a:lnTo>
-                  <a:lnTo>
-                    <a:pt x="2712930" y="2186061"/>
-                  </a:lnTo>
-                  <a:lnTo>
-                    <a:pt x="2790564" y="2220404"/>
-                  </a:lnTo>
-                  <a:lnTo>
-                    <a:pt x="2868198" y="2253707"/>
-                  </a:lnTo>
-                  <a:lnTo>
-                    <a:pt x="2945832" y="2286003"/>
-                  </a:lnTo>
-                  <a:lnTo>
-                    <a:pt x="3023466" y="2317322"/>
-                  </a:lnTo>
-                  <a:lnTo>
-                    <a:pt x="3101100" y="2347694"/>
-                  </a:lnTo>
-                  <a:lnTo>
-                    <a:pt x="3178734" y="2377146"/>
-                  </a:lnTo>
-                  <a:lnTo>
-                    <a:pt x="3256368" y="2405708"/>
-                  </a:lnTo>
-                  <a:lnTo>
-                    <a:pt x="3334002" y="2433405"/>
-                  </a:lnTo>
-                  <a:lnTo>
-                    <a:pt x="3411636" y="2460265"/>
-                  </a:lnTo>
-                  <a:lnTo>
-                    <a:pt x="3489270" y="2486312"/>
-                  </a:lnTo>
-                  <a:lnTo>
-                    <a:pt x="3566904" y="2511570"/>
-                  </a:lnTo>
-                  <a:lnTo>
-                    <a:pt x="3644538" y="2536065"/>
-                  </a:lnTo>
-                  <a:lnTo>
-                    <a:pt x="3722172" y="2559819"/>
-                  </a:lnTo>
-                  <a:lnTo>
-                    <a:pt x="3799806" y="2582854"/>
-                  </a:lnTo>
-                  <a:lnTo>
-                    <a:pt x="3877440" y="2605192"/>
-                  </a:lnTo>
-                  <a:lnTo>
-                    <a:pt x="3955074" y="2626854"/>
-                  </a:lnTo>
-                  <a:lnTo>
-                    <a:pt x="4032708" y="2647861"/>
-                  </a:lnTo>
-                  <a:lnTo>
-                    <a:pt x="4110342" y="2668233"/>
-                  </a:lnTo>
-                  <a:lnTo>
-                    <a:pt x="4187976" y="2687988"/>
-                  </a:lnTo>
-                  <a:lnTo>
-                    <a:pt x="4265610" y="2707145"/>
-                  </a:lnTo>
-                  <a:lnTo>
-                    <a:pt x="4343244" y="2725723"/>
-                  </a:lnTo>
-                  <a:lnTo>
-                    <a:pt x="4420879" y="2743739"/>
-                  </a:lnTo>
-                  <a:lnTo>
-                    <a:pt x="4498513" y="2761210"/>
-                  </a:lnTo>
-                  <a:lnTo>
-                    <a:pt x="4576147" y="2778152"/>
-                  </a:lnTo>
-                  <a:lnTo>
-                    <a:pt x="4653781" y="2794582"/>
-                  </a:lnTo>
-                  <a:lnTo>
-                    <a:pt x="4731415" y="2810514"/>
-                  </a:lnTo>
-                  <a:lnTo>
-                    <a:pt x="4809049" y="2825965"/>
-                  </a:lnTo>
-                  <a:lnTo>
-                    <a:pt x="4886683" y="2840948"/>
-                  </a:lnTo>
-                  <a:lnTo>
-                    <a:pt x="4964317" y="2855478"/>
-                  </a:lnTo>
-                  <a:lnTo>
-                    <a:pt x="5041951" y="2869568"/>
-                  </a:lnTo>
-                  <a:lnTo>
-                    <a:pt x="5119585" y="2883232"/>
-                  </a:lnTo>
-                  <a:lnTo>
-                    <a:pt x="5197219" y="2896483"/>
-                  </a:lnTo>
-                  <a:lnTo>
-                    <a:pt x="5274853" y="2909332"/>
-                  </a:lnTo>
-                  <a:lnTo>
-                    <a:pt x="5352487" y="2921793"/>
-                  </a:lnTo>
-                  <a:lnTo>
-                    <a:pt x="5430121" y="2933877"/>
-                  </a:lnTo>
-                  <a:lnTo>
-                    <a:pt x="5507755" y="2945596"/>
-                  </a:lnTo>
-                  <a:lnTo>
-                    <a:pt x="5585389" y="2956960"/>
-                  </a:lnTo>
-                  <a:lnTo>
-                    <a:pt x="5663023" y="2967980"/>
-                  </a:lnTo>
-                  <a:lnTo>
-                    <a:pt x="5740657" y="2978666"/>
-                  </a:lnTo>
-                  <a:lnTo>
-                    <a:pt x="5818291" y="2989030"/>
-                  </a:lnTo>
-                  <a:lnTo>
-                    <a:pt x="5895925" y="2999080"/>
-                  </a:lnTo>
-                  <a:lnTo>
-                    <a:pt x="5973559" y="3008825"/>
-                  </a:lnTo>
-                  <a:lnTo>
-                    <a:pt x="6051193" y="3018276"/>
-                  </a:lnTo>
-                  <a:lnTo>
-                    <a:pt x="6128827" y="3027441"/>
-                  </a:lnTo>
-                  <a:lnTo>
-                    <a:pt x="6206462" y="3036329"/>
-                  </a:lnTo>
-                  <a:lnTo>
-                    <a:pt x="6284096" y="3044948"/>
-                  </a:lnTo>
-                  <a:lnTo>
-                    <a:pt x="6361730" y="3053306"/>
-                  </a:lnTo>
-                  <a:lnTo>
-                    <a:pt x="6439364" y="3061411"/>
-                  </a:lnTo>
-                  <a:lnTo>
-                    <a:pt x="6516998" y="3069271"/>
-                  </a:lnTo>
-                  <a:lnTo>
-                    <a:pt x="6594632" y="3076894"/>
-                  </a:lnTo>
-                  <a:lnTo>
-                    <a:pt x="6672266" y="3084285"/>
-                  </a:lnTo>
-                  <a:lnTo>
-                    <a:pt x="6749900" y="3091453"/>
-                  </a:lnTo>
-                  <a:lnTo>
-                    <a:pt x="6827534" y="3098405"/>
-                  </a:lnTo>
-                  <a:lnTo>
-                    <a:pt x="6905168" y="3105145"/>
-                  </a:lnTo>
-                  <a:lnTo>
-                    <a:pt x="6982802" y="3111682"/>
-                  </a:lnTo>
-                  <a:lnTo>
-                    <a:pt x="7060436" y="3118022"/>
-                  </a:lnTo>
-                  <a:lnTo>
-                    <a:pt x="7138070" y="3124169"/>
-                  </a:lnTo>
-                  <a:lnTo>
-                    <a:pt x="7215704" y="3130130"/>
-                  </a:lnTo>
-                  <a:lnTo>
-                    <a:pt x="7293338" y="3135911"/>
-                  </a:lnTo>
-                  <a:lnTo>
-                    <a:pt x="7370972" y="3141518"/>
+                    <a:pt x="73372" y="94134"/>
+                  </a:lnTo>
+                  <a:lnTo>
+                    <a:pt x="151006" y="190736"/>
+                  </a:lnTo>
+                  <a:lnTo>
+                    <a:pt x="228640" y="284428"/>
+                  </a:lnTo>
+                  <a:lnTo>
+                    <a:pt x="306274" y="375298"/>
+                  </a:lnTo>
+                  <a:lnTo>
+                    <a:pt x="383908" y="463431"/>
+                  </a:lnTo>
+                  <a:lnTo>
+                    <a:pt x="461542" y="548910"/>
+                  </a:lnTo>
+                  <a:lnTo>
+                    <a:pt x="539176" y="631814"/>
+                  </a:lnTo>
+                  <a:lnTo>
+                    <a:pt x="616810" y="712221"/>
+                  </a:lnTo>
+                  <a:lnTo>
+                    <a:pt x="694444" y="790206"/>
+                  </a:lnTo>
+                  <a:lnTo>
+                    <a:pt x="772078" y="865842"/>
+                  </a:lnTo>
+                  <a:lnTo>
+                    <a:pt x="849712" y="939200"/>
+                  </a:lnTo>
+                  <a:lnTo>
+                    <a:pt x="927346" y="1010348"/>
+                  </a:lnTo>
+                  <a:lnTo>
+                    <a:pt x="1004981" y="1079353"/>
+                  </a:lnTo>
+                  <a:lnTo>
+                    <a:pt x="1082615" y="1146280"/>
+                  </a:lnTo>
+                  <a:lnTo>
+                    <a:pt x="1160249" y="1211191"/>
+                  </a:lnTo>
+                  <a:lnTo>
+                    <a:pt x="1237883" y="1274147"/>
+                  </a:lnTo>
+                  <a:lnTo>
+                    <a:pt x="1315517" y="1335207"/>
+                  </a:lnTo>
+                  <a:lnTo>
+                    <a:pt x="1393151" y="1394427"/>
+                  </a:lnTo>
+                  <a:lnTo>
+                    <a:pt x="1470785" y="1451864"/>
+                  </a:lnTo>
+                  <a:lnTo>
+                    <a:pt x="1548419" y="1507571"/>
+                  </a:lnTo>
+                  <a:lnTo>
+                    <a:pt x="1626053" y="1561600"/>
+                  </a:lnTo>
+                  <a:lnTo>
+                    <a:pt x="1703687" y="1614001"/>
+                  </a:lnTo>
+                  <a:lnTo>
+                    <a:pt x="1781321" y="1664824"/>
+                  </a:lnTo>
+                  <a:lnTo>
+                    <a:pt x="1858955" y="1714117"/>
+                  </a:lnTo>
+                  <a:lnTo>
+                    <a:pt x="1936589" y="1761924"/>
+                  </a:lnTo>
+                  <a:lnTo>
+                    <a:pt x="2014223" y="1808292"/>
+                  </a:lnTo>
+                  <a:lnTo>
+                    <a:pt x="2091857" y="1853263"/>
+                  </a:lnTo>
+                  <a:lnTo>
+                    <a:pt x="2169491" y="1896880"/>
+                  </a:lnTo>
+                  <a:lnTo>
+                    <a:pt x="2247125" y="1939183"/>
+                  </a:lnTo>
+                  <a:lnTo>
+                    <a:pt x="2324759" y="1980211"/>
+                  </a:lnTo>
+                  <a:lnTo>
+                    <a:pt x="2402393" y="2020004"/>
+                  </a:lnTo>
+                  <a:lnTo>
+                    <a:pt x="2480027" y="2058598"/>
+                  </a:lnTo>
+                  <a:lnTo>
+                    <a:pt x="2557661" y="2096030"/>
+                  </a:lnTo>
+                  <a:lnTo>
+                    <a:pt x="2635295" y="2132335"/>
+                  </a:lnTo>
+                  <a:lnTo>
+                    <a:pt x="2712930" y="2167545"/>
+                  </a:lnTo>
+                  <a:lnTo>
+                    <a:pt x="2790564" y="2201696"/>
+                  </a:lnTo>
+                  <a:lnTo>
+                    <a:pt x="2868198" y="2234818"/>
+                  </a:lnTo>
+                  <a:lnTo>
+                    <a:pt x="2945832" y="2266942"/>
+                  </a:lnTo>
+                  <a:lnTo>
+                    <a:pt x="3023466" y="2298098"/>
+                  </a:lnTo>
+                  <a:lnTo>
+                    <a:pt x="3101100" y="2328316"/>
+                  </a:lnTo>
+                  <a:lnTo>
+                    <a:pt x="3178734" y="2357624"/>
+                  </a:lnTo>
+                  <a:lnTo>
+                    <a:pt x="3256368" y="2386049"/>
+                  </a:lnTo>
+                  <a:lnTo>
+                    <a:pt x="3334002" y="2413618"/>
+                  </a:lnTo>
+                  <a:lnTo>
+                    <a:pt x="3411636" y="2440357"/>
+                  </a:lnTo>
+                  <a:lnTo>
+                    <a:pt x="3489270" y="2466290"/>
+                  </a:lnTo>
+                  <a:lnTo>
+                    <a:pt x="3566904" y="2491442"/>
+                  </a:lnTo>
+                  <a:lnTo>
+                    <a:pt x="3644538" y="2515837"/>
+                  </a:lnTo>
+                  <a:lnTo>
+                    <a:pt x="3722172" y="2539496"/>
+                  </a:lnTo>
+                  <a:lnTo>
+                    <a:pt x="3799806" y="2562443"/>
+                  </a:lnTo>
+                  <a:lnTo>
+                    <a:pt x="3877440" y="2584699"/>
+                  </a:lnTo>
+                  <a:lnTo>
+                    <a:pt x="3955074" y="2606285"/>
+                  </a:lnTo>
+                  <a:lnTo>
+                    <a:pt x="4032708" y="2627220"/>
+                  </a:lnTo>
+                  <a:lnTo>
+                    <a:pt x="4110342" y="2647525"/>
+                  </a:lnTo>
+                  <a:lnTo>
+                    <a:pt x="4187976" y="2667218"/>
+                  </a:lnTo>
+                  <a:lnTo>
+                    <a:pt x="4265610" y="2686318"/>
+                  </a:lnTo>
+                  <a:lnTo>
+                    <a:pt x="4343244" y="2704843"/>
+                  </a:lnTo>
+                  <a:lnTo>
+                    <a:pt x="4420879" y="2722810"/>
+                  </a:lnTo>
+                  <a:lnTo>
+                    <a:pt x="4498513" y="2740236"/>
+                  </a:lnTo>
+                  <a:lnTo>
+                    <a:pt x="4576147" y="2757137"/>
+                  </a:lnTo>
+                  <a:lnTo>
+                    <a:pt x="4653781" y="2773528"/>
+                  </a:lnTo>
+                  <a:lnTo>
+                    <a:pt x="4731415" y="2789426"/>
+                  </a:lnTo>
+                  <a:lnTo>
+                    <a:pt x="4809049" y="2804845"/>
+                  </a:lnTo>
+                  <a:lnTo>
+                    <a:pt x="4886683" y="2819800"/>
+                  </a:lnTo>
+                  <a:lnTo>
+                    <a:pt x="4964317" y="2834304"/>
+                  </a:lnTo>
+                  <a:lnTo>
+                    <a:pt x="5041951" y="2848372"/>
+                  </a:lnTo>
+                  <a:lnTo>
+                    <a:pt x="5119585" y="2862016"/>
+                  </a:lnTo>
+                  <a:lnTo>
+                    <a:pt x="5197219" y="2875248"/>
+                  </a:lnTo>
+                  <a:lnTo>
+                    <a:pt x="5274853" y="2888083"/>
+                  </a:lnTo>
+                  <a:lnTo>
+                    <a:pt x="5352487" y="2900530"/>
+                  </a:lnTo>
+                  <a:lnTo>
+                    <a:pt x="5430121" y="2912603"/>
+                  </a:lnTo>
+                  <a:lnTo>
+                    <a:pt x="5507755" y="2924312"/>
+                  </a:lnTo>
+                  <a:lnTo>
+                    <a:pt x="5585389" y="2935668"/>
+                  </a:lnTo>
+                  <a:lnTo>
+                    <a:pt x="5663023" y="2946683"/>
+                  </a:lnTo>
+                  <a:lnTo>
+                    <a:pt x="5740657" y="2957365"/>
+                  </a:lnTo>
+                  <a:lnTo>
+                    <a:pt x="5818291" y="2967726"/>
+                  </a:lnTo>
+                  <a:lnTo>
+                    <a:pt x="5895925" y="2977775"/>
+                  </a:lnTo>
+                  <a:lnTo>
+                    <a:pt x="5973559" y="2987521"/>
+                  </a:lnTo>
+                  <a:lnTo>
+                    <a:pt x="6051193" y="2996973"/>
+                  </a:lnTo>
+                  <a:lnTo>
+                    <a:pt x="6128827" y="3006141"/>
+                  </a:lnTo>
+                  <a:lnTo>
+                    <a:pt x="6206462" y="3015033"/>
+                  </a:lnTo>
+                  <a:lnTo>
+                    <a:pt x="6284096" y="3023657"/>
+                  </a:lnTo>
+                  <a:lnTo>
+                    <a:pt x="6361730" y="3032021"/>
+                  </a:lnTo>
+                  <a:lnTo>
+                    <a:pt x="6439364" y="3040133"/>
+                  </a:lnTo>
+                  <a:lnTo>
+                    <a:pt x="6516998" y="3048001"/>
+                  </a:lnTo>
+                  <a:lnTo>
+                    <a:pt x="6594632" y="3055632"/>
+                  </a:lnTo>
+                  <a:lnTo>
+                    <a:pt x="6672266" y="3063033"/>
+                  </a:lnTo>
+                  <a:lnTo>
+                    <a:pt x="6749900" y="3070211"/>
+                  </a:lnTo>
+                  <a:lnTo>
+                    <a:pt x="6827534" y="3077173"/>
+                  </a:lnTo>
+                  <a:lnTo>
+                    <a:pt x="6905168" y="3083925"/>
+                  </a:lnTo>
+                  <a:lnTo>
+                    <a:pt x="6982802" y="3090474"/>
+                  </a:lnTo>
+                  <a:lnTo>
+                    <a:pt x="7060436" y="3096825"/>
+                  </a:lnTo>
+                  <a:lnTo>
+                    <a:pt x="7138070" y="3102985"/>
+                  </a:lnTo>
+                  <a:lnTo>
+                    <a:pt x="7215704" y="3108960"/>
+                  </a:lnTo>
+                  <a:lnTo>
+                    <a:pt x="7293338" y="3114755"/>
+                  </a:lnTo>
+                  <a:lnTo>
+                    <a:pt x="7370972" y="3120375"/>
                   </a:lnTo>
                 </a:path>
               </a:pathLst>

--- a/docs/plots/carbo/jx_carbo_linsubhr_ratio_akikdigo.pptx
+++ b/docs/plots/carbo/jx_carbo_linsubhr_ratio_akikdigo.pptx
@@ -3193,13 +3193,13 @@
                     <a:pt x="6361730" y="2481980"/>
                   </a:lnTo>
                   <a:lnTo>
-                    <a:pt x="6439364" y="2472868"/>
+                    <a:pt x="6439364" y="2472867"/>
                   </a:lnTo>
                   <a:lnTo>
                     <a:pt x="6516998" y="2463684"/>
                   </a:lnTo>
                   <a:lnTo>
-                    <a:pt x="6594632" y="2454429"/>
+                    <a:pt x="6594632" y="2454428"/>
                   </a:lnTo>
                   <a:lnTo>
                     <a:pt x="6672266" y="2445101"/>
@@ -3211,7 +3211,7 @@
                     <a:pt x="6827534" y="2426228"/>
                   </a:lnTo>
                   <a:lnTo>
-                    <a:pt x="6905168" y="2416682"/>
+                    <a:pt x="6905168" y="2416681"/>
                   </a:lnTo>
                   <a:lnTo>
                     <a:pt x="6982802" y="2407060"/>
@@ -3418,7 +3418,7 @@
                     <a:pt x="2635295" y="2845803"/>
                   </a:lnTo>
                   <a:lnTo>
-                    <a:pt x="2557661" y="2852035"/>
+                    <a:pt x="2557661" y="2852036"/>
                   </a:lnTo>
                   <a:lnTo>
                     <a:pt x="2480027" y="2858220"/>
@@ -3439,7 +3439,7 @@
                     <a:pt x="2091857" y="2888431"/>
                   </a:lnTo>
                   <a:lnTo>
-                    <a:pt x="2014223" y="2894333"/>
+                    <a:pt x="2014223" y="2894334"/>
                   </a:lnTo>
                   <a:lnTo>
                     <a:pt x="1936589" y="2900191"/>
@@ -3472,7 +3472,7 @@
                     <a:pt x="1237883" y="2950912"/>
                   </a:lnTo>
                   <a:lnTo>
-                    <a:pt x="1160249" y="2956332"/>
+                    <a:pt x="1160249" y="2956333"/>
                   </a:lnTo>
                   <a:lnTo>
                     <a:pt x="1082615" y="2961711"/>
@@ -3560,7 +3560,7 @@
                     <a:pt x="88983" y="278459"/>
                   </a:lnTo>
                   <a:lnTo>
-                    <a:pt x="166618" y="503177"/>
+                    <a:pt x="166617" y="503177"/>
                   </a:lnTo>
                   <a:lnTo>
                     <a:pt x="244252" y="712928"/>
@@ -3626,7 +3626,7 @@
                     <a:pt x="1796932" y="2767123"/>
                   </a:lnTo>
                   <a:lnTo>
-                    <a:pt x="1874567" y="2760230"/>
+                    <a:pt x="1874566" y="2760230"/>
                   </a:lnTo>
                   <a:lnTo>
                     <a:pt x="1952201" y="2753283"/>
@@ -3692,7 +3692,7 @@
                     <a:pt x="3504881" y="2602410"/>
                   </a:lnTo>
                   <a:lnTo>
-                    <a:pt x="3582516" y="2594235"/>
+                    <a:pt x="3582515" y="2594235"/>
                   </a:lnTo>
                   <a:lnTo>
                     <a:pt x="3660150" y="2585996"/>
@@ -3734,13 +3734,13 @@
                     <a:pt x="4591758" y="2481980"/>
                   </a:lnTo>
                   <a:lnTo>
-                    <a:pt x="4669392" y="2472868"/>
+                    <a:pt x="4669392" y="2472867"/>
                   </a:lnTo>
                   <a:lnTo>
                     <a:pt x="4747026" y="2463684"/>
                   </a:lnTo>
                   <a:lnTo>
-                    <a:pt x="4824660" y="2454429"/>
+                    <a:pt x="4824660" y="2454428"/>
                   </a:lnTo>
                   <a:lnTo>
                     <a:pt x="4902294" y="2445101"/>
@@ -3752,7 +3752,7 @@
                     <a:pt x="5057562" y="2426228"/>
                   </a:lnTo>
                   <a:lnTo>
-                    <a:pt x="5135196" y="2416682"/>
+                    <a:pt x="5135196" y="2416681"/>
                   </a:lnTo>
                   <a:lnTo>
                     <a:pt x="5212830" y="2407060"/>
@@ -4216,7 +4216,7 @@
                     <a:pt x="2635295" y="2132335"/>
                   </a:lnTo>
                   <a:lnTo>
-                    <a:pt x="2712930" y="2167545"/>
+                    <a:pt x="2712930" y="2167546"/>
                   </a:lnTo>
                   <a:lnTo>
                     <a:pt x="2790564" y="2201696"/>

--- a/docs/plots/carbo/jx_carbo_linsubhr_ratio_akikdigo.pptx
+++ b/docs/plots/carbo/jx_carbo_linsubhr_ratio_akikdigo.pptx
@@ -2271,7 +2271,7 @@
           </p:nvSpPr>
           <p:spPr>
             <a:xfrm>
-              <a:off x="817517" y="5114368"/>
+              <a:off x="817517" y="5142518"/>
               <a:ext cx="7799693" cy="0"/>
             </a:xfrm>
             <a:custGeom>
@@ -2314,7 +2314,7 @@
           </p:nvSpPr>
           <p:spPr>
             <a:xfrm>
-              <a:off x="817517" y="4244691"/>
+              <a:off x="817517" y="4313054"/>
               <a:ext cx="7799693" cy="0"/>
             </a:xfrm>
             <a:custGeom>
@@ -2357,7 +2357,7 @@
           </p:nvSpPr>
           <p:spPr>
             <a:xfrm>
-              <a:off x="817517" y="3375014"/>
+              <a:off x="817517" y="3483591"/>
               <a:ext cx="7799693" cy="0"/>
             </a:xfrm>
             <a:custGeom>
@@ -2400,7 +2400,7 @@
           </p:nvSpPr>
           <p:spPr>
             <a:xfrm>
-              <a:off x="817517" y="2505337"/>
+              <a:off x="817517" y="2654127"/>
               <a:ext cx="7799693" cy="0"/>
             </a:xfrm>
             <a:custGeom>
@@ -2443,15 +2443,15 @@
           </p:nvSpPr>
           <p:spPr>
             <a:xfrm>
-              <a:off x="1615213" y="1896563"/>
-              <a:ext cx="0" cy="3826579"/>
+              <a:off x="1615213" y="2073503"/>
+              <a:ext cx="0" cy="3649639"/>
             </a:xfrm>
             <a:custGeom>
               <a:avLst/>
               <a:pathLst>
-                <a:path w="0" h="3826579">
+                <a:path w="0" h="3649639">
                   <a:moveTo>
-                    <a:pt x="0" y="3826579"/>
+                    <a:pt x="0" y="3649639"/>
                   </a:moveTo>
                   <a:lnTo>
                     <a:pt x="0" y="0"/>
@@ -2486,15 +2486,15 @@
           </p:nvSpPr>
           <p:spPr>
             <a:xfrm>
-              <a:off x="3387871" y="1896563"/>
-              <a:ext cx="0" cy="3826579"/>
+              <a:off x="3387871" y="2073503"/>
+              <a:ext cx="0" cy="3649639"/>
             </a:xfrm>
             <a:custGeom>
               <a:avLst/>
               <a:pathLst>
-                <a:path w="0" h="3826579">
+                <a:path w="0" h="3649639">
                   <a:moveTo>
-                    <a:pt x="0" y="3826579"/>
+                    <a:pt x="0" y="3649639"/>
                   </a:moveTo>
                   <a:lnTo>
                     <a:pt x="0" y="0"/>
@@ -2529,15 +2529,15 @@
           </p:nvSpPr>
           <p:spPr>
             <a:xfrm>
-              <a:off x="5160528" y="1896563"/>
-              <a:ext cx="0" cy="3826579"/>
+              <a:off x="5160528" y="2073503"/>
+              <a:ext cx="0" cy="3649639"/>
             </a:xfrm>
             <a:custGeom>
               <a:avLst/>
               <a:pathLst>
-                <a:path w="0" h="3826579">
+                <a:path w="0" h="3649639">
                   <a:moveTo>
-                    <a:pt x="0" y="3826579"/>
+                    <a:pt x="0" y="3649639"/>
                   </a:moveTo>
                   <a:lnTo>
                     <a:pt x="0" y="0"/>
@@ -2572,15 +2572,15 @@
           </p:nvSpPr>
           <p:spPr>
             <a:xfrm>
-              <a:off x="6933186" y="1896563"/>
-              <a:ext cx="0" cy="3826579"/>
+              <a:off x="6933186" y="2073503"/>
+              <a:ext cx="0" cy="3649639"/>
             </a:xfrm>
             <a:custGeom>
               <a:avLst/>
               <a:pathLst>
-                <a:path w="0" h="3826579">
+                <a:path w="0" h="3649639">
                   <a:moveTo>
-                    <a:pt x="0" y="3826579"/>
+                    <a:pt x="0" y="3649639"/>
                   </a:moveTo>
                   <a:lnTo>
                     <a:pt x="0" y="0"/>
@@ -2615,7 +2615,7 @@
           </p:nvSpPr>
           <p:spPr>
             <a:xfrm>
-              <a:off x="817517" y="5549207"/>
+              <a:off x="817517" y="5557249"/>
               <a:ext cx="7799693" cy="0"/>
             </a:xfrm>
             <a:custGeom>
@@ -2658,7 +2658,7 @@
           </p:nvSpPr>
           <p:spPr>
             <a:xfrm>
-              <a:off x="817517" y="4679530"/>
+              <a:off x="817517" y="4727786"/>
               <a:ext cx="7799693" cy="0"/>
             </a:xfrm>
             <a:custGeom>
@@ -2701,7 +2701,7 @@
           </p:nvSpPr>
           <p:spPr>
             <a:xfrm>
-              <a:off x="817517" y="3809853"/>
+              <a:off x="817517" y="3898322"/>
               <a:ext cx="7799693" cy="0"/>
             </a:xfrm>
             <a:custGeom>
@@ -2744,7 +2744,7 @@
           </p:nvSpPr>
           <p:spPr>
             <a:xfrm>
-              <a:off x="817517" y="2940175"/>
+              <a:off x="817517" y="3068859"/>
               <a:ext cx="7799693" cy="0"/>
             </a:xfrm>
             <a:custGeom>
@@ -2787,7 +2787,7 @@
           </p:nvSpPr>
           <p:spPr>
             <a:xfrm>
-              <a:off x="817517" y="2070498"/>
+              <a:off x="817517" y="2239395"/>
               <a:ext cx="7799693" cy="0"/>
             </a:xfrm>
             <a:custGeom>
@@ -2830,15 +2830,15 @@
           </p:nvSpPr>
           <p:spPr>
             <a:xfrm>
-              <a:off x="2501542" y="1896563"/>
-              <a:ext cx="0" cy="3826579"/>
+              <a:off x="2501542" y="2073503"/>
+              <a:ext cx="0" cy="3649639"/>
             </a:xfrm>
             <a:custGeom>
               <a:avLst/>
               <a:pathLst>
-                <a:path w="0" h="3826579">
+                <a:path w="0" h="3649639">
                   <a:moveTo>
-                    <a:pt x="0" y="3826579"/>
+                    <a:pt x="0" y="3649639"/>
                   </a:moveTo>
                   <a:lnTo>
                     <a:pt x="0" y="0"/>
@@ -2873,15 +2873,15 @@
           </p:nvSpPr>
           <p:spPr>
             <a:xfrm>
-              <a:off x="4274200" y="1896563"/>
-              <a:ext cx="0" cy="3826579"/>
+              <a:off x="4274200" y="2073503"/>
+              <a:ext cx="0" cy="3649639"/>
             </a:xfrm>
             <a:custGeom>
               <a:avLst/>
               <a:pathLst>
-                <a:path w="0" h="3826579">
+                <a:path w="0" h="3649639">
                   <a:moveTo>
-                    <a:pt x="0" y="3826579"/>
+                    <a:pt x="0" y="3649639"/>
                   </a:moveTo>
                   <a:lnTo>
                     <a:pt x="0" y="0"/>
@@ -2916,15 +2916,15 @@
           </p:nvSpPr>
           <p:spPr>
             <a:xfrm>
-              <a:off x="6046857" y="1896563"/>
-              <a:ext cx="0" cy="3826579"/>
+              <a:off x="6046857" y="2073503"/>
+              <a:ext cx="0" cy="3649639"/>
             </a:xfrm>
             <a:custGeom>
               <a:avLst/>
               <a:pathLst>
-                <a:path w="0" h="3826579">
+                <a:path w="0" h="3649639">
                   <a:moveTo>
-                    <a:pt x="0" y="3826579"/>
+                    <a:pt x="0" y="3649639"/>
                   </a:moveTo>
                   <a:lnTo>
                     <a:pt x="0" y="0"/>
@@ -2959,15 +2959,15 @@
           </p:nvSpPr>
           <p:spPr>
             <a:xfrm>
-              <a:off x="7819515" y="1896563"/>
-              <a:ext cx="0" cy="3826579"/>
+              <a:off x="7819515" y="2073503"/>
+              <a:ext cx="0" cy="3649639"/>
             </a:xfrm>
             <a:custGeom>
               <a:avLst/>
               <a:pathLst>
-                <a:path w="0" h="3826579">
+                <a:path w="0" h="3649639">
                   <a:moveTo>
-                    <a:pt x="0" y="3826579"/>
+                    <a:pt x="0" y="3649639"/>
                   </a:moveTo>
                   <a:lnTo>
                     <a:pt x="0" y="0"/>
@@ -3002,522 +3002,522 @@
           </p:nvSpPr>
           <p:spPr>
             <a:xfrm>
-              <a:off x="817517" y="1896563"/>
-              <a:ext cx="7370972" cy="3627349"/>
+              <a:off x="817517" y="2073503"/>
+              <a:ext cx="7370972" cy="3459622"/>
             </a:xfrm>
             <a:custGeom>
               <a:avLst/>
               <a:pathLst>
-                <a:path w="7370972" h="3627349">
+                <a:path w="7370972" h="3459622">
                   <a:moveTo>
                     <a:pt x="1769971" y="0"/>
                   </a:moveTo>
                   <a:lnTo>
-                    <a:pt x="1781321" y="37708"/>
-                  </a:lnTo>
-                  <a:lnTo>
-                    <a:pt x="1858955" y="278459"/>
-                  </a:lnTo>
-                  <a:lnTo>
-                    <a:pt x="1936589" y="503177"/>
-                  </a:lnTo>
-                  <a:lnTo>
-                    <a:pt x="2014223" y="712928"/>
-                  </a:lnTo>
-                  <a:lnTo>
-                    <a:pt x="2091857" y="908710"/>
-                  </a:lnTo>
-                  <a:lnTo>
-                    <a:pt x="2169491" y="1091453"/>
-                  </a:lnTo>
-                  <a:lnTo>
-                    <a:pt x="2247125" y="1262026"/>
-                  </a:lnTo>
-                  <a:lnTo>
-                    <a:pt x="2324759" y="1421239"/>
-                  </a:lnTo>
-                  <a:lnTo>
-                    <a:pt x="2402393" y="1569848"/>
-                  </a:lnTo>
-                  <a:lnTo>
-                    <a:pt x="2480027" y="1708560"/>
-                  </a:lnTo>
-                  <a:lnTo>
-                    <a:pt x="2557661" y="1838034"/>
-                  </a:lnTo>
-                  <a:lnTo>
-                    <a:pt x="2635295" y="1958886"/>
-                  </a:lnTo>
-                  <a:lnTo>
-                    <a:pt x="2712930" y="2071688"/>
-                  </a:lnTo>
-                  <a:lnTo>
-                    <a:pt x="2790564" y="2176978"/>
-                  </a:lnTo>
-                  <a:lnTo>
-                    <a:pt x="2868198" y="2275256"/>
-                  </a:lnTo>
-                  <a:lnTo>
-                    <a:pt x="2945832" y="2366989"/>
-                  </a:lnTo>
-                  <a:lnTo>
-                    <a:pt x="3023466" y="2452612"/>
-                  </a:lnTo>
-                  <a:lnTo>
-                    <a:pt x="3101100" y="2532533"/>
-                  </a:lnTo>
-                  <a:lnTo>
-                    <a:pt x="3178734" y="2607131"/>
-                  </a:lnTo>
-                  <a:lnTo>
-                    <a:pt x="3256368" y="2676761"/>
-                  </a:lnTo>
-                  <a:lnTo>
-                    <a:pt x="3334002" y="2741754"/>
-                  </a:lnTo>
-                  <a:lnTo>
-                    <a:pt x="3411636" y="2780750"/>
-                  </a:lnTo>
-                  <a:lnTo>
-                    <a:pt x="3489270" y="2773963"/>
-                  </a:lnTo>
-                  <a:lnTo>
-                    <a:pt x="3566904" y="2767123"/>
-                  </a:lnTo>
-                  <a:lnTo>
-                    <a:pt x="3644538" y="2760230"/>
-                  </a:lnTo>
-                  <a:lnTo>
-                    <a:pt x="3722172" y="2753283"/>
-                  </a:lnTo>
-                  <a:lnTo>
-                    <a:pt x="3799806" y="2746282"/>
-                  </a:lnTo>
-                  <a:lnTo>
-                    <a:pt x="3877440" y="2739227"/>
-                  </a:lnTo>
-                  <a:lnTo>
-                    <a:pt x="3955074" y="2732116"/>
-                  </a:lnTo>
-                  <a:lnTo>
-                    <a:pt x="4032708" y="2724951"/>
-                  </a:lnTo>
-                  <a:lnTo>
-                    <a:pt x="4110342" y="2717729"/>
-                  </a:lnTo>
-                  <a:lnTo>
-                    <a:pt x="4187976" y="2710452"/>
-                  </a:lnTo>
-                  <a:lnTo>
-                    <a:pt x="4265610" y="2703117"/>
-                  </a:lnTo>
-                  <a:lnTo>
-                    <a:pt x="4343244" y="2695726"/>
-                  </a:lnTo>
-                  <a:lnTo>
-                    <a:pt x="4420879" y="2688277"/>
-                  </a:lnTo>
-                  <a:lnTo>
-                    <a:pt x="4498513" y="2680770"/>
-                  </a:lnTo>
-                  <a:lnTo>
-                    <a:pt x="4576147" y="2673205"/>
-                  </a:lnTo>
-                  <a:lnTo>
-                    <a:pt x="4653781" y="2665580"/>
-                  </a:lnTo>
-                  <a:lnTo>
-                    <a:pt x="4731415" y="2657897"/>
-                  </a:lnTo>
-                  <a:lnTo>
-                    <a:pt x="4809049" y="2650153"/>
-                  </a:lnTo>
-                  <a:lnTo>
-                    <a:pt x="4886683" y="2642350"/>
-                  </a:lnTo>
-                  <a:lnTo>
-                    <a:pt x="4964317" y="2634485"/>
-                  </a:lnTo>
-                  <a:lnTo>
-                    <a:pt x="5041951" y="2626560"/>
-                  </a:lnTo>
-                  <a:lnTo>
-                    <a:pt x="5119585" y="2618572"/>
-                  </a:lnTo>
-                  <a:lnTo>
-                    <a:pt x="5197219" y="2610523"/>
-                  </a:lnTo>
-                  <a:lnTo>
-                    <a:pt x="5274853" y="2602410"/>
-                  </a:lnTo>
-                  <a:lnTo>
-                    <a:pt x="5352487" y="2594235"/>
-                  </a:lnTo>
-                  <a:lnTo>
-                    <a:pt x="5430121" y="2585996"/>
-                  </a:lnTo>
-                  <a:lnTo>
-                    <a:pt x="5507755" y="2577693"/>
-                  </a:lnTo>
-                  <a:lnTo>
-                    <a:pt x="5585389" y="2569325"/>
-                  </a:lnTo>
-                  <a:lnTo>
-                    <a:pt x="5663023" y="2560892"/>
-                  </a:lnTo>
-                  <a:lnTo>
-                    <a:pt x="5740657" y="2552394"/>
-                  </a:lnTo>
-                  <a:lnTo>
-                    <a:pt x="5818291" y="2543829"/>
-                  </a:lnTo>
-                  <a:lnTo>
-                    <a:pt x="5895925" y="2535198"/>
-                  </a:lnTo>
-                  <a:lnTo>
-                    <a:pt x="5973559" y="2526499"/>
-                  </a:lnTo>
-                  <a:lnTo>
-                    <a:pt x="6051193" y="2517733"/>
-                  </a:lnTo>
-                  <a:lnTo>
-                    <a:pt x="6128827" y="2508899"/>
-                  </a:lnTo>
-                  <a:lnTo>
-                    <a:pt x="6206462" y="2499995"/>
-                  </a:lnTo>
-                  <a:lnTo>
-                    <a:pt x="6284096" y="2491023"/>
-                  </a:lnTo>
-                  <a:lnTo>
-                    <a:pt x="6361730" y="2481980"/>
-                  </a:lnTo>
-                  <a:lnTo>
-                    <a:pt x="6439364" y="2472867"/>
-                  </a:lnTo>
-                  <a:lnTo>
-                    <a:pt x="6516998" y="2463684"/>
-                  </a:lnTo>
-                  <a:lnTo>
-                    <a:pt x="6594632" y="2454428"/>
-                  </a:lnTo>
-                  <a:lnTo>
-                    <a:pt x="6672266" y="2445101"/>
-                  </a:lnTo>
-                  <a:lnTo>
-                    <a:pt x="6749900" y="2435701"/>
-                  </a:lnTo>
-                  <a:lnTo>
-                    <a:pt x="6827534" y="2426228"/>
-                  </a:lnTo>
-                  <a:lnTo>
-                    <a:pt x="6905168" y="2416681"/>
-                  </a:lnTo>
-                  <a:lnTo>
-                    <a:pt x="6982802" y="2407060"/>
-                  </a:lnTo>
-                  <a:lnTo>
-                    <a:pt x="7060436" y="2397364"/>
-                  </a:lnTo>
-                  <a:lnTo>
-                    <a:pt x="7138070" y="2387593"/>
-                  </a:lnTo>
-                  <a:lnTo>
-                    <a:pt x="7215704" y="2377745"/>
-                  </a:lnTo>
-                  <a:lnTo>
-                    <a:pt x="7293338" y="2367821"/>
-                  </a:lnTo>
-                  <a:lnTo>
-                    <a:pt x="7370972" y="2357820"/>
-                  </a:lnTo>
-                  <a:lnTo>
-                    <a:pt x="7370972" y="3627349"/>
-                  </a:lnTo>
-                  <a:lnTo>
-                    <a:pt x="7293338" y="3625545"/>
-                  </a:lnTo>
-                  <a:lnTo>
-                    <a:pt x="7215704" y="3623611"/>
-                  </a:lnTo>
-                  <a:lnTo>
-                    <a:pt x="7138070" y="3621540"/>
-                  </a:lnTo>
-                  <a:lnTo>
-                    <a:pt x="7060436" y="3619320"/>
-                  </a:lnTo>
-                  <a:lnTo>
-                    <a:pt x="6982802" y="3616943"/>
-                  </a:lnTo>
-                  <a:lnTo>
-                    <a:pt x="6905168" y="3614396"/>
-                  </a:lnTo>
-                  <a:lnTo>
-                    <a:pt x="6827534" y="3611667"/>
-                  </a:lnTo>
-                  <a:lnTo>
-                    <a:pt x="6749900" y="3608743"/>
-                  </a:lnTo>
-                  <a:lnTo>
-                    <a:pt x="6672266" y="3605611"/>
-                  </a:lnTo>
-                  <a:lnTo>
-                    <a:pt x="6594632" y="3602255"/>
-                  </a:lnTo>
-                  <a:lnTo>
-                    <a:pt x="6516998" y="3598659"/>
-                  </a:lnTo>
-                  <a:lnTo>
-                    <a:pt x="6439364" y="3594808"/>
-                  </a:lnTo>
-                  <a:lnTo>
-                    <a:pt x="6361730" y="3590681"/>
-                  </a:lnTo>
-                  <a:lnTo>
-                    <a:pt x="6284096" y="3586260"/>
-                  </a:lnTo>
-                  <a:lnTo>
-                    <a:pt x="6206462" y="3581523"/>
-                  </a:lnTo>
-                  <a:lnTo>
-                    <a:pt x="6128827" y="3576449"/>
-                  </a:lnTo>
-                  <a:lnTo>
-                    <a:pt x="6051193" y="3571012"/>
-                  </a:lnTo>
-                  <a:lnTo>
-                    <a:pt x="5973559" y="3565188"/>
-                  </a:lnTo>
-                  <a:lnTo>
-                    <a:pt x="5895925" y="3558948"/>
-                  </a:lnTo>
-                  <a:lnTo>
-                    <a:pt x="5818291" y="3552263"/>
-                  </a:lnTo>
-                  <a:lnTo>
-                    <a:pt x="5740657" y="3545100"/>
-                  </a:lnTo>
-                  <a:lnTo>
-                    <a:pt x="5663023" y="3537427"/>
-                  </a:lnTo>
-                  <a:lnTo>
-                    <a:pt x="5585389" y="3529206"/>
-                  </a:lnTo>
-                  <a:lnTo>
-                    <a:pt x="5507755" y="3520399"/>
-                  </a:lnTo>
-                  <a:lnTo>
-                    <a:pt x="5430121" y="3510963"/>
-                  </a:lnTo>
-                  <a:lnTo>
-                    <a:pt x="5352487" y="3500854"/>
-                  </a:lnTo>
-                  <a:lnTo>
-                    <a:pt x="5274853" y="3490024"/>
-                  </a:lnTo>
-                  <a:lnTo>
-                    <a:pt x="5197219" y="3478421"/>
-                  </a:lnTo>
-                  <a:lnTo>
-                    <a:pt x="5119585" y="3465990"/>
-                  </a:lnTo>
-                  <a:lnTo>
-                    <a:pt x="5041951" y="3452672"/>
-                  </a:lnTo>
-                  <a:lnTo>
-                    <a:pt x="4964317" y="3438404"/>
-                  </a:lnTo>
-                  <a:lnTo>
-                    <a:pt x="4886683" y="3423118"/>
-                  </a:lnTo>
-                  <a:lnTo>
-                    <a:pt x="4809049" y="3406741"/>
-                  </a:lnTo>
-                  <a:lnTo>
-                    <a:pt x="4731415" y="3389196"/>
-                  </a:lnTo>
-                  <a:lnTo>
-                    <a:pt x="4653781" y="3370399"/>
-                  </a:lnTo>
-                  <a:lnTo>
-                    <a:pt x="4576147" y="3350260"/>
-                  </a:lnTo>
-                  <a:lnTo>
-                    <a:pt x="4498513" y="3328685"/>
-                  </a:lnTo>
-                  <a:lnTo>
-                    <a:pt x="4420879" y="3305570"/>
-                  </a:lnTo>
-                  <a:lnTo>
-                    <a:pt x="4343244" y="3280806"/>
-                  </a:lnTo>
-                  <a:lnTo>
-                    <a:pt x="4265610" y="3254275"/>
-                  </a:lnTo>
-                  <a:lnTo>
-                    <a:pt x="4187976" y="3225851"/>
-                  </a:lnTo>
-                  <a:lnTo>
-                    <a:pt x="4110342" y="3195399"/>
-                  </a:lnTo>
-                  <a:lnTo>
-                    <a:pt x="4032708" y="3162774"/>
-                  </a:lnTo>
-                  <a:lnTo>
-                    <a:pt x="3955074" y="3127822"/>
-                  </a:lnTo>
-                  <a:lnTo>
-                    <a:pt x="3877440" y="3090375"/>
-                  </a:lnTo>
-                  <a:lnTo>
-                    <a:pt x="3799806" y="3050257"/>
-                  </a:lnTo>
-                  <a:lnTo>
-                    <a:pt x="3722172" y="3007276"/>
-                  </a:lnTo>
-                  <a:lnTo>
-                    <a:pt x="3644538" y="2961229"/>
-                  </a:lnTo>
-                  <a:lnTo>
-                    <a:pt x="3566904" y="2911896"/>
-                  </a:lnTo>
-                  <a:lnTo>
-                    <a:pt x="3489270" y="2859043"/>
-                  </a:lnTo>
-                  <a:lnTo>
-                    <a:pt x="3411636" y="2802418"/>
-                  </a:lnTo>
-                  <a:lnTo>
-                    <a:pt x="3334002" y="2787485"/>
-                  </a:lnTo>
-                  <a:lnTo>
-                    <a:pt x="3256368" y="2794167"/>
-                  </a:lnTo>
-                  <a:lnTo>
-                    <a:pt x="3178734" y="2800798"/>
-                  </a:lnTo>
-                  <a:lnTo>
-                    <a:pt x="3101100" y="2807378"/>
-                  </a:lnTo>
-                  <a:lnTo>
-                    <a:pt x="3023466" y="2813907"/>
-                  </a:lnTo>
-                  <a:lnTo>
-                    <a:pt x="2945832" y="2820386"/>
-                  </a:lnTo>
-                  <a:lnTo>
-                    <a:pt x="2868198" y="2826814"/>
-                  </a:lnTo>
-                  <a:lnTo>
-                    <a:pt x="2790564" y="2833193"/>
-                  </a:lnTo>
-                  <a:lnTo>
-                    <a:pt x="2712930" y="2839523"/>
-                  </a:lnTo>
-                  <a:lnTo>
-                    <a:pt x="2635295" y="2845803"/>
-                  </a:lnTo>
-                  <a:lnTo>
-                    <a:pt x="2557661" y="2852036"/>
-                  </a:lnTo>
-                  <a:lnTo>
-                    <a:pt x="2480027" y="2858220"/>
-                  </a:lnTo>
-                  <a:lnTo>
-                    <a:pt x="2402393" y="2864356"/>
-                  </a:lnTo>
-                  <a:lnTo>
-                    <a:pt x="2324759" y="2870445"/>
-                  </a:lnTo>
-                  <a:lnTo>
-                    <a:pt x="2247125" y="2876487"/>
-                  </a:lnTo>
-                  <a:lnTo>
-                    <a:pt x="2169491" y="2882482"/>
-                  </a:lnTo>
-                  <a:lnTo>
-                    <a:pt x="2091857" y="2888431"/>
-                  </a:lnTo>
-                  <a:lnTo>
-                    <a:pt x="2014223" y="2894334"/>
-                  </a:lnTo>
-                  <a:lnTo>
-                    <a:pt x="1936589" y="2900191"/>
-                  </a:lnTo>
-                  <a:lnTo>
-                    <a:pt x="1858955" y="2906003"/>
-                  </a:lnTo>
-                  <a:lnTo>
-                    <a:pt x="1781321" y="2911770"/>
-                  </a:lnTo>
-                  <a:lnTo>
-                    <a:pt x="1703687" y="2917493"/>
-                  </a:lnTo>
-                  <a:lnTo>
-                    <a:pt x="1626053" y="2923171"/>
-                  </a:lnTo>
-                  <a:lnTo>
-                    <a:pt x="1548419" y="2928806"/>
-                  </a:lnTo>
-                  <a:lnTo>
-                    <a:pt x="1470785" y="2934397"/>
-                  </a:lnTo>
-                  <a:lnTo>
-                    <a:pt x="1393151" y="2939945"/>
-                  </a:lnTo>
-                  <a:lnTo>
-                    <a:pt x="1315517" y="2945450"/>
-                  </a:lnTo>
-                  <a:lnTo>
-                    <a:pt x="1237883" y="2950912"/>
-                  </a:lnTo>
-                  <a:lnTo>
-                    <a:pt x="1160249" y="2956333"/>
-                  </a:lnTo>
-                  <a:lnTo>
-                    <a:pt x="1082615" y="2961711"/>
-                  </a:lnTo>
-                  <a:lnTo>
-                    <a:pt x="1004981" y="2967048"/>
-                  </a:lnTo>
-                  <a:lnTo>
-                    <a:pt x="927346" y="2972343"/>
-                  </a:lnTo>
-                  <a:lnTo>
-                    <a:pt x="849712" y="2977598"/>
-                  </a:lnTo>
-                  <a:lnTo>
-                    <a:pt x="772078" y="2982812"/>
-                  </a:lnTo>
-                  <a:lnTo>
-                    <a:pt x="694444" y="2987986"/>
-                  </a:lnTo>
-                  <a:lnTo>
-                    <a:pt x="616810" y="2993120"/>
-                  </a:lnTo>
-                  <a:lnTo>
-                    <a:pt x="539176" y="2998215"/>
-                  </a:lnTo>
-                  <a:lnTo>
-                    <a:pt x="461542" y="3003269"/>
-                  </a:lnTo>
-                  <a:lnTo>
-                    <a:pt x="383908" y="3008285"/>
-                  </a:lnTo>
-                  <a:lnTo>
-                    <a:pt x="306274" y="3013262"/>
-                  </a:lnTo>
-                  <a:lnTo>
-                    <a:pt x="228640" y="3018201"/>
-                  </a:lnTo>
-                  <a:lnTo>
-                    <a:pt x="151006" y="3023102"/>
-                  </a:lnTo>
-                  <a:lnTo>
-                    <a:pt x="73372" y="3027964"/>
-                  </a:lnTo>
-                  <a:lnTo>
-                    <a:pt x="0" y="3032525"/>
+                    <a:pt x="1781321" y="35964"/>
+                  </a:lnTo>
+                  <a:lnTo>
+                    <a:pt x="1858955" y="265583"/>
+                  </a:lnTo>
+                  <a:lnTo>
+                    <a:pt x="1936589" y="479910"/>
+                  </a:lnTo>
+                  <a:lnTo>
+                    <a:pt x="2014223" y="679962"/>
+                  </a:lnTo>
+                  <a:lnTo>
+                    <a:pt x="2091857" y="866692"/>
+                  </a:lnTo>
+                  <a:lnTo>
+                    <a:pt x="2169491" y="1040985"/>
+                  </a:lnTo>
+                  <a:lnTo>
+                    <a:pt x="2247125" y="1203671"/>
+                  </a:lnTo>
+                  <a:lnTo>
+                    <a:pt x="2324759" y="1355521"/>
+                  </a:lnTo>
+                  <a:lnTo>
+                    <a:pt x="2402393" y="1497259"/>
+                  </a:lnTo>
+                  <a:lnTo>
+                    <a:pt x="2480027" y="1629557"/>
+                  </a:lnTo>
+                  <a:lnTo>
+                    <a:pt x="2557661" y="1753044"/>
+                  </a:lnTo>
+                  <a:lnTo>
+                    <a:pt x="2635295" y="1868307"/>
+                  </a:lnTo>
+                  <a:lnTo>
+                    <a:pt x="2712930" y="1975894"/>
+                  </a:lnTo>
+                  <a:lnTo>
+                    <a:pt x="2790564" y="2076316"/>
+                  </a:lnTo>
+                  <a:lnTo>
+                    <a:pt x="2868198" y="2170049"/>
+                  </a:lnTo>
+                  <a:lnTo>
+                    <a:pt x="2945832" y="2257540"/>
+                  </a:lnTo>
+                  <a:lnTo>
+                    <a:pt x="3023466" y="2339204"/>
+                  </a:lnTo>
+                  <a:lnTo>
+                    <a:pt x="3101100" y="2415430"/>
+                  </a:lnTo>
+                  <a:lnTo>
+                    <a:pt x="3178734" y="2486578"/>
+                  </a:lnTo>
+                  <a:lnTo>
+                    <a:pt x="3256368" y="2552989"/>
+                  </a:lnTo>
+                  <a:lnTo>
+                    <a:pt x="3334002" y="2614976"/>
+                  </a:lnTo>
+                  <a:lnTo>
+                    <a:pt x="3411636" y="2652169"/>
+                  </a:lnTo>
+                  <a:lnTo>
+                    <a:pt x="3489270" y="2645696"/>
+                  </a:lnTo>
+                  <a:lnTo>
+                    <a:pt x="3566904" y="2639172"/>
+                  </a:lnTo>
+                  <a:lnTo>
+                    <a:pt x="3644538" y="2632598"/>
+                  </a:lnTo>
+                  <a:lnTo>
+                    <a:pt x="3722172" y="2625972"/>
+                  </a:lnTo>
+                  <a:lnTo>
+                    <a:pt x="3799806" y="2619295"/>
+                  </a:lnTo>
+                  <a:lnTo>
+                    <a:pt x="3877440" y="2612566"/>
+                  </a:lnTo>
+                  <a:lnTo>
+                    <a:pt x="3955074" y="2605784"/>
+                  </a:lnTo>
+                  <a:lnTo>
+                    <a:pt x="4032708" y="2598950"/>
+                  </a:lnTo>
+                  <a:lnTo>
+                    <a:pt x="4110342" y="2592062"/>
+                  </a:lnTo>
+                  <a:lnTo>
+                    <a:pt x="4187976" y="2585121"/>
+                  </a:lnTo>
+                  <a:lnTo>
+                    <a:pt x="4265610" y="2578126"/>
+                  </a:lnTo>
+                  <a:lnTo>
+                    <a:pt x="4343244" y="2571076"/>
+                  </a:lnTo>
+                  <a:lnTo>
+                    <a:pt x="4420879" y="2563972"/>
+                  </a:lnTo>
+                  <a:lnTo>
+                    <a:pt x="4498513" y="2556812"/>
+                  </a:lnTo>
+                  <a:lnTo>
+                    <a:pt x="4576147" y="2549597"/>
+                  </a:lnTo>
+                  <a:lnTo>
+                    <a:pt x="4653781" y="2542325"/>
+                  </a:lnTo>
+                  <a:lnTo>
+                    <a:pt x="4731415" y="2534997"/>
+                  </a:lnTo>
+                  <a:lnTo>
+                    <a:pt x="4809049" y="2527611"/>
+                  </a:lnTo>
+                  <a:lnTo>
+                    <a:pt x="4886683" y="2520168"/>
+                  </a:lnTo>
+                  <a:lnTo>
+                    <a:pt x="4964317" y="2512668"/>
+                  </a:lnTo>
+                  <a:lnTo>
+                    <a:pt x="5041951" y="2505108"/>
+                  </a:lnTo>
+                  <a:lnTo>
+                    <a:pt x="5119585" y="2497490"/>
+                  </a:lnTo>
+                  <a:lnTo>
+                    <a:pt x="5197219" y="2489813"/>
+                  </a:lnTo>
+                  <a:lnTo>
+                    <a:pt x="5274853" y="2482076"/>
+                  </a:lnTo>
+                  <a:lnTo>
+                    <a:pt x="5352487" y="2474279"/>
+                  </a:lnTo>
+                  <a:lnTo>
+                    <a:pt x="5430121" y="2466421"/>
+                  </a:lnTo>
+                  <a:lnTo>
+                    <a:pt x="5507755" y="2458501"/>
+                  </a:lnTo>
+                  <a:lnTo>
+                    <a:pt x="5585389" y="2450521"/>
+                  </a:lnTo>
+                  <a:lnTo>
+                    <a:pt x="5663023" y="2442478"/>
+                  </a:lnTo>
+                  <a:lnTo>
+                    <a:pt x="5740657" y="2434372"/>
+                  </a:lnTo>
+                  <a:lnTo>
+                    <a:pt x="5818291" y="2426203"/>
+                  </a:lnTo>
+                  <a:lnTo>
+                    <a:pt x="5895925" y="2417971"/>
+                  </a:lnTo>
+                  <a:lnTo>
+                    <a:pt x="5973559" y="2409675"/>
+                  </a:lnTo>
+                  <a:lnTo>
+                    <a:pt x="6051193" y="2401314"/>
+                  </a:lnTo>
+                  <a:lnTo>
+                    <a:pt x="6128827" y="2392888"/>
+                  </a:lnTo>
+                  <a:lnTo>
+                    <a:pt x="6206462" y="2384396"/>
+                  </a:lnTo>
+                  <a:lnTo>
+                    <a:pt x="6284096" y="2375839"/>
+                  </a:lnTo>
+                  <a:lnTo>
+                    <a:pt x="6361730" y="2367214"/>
+                  </a:lnTo>
+                  <a:lnTo>
+                    <a:pt x="6439364" y="2358523"/>
+                  </a:lnTo>
+                  <a:lnTo>
+                    <a:pt x="6516998" y="2349764"/>
+                  </a:lnTo>
+                  <a:lnTo>
+                    <a:pt x="6594632" y="2340937"/>
+                  </a:lnTo>
+                  <a:lnTo>
+                    <a:pt x="6672266" y="2332041"/>
+                  </a:lnTo>
+                  <a:lnTo>
+                    <a:pt x="6749900" y="2323075"/>
+                  </a:lnTo>
+                  <a:lnTo>
+                    <a:pt x="6827534" y="2314040"/>
+                  </a:lnTo>
+                  <a:lnTo>
+                    <a:pt x="6905168" y="2304935"/>
+                  </a:lnTo>
+                  <a:lnTo>
+                    <a:pt x="6982802" y="2295759"/>
+                  </a:lnTo>
+                  <a:lnTo>
+                    <a:pt x="7060436" y="2286511"/>
+                  </a:lnTo>
+                  <a:lnTo>
+                    <a:pt x="7138070" y="2277191"/>
+                  </a:lnTo>
+                  <a:lnTo>
+                    <a:pt x="7215704" y="2267799"/>
+                  </a:lnTo>
+                  <a:lnTo>
+                    <a:pt x="7293338" y="2258334"/>
+                  </a:lnTo>
+                  <a:lnTo>
+                    <a:pt x="7370972" y="2248795"/>
+                  </a:lnTo>
+                  <a:lnTo>
+                    <a:pt x="7370972" y="3459622"/>
+                  </a:lnTo>
+                  <a:lnTo>
+                    <a:pt x="7293338" y="3457901"/>
+                  </a:lnTo>
+                  <a:lnTo>
+                    <a:pt x="7215704" y="3456057"/>
+                  </a:lnTo>
+                  <a:lnTo>
+                    <a:pt x="7138070" y="3454081"/>
+                  </a:lnTo>
+                  <a:lnTo>
+                    <a:pt x="7060436" y="3451964"/>
+                  </a:lnTo>
+                  <a:lnTo>
+                    <a:pt x="6982802" y="3449697"/>
+                  </a:lnTo>
+                  <a:lnTo>
+                    <a:pt x="6905168" y="3447267"/>
+                  </a:lnTo>
+                  <a:lnTo>
+                    <a:pt x="6827534" y="3444664"/>
+                  </a:lnTo>
+                  <a:lnTo>
+                    <a:pt x="6749900" y="3441876"/>
+                  </a:lnTo>
+                  <a:lnTo>
+                    <a:pt x="6672266" y="3438888"/>
+                  </a:lnTo>
+                  <a:lnTo>
+                    <a:pt x="6594632" y="3435688"/>
+                  </a:lnTo>
+                  <a:lnTo>
+                    <a:pt x="6516998" y="3432259"/>
+                  </a:lnTo>
+                  <a:lnTo>
+                    <a:pt x="6439364" y="3428585"/>
+                  </a:lnTo>
+                  <a:lnTo>
+                    <a:pt x="6361730" y="3424649"/>
+                  </a:lnTo>
+                  <a:lnTo>
+                    <a:pt x="6284096" y="3420433"/>
+                  </a:lnTo>
+                  <a:lnTo>
+                    <a:pt x="6206462" y="3415915"/>
+                  </a:lnTo>
+                  <a:lnTo>
+                    <a:pt x="6128827" y="3411075"/>
+                  </a:lnTo>
+                  <a:lnTo>
+                    <a:pt x="6051193" y="3405890"/>
+                  </a:lnTo>
+                  <a:lnTo>
+                    <a:pt x="5973559" y="3400335"/>
+                  </a:lnTo>
+                  <a:lnTo>
+                    <a:pt x="5895925" y="3394384"/>
+                  </a:lnTo>
+                  <a:lnTo>
+                    <a:pt x="5818291" y="3388007"/>
+                  </a:lnTo>
+                  <a:lnTo>
+                    <a:pt x="5740657" y="3381176"/>
+                  </a:lnTo>
+                  <a:lnTo>
+                    <a:pt x="5663023" y="3373858"/>
+                  </a:lnTo>
+                  <a:lnTo>
+                    <a:pt x="5585389" y="3366017"/>
+                  </a:lnTo>
+                  <a:lnTo>
+                    <a:pt x="5507755" y="3357617"/>
+                  </a:lnTo>
+                  <a:lnTo>
+                    <a:pt x="5430121" y="3348618"/>
+                  </a:lnTo>
+                  <a:lnTo>
+                    <a:pt x="5352487" y="3338976"/>
+                  </a:lnTo>
+                  <a:lnTo>
+                    <a:pt x="5274853" y="3328647"/>
+                  </a:lnTo>
+                  <a:lnTo>
+                    <a:pt x="5197219" y="3317580"/>
+                  </a:lnTo>
+                  <a:lnTo>
+                    <a:pt x="5119585" y="3305724"/>
+                  </a:lnTo>
+                  <a:lnTo>
+                    <a:pt x="5041951" y="3293022"/>
+                  </a:lnTo>
+                  <a:lnTo>
+                    <a:pt x="4964317" y="3279414"/>
+                  </a:lnTo>
+                  <a:lnTo>
+                    <a:pt x="4886683" y="3264834"/>
+                  </a:lnTo>
+                  <a:lnTo>
+                    <a:pt x="4809049" y="3249215"/>
+                  </a:lnTo>
+                  <a:lnTo>
+                    <a:pt x="4731415" y="3232481"/>
+                  </a:lnTo>
+                  <a:lnTo>
+                    <a:pt x="4653781" y="3214553"/>
+                  </a:lnTo>
+                  <a:lnTo>
+                    <a:pt x="4576147" y="3195345"/>
+                  </a:lnTo>
+                  <a:lnTo>
+                    <a:pt x="4498513" y="3174768"/>
+                  </a:lnTo>
+                  <a:lnTo>
+                    <a:pt x="4420879" y="3152722"/>
+                  </a:lnTo>
+                  <a:lnTo>
+                    <a:pt x="4343244" y="3129103"/>
+                  </a:lnTo>
+                  <a:lnTo>
+                    <a:pt x="4265610" y="3103799"/>
+                  </a:lnTo>
+                  <a:lnTo>
+                    <a:pt x="4187976" y="3076689"/>
+                  </a:lnTo>
+                  <a:lnTo>
+                    <a:pt x="4110342" y="3047645"/>
+                  </a:lnTo>
+                  <a:lnTo>
+                    <a:pt x="4032708" y="3016529"/>
+                  </a:lnTo>
+                  <a:lnTo>
+                    <a:pt x="3955074" y="2983193"/>
+                  </a:lnTo>
+                  <a:lnTo>
+                    <a:pt x="3877440" y="2947478"/>
+                  </a:lnTo>
+                  <a:lnTo>
+                    <a:pt x="3799806" y="2909214"/>
+                  </a:lnTo>
+                  <a:lnTo>
+                    <a:pt x="3722172" y="2868221"/>
+                  </a:lnTo>
+                  <a:lnTo>
+                    <a:pt x="3644538" y="2824303"/>
+                  </a:lnTo>
+                  <a:lnTo>
+                    <a:pt x="3566904" y="2777251"/>
+                  </a:lnTo>
+                  <a:lnTo>
+                    <a:pt x="3489270" y="2726841"/>
+                  </a:lnTo>
+                  <a:lnTo>
+                    <a:pt x="3411636" y="2672836"/>
+                  </a:lnTo>
+                  <a:lnTo>
+                    <a:pt x="3334002" y="2658592"/>
+                  </a:lnTo>
+                  <a:lnTo>
+                    <a:pt x="3256368" y="2664966"/>
+                  </a:lnTo>
+                  <a:lnTo>
+                    <a:pt x="3178734" y="2671290"/>
+                  </a:lnTo>
+                  <a:lnTo>
+                    <a:pt x="3101100" y="2677566"/>
+                  </a:lnTo>
+                  <a:lnTo>
+                    <a:pt x="3023466" y="2683793"/>
+                  </a:lnTo>
+                  <a:lnTo>
+                    <a:pt x="2945832" y="2689972"/>
+                  </a:lnTo>
+                  <a:lnTo>
+                    <a:pt x="2868198" y="2696103"/>
+                  </a:lnTo>
+                  <a:lnTo>
+                    <a:pt x="2790564" y="2702187"/>
+                  </a:lnTo>
+                  <a:lnTo>
+                    <a:pt x="2712930" y="2708224"/>
+                  </a:lnTo>
+                  <a:lnTo>
+                    <a:pt x="2635295" y="2714214"/>
+                  </a:lnTo>
+                  <a:lnTo>
+                    <a:pt x="2557661" y="2720158"/>
+                  </a:lnTo>
+                  <a:lnTo>
+                    <a:pt x="2480027" y="2726057"/>
+                  </a:lnTo>
+                  <a:lnTo>
+                    <a:pt x="2402393" y="2731909"/>
+                  </a:lnTo>
+                  <a:lnTo>
+                    <a:pt x="2324759" y="2737716"/>
+                  </a:lnTo>
+                  <a:lnTo>
+                    <a:pt x="2247125" y="2743479"/>
+                  </a:lnTo>
+                  <a:lnTo>
+                    <a:pt x="2169491" y="2749197"/>
+                  </a:lnTo>
+                  <a:lnTo>
+                    <a:pt x="2091857" y="2754871"/>
+                  </a:lnTo>
+                  <a:lnTo>
+                    <a:pt x="2014223" y="2760501"/>
+                  </a:lnTo>
+                  <a:lnTo>
+                    <a:pt x="1936589" y="2766087"/>
+                  </a:lnTo>
+                  <a:lnTo>
+                    <a:pt x="1858955" y="2771630"/>
+                  </a:lnTo>
+                  <a:lnTo>
+                    <a:pt x="1781321" y="2777131"/>
+                  </a:lnTo>
+                  <a:lnTo>
+                    <a:pt x="1703687" y="2782589"/>
+                  </a:lnTo>
+                  <a:lnTo>
+                    <a:pt x="1626053" y="2788005"/>
+                  </a:lnTo>
+                  <a:lnTo>
+                    <a:pt x="1548419" y="2793379"/>
+                  </a:lnTo>
+                  <a:lnTo>
+                    <a:pt x="1470785" y="2798711"/>
+                  </a:lnTo>
+                  <a:lnTo>
+                    <a:pt x="1393151" y="2804003"/>
+                  </a:lnTo>
+                  <a:lnTo>
+                    <a:pt x="1315517" y="2809253"/>
+                  </a:lnTo>
+                  <a:lnTo>
+                    <a:pt x="1237883" y="2814463"/>
+                  </a:lnTo>
+                  <a:lnTo>
+                    <a:pt x="1160249" y="2819633"/>
+                  </a:lnTo>
+                  <a:lnTo>
+                    <a:pt x="1082615" y="2824763"/>
+                  </a:lnTo>
+                  <a:lnTo>
+                    <a:pt x="1004981" y="2829853"/>
+                  </a:lnTo>
+                  <a:lnTo>
+                    <a:pt x="927346" y="2834903"/>
+                  </a:lnTo>
+                  <a:lnTo>
+                    <a:pt x="849712" y="2839915"/>
+                  </a:lnTo>
+                  <a:lnTo>
+                    <a:pt x="772078" y="2844888"/>
+                  </a:lnTo>
+                  <a:lnTo>
+                    <a:pt x="694444" y="2849823"/>
+                  </a:lnTo>
+                  <a:lnTo>
+                    <a:pt x="616810" y="2854719"/>
+                  </a:lnTo>
+                  <a:lnTo>
+                    <a:pt x="539176" y="2859578"/>
+                  </a:lnTo>
+                  <a:lnTo>
+                    <a:pt x="461542" y="2864399"/>
+                  </a:lnTo>
+                  <a:lnTo>
+                    <a:pt x="383908" y="2869183"/>
+                  </a:lnTo>
+                  <a:lnTo>
+                    <a:pt x="306274" y="2873930"/>
+                  </a:lnTo>
+                  <a:lnTo>
+                    <a:pt x="228640" y="2878641"/>
+                  </a:lnTo>
+                  <a:lnTo>
+                    <a:pt x="151006" y="2883315"/>
+                  </a:lnTo>
+                  <a:lnTo>
+                    <a:pt x="73372" y="2887952"/>
+                  </a:lnTo>
+                  <a:lnTo>
+                    <a:pt x="0" y="2892302"/>
                   </a:lnTo>
                   <a:close/>
                 </a:path>
@@ -3543,234 +3543,234 @@
           </p:nvSpPr>
           <p:spPr>
             <a:xfrm>
-              <a:off x="2587489" y="1896563"/>
-              <a:ext cx="5601001" cy="2780750"/>
+              <a:off x="2587489" y="2073503"/>
+              <a:ext cx="5601001" cy="2652169"/>
             </a:xfrm>
             <a:custGeom>
               <a:avLst/>
               <a:pathLst>
-                <a:path w="5601001" h="2780750">
+                <a:path w="5601001" h="2652169">
                   <a:moveTo>
                     <a:pt x="0" y="0"/>
                   </a:moveTo>
                   <a:lnTo>
-                    <a:pt x="11349" y="37708"/>
-                  </a:lnTo>
-                  <a:lnTo>
-                    <a:pt x="88983" y="278459"/>
-                  </a:lnTo>
-                  <a:lnTo>
-                    <a:pt x="166617" y="503177"/>
-                  </a:lnTo>
-                  <a:lnTo>
-                    <a:pt x="244252" y="712928"/>
-                  </a:lnTo>
-                  <a:lnTo>
-                    <a:pt x="321886" y="908710"/>
-                  </a:lnTo>
-                  <a:lnTo>
-                    <a:pt x="399520" y="1091453"/>
-                  </a:lnTo>
-                  <a:lnTo>
-                    <a:pt x="477154" y="1262026"/>
-                  </a:lnTo>
-                  <a:lnTo>
-                    <a:pt x="554788" y="1421239"/>
-                  </a:lnTo>
-                  <a:lnTo>
-                    <a:pt x="632422" y="1569848"/>
-                  </a:lnTo>
-                  <a:lnTo>
-                    <a:pt x="710056" y="1708560"/>
-                  </a:lnTo>
-                  <a:lnTo>
-                    <a:pt x="787690" y="1838034"/>
-                  </a:lnTo>
-                  <a:lnTo>
-                    <a:pt x="865324" y="1958886"/>
-                  </a:lnTo>
-                  <a:lnTo>
-                    <a:pt x="942958" y="2071688"/>
-                  </a:lnTo>
-                  <a:lnTo>
-                    <a:pt x="1020592" y="2176978"/>
-                  </a:lnTo>
-                  <a:lnTo>
-                    <a:pt x="1098226" y="2275256"/>
-                  </a:lnTo>
-                  <a:lnTo>
-                    <a:pt x="1175860" y="2366989"/>
-                  </a:lnTo>
-                  <a:lnTo>
-                    <a:pt x="1253494" y="2452612"/>
-                  </a:lnTo>
-                  <a:lnTo>
-                    <a:pt x="1331128" y="2532533"/>
-                  </a:lnTo>
-                  <a:lnTo>
-                    <a:pt x="1408762" y="2607131"/>
-                  </a:lnTo>
-                  <a:lnTo>
-                    <a:pt x="1486396" y="2676761"/>
-                  </a:lnTo>
-                  <a:lnTo>
-                    <a:pt x="1564030" y="2741754"/>
-                  </a:lnTo>
-                  <a:lnTo>
-                    <a:pt x="1641664" y="2780750"/>
-                  </a:lnTo>
-                  <a:lnTo>
-                    <a:pt x="1719298" y="2773963"/>
-                  </a:lnTo>
-                  <a:lnTo>
-                    <a:pt x="1796932" y="2767123"/>
-                  </a:lnTo>
-                  <a:lnTo>
-                    <a:pt x="1874566" y="2760230"/>
-                  </a:lnTo>
-                  <a:lnTo>
-                    <a:pt x="1952201" y="2753283"/>
-                  </a:lnTo>
-                  <a:lnTo>
-                    <a:pt x="2029835" y="2746282"/>
-                  </a:lnTo>
-                  <a:lnTo>
-                    <a:pt x="2107469" y="2739227"/>
-                  </a:lnTo>
-                  <a:lnTo>
-                    <a:pt x="2185103" y="2732116"/>
-                  </a:lnTo>
-                  <a:lnTo>
-                    <a:pt x="2262737" y="2724951"/>
-                  </a:lnTo>
-                  <a:lnTo>
-                    <a:pt x="2340371" y="2717729"/>
-                  </a:lnTo>
-                  <a:lnTo>
-                    <a:pt x="2418005" y="2710452"/>
-                  </a:lnTo>
-                  <a:lnTo>
-                    <a:pt x="2495639" y="2703117"/>
-                  </a:lnTo>
-                  <a:lnTo>
-                    <a:pt x="2573273" y="2695726"/>
-                  </a:lnTo>
-                  <a:lnTo>
-                    <a:pt x="2650907" y="2688277"/>
-                  </a:lnTo>
-                  <a:lnTo>
-                    <a:pt x="2728541" y="2680770"/>
-                  </a:lnTo>
-                  <a:lnTo>
-                    <a:pt x="2806175" y="2673205"/>
-                  </a:lnTo>
-                  <a:lnTo>
-                    <a:pt x="2883809" y="2665580"/>
-                  </a:lnTo>
-                  <a:lnTo>
-                    <a:pt x="2961443" y="2657897"/>
-                  </a:lnTo>
-                  <a:lnTo>
-                    <a:pt x="3039077" y="2650153"/>
-                  </a:lnTo>
-                  <a:lnTo>
-                    <a:pt x="3116711" y="2642350"/>
-                  </a:lnTo>
-                  <a:lnTo>
-                    <a:pt x="3194345" y="2634485"/>
-                  </a:lnTo>
-                  <a:lnTo>
-                    <a:pt x="3271979" y="2626560"/>
-                  </a:lnTo>
-                  <a:lnTo>
-                    <a:pt x="3349613" y="2618572"/>
-                  </a:lnTo>
-                  <a:lnTo>
-                    <a:pt x="3427247" y="2610523"/>
-                  </a:lnTo>
-                  <a:lnTo>
-                    <a:pt x="3504881" y="2602410"/>
-                  </a:lnTo>
-                  <a:lnTo>
-                    <a:pt x="3582515" y="2594235"/>
-                  </a:lnTo>
-                  <a:lnTo>
-                    <a:pt x="3660150" y="2585996"/>
-                  </a:lnTo>
-                  <a:lnTo>
-                    <a:pt x="3737784" y="2577693"/>
-                  </a:lnTo>
-                  <a:lnTo>
-                    <a:pt x="3815418" y="2569325"/>
-                  </a:lnTo>
-                  <a:lnTo>
-                    <a:pt x="3893052" y="2560892"/>
-                  </a:lnTo>
-                  <a:lnTo>
-                    <a:pt x="3970686" y="2552394"/>
-                  </a:lnTo>
-                  <a:lnTo>
-                    <a:pt x="4048320" y="2543829"/>
-                  </a:lnTo>
-                  <a:lnTo>
-                    <a:pt x="4125954" y="2535198"/>
-                  </a:lnTo>
-                  <a:lnTo>
-                    <a:pt x="4203588" y="2526499"/>
-                  </a:lnTo>
-                  <a:lnTo>
-                    <a:pt x="4281222" y="2517733"/>
-                  </a:lnTo>
-                  <a:lnTo>
-                    <a:pt x="4358856" y="2508899"/>
-                  </a:lnTo>
-                  <a:lnTo>
-                    <a:pt x="4436490" y="2499995"/>
-                  </a:lnTo>
-                  <a:lnTo>
-                    <a:pt x="4514124" y="2491023"/>
-                  </a:lnTo>
-                  <a:lnTo>
-                    <a:pt x="4591758" y="2481980"/>
-                  </a:lnTo>
-                  <a:lnTo>
-                    <a:pt x="4669392" y="2472867"/>
-                  </a:lnTo>
-                  <a:lnTo>
-                    <a:pt x="4747026" y="2463684"/>
-                  </a:lnTo>
-                  <a:lnTo>
-                    <a:pt x="4824660" y="2454428"/>
-                  </a:lnTo>
-                  <a:lnTo>
-                    <a:pt x="4902294" y="2445101"/>
-                  </a:lnTo>
-                  <a:lnTo>
-                    <a:pt x="4979928" y="2435701"/>
-                  </a:lnTo>
-                  <a:lnTo>
-                    <a:pt x="5057562" y="2426228"/>
-                  </a:lnTo>
-                  <a:lnTo>
-                    <a:pt x="5135196" y="2416681"/>
-                  </a:lnTo>
-                  <a:lnTo>
-                    <a:pt x="5212830" y="2407060"/>
-                  </a:lnTo>
-                  <a:lnTo>
-                    <a:pt x="5290464" y="2397364"/>
-                  </a:lnTo>
-                  <a:lnTo>
-                    <a:pt x="5368099" y="2387593"/>
-                  </a:lnTo>
-                  <a:lnTo>
-                    <a:pt x="5445733" y="2377745"/>
-                  </a:lnTo>
-                  <a:lnTo>
-                    <a:pt x="5523367" y="2367821"/>
-                  </a:lnTo>
-                  <a:lnTo>
-                    <a:pt x="5601001" y="2357820"/>
+                    <a:pt x="11349" y="35964"/>
+                  </a:lnTo>
+                  <a:lnTo>
+                    <a:pt x="88983" y="265583"/>
+                  </a:lnTo>
+                  <a:lnTo>
+                    <a:pt x="166617" y="479910"/>
+                  </a:lnTo>
+                  <a:lnTo>
+                    <a:pt x="244252" y="679962"/>
+                  </a:lnTo>
+                  <a:lnTo>
+                    <a:pt x="321886" y="866692"/>
+                  </a:lnTo>
+                  <a:lnTo>
+                    <a:pt x="399520" y="1040985"/>
+                  </a:lnTo>
+                  <a:lnTo>
+                    <a:pt x="477154" y="1203671"/>
+                  </a:lnTo>
+                  <a:lnTo>
+                    <a:pt x="554788" y="1355521"/>
+                  </a:lnTo>
+                  <a:lnTo>
+                    <a:pt x="632422" y="1497259"/>
+                  </a:lnTo>
+                  <a:lnTo>
+                    <a:pt x="710056" y="1629557"/>
+                  </a:lnTo>
+                  <a:lnTo>
+                    <a:pt x="787690" y="1753044"/>
+                  </a:lnTo>
+                  <a:lnTo>
+                    <a:pt x="865324" y="1868307"/>
+                  </a:lnTo>
+                  <a:lnTo>
+                    <a:pt x="942958" y="1975894"/>
+                  </a:lnTo>
+                  <a:lnTo>
+                    <a:pt x="1020592" y="2076316"/>
+                  </a:lnTo>
+                  <a:lnTo>
+                    <a:pt x="1098226" y="2170049"/>
+                  </a:lnTo>
+                  <a:lnTo>
+                    <a:pt x="1175860" y="2257540"/>
+                  </a:lnTo>
+                  <a:lnTo>
+                    <a:pt x="1253494" y="2339204"/>
+                  </a:lnTo>
+                  <a:lnTo>
+                    <a:pt x="1331128" y="2415430"/>
+                  </a:lnTo>
+                  <a:lnTo>
+                    <a:pt x="1408762" y="2486578"/>
+                  </a:lnTo>
+                  <a:lnTo>
+                    <a:pt x="1486396" y="2552989"/>
+                  </a:lnTo>
+                  <a:lnTo>
+                    <a:pt x="1564030" y="2614976"/>
+                  </a:lnTo>
+                  <a:lnTo>
+                    <a:pt x="1641664" y="2652169"/>
+                  </a:lnTo>
+                  <a:lnTo>
+                    <a:pt x="1719298" y="2645696"/>
+                  </a:lnTo>
+                  <a:lnTo>
+                    <a:pt x="1796932" y="2639172"/>
+                  </a:lnTo>
+                  <a:lnTo>
+                    <a:pt x="1874566" y="2632598"/>
+                  </a:lnTo>
+                  <a:lnTo>
+                    <a:pt x="1952201" y="2625972"/>
+                  </a:lnTo>
+                  <a:lnTo>
+                    <a:pt x="2029835" y="2619295"/>
+                  </a:lnTo>
+                  <a:lnTo>
+                    <a:pt x="2107469" y="2612566"/>
+                  </a:lnTo>
+                  <a:lnTo>
+                    <a:pt x="2185103" y="2605784"/>
+                  </a:lnTo>
+                  <a:lnTo>
+                    <a:pt x="2262737" y="2598950"/>
+                  </a:lnTo>
+                  <a:lnTo>
+                    <a:pt x="2340371" y="2592062"/>
+                  </a:lnTo>
+                  <a:lnTo>
+                    <a:pt x="2418005" y="2585121"/>
+                  </a:lnTo>
+                  <a:lnTo>
+                    <a:pt x="2495639" y="2578126"/>
+                  </a:lnTo>
+                  <a:lnTo>
+                    <a:pt x="2573273" y="2571076"/>
+                  </a:lnTo>
+                  <a:lnTo>
+                    <a:pt x="2650907" y="2563972"/>
+                  </a:lnTo>
+                  <a:lnTo>
+                    <a:pt x="2728541" y="2556812"/>
+                  </a:lnTo>
+                  <a:lnTo>
+                    <a:pt x="2806175" y="2549597"/>
+                  </a:lnTo>
+                  <a:lnTo>
+                    <a:pt x="2883809" y="2542325"/>
+                  </a:lnTo>
+                  <a:lnTo>
+                    <a:pt x="2961443" y="2534997"/>
+                  </a:lnTo>
+                  <a:lnTo>
+                    <a:pt x="3039077" y="2527611"/>
+                  </a:lnTo>
+                  <a:lnTo>
+                    <a:pt x="3116711" y="2520168"/>
+                  </a:lnTo>
+                  <a:lnTo>
+                    <a:pt x="3194345" y="2512668"/>
+                  </a:lnTo>
+                  <a:lnTo>
+                    <a:pt x="3271979" y="2505108"/>
+                  </a:lnTo>
+                  <a:lnTo>
+                    <a:pt x="3349613" y="2497490"/>
+                  </a:lnTo>
+                  <a:lnTo>
+                    <a:pt x="3427247" y="2489813"/>
+                  </a:lnTo>
+                  <a:lnTo>
+                    <a:pt x="3504881" y="2482076"/>
+                  </a:lnTo>
+                  <a:lnTo>
+                    <a:pt x="3582515" y="2474279"/>
+                  </a:lnTo>
+                  <a:lnTo>
+                    <a:pt x="3660150" y="2466421"/>
+                  </a:lnTo>
+                  <a:lnTo>
+                    <a:pt x="3737784" y="2458501"/>
+                  </a:lnTo>
+                  <a:lnTo>
+                    <a:pt x="3815418" y="2450521"/>
+                  </a:lnTo>
+                  <a:lnTo>
+                    <a:pt x="3893052" y="2442478"/>
+                  </a:lnTo>
+                  <a:lnTo>
+                    <a:pt x="3970686" y="2434372"/>
+                  </a:lnTo>
+                  <a:lnTo>
+                    <a:pt x="4048320" y="2426203"/>
+                  </a:lnTo>
+                  <a:lnTo>
+                    <a:pt x="4125954" y="2417971"/>
+                  </a:lnTo>
+                  <a:lnTo>
+                    <a:pt x="4203588" y="2409675"/>
+                  </a:lnTo>
+                  <a:lnTo>
+                    <a:pt x="4281222" y="2401314"/>
+                  </a:lnTo>
+                  <a:lnTo>
+                    <a:pt x="4358856" y="2392888"/>
+                  </a:lnTo>
+                  <a:lnTo>
+                    <a:pt x="4436490" y="2384396"/>
+                  </a:lnTo>
+                  <a:lnTo>
+                    <a:pt x="4514124" y="2375839"/>
+                  </a:lnTo>
+                  <a:lnTo>
+                    <a:pt x="4591758" y="2367214"/>
+                  </a:lnTo>
+                  <a:lnTo>
+                    <a:pt x="4669392" y="2358523"/>
+                  </a:lnTo>
+                  <a:lnTo>
+                    <a:pt x="4747026" y="2349764"/>
+                  </a:lnTo>
+                  <a:lnTo>
+                    <a:pt x="4824660" y="2340937"/>
+                  </a:lnTo>
+                  <a:lnTo>
+                    <a:pt x="4902294" y="2332041"/>
+                  </a:lnTo>
+                  <a:lnTo>
+                    <a:pt x="4979928" y="2323075"/>
+                  </a:lnTo>
+                  <a:lnTo>
+                    <a:pt x="5057562" y="2314040"/>
+                  </a:lnTo>
+                  <a:lnTo>
+                    <a:pt x="5135196" y="2304935"/>
+                  </a:lnTo>
+                  <a:lnTo>
+                    <a:pt x="5212830" y="2295759"/>
+                  </a:lnTo>
+                  <a:lnTo>
+                    <a:pt x="5290464" y="2286511"/>
+                  </a:lnTo>
+                  <a:lnTo>
+                    <a:pt x="5368099" y="2277191"/>
+                  </a:lnTo>
+                  <a:lnTo>
+                    <a:pt x="5445733" y="2267799"/>
+                  </a:lnTo>
+                  <a:lnTo>
+                    <a:pt x="5523367" y="2258334"/>
+                  </a:lnTo>
+                  <a:lnTo>
+                    <a:pt x="5601001" y="2248795"/>
                   </a:lnTo>
                 </a:path>
               </a:pathLst>
@@ -3790,300 +3790,300 @@
           </p:nvSpPr>
           <p:spPr>
             <a:xfrm>
-              <a:off x="817517" y="4684048"/>
-              <a:ext cx="7370972" cy="839864"/>
+              <a:off x="817517" y="4732095"/>
+              <a:ext cx="7370972" cy="801029"/>
             </a:xfrm>
             <a:custGeom>
               <a:avLst/>
               <a:pathLst>
-                <a:path w="7370972" h="839864">
+                <a:path w="7370972" h="801029">
                   <a:moveTo>
-                    <a:pt x="7370972" y="839864"/>
+                    <a:pt x="7370972" y="801029"/>
                   </a:moveTo>
                   <a:lnTo>
-                    <a:pt x="7293338" y="838060"/>
-                  </a:lnTo>
-                  <a:lnTo>
-                    <a:pt x="7215704" y="836126"/>
-                  </a:lnTo>
-                  <a:lnTo>
-                    <a:pt x="7138070" y="834055"/>
-                  </a:lnTo>
-                  <a:lnTo>
-                    <a:pt x="7060436" y="831835"/>
-                  </a:lnTo>
-                  <a:lnTo>
-                    <a:pt x="6982802" y="829458"/>
-                  </a:lnTo>
-                  <a:lnTo>
-                    <a:pt x="6905168" y="826910"/>
-                  </a:lnTo>
-                  <a:lnTo>
-                    <a:pt x="6827534" y="824181"/>
-                  </a:lnTo>
-                  <a:lnTo>
-                    <a:pt x="6749900" y="821258"/>
-                  </a:lnTo>
-                  <a:lnTo>
-                    <a:pt x="6672266" y="818125"/>
-                  </a:lnTo>
-                  <a:lnTo>
-                    <a:pt x="6594632" y="814770"/>
-                  </a:lnTo>
-                  <a:lnTo>
-                    <a:pt x="6516998" y="811174"/>
-                  </a:lnTo>
-                  <a:lnTo>
-                    <a:pt x="6439364" y="807322"/>
-                  </a:lnTo>
-                  <a:lnTo>
-                    <a:pt x="6361730" y="803196"/>
-                  </a:lnTo>
-                  <a:lnTo>
-                    <a:pt x="6284096" y="798775"/>
-                  </a:lnTo>
-                  <a:lnTo>
-                    <a:pt x="6206462" y="794038"/>
-                  </a:lnTo>
-                  <a:lnTo>
-                    <a:pt x="6128827" y="788964"/>
-                  </a:lnTo>
-                  <a:lnTo>
-                    <a:pt x="6051193" y="783527"/>
-                  </a:lnTo>
-                  <a:lnTo>
-                    <a:pt x="5973559" y="777703"/>
-                  </a:lnTo>
-                  <a:lnTo>
-                    <a:pt x="5895925" y="771463"/>
-                  </a:lnTo>
-                  <a:lnTo>
-                    <a:pt x="5818291" y="764778"/>
-                  </a:lnTo>
-                  <a:lnTo>
-                    <a:pt x="5740657" y="757615"/>
-                  </a:lnTo>
-                  <a:lnTo>
-                    <a:pt x="5663023" y="749942"/>
-                  </a:lnTo>
-                  <a:lnTo>
-                    <a:pt x="5585389" y="741721"/>
-                  </a:lnTo>
-                  <a:lnTo>
-                    <a:pt x="5507755" y="732914"/>
-                  </a:lnTo>
-                  <a:lnTo>
-                    <a:pt x="5430121" y="723478"/>
-                  </a:lnTo>
-                  <a:lnTo>
-                    <a:pt x="5352487" y="713369"/>
-                  </a:lnTo>
-                  <a:lnTo>
-                    <a:pt x="5274853" y="702539"/>
-                  </a:lnTo>
-                  <a:lnTo>
-                    <a:pt x="5197219" y="690936"/>
-                  </a:lnTo>
-                  <a:lnTo>
-                    <a:pt x="5119585" y="678505"/>
-                  </a:lnTo>
-                  <a:lnTo>
-                    <a:pt x="5041951" y="665187"/>
-                  </a:lnTo>
-                  <a:lnTo>
-                    <a:pt x="4964317" y="650919"/>
-                  </a:lnTo>
-                  <a:lnTo>
-                    <a:pt x="4886683" y="635633"/>
-                  </a:lnTo>
-                  <a:lnTo>
-                    <a:pt x="4809049" y="619256"/>
-                  </a:lnTo>
-                  <a:lnTo>
-                    <a:pt x="4731415" y="601711"/>
-                  </a:lnTo>
-                  <a:lnTo>
-                    <a:pt x="4653781" y="582913"/>
-                  </a:lnTo>
-                  <a:lnTo>
-                    <a:pt x="4576147" y="562775"/>
-                  </a:lnTo>
-                  <a:lnTo>
-                    <a:pt x="4498513" y="541200"/>
-                  </a:lnTo>
-                  <a:lnTo>
-                    <a:pt x="4420879" y="518085"/>
-                  </a:lnTo>
-                  <a:lnTo>
-                    <a:pt x="4343244" y="493321"/>
-                  </a:lnTo>
-                  <a:lnTo>
-                    <a:pt x="4265610" y="466790"/>
-                  </a:lnTo>
-                  <a:lnTo>
-                    <a:pt x="4187976" y="438366"/>
-                  </a:lnTo>
-                  <a:lnTo>
-                    <a:pt x="4110342" y="407914"/>
-                  </a:lnTo>
-                  <a:lnTo>
-                    <a:pt x="4032708" y="375289"/>
-                  </a:lnTo>
-                  <a:lnTo>
-                    <a:pt x="3955074" y="340337"/>
-                  </a:lnTo>
-                  <a:lnTo>
-                    <a:pt x="3877440" y="302890"/>
-                  </a:lnTo>
-                  <a:lnTo>
-                    <a:pt x="3799806" y="262772"/>
-                  </a:lnTo>
-                  <a:lnTo>
-                    <a:pt x="3722172" y="219791"/>
-                  </a:lnTo>
-                  <a:lnTo>
-                    <a:pt x="3644538" y="173744"/>
-                  </a:lnTo>
-                  <a:lnTo>
-                    <a:pt x="3566904" y="124410"/>
-                  </a:lnTo>
-                  <a:lnTo>
-                    <a:pt x="3489270" y="71557"/>
-                  </a:lnTo>
-                  <a:lnTo>
-                    <a:pt x="3411636" y="14933"/>
+                    <a:pt x="7293338" y="799308"/>
+                  </a:lnTo>
+                  <a:lnTo>
+                    <a:pt x="7215704" y="797464"/>
+                  </a:lnTo>
+                  <a:lnTo>
+                    <a:pt x="7138070" y="795488"/>
+                  </a:lnTo>
+                  <a:lnTo>
+                    <a:pt x="7060436" y="793372"/>
+                  </a:lnTo>
+                  <a:lnTo>
+                    <a:pt x="6982802" y="791104"/>
+                  </a:lnTo>
+                  <a:lnTo>
+                    <a:pt x="6905168" y="788674"/>
+                  </a:lnTo>
+                  <a:lnTo>
+                    <a:pt x="6827534" y="786072"/>
+                  </a:lnTo>
+                  <a:lnTo>
+                    <a:pt x="6749900" y="783283"/>
+                  </a:lnTo>
+                  <a:lnTo>
+                    <a:pt x="6672266" y="780296"/>
+                  </a:lnTo>
+                  <a:lnTo>
+                    <a:pt x="6594632" y="777095"/>
+                  </a:lnTo>
+                  <a:lnTo>
+                    <a:pt x="6516998" y="773666"/>
+                  </a:lnTo>
+                  <a:lnTo>
+                    <a:pt x="6439364" y="769992"/>
+                  </a:lnTo>
+                  <a:lnTo>
+                    <a:pt x="6361730" y="766056"/>
+                  </a:lnTo>
+                  <a:lnTo>
+                    <a:pt x="6284096" y="761840"/>
+                  </a:lnTo>
+                  <a:lnTo>
+                    <a:pt x="6206462" y="757322"/>
+                  </a:lnTo>
+                  <a:lnTo>
+                    <a:pt x="6128827" y="752482"/>
+                  </a:lnTo>
+                  <a:lnTo>
+                    <a:pt x="6051193" y="747297"/>
+                  </a:lnTo>
+                  <a:lnTo>
+                    <a:pt x="5973559" y="741742"/>
+                  </a:lnTo>
+                  <a:lnTo>
+                    <a:pt x="5895925" y="735791"/>
+                  </a:lnTo>
+                  <a:lnTo>
+                    <a:pt x="5818291" y="729415"/>
+                  </a:lnTo>
+                  <a:lnTo>
+                    <a:pt x="5740657" y="722583"/>
+                  </a:lnTo>
+                  <a:lnTo>
+                    <a:pt x="5663023" y="715265"/>
+                  </a:lnTo>
+                  <a:lnTo>
+                    <a:pt x="5585389" y="707424"/>
+                  </a:lnTo>
+                  <a:lnTo>
+                    <a:pt x="5507755" y="699024"/>
+                  </a:lnTo>
+                  <a:lnTo>
+                    <a:pt x="5430121" y="690025"/>
+                  </a:lnTo>
+                  <a:lnTo>
+                    <a:pt x="5352487" y="680383"/>
+                  </a:lnTo>
+                  <a:lnTo>
+                    <a:pt x="5274853" y="670054"/>
+                  </a:lnTo>
+                  <a:lnTo>
+                    <a:pt x="5197219" y="658987"/>
+                  </a:lnTo>
+                  <a:lnTo>
+                    <a:pt x="5119585" y="647131"/>
+                  </a:lnTo>
+                  <a:lnTo>
+                    <a:pt x="5041951" y="634429"/>
+                  </a:lnTo>
+                  <a:lnTo>
+                    <a:pt x="4964317" y="620821"/>
+                  </a:lnTo>
+                  <a:lnTo>
+                    <a:pt x="4886683" y="606241"/>
+                  </a:lnTo>
+                  <a:lnTo>
+                    <a:pt x="4809049" y="590622"/>
+                  </a:lnTo>
+                  <a:lnTo>
+                    <a:pt x="4731415" y="573888"/>
+                  </a:lnTo>
+                  <a:lnTo>
+                    <a:pt x="4653781" y="555960"/>
+                  </a:lnTo>
+                  <a:lnTo>
+                    <a:pt x="4576147" y="536752"/>
+                  </a:lnTo>
+                  <a:lnTo>
+                    <a:pt x="4498513" y="516175"/>
+                  </a:lnTo>
+                  <a:lnTo>
+                    <a:pt x="4420879" y="494129"/>
+                  </a:lnTo>
+                  <a:lnTo>
+                    <a:pt x="4343244" y="470510"/>
+                  </a:lnTo>
+                  <a:lnTo>
+                    <a:pt x="4265610" y="445206"/>
+                  </a:lnTo>
+                  <a:lnTo>
+                    <a:pt x="4187976" y="418096"/>
+                  </a:lnTo>
+                  <a:lnTo>
+                    <a:pt x="4110342" y="389052"/>
+                  </a:lnTo>
+                  <a:lnTo>
+                    <a:pt x="4032708" y="357936"/>
+                  </a:lnTo>
+                  <a:lnTo>
+                    <a:pt x="3955074" y="324600"/>
+                  </a:lnTo>
+                  <a:lnTo>
+                    <a:pt x="3877440" y="288885"/>
+                  </a:lnTo>
+                  <a:lnTo>
+                    <a:pt x="3799806" y="250621"/>
+                  </a:lnTo>
+                  <a:lnTo>
+                    <a:pt x="3722172" y="209628"/>
+                  </a:lnTo>
+                  <a:lnTo>
+                    <a:pt x="3644538" y="165710"/>
+                  </a:lnTo>
+                  <a:lnTo>
+                    <a:pt x="3566904" y="118658"/>
+                  </a:lnTo>
+                  <a:lnTo>
+                    <a:pt x="3489270" y="68249"/>
+                  </a:lnTo>
+                  <a:lnTo>
+                    <a:pt x="3411636" y="14243"/>
                   </a:lnTo>
                   <a:lnTo>
                     <a:pt x="3334002" y="0"/>
                   </a:lnTo>
                   <a:lnTo>
-                    <a:pt x="3256368" y="6682"/>
-                  </a:lnTo>
-                  <a:lnTo>
-                    <a:pt x="3178734" y="13313"/>
-                  </a:lnTo>
-                  <a:lnTo>
-                    <a:pt x="3101100" y="19893"/>
-                  </a:lnTo>
-                  <a:lnTo>
-                    <a:pt x="3023466" y="26422"/>
-                  </a:lnTo>
-                  <a:lnTo>
-                    <a:pt x="2945832" y="32901"/>
-                  </a:lnTo>
-                  <a:lnTo>
-                    <a:pt x="2868198" y="39329"/>
-                  </a:lnTo>
-                  <a:lnTo>
-                    <a:pt x="2790564" y="45708"/>
-                  </a:lnTo>
-                  <a:lnTo>
-                    <a:pt x="2712930" y="52037"/>
-                  </a:lnTo>
-                  <a:lnTo>
-                    <a:pt x="2635295" y="58318"/>
-                  </a:lnTo>
-                  <a:lnTo>
-                    <a:pt x="2557661" y="64550"/>
-                  </a:lnTo>
-                  <a:lnTo>
-                    <a:pt x="2480027" y="70734"/>
-                  </a:lnTo>
-                  <a:lnTo>
-                    <a:pt x="2402393" y="76871"/>
-                  </a:lnTo>
-                  <a:lnTo>
-                    <a:pt x="2324759" y="82960"/>
-                  </a:lnTo>
-                  <a:lnTo>
-                    <a:pt x="2247125" y="89001"/>
-                  </a:lnTo>
-                  <a:lnTo>
-                    <a:pt x="2169491" y="94997"/>
-                  </a:lnTo>
-                  <a:lnTo>
-                    <a:pt x="2091857" y="100945"/>
-                  </a:lnTo>
-                  <a:lnTo>
-                    <a:pt x="2014223" y="106848"/>
-                  </a:lnTo>
-                  <a:lnTo>
-                    <a:pt x="1936589" y="112706"/>
-                  </a:lnTo>
-                  <a:lnTo>
-                    <a:pt x="1858955" y="118518"/>
-                  </a:lnTo>
-                  <a:lnTo>
-                    <a:pt x="1781321" y="124285"/>
-                  </a:lnTo>
-                  <a:lnTo>
-                    <a:pt x="1703687" y="130008"/>
-                  </a:lnTo>
-                  <a:lnTo>
-                    <a:pt x="1626053" y="135686"/>
-                  </a:lnTo>
-                  <a:lnTo>
-                    <a:pt x="1548419" y="141321"/>
-                  </a:lnTo>
-                  <a:lnTo>
-                    <a:pt x="1470785" y="146912"/>
-                  </a:lnTo>
-                  <a:lnTo>
-                    <a:pt x="1393151" y="152460"/>
-                  </a:lnTo>
-                  <a:lnTo>
-                    <a:pt x="1315517" y="157965"/>
-                  </a:lnTo>
-                  <a:lnTo>
-                    <a:pt x="1237883" y="163427"/>
-                  </a:lnTo>
-                  <a:lnTo>
-                    <a:pt x="1160249" y="168847"/>
-                  </a:lnTo>
-                  <a:lnTo>
-                    <a:pt x="1082615" y="174226"/>
-                  </a:lnTo>
-                  <a:lnTo>
-                    <a:pt x="1004981" y="179563"/>
-                  </a:lnTo>
-                  <a:lnTo>
-                    <a:pt x="927346" y="184858"/>
-                  </a:lnTo>
-                  <a:lnTo>
-                    <a:pt x="849712" y="190113"/>
-                  </a:lnTo>
-                  <a:lnTo>
-                    <a:pt x="772078" y="195327"/>
-                  </a:lnTo>
-                  <a:lnTo>
-                    <a:pt x="694444" y="200501"/>
-                  </a:lnTo>
-                  <a:lnTo>
-                    <a:pt x="616810" y="205635"/>
-                  </a:lnTo>
-                  <a:lnTo>
-                    <a:pt x="539176" y="210729"/>
-                  </a:lnTo>
-                  <a:lnTo>
-                    <a:pt x="461542" y="215784"/>
-                  </a:lnTo>
-                  <a:lnTo>
-                    <a:pt x="383908" y="220800"/>
-                  </a:lnTo>
-                  <a:lnTo>
-                    <a:pt x="306274" y="225777"/>
-                  </a:lnTo>
-                  <a:lnTo>
-                    <a:pt x="228640" y="230716"/>
-                  </a:lnTo>
-                  <a:lnTo>
-                    <a:pt x="151006" y="235617"/>
-                  </a:lnTo>
-                  <a:lnTo>
-                    <a:pt x="73372" y="240479"/>
-                  </a:lnTo>
-                  <a:lnTo>
-                    <a:pt x="0" y="245040"/>
+                    <a:pt x="3256368" y="6373"/>
+                  </a:lnTo>
+                  <a:lnTo>
+                    <a:pt x="3178734" y="12698"/>
+                  </a:lnTo>
+                  <a:lnTo>
+                    <a:pt x="3101100" y="18973"/>
+                  </a:lnTo>
+                  <a:lnTo>
+                    <a:pt x="3023466" y="25200"/>
+                  </a:lnTo>
+                  <a:lnTo>
+                    <a:pt x="2945832" y="31379"/>
+                  </a:lnTo>
+                  <a:lnTo>
+                    <a:pt x="2868198" y="37510"/>
+                  </a:lnTo>
+                  <a:lnTo>
+                    <a:pt x="2790564" y="43594"/>
+                  </a:lnTo>
+                  <a:lnTo>
+                    <a:pt x="2712930" y="49631"/>
+                  </a:lnTo>
+                  <a:lnTo>
+                    <a:pt x="2635295" y="55622"/>
+                  </a:lnTo>
+                  <a:lnTo>
+                    <a:pt x="2557661" y="61566"/>
+                  </a:lnTo>
+                  <a:lnTo>
+                    <a:pt x="2480027" y="67464"/>
+                  </a:lnTo>
+                  <a:lnTo>
+                    <a:pt x="2402393" y="73316"/>
+                  </a:lnTo>
+                  <a:lnTo>
+                    <a:pt x="2324759" y="79124"/>
+                  </a:lnTo>
+                  <a:lnTo>
+                    <a:pt x="2247125" y="84886"/>
+                  </a:lnTo>
+                  <a:lnTo>
+                    <a:pt x="2169491" y="90604"/>
+                  </a:lnTo>
+                  <a:lnTo>
+                    <a:pt x="2091857" y="96278"/>
+                  </a:lnTo>
+                  <a:lnTo>
+                    <a:pt x="2014223" y="101908"/>
+                  </a:lnTo>
+                  <a:lnTo>
+                    <a:pt x="1936589" y="107494"/>
+                  </a:lnTo>
+                  <a:lnTo>
+                    <a:pt x="1858955" y="113038"/>
+                  </a:lnTo>
+                  <a:lnTo>
+                    <a:pt x="1781321" y="118538"/>
+                  </a:lnTo>
+                  <a:lnTo>
+                    <a:pt x="1703687" y="123996"/>
+                  </a:lnTo>
+                  <a:lnTo>
+                    <a:pt x="1626053" y="129412"/>
+                  </a:lnTo>
+                  <a:lnTo>
+                    <a:pt x="1548419" y="134786"/>
+                  </a:lnTo>
+                  <a:lnTo>
+                    <a:pt x="1470785" y="140119"/>
+                  </a:lnTo>
+                  <a:lnTo>
+                    <a:pt x="1393151" y="145410"/>
+                  </a:lnTo>
+                  <a:lnTo>
+                    <a:pt x="1315517" y="150660"/>
+                  </a:lnTo>
+                  <a:lnTo>
+                    <a:pt x="1237883" y="155870"/>
+                  </a:lnTo>
+                  <a:lnTo>
+                    <a:pt x="1160249" y="161040"/>
+                  </a:lnTo>
+                  <a:lnTo>
+                    <a:pt x="1082615" y="166170"/>
+                  </a:lnTo>
+                  <a:lnTo>
+                    <a:pt x="1004981" y="171260"/>
+                  </a:lnTo>
+                  <a:lnTo>
+                    <a:pt x="927346" y="176311"/>
+                  </a:lnTo>
+                  <a:lnTo>
+                    <a:pt x="849712" y="181322"/>
+                  </a:lnTo>
+                  <a:lnTo>
+                    <a:pt x="772078" y="186295"/>
+                  </a:lnTo>
+                  <a:lnTo>
+                    <a:pt x="694444" y="191230"/>
+                  </a:lnTo>
+                  <a:lnTo>
+                    <a:pt x="616810" y="196127"/>
+                  </a:lnTo>
+                  <a:lnTo>
+                    <a:pt x="539176" y="200985"/>
+                  </a:lnTo>
+                  <a:lnTo>
+                    <a:pt x="461542" y="205807"/>
+                  </a:lnTo>
+                  <a:lnTo>
+                    <a:pt x="383908" y="210590"/>
+                  </a:lnTo>
+                  <a:lnTo>
+                    <a:pt x="306274" y="215337"/>
+                  </a:lnTo>
+                  <a:lnTo>
+                    <a:pt x="228640" y="220048"/>
+                  </a:lnTo>
+                  <a:lnTo>
+                    <a:pt x="151006" y="224722"/>
+                  </a:lnTo>
+                  <a:lnTo>
+                    <a:pt x="73372" y="229360"/>
+                  </a:lnTo>
+                  <a:lnTo>
+                    <a:pt x="0" y="233709"/>
                   </a:lnTo>
                 </a:path>
               </a:pathLst>
@@ -4103,300 +4103,300 @@
           </p:nvSpPr>
           <p:spPr>
             <a:xfrm>
-              <a:off x="817517" y="2247859"/>
-              <a:ext cx="7370972" cy="3120375"/>
+              <a:off x="817517" y="2408554"/>
+              <a:ext cx="7370972" cy="2976090"/>
             </a:xfrm>
             <a:custGeom>
               <a:avLst/>
               <a:pathLst>
-                <a:path w="7370972" h="3120375">
+                <a:path w="7370972" h="2976090">
                   <a:moveTo>
                     <a:pt x="0" y="0"/>
                   </a:moveTo>
                   <a:lnTo>
-                    <a:pt x="73372" y="94134"/>
-                  </a:lnTo>
-                  <a:lnTo>
-                    <a:pt x="151006" y="190736"/>
-                  </a:lnTo>
-                  <a:lnTo>
-                    <a:pt x="228640" y="284428"/>
-                  </a:lnTo>
-                  <a:lnTo>
-                    <a:pt x="306274" y="375298"/>
-                  </a:lnTo>
-                  <a:lnTo>
-                    <a:pt x="383908" y="463431"/>
-                  </a:lnTo>
-                  <a:lnTo>
-                    <a:pt x="461542" y="548910"/>
-                  </a:lnTo>
-                  <a:lnTo>
-                    <a:pt x="539176" y="631814"/>
-                  </a:lnTo>
-                  <a:lnTo>
-                    <a:pt x="616810" y="712221"/>
-                  </a:lnTo>
-                  <a:lnTo>
-                    <a:pt x="694444" y="790206"/>
-                  </a:lnTo>
-                  <a:lnTo>
-                    <a:pt x="772078" y="865842"/>
-                  </a:lnTo>
-                  <a:lnTo>
-                    <a:pt x="849712" y="939200"/>
-                  </a:lnTo>
-                  <a:lnTo>
-                    <a:pt x="927346" y="1010348"/>
-                  </a:lnTo>
-                  <a:lnTo>
-                    <a:pt x="1004981" y="1079353"/>
-                  </a:lnTo>
-                  <a:lnTo>
-                    <a:pt x="1082615" y="1146280"/>
-                  </a:lnTo>
-                  <a:lnTo>
-                    <a:pt x="1160249" y="1211191"/>
-                  </a:lnTo>
-                  <a:lnTo>
-                    <a:pt x="1237883" y="1274147"/>
-                  </a:lnTo>
-                  <a:lnTo>
-                    <a:pt x="1315517" y="1335207"/>
-                  </a:lnTo>
-                  <a:lnTo>
-                    <a:pt x="1393151" y="1394427"/>
-                  </a:lnTo>
-                  <a:lnTo>
-                    <a:pt x="1470785" y="1451864"/>
-                  </a:lnTo>
-                  <a:lnTo>
-                    <a:pt x="1548419" y="1507571"/>
-                  </a:lnTo>
-                  <a:lnTo>
-                    <a:pt x="1626053" y="1561600"/>
-                  </a:lnTo>
-                  <a:lnTo>
-                    <a:pt x="1703687" y="1614001"/>
-                  </a:lnTo>
-                  <a:lnTo>
-                    <a:pt x="1781321" y="1664824"/>
-                  </a:lnTo>
-                  <a:lnTo>
-                    <a:pt x="1858955" y="1714117"/>
-                  </a:lnTo>
-                  <a:lnTo>
-                    <a:pt x="1936589" y="1761924"/>
-                  </a:lnTo>
-                  <a:lnTo>
-                    <a:pt x="2014223" y="1808292"/>
-                  </a:lnTo>
-                  <a:lnTo>
-                    <a:pt x="2091857" y="1853263"/>
-                  </a:lnTo>
-                  <a:lnTo>
-                    <a:pt x="2169491" y="1896880"/>
-                  </a:lnTo>
-                  <a:lnTo>
-                    <a:pt x="2247125" y="1939183"/>
-                  </a:lnTo>
-                  <a:lnTo>
-                    <a:pt x="2324759" y="1980211"/>
-                  </a:lnTo>
-                  <a:lnTo>
-                    <a:pt x="2402393" y="2020004"/>
-                  </a:lnTo>
-                  <a:lnTo>
-                    <a:pt x="2480027" y="2058598"/>
-                  </a:lnTo>
-                  <a:lnTo>
-                    <a:pt x="2557661" y="2096030"/>
-                  </a:lnTo>
-                  <a:lnTo>
-                    <a:pt x="2635295" y="2132335"/>
-                  </a:lnTo>
-                  <a:lnTo>
-                    <a:pt x="2712930" y="2167546"/>
-                  </a:lnTo>
-                  <a:lnTo>
-                    <a:pt x="2790564" y="2201696"/>
-                  </a:lnTo>
-                  <a:lnTo>
-                    <a:pt x="2868198" y="2234818"/>
-                  </a:lnTo>
-                  <a:lnTo>
-                    <a:pt x="2945832" y="2266942"/>
-                  </a:lnTo>
-                  <a:lnTo>
-                    <a:pt x="3023466" y="2298098"/>
-                  </a:lnTo>
-                  <a:lnTo>
-                    <a:pt x="3101100" y="2328316"/>
-                  </a:lnTo>
-                  <a:lnTo>
-                    <a:pt x="3178734" y="2357624"/>
-                  </a:lnTo>
-                  <a:lnTo>
-                    <a:pt x="3256368" y="2386049"/>
-                  </a:lnTo>
-                  <a:lnTo>
-                    <a:pt x="3334002" y="2413618"/>
-                  </a:lnTo>
-                  <a:lnTo>
-                    <a:pt x="3411636" y="2440357"/>
-                  </a:lnTo>
-                  <a:lnTo>
-                    <a:pt x="3489270" y="2466290"/>
-                  </a:lnTo>
-                  <a:lnTo>
-                    <a:pt x="3566904" y="2491442"/>
-                  </a:lnTo>
-                  <a:lnTo>
-                    <a:pt x="3644538" y="2515837"/>
-                  </a:lnTo>
-                  <a:lnTo>
-                    <a:pt x="3722172" y="2539496"/>
-                  </a:lnTo>
-                  <a:lnTo>
-                    <a:pt x="3799806" y="2562443"/>
-                  </a:lnTo>
-                  <a:lnTo>
-                    <a:pt x="3877440" y="2584699"/>
-                  </a:lnTo>
-                  <a:lnTo>
-                    <a:pt x="3955074" y="2606285"/>
-                  </a:lnTo>
-                  <a:lnTo>
-                    <a:pt x="4032708" y="2627220"/>
-                  </a:lnTo>
-                  <a:lnTo>
-                    <a:pt x="4110342" y="2647525"/>
-                  </a:lnTo>
-                  <a:lnTo>
-                    <a:pt x="4187976" y="2667218"/>
-                  </a:lnTo>
-                  <a:lnTo>
-                    <a:pt x="4265610" y="2686318"/>
-                  </a:lnTo>
-                  <a:lnTo>
-                    <a:pt x="4343244" y="2704843"/>
-                  </a:lnTo>
-                  <a:lnTo>
-                    <a:pt x="4420879" y="2722810"/>
-                  </a:lnTo>
-                  <a:lnTo>
-                    <a:pt x="4498513" y="2740236"/>
-                  </a:lnTo>
-                  <a:lnTo>
-                    <a:pt x="4576147" y="2757137"/>
-                  </a:lnTo>
-                  <a:lnTo>
-                    <a:pt x="4653781" y="2773528"/>
-                  </a:lnTo>
-                  <a:lnTo>
-                    <a:pt x="4731415" y="2789426"/>
-                  </a:lnTo>
-                  <a:lnTo>
-                    <a:pt x="4809049" y="2804845"/>
-                  </a:lnTo>
-                  <a:lnTo>
-                    <a:pt x="4886683" y="2819800"/>
-                  </a:lnTo>
-                  <a:lnTo>
-                    <a:pt x="4964317" y="2834304"/>
-                  </a:lnTo>
-                  <a:lnTo>
-                    <a:pt x="5041951" y="2848372"/>
-                  </a:lnTo>
-                  <a:lnTo>
-                    <a:pt x="5119585" y="2862016"/>
-                  </a:lnTo>
-                  <a:lnTo>
-                    <a:pt x="5197219" y="2875248"/>
-                  </a:lnTo>
-                  <a:lnTo>
-                    <a:pt x="5274853" y="2888083"/>
-                  </a:lnTo>
-                  <a:lnTo>
-                    <a:pt x="5352487" y="2900530"/>
-                  </a:lnTo>
-                  <a:lnTo>
-                    <a:pt x="5430121" y="2912603"/>
-                  </a:lnTo>
-                  <a:lnTo>
-                    <a:pt x="5507755" y="2924312"/>
-                  </a:lnTo>
-                  <a:lnTo>
-                    <a:pt x="5585389" y="2935668"/>
-                  </a:lnTo>
-                  <a:lnTo>
-                    <a:pt x="5663023" y="2946683"/>
-                  </a:lnTo>
-                  <a:lnTo>
-                    <a:pt x="5740657" y="2957365"/>
-                  </a:lnTo>
-                  <a:lnTo>
-                    <a:pt x="5818291" y="2967726"/>
-                  </a:lnTo>
-                  <a:lnTo>
-                    <a:pt x="5895925" y="2977775"/>
-                  </a:lnTo>
-                  <a:lnTo>
-                    <a:pt x="5973559" y="2987521"/>
-                  </a:lnTo>
-                  <a:lnTo>
-                    <a:pt x="6051193" y="2996973"/>
-                  </a:lnTo>
-                  <a:lnTo>
-                    <a:pt x="6128827" y="3006141"/>
-                  </a:lnTo>
-                  <a:lnTo>
-                    <a:pt x="6206462" y="3015033"/>
-                  </a:lnTo>
-                  <a:lnTo>
-                    <a:pt x="6284096" y="3023657"/>
-                  </a:lnTo>
-                  <a:lnTo>
-                    <a:pt x="6361730" y="3032021"/>
-                  </a:lnTo>
-                  <a:lnTo>
-                    <a:pt x="6439364" y="3040133"/>
-                  </a:lnTo>
-                  <a:lnTo>
-                    <a:pt x="6516998" y="3048001"/>
-                  </a:lnTo>
-                  <a:lnTo>
-                    <a:pt x="6594632" y="3055632"/>
-                  </a:lnTo>
-                  <a:lnTo>
-                    <a:pt x="6672266" y="3063033"/>
-                  </a:lnTo>
-                  <a:lnTo>
-                    <a:pt x="6749900" y="3070211"/>
-                  </a:lnTo>
-                  <a:lnTo>
-                    <a:pt x="6827534" y="3077173"/>
-                  </a:lnTo>
-                  <a:lnTo>
-                    <a:pt x="6905168" y="3083925"/>
-                  </a:lnTo>
-                  <a:lnTo>
-                    <a:pt x="6982802" y="3090474"/>
-                  </a:lnTo>
-                  <a:lnTo>
-                    <a:pt x="7060436" y="3096825"/>
-                  </a:lnTo>
-                  <a:lnTo>
-                    <a:pt x="7138070" y="3102985"/>
-                  </a:lnTo>
-                  <a:lnTo>
-                    <a:pt x="7215704" y="3108960"/>
-                  </a:lnTo>
-                  <a:lnTo>
-                    <a:pt x="7293338" y="3114755"/>
-                  </a:lnTo>
-                  <a:lnTo>
-                    <a:pt x="7370972" y="3120375"/>
+                    <a:pt x="73372" y="89781"/>
+                  </a:lnTo>
+                  <a:lnTo>
+                    <a:pt x="151006" y="181916"/>
+                  </a:lnTo>
+                  <a:lnTo>
+                    <a:pt x="228640" y="271276"/>
+                  </a:lnTo>
+                  <a:lnTo>
+                    <a:pt x="306274" y="357944"/>
+                  </a:lnTo>
+                  <a:lnTo>
+                    <a:pt x="383908" y="442002"/>
+                  </a:lnTo>
+                  <a:lnTo>
+                    <a:pt x="461542" y="523528"/>
+                  </a:lnTo>
+                  <a:lnTo>
+                    <a:pt x="539176" y="602599"/>
+                  </a:lnTo>
+                  <a:lnTo>
+                    <a:pt x="616810" y="679288"/>
+                  </a:lnTo>
+                  <a:lnTo>
+                    <a:pt x="694444" y="753667"/>
+                  </a:lnTo>
+                  <a:lnTo>
+                    <a:pt x="772078" y="825805"/>
+                  </a:lnTo>
+                  <a:lnTo>
+                    <a:pt x="849712" y="895771"/>
+                  </a:lnTo>
+                  <a:lnTo>
+                    <a:pt x="927346" y="963630"/>
+                  </a:lnTo>
+                  <a:lnTo>
+                    <a:pt x="1004981" y="1029444"/>
+                  </a:lnTo>
+                  <a:lnTo>
+                    <a:pt x="1082615" y="1093276"/>
+                  </a:lnTo>
+                  <a:lnTo>
+                    <a:pt x="1160249" y="1155186"/>
+                  </a:lnTo>
+                  <a:lnTo>
+                    <a:pt x="1237883" y="1215231"/>
+                  </a:lnTo>
+                  <a:lnTo>
+                    <a:pt x="1315517" y="1273467"/>
+                  </a:lnTo>
+                  <a:lnTo>
+                    <a:pt x="1393151" y="1329949"/>
+                  </a:lnTo>
+                  <a:lnTo>
+                    <a:pt x="1470785" y="1384730"/>
+                  </a:lnTo>
+                  <a:lnTo>
+                    <a:pt x="1548419" y="1437861"/>
+                  </a:lnTo>
+                  <a:lnTo>
+                    <a:pt x="1626053" y="1489392"/>
+                  </a:lnTo>
+                  <a:lnTo>
+                    <a:pt x="1703687" y="1539370"/>
+                  </a:lnTo>
+                  <a:lnTo>
+                    <a:pt x="1781321" y="1587843"/>
+                  </a:lnTo>
+                  <a:lnTo>
+                    <a:pt x="1858955" y="1634857"/>
+                  </a:lnTo>
+                  <a:lnTo>
+                    <a:pt x="1936589" y="1680454"/>
+                  </a:lnTo>
+                  <a:lnTo>
+                    <a:pt x="2014223" y="1724677"/>
+                  </a:lnTo>
+                  <a:lnTo>
+                    <a:pt x="2091857" y="1767569"/>
+                  </a:lnTo>
+                  <a:lnTo>
+                    <a:pt x="2169491" y="1809169"/>
+                  </a:lnTo>
+                  <a:lnTo>
+                    <a:pt x="2247125" y="1849515"/>
+                  </a:lnTo>
+                  <a:lnTo>
+                    <a:pt x="2324759" y="1888647"/>
+                  </a:lnTo>
+                  <a:lnTo>
+                    <a:pt x="2402393" y="1926600"/>
+                  </a:lnTo>
+                  <a:lnTo>
+                    <a:pt x="2480027" y="1963410"/>
+                  </a:lnTo>
+                  <a:lnTo>
+                    <a:pt x="2557661" y="1999111"/>
+                  </a:lnTo>
+                  <a:lnTo>
+                    <a:pt x="2635295" y="2033736"/>
+                  </a:lnTo>
+                  <a:lnTo>
+                    <a:pt x="2712930" y="2067319"/>
+                  </a:lnTo>
+                  <a:lnTo>
+                    <a:pt x="2790564" y="2099890"/>
+                  </a:lnTo>
+                  <a:lnTo>
+                    <a:pt x="2868198" y="2131480"/>
+                  </a:lnTo>
+                  <a:lnTo>
+                    <a:pt x="2945832" y="2162119"/>
+                  </a:lnTo>
+                  <a:lnTo>
+                    <a:pt x="3023466" y="2191835"/>
+                  </a:lnTo>
+                  <a:lnTo>
+                    <a:pt x="3101100" y="2220656"/>
+                  </a:lnTo>
+                  <a:lnTo>
+                    <a:pt x="3178734" y="2248608"/>
+                  </a:lnTo>
+                  <a:lnTo>
+                    <a:pt x="3256368" y="2275719"/>
+                  </a:lnTo>
+                  <a:lnTo>
+                    <a:pt x="3334002" y="2302013"/>
+                  </a:lnTo>
+                  <a:lnTo>
+                    <a:pt x="3411636" y="2327515"/>
+                  </a:lnTo>
+                  <a:lnTo>
+                    <a:pt x="3489270" y="2352250"/>
+                  </a:lnTo>
+                  <a:lnTo>
+                    <a:pt x="3566904" y="2376239"/>
+                  </a:lnTo>
+                  <a:lnTo>
+                    <a:pt x="3644538" y="2399505"/>
+                  </a:lnTo>
+                  <a:lnTo>
+                    <a:pt x="3722172" y="2422071"/>
+                  </a:lnTo>
+                  <a:lnTo>
+                    <a:pt x="3799806" y="2443957"/>
+                  </a:lnTo>
+                  <a:lnTo>
+                    <a:pt x="3877440" y="2465184"/>
+                  </a:lnTo>
+                  <a:lnTo>
+                    <a:pt x="3955074" y="2485771"/>
+                  </a:lnTo>
+                  <a:lnTo>
+                    <a:pt x="4032708" y="2505739"/>
+                  </a:lnTo>
+                  <a:lnTo>
+                    <a:pt x="4110342" y="2525105"/>
+                  </a:lnTo>
+                  <a:lnTo>
+                    <a:pt x="4187976" y="2543887"/>
+                  </a:lnTo>
+                  <a:lnTo>
+                    <a:pt x="4265610" y="2562104"/>
+                  </a:lnTo>
+                  <a:lnTo>
+                    <a:pt x="4343244" y="2579772"/>
+                  </a:lnTo>
+                  <a:lnTo>
+                    <a:pt x="4420879" y="2596908"/>
+                  </a:lnTo>
+                  <a:lnTo>
+                    <a:pt x="4498513" y="2613528"/>
+                  </a:lnTo>
+                  <a:lnTo>
+                    <a:pt x="4576147" y="2629648"/>
+                  </a:lnTo>
+                  <a:lnTo>
+                    <a:pt x="4653781" y="2645281"/>
+                  </a:lnTo>
+                  <a:lnTo>
+                    <a:pt x="4731415" y="2660444"/>
+                  </a:lnTo>
+                  <a:lnTo>
+                    <a:pt x="4809049" y="2675150"/>
+                  </a:lnTo>
+                  <a:lnTo>
+                    <a:pt x="4886683" y="2689414"/>
+                  </a:lnTo>
+                  <a:lnTo>
+                    <a:pt x="4964317" y="2703247"/>
+                  </a:lnTo>
+                  <a:lnTo>
+                    <a:pt x="5041951" y="2716664"/>
+                  </a:lnTo>
+                  <a:lnTo>
+                    <a:pt x="5119585" y="2729677"/>
+                  </a:lnTo>
+                  <a:lnTo>
+                    <a:pt x="5197219" y="2742298"/>
+                  </a:lnTo>
+                  <a:lnTo>
+                    <a:pt x="5274853" y="2754539"/>
+                  </a:lnTo>
+                  <a:lnTo>
+                    <a:pt x="5352487" y="2766411"/>
+                  </a:lnTo>
+                  <a:lnTo>
+                    <a:pt x="5430121" y="2777925"/>
+                  </a:lnTo>
+                  <a:lnTo>
+                    <a:pt x="5507755" y="2789093"/>
+                  </a:lnTo>
+                  <a:lnTo>
+                    <a:pt x="5585389" y="2799924"/>
+                  </a:lnTo>
+                  <a:lnTo>
+                    <a:pt x="5663023" y="2810429"/>
+                  </a:lnTo>
+                  <a:lnTo>
+                    <a:pt x="5740657" y="2820618"/>
+                  </a:lnTo>
+                  <a:lnTo>
+                    <a:pt x="5818291" y="2830499"/>
+                  </a:lnTo>
+                  <a:lnTo>
+                    <a:pt x="5895925" y="2840084"/>
+                  </a:lnTo>
+                  <a:lnTo>
+                    <a:pt x="5973559" y="2849379"/>
+                  </a:lnTo>
+                  <a:lnTo>
+                    <a:pt x="6051193" y="2858394"/>
+                  </a:lnTo>
+                  <a:lnTo>
+                    <a:pt x="6128827" y="2867138"/>
+                  </a:lnTo>
+                  <a:lnTo>
+                    <a:pt x="6206462" y="2875619"/>
+                  </a:lnTo>
+                  <a:lnTo>
+                    <a:pt x="6284096" y="2883844"/>
+                  </a:lnTo>
+                  <a:lnTo>
+                    <a:pt x="6361730" y="2891821"/>
+                  </a:lnTo>
+                  <a:lnTo>
+                    <a:pt x="6439364" y="2899558"/>
+                  </a:lnTo>
+                  <a:lnTo>
+                    <a:pt x="6516998" y="2907062"/>
+                  </a:lnTo>
+                  <a:lnTo>
+                    <a:pt x="6594632" y="2914340"/>
+                  </a:lnTo>
+                  <a:lnTo>
+                    <a:pt x="6672266" y="2921399"/>
+                  </a:lnTo>
+                  <a:lnTo>
+                    <a:pt x="6749900" y="2928245"/>
+                  </a:lnTo>
+                  <a:lnTo>
+                    <a:pt x="6827534" y="2934885"/>
+                  </a:lnTo>
+                  <a:lnTo>
+                    <a:pt x="6905168" y="2941325"/>
+                  </a:lnTo>
+                  <a:lnTo>
+                    <a:pt x="6982802" y="2947571"/>
+                  </a:lnTo>
+                  <a:lnTo>
+                    <a:pt x="7060436" y="2953629"/>
+                  </a:lnTo>
+                  <a:lnTo>
+                    <a:pt x="7138070" y="2959505"/>
+                  </a:lnTo>
+                  <a:lnTo>
+                    <a:pt x="7215704" y="2965203"/>
+                  </a:lnTo>
+                  <a:lnTo>
+                    <a:pt x="7293338" y="2970730"/>
+                  </a:lnTo>
+                  <a:lnTo>
+                    <a:pt x="7370972" y="2976090"/>
                   </a:lnTo>
                 </a:path>
               </a:pathLst>
@@ -4425,7 +4425,7 @@
           </p:nvSpPr>
           <p:spPr>
             <a:xfrm>
-              <a:off x="817517" y="4679530"/>
+              <a:off x="817517" y="4727786"/>
               <a:ext cx="7799693" cy="0"/>
             </a:xfrm>
             <a:custGeom>
@@ -4468,15 +4468,15 @@
           </p:nvSpPr>
           <p:spPr>
             <a:xfrm>
-              <a:off x="4203673" y="1896563"/>
-              <a:ext cx="0" cy="3826579"/>
+              <a:off x="4203673" y="2073503"/>
+              <a:ext cx="0" cy="3649639"/>
             </a:xfrm>
             <a:custGeom>
               <a:avLst/>
               <a:pathLst>
-                <a:path w="0" h="3826579">
+                <a:path w="0" h="3649639">
                   <a:moveTo>
-                    <a:pt x="0" y="3826579"/>
+                    <a:pt x="0" y="3649639"/>
                   </a:moveTo>
                   <a:lnTo>
                     <a:pt x="0" y="0"/>
@@ -4511,7 +4511,7 @@
           </p:nvSpPr>
           <p:spPr>
             <a:xfrm>
-              <a:off x="692708" y="5509156"/>
+              <a:off x="692708" y="5517199"/>
               <a:ext cx="62179" cy="80101"/>
             </a:xfrm>
             <a:prstGeom prst="rect">
@@ -4557,7 +4557,7 @@
           </p:nvSpPr>
           <p:spPr>
             <a:xfrm>
-              <a:off x="692708" y="4639479"/>
+              <a:off x="692708" y="4687735"/>
               <a:ext cx="62179" cy="80101"/>
             </a:xfrm>
             <a:prstGeom prst="rect">
@@ -4603,7 +4603,7 @@
           </p:nvSpPr>
           <p:spPr>
             <a:xfrm>
-              <a:off x="692708" y="3769802"/>
+              <a:off x="692708" y="3858272"/>
               <a:ext cx="62179" cy="80101"/>
             </a:xfrm>
             <a:prstGeom prst="rect">
@@ -4649,7 +4649,7 @@
           </p:nvSpPr>
           <p:spPr>
             <a:xfrm>
-              <a:off x="692708" y="2900125"/>
+              <a:off x="692708" y="3028808"/>
               <a:ext cx="62179" cy="80101"/>
             </a:xfrm>
             <a:prstGeom prst="rect">
@@ -4695,7 +4695,7 @@
           </p:nvSpPr>
           <p:spPr>
             <a:xfrm>
-              <a:off x="692708" y="2030448"/>
+              <a:off x="692708" y="2199345"/>
               <a:ext cx="62179" cy="80101"/>
             </a:xfrm>
             <a:prstGeom prst="rect">
@@ -4971,7 +4971,7 @@
           </p:nvSpPr>
           <p:spPr>
             <a:xfrm rot="-5400000">
-              <a:off x="68446" y="3759743"/>
+              <a:off x="68446" y="3848213"/>
               <a:ext cx="1016904" cy="100218"/>
             </a:xfrm>
             <a:prstGeom prst="rect">
@@ -5012,6 +5012,52 @@
         <p:sp>
           <p:nvSpPr>
             <p:cNvPr id="38" name="tx38"/>
+            <p:cNvSpPr/>
+            <p:nvPr/>
+          </p:nvSpPr>
+          <p:spPr>
+            <a:xfrm>
+              <a:off x="817517" y="1896563"/>
+              <a:ext cx="4166463" cy="82021"/>
+            </a:xfrm>
+            <a:prstGeom prst="rect">
+              <a:avLst/>
+            </a:prstGeom>
+            <a:noFill/>
+          </p:spPr>
+          <p:txBody>
+            <a:bodyPr lIns="0" rIns="0" tIns="0" bIns="0" anchorCtr="1" anchor="ctr" wrap="none"/>
+            <a:lstStyle/>
+            <a:p>
+              <a:pPr algn="l" marL="0" marR="0" indent="0">
+                <a:lnSpc>
+                  <a:spcPts val="900"/>
+                </a:lnSpc>
+                <a:spcBef>
+                  <a:spcPts val="0"/>
+                </a:spcBef>
+                <a:spcAft>
+                  <a:spcPts val="0"/>
+                </a:spcAft>
+              </a:pPr>
+              <a:r>
+                <a:rPr sz="900">
+                  <a:solidFill>
+                    <a:srgbClr val="404040">
+                      <a:alpha val="100000"/>
+                    </a:srgbClr>
+                  </a:solidFill>
+                  <a:latin typeface="Helvetica"/>
+                  <a:cs typeface="Helvetica"/>
+                </a:rPr>
+                <a:t>subHR = 0.71 (95% CI 0.46-1.09), p = 0.118   (per 0.1-unit increase in eGFR ratio)</a:t>
+              </a:r>
+            </a:p>
+          </p:txBody>
+        </p:sp>
+        <p:sp>
+          <p:nvSpPr>
+            <p:cNvPr id="39" name="tx39"/>
             <p:cNvSpPr/>
             <p:nvPr/>
           </p:nvSpPr>

--- a/docs/plots/carbo/jx_carbo_linsubhr_ratio_akikdigo.pptx
+++ b/docs/plots/carbo/jx_carbo_linsubhr_ratio_akikdigo.pptx
@@ -2271,26 +2271,26 @@
           </p:nvSpPr>
           <p:spPr>
             <a:xfrm>
-              <a:off x="817517" y="5142518"/>
-              <a:ext cx="7799693" cy="0"/>
+              <a:off x="915645" y="5071743"/>
+              <a:ext cx="7682587" cy="0"/>
             </a:xfrm>
             <a:custGeom>
               <a:avLst/>
               <a:pathLst>
-                <a:path w="7799693" h="0">
+                <a:path w="7682587" h="0">
                   <a:moveTo>
                     <a:pt x="0" y="0"/>
                   </a:moveTo>
                   <a:lnTo>
-                    <a:pt x="7799693" y="0"/>
-                  </a:lnTo>
-                  <a:lnTo>
-                    <a:pt x="7799693" y="0"/>
+                    <a:pt x="7682587" y="0"/>
+                  </a:lnTo>
+                  <a:lnTo>
+                    <a:pt x="7682587" y="0"/>
                   </a:lnTo>
                 </a:path>
               </a:pathLst>
             </a:custGeom>
-            <a:ln w="6775" cap="flat">
+            <a:ln w="8623" cap="flat">
               <a:solidFill>
                 <a:srgbClr val="EBEBEB">
                   <a:alpha val="100000"/>
@@ -2314,26 +2314,26 @@
           </p:nvSpPr>
           <p:spPr>
             <a:xfrm>
-              <a:off x="817517" y="4313054"/>
-              <a:ext cx="7799693" cy="0"/>
+              <a:off x="915645" y="4298074"/>
+              <a:ext cx="7682587" cy="0"/>
             </a:xfrm>
             <a:custGeom>
               <a:avLst/>
               <a:pathLst>
-                <a:path w="7799693" h="0">
+                <a:path w="7682587" h="0">
                   <a:moveTo>
                     <a:pt x="0" y="0"/>
                   </a:moveTo>
                   <a:lnTo>
-                    <a:pt x="7799693" y="0"/>
-                  </a:lnTo>
-                  <a:lnTo>
-                    <a:pt x="7799693" y="0"/>
+                    <a:pt x="7682587" y="0"/>
+                  </a:lnTo>
+                  <a:lnTo>
+                    <a:pt x="7682587" y="0"/>
                   </a:lnTo>
                 </a:path>
               </a:pathLst>
             </a:custGeom>
-            <a:ln w="6775" cap="flat">
+            <a:ln w="8623" cap="flat">
               <a:solidFill>
                 <a:srgbClr val="EBEBEB">
                   <a:alpha val="100000"/>
@@ -2357,26 +2357,26 @@
           </p:nvSpPr>
           <p:spPr>
             <a:xfrm>
-              <a:off x="817517" y="3483591"/>
-              <a:ext cx="7799693" cy="0"/>
+              <a:off x="915645" y="3524405"/>
+              <a:ext cx="7682587" cy="0"/>
             </a:xfrm>
             <a:custGeom>
               <a:avLst/>
               <a:pathLst>
-                <a:path w="7799693" h="0">
+                <a:path w="7682587" h="0">
                   <a:moveTo>
                     <a:pt x="0" y="0"/>
                   </a:moveTo>
                   <a:lnTo>
-                    <a:pt x="7799693" y="0"/>
-                  </a:lnTo>
-                  <a:lnTo>
-                    <a:pt x="7799693" y="0"/>
+                    <a:pt x="7682587" y="0"/>
+                  </a:lnTo>
+                  <a:lnTo>
+                    <a:pt x="7682587" y="0"/>
                   </a:lnTo>
                 </a:path>
               </a:pathLst>
             </a:custGeom>
-            <a:ln w="6775" cap="flat">
+            <a:ln w="8623" cap="flat">
               <a:solidFill>
                 <a:srgbClr val="EBEBEB">
                   <a:alpha val="100000"/>
@@ -2400,26 +2400,26 @@
           </p:nvSpPr>
           <p:spPr>
             <a:xfrm>
-              <a:off x="817517" y="2654127"/>
-              <a:ext cx="7799693" cy="0"/>
+              <a:off x="915645" y="2750737"/>
+              <a:ext cx="7682587" cy="0"/>
             </a:xfrm>
             <a:custGeom>
               <a:avLst/>
               <a:pathLst>
-                <a:path w="7799693" h="0">
+                <a:path w="7682587" h="0">
                   <a:moveTo>
                     <a:pt x="0" y="0"/>
                   </a:moveTo>
                   <a:lnTo>
-                    <a:pt x="7799693" y="0"/>
-                  </a:lnTo>
-                  <a:lnTo>
-                    <a:pt x="7799693" y="0"/>
+                    <a:pt x="7682587" y="0"/>
+                  </a:lnTo>
+                  <a:lnTo>
+                    <a:pt x="7682587" y="0"/>
                   </a:lnTo>
                 </a:path>
               </a:pathLst>
             </a:custGeom>
-            <a:ln w="6775" cap="flat">
+            <a:ln w="8623" cap="flat">
               <a:solidFill>
                 <a:srgbClr val="EBEBEB">
                   <a:alpha val="100000"/>
@@ -2443,15 +2443,15 @@
           </p:nvSpPr>
           <p:spPr>
             <a:xfrm>
-              <a:off x="1615213" y="2073503"/>
-              <a:ext cx="0" cy="3649639"/>
+              <a:off x="1701364" y="2209169"/>
+              <a:ext cx="0" cy="3404141"/>
             </a:xfrm>
             <a:custGeom>
               <a:avLst/>
               <a:pathLst>
-                <a:path w="0" h="3649639">
+                <a:path w="0" h="3404141">
                   <a:moveTo>
-                    <a:pt x="0" y="3649639"/>
+                    <a:pt x="0" y="3404141"/>
                   </a:moveTo>
                   <a:lnTo>
                     <a:pt x="0" y="0"/>
@@ -2462,7 +2462,7 @@
                 </a:path>
               </a:pathLst>
             </a:custGeom>
-            <a:ln w="6775" cap="flat">
+            <a:ln w="8623" cap="flat">
               <a:solidFill>
                 <a:srgbClr val="EBEBEB">
                   <a:alpha val="100000"/>
@@ -2486,15 +2486,15 @@
           </p:nvSpPr>
           <p:spPr>
             <a:xfrm>
-              <a:off x="3387871" y="2073503"/>
-              <a:ext cx="0" cy="3649639"/>
+              <a:off x="3447406" y="2209169"/>
+              <a:ext cx="0" cy="3404141"/>
             </a:xfrm>
             <a:custGeom>
               <a:avLst/>
               <a:pathLst>
-                <a:path w="0" h="3649639">
+                <a:path w="0" h="3404141">
                   <a:moveTo>
-                    <a:pt x="0" y="3649639"/>
+                    <a:pt x="0" y="3404141"/>
                   </a:moveTo>
                   <a:lnTo>
                     <a:pt x="0" y="0"/>
@@ -2505,7 +2505,7 @@
                 </a:path>
               </a:pathLst>
             </a:custGeom>
-            <a:ln w="6775" cap="flat">
+            <a:ln w="8623" cap="flat">
               <a:solidFill>
                 <a:srgbClr val="EBEBEB">
                   <a:alpha val="100000"/>
@@ -2529,15 +2529,15 @@
           </p:nvSpPr>
           <p:spPr>
             <a:xfrm>
-              <a:off x="5160528" y="2073503"/>
-              <a:ext cx="0" cy="3649639"/>
+              <a:off x="5193449" y="2209169"/>
+              <a:ext cx="0" cy="3404141"/>
             </a:xfrm>
             <a:custGeom>
               <a:avLst/>
               <a:pathLst>
-                <a:path w="0" h="3649639">
+                <a:path w="0" h="3404141">
                   <a:moveTo>
-                    <a:pt x="0" y="3649639"/>
+                    <a:pt x="0" y="3404141"/>
                   </a:moveTo>
                   <a:lnTo>
                     <a:pt x="0" y="0"/>
@@ -2548,7 +2548,7 @@
                 </a:path>
               </a:pathLst>
             </a:custGeom>
-            <a:ln w="6775" cap="flat">
+            <a:ln w="8623" cap="flat">
               <a:solidFill>
                 <a:srgbClr val="EBEBEB">
                   <a:alpha val="100000"/>
@@ -2572,15 +2572,15 @@
           </p:nvSpPr>
           <p:spPr>
             <a:xfrm>
-              <a:off x="6933186" y="2073503"/>
-              <a:ext cx="0" cy="3649639"/>
+              <a:off x="6939491" y="2209169"/>
+              <a:ext cx="0" cy="3404141"/>
             </a:xfrm>
             <a:custGeom>
               <a:avLst/>
               <a:pathLst>
-                <a:path w="0" h="3649639">
+                <a:path w="0" h="3404141">
                   <a:moveTo>
-                    <a:pt x="0" y="3649639"/>
+                    <a:pt x="0" y="3404141"/>
                   </a:moveTo>
                   <a:lnTo>
                     <a:pt x="0" y="0"/>
@@ -2591,7 +2591,7 @@
                 </a:path>
               </a:pathLst>
             </a:custGeom>
-            <a:ln w="6775" cap="flat">
+            <a:ln w="8623" cap="flat">
               <a:solidFill>
                 <a:srgbClr val="EBEBEB">
                   <a:alpha val="100000"/>
@@ -2615,26 +2615,26 @@
           </p:nvSpPr>
           <p:spPr>
             <a:xfrm>
-              <a:off x="817517" y="5557249"/>
-              <a:ext cx="7799693" cy="0"/>
+              <a:off x="915645" y="5458577"/>
+              <a:ext cx="7682587" cy="0"/>
             </a:xfrm>
             <a:custGeom>
               <a:avLst/>
               <a:pathLst>
-                <a:path w="7799693" h="0">
+                <a:path w="7682587" h="0">
                   <a:moveTo>
                     <a:pt x="0" y="0"/>
                   </a:moveTo>
                   <a:lnTo>
-                    <a:pt x="7799693" y="0"/>
-                  </a:lnTo>
-                  <a:lnTo>
-                    <a:pt x="7799693" y="0"/>
+                    <a:pt x="7682587" y="0"/>
+                  </a:lnTo>
+                  <a:lnTo>
+                    <a:pt x="7682587" y="0"/>
                   </a:lnTo>
                 </a:path>
               </a:pathLst>
             </a:custGeom>
-            <a:ln w="13550" cap="flat">
+            <a:ln w="17246" cap="flat">
               <a:solidFill>
                 <a:srgbClr val="EBEBEB">
                   <a:alpha val="100000"/>
@@ -2658,26 +2658,26 @@
           </p:nvSpPr>
           <p:spPr>
             <a:xfrm>
-              <a:off x="817517" y="4727786"/>
-              <a:ext cx="7799693" cy="0"/>
+              <a:off x="915645" y="4684908"/>
+              <a:ext cx="7682587" cy="0"/>
             </a:xfrm>
             <a:custGeom>
               <a:avLst/>
               <a:pathLst>
-                <a:path w="7799693" h="0">
+                <a:path w="7682587" h="0">
                   <a:moveTo>
                     <a:pt x="0" y="0"/>
                   </a:moveTo>
                   <a:lnTo>
-                    <a:pt x="7799693" y="0"/>
-                  </a:lnTo>
-                  <a:lnTo>
-                    <a:pt x="7799693" y="0"/>
+                    <a:pt x="7682587" y="0"/>
+                  </a:lnTo>
+                  <a:lnTo>
+                    <a:pt x="7682587" y="0"/>
                   </a:lnTo>
                 </a:path>
               </a:pathLst>
             </a:custGeom>
-            <a:ln w="13550" cap="flat">
+            <a:ln w="17246" cap="flat">
               <a:solidFill>
                 <a:srgbClr val="EBEBEB">
                   <a:alpha val="100000"/>
@@ -2701,26 +2701,26 @@
           </p:nvSpPr>
           <p:spPr>
             <a:xfrm>
-              <a:off x="817517" y="3898322"/>
-              <a:ext cx="7799693" cy="0"/>
+              <a:off x="915645" y="3911240"/>
+              <a:ext cx="7682587" cy="0"/>
             </a:xfrm>
             <a:custGeom>
               <a:avLst/>
               <a:pathLst>
-                <a:path w="7799693" h="0">
+                <a:path w="7682587" h="0">
                   <a:moveTo>
                     <a:pt x="0" y="0"/>
                   </a:moveTo>
                   <a:lnTo>
-                    <a:pt x="7799693" y="0"/>
-                  </a:lnTo>
-                  <a:lnTo>
-                    <a:pt x="7799693" y="0"/>
+                    <a:pt x="7682587" y="0"/>
+                  </a:lnTo>
+                  <a:lnTo>
+                    <a:pt x="7682587" y="0"/>
                   </a:lnTo>
                 </a:path>
               </a:pathLst>
             </a:custGeom>
-            <a:ln w="13550" cap="flat">
+            <a:ln w="17246" cap="flat">
               <a:solidFill>
                 <a:srgbClr val="EBEBEB">
                   <a:alpha val="100000"/>
@@ -2744,26 +2744,26 @@
           </p:nvSpPr>
           <p:spPr>
             <a:xfrm>
-              <a:off x="817517" y="3068859"/>
-              <a:ext cx="7799693" cy="0"/>
+              <a:off x="915645" y="3137571"/>
+              <a:ext cx="7682587" cy="0"/>
             </a:xfrm>
             <a:custGeom>
               <a:avLst/>
               <a:pathLst>
-                <a:path w="7799693" h="0">
+                <a:path w="7682587" h="0">
                   <a:moveTo>
                     <a:pt x="0" y="0"/>
                   </a:moveTo>
                   <a:lnTo>
-                    <a:pt x="7799693" y="0"/>
-                  </a:lnTo>
-                  <a:lnTo>
-                    <a:pt x="7799693" y="0"/>
+                    <a:pt x="7682587" y="0"/>
+                  </a:lnTo>
+                  <a:lnTo>
+                    <a:pt x="7682587" y="0"/>
                   </a:lnTo>
                 </a:path>
               </a:pathLst>
             </a:custGeom>
-            <a:ln w="13550" cap="flat">
+            <a:ln w="17246" cap="flat">
               <a:solidFill>
                 <a:srgbClr val="EBEBEB">
                   <a:alpha val="100000"/>
@@ -2787,26 +2787,26 @@
           </p:nvSpPr>
           <p:spPr>
             <a:xfrm>
-              <a:off x="817517" y="2239395"/>
-              <a:ext cx="7799693" cy="0"/>
+              <a:off x="915645" y="2363903"/>
+              <a:ext cx="7682587" cy="0"/>
             </a:xfrm>
             <a:custGeom>
               <a:avLst/>
               <a:pathLst>
-                <a:path w="7799693" h="0">
+                <a:path w="7682587" h="0">
                   <a:moveTo>
                     <a:pt x="0" y="0"/>
                   </a:moveTo>
                   <a:lnTo>
-                    <a:pt x="7799693" y="0"/>
-                  </a:lnTo>
-                  <a:lnTo>
-                    <a:pt x="7799693" y="0"/>
+                    <a:pt x="7682587" y="0"/>
+                  </a:lnTo>
+                  <a:lnTo>
+                    <a:pt x="7682587" y="0"/>
                   </a:lnTo>
                 </a:path>
               </a:pathLst>
             </a:custGeom>
-            <a:ln w="13550" cap="flat">
+            <a:ln w="17246" cap="flat">
               <a:solidFill>
                 <a:srgbClr val="EBEBEB">
                   <a:alpha val="100000"/>
@@ -2830,15 +2830,15 @@
           </p:nvSpPr>
           <p:spPr>
             <a:xfrm>
-              <a:off x="2501542" y="2073503"/>
-              <a:ext cx="0" cy="3649639"/>
+              <a:off x="2574385" y="2209169"/>
+              <a:ext cx="0" cy="3404141"/>
             </a:xfrm>
             <a:custGeom>
               <a:avLst/>
               <a:pathLst>
-                <a:path w="0" h="3649639">
+                <a:path w="0" h="3404141">
                   <a:moveTo>
-                    <a:pt x="0" y="3649639"/>
+                    <a:pt x="0" y="3404141"/>
                   </a:moveTo>
                   <a:lnTo>
                     <a:pt x="0" y="0"/>
@@ -2849,7 +2849,7 @@
                 </a:path>
               </a:pathLst>
             </a:custGeom>
-            <a:ln w="13550" cap="flat">
+            <a:ln w="17246" cap="flat">
               <a:solidFill>
                 <a:srgbClr val="EBEBEB">
                   <a:alpha val="100000"/>
@@ -2873,15 +2873,15 @@
           </p:nvSpPr>
           <p:spPr>
             <a:xfrm>
-              <a:off x="4274200" y="2073503"/>
-              <a:ext cx="0" cy="3649639"/>
+              <a:off x="4320427" y="2209169"/>
+              <a:ext cx="0" cy="3404141"/>
             </a:xfrm>
             <a:custGeom>
               <a:avLst/>
               <a:pathLst>
-                <a:path w="0" h="3649639">
+                <a:path w="0" h="3404141">
                   <a:moveTo>
-                    <a:pt x="0" y="3649639"/>
+                    <a:pt x="0" y="3404141"/>
                   </a:moveTo>
                   <a:lnTo>
                     <a:pt x="0" y="0"/>
@@ -2892,7 +2892,7 @@
                 </a:path>
               </a:pathLst>
             </a:custGeom>
-            <a:ln w="13550" cap="flat">
+            <a:ln w="17246" cap="flat">
               <a:solidFill>
                 <a:srgbClr val="EBEBEB">
                   <a:alpha val="100000"/>
@@ -2916,15 +2916,15 @@
           </p:nvSpPr>
           <p:spPr>
             <a:xfrm>
-              <a:off x="6046857" y="2073503"/>
-              <a:ext cx="0" cy="3649639"/>
+              <a:off x="6066470" y="2209169"/>
+              <a:ext cx="0" cy="3404141"/>
             </a:xfrm>
             <a:custGeom>
               <a:avLst/>
               <a:pathLst>
-                <a:path w="0" h="3649639">
+                <a:path w="0" h="3404141">
                   <a:moveTo>
-                    <a:pt x="0" y="3649639"/>
+                    <a:pt x="0" y="3404141"/>
                   </a:moveTo>
                   <a:lnTo>
                     <a:pt x="0" y="0"/>
@@ -2935,7 +2935,7 @@
                 </a:path>
               </a:pathLst>
             </a:custGeom>
-            <a:ln w="13550" cap="flat">
+            <a:ln w="17246" cap="flat">
               <a:solidFill>
                 <a:srgbClr val="EBEBEB">
                   <a:alpha val="100000"/>
@@ -2959,15 +2959,15 @@
           </p:nvSpPr>
           <p:spPr>
             <a:xfrm>
-              <a:off x="7819515" y="2073503"/>
-              <a:ext cx="0" cy="3649639"/>
+              <a:off x="7812512" y="2209169"/>
+              <a:ext cx="0" cy="3404141"/>
             </a:xfrm>
             <a:custGeom>
               <a:avLst/>
               <a:pathLst>
-                <a:path w="0" h="3649639">
+                <a:path w="0" h="3404141">
                   <a:moveTo>
-                    <a:pt x="0" y="3649639"/>
+                    <a:pt x="0" y="3404141"/>
                   </a:moveTo>
                   <a:lnTo>
                     <a:pt x="0" y="0"/>
@@ -2978,7 +2978,7 @@
                 </a:path>
               </a:pathLst>
             </a:custGeom>
-            <a:ln w="13550" cap="flat">
+            <a:ln w="17246" cap="flat">
               <a:solidFill>
                 <a:srgbClr val="EBEBEB">
                   <a:alpha val="100000"/>
@@ -3002,522 +3002,522 @@
           </p:nvSpPr>
           <p:spPr>
             <a:xfrm>
-              <a:off x="817517" y="2073503"/>
-              <a:ext cx="7370972" cy="3459622"/>
+              <a:off x="915645" y="2209169"/>
+              <a:ext cx="7260303" cy="3226906"/>
             </a:xfrm>
             <a:custGeom>
               <a:avLst/>
               <a:pathLst>
-                <a:path w="7370972" h="3459622">
+                <a:path w="7260303" h="3226906">
                   <a:moveTo>
-                    <a:pt x="1769971" y="0"/>
+                    <a:pt x="1743396" y="0"/>
                   </a:moveTo>
                   <a:lnTo>
-                    <a:pt x="1781321" y="35964"/>
-                  </a:lnTo>
-                  <a:lnTo>
-                    <a:pt x="1858955" y="265583"/>
-                  </a:lnTo>
-                  <a:lnTo>
-                    <a:pt x="1936589" y="479910"/>
-                  </a:lnTo>
-                  <a:lnTo>
-                    <a:pt x="2014223" y="679962"/>
-                  </a:lnTo>
-                  <a:lnTo>
-                    <a:pt x="2091857" y="866692"/>
-                  </a:lnTo>
-                  <a:lnTo>
-                    <a:pt x="2169491" y="1040985"/>
-                  </a:lnTo>
-                  <a:lnTo>
-                    <a:pt x="2247125" y="1203671"/>
-                  </a:lnTo>
-                  <a:lnTo>
-                    <a:pt x="2324759" y="1355521"/>
-                  </a:lnTo>
-                  <a:lnTo>
-                    <a:pt x="2402393" y="1497259"/>
-                  </a:lnTo>
-                  <a:lnTo>
-                    <a:pt x="2480027" y="1629557"/>
-                  </a:lnTo>
-                  <a:lnTo>
-                    <a:pt x="2557661" y="1753044"/>
-                  </a:lnTo>
-                  <a:lnTo>
-                    <a:pt x="2635295" y="1868307"/>
-                  </a:lnTo>
-                  <a:lnTo>
-                    <a:pt x="2712930" y="1975894"/>
-                  </a:lnTo>
-                  <a:lnTo>
-                    <a:pt x="2790564" y="2076316"/>
-                  </a:lnTo>
-                  <a:lnTo>
-                    <a:pt x="2868198" y="2170049"/>
-                  </a:lnTo>
-                  <a:lnTo>
-                    <a:pt x="2945832" y="2257540"/>
-                  </a:lnTo>
-                  <a:lnTo>
-                    <a:pt x="3023466" y="2339204"/>
-                  </a:lnTo>
-                  <a:lnTo>
-                    <a:pt x="3101100" y="2415430"/>
-                  </a:lnTo>
-                  <a:lnTo>
-                    <a:pt x="3178734" y="2486578"/>
-                  </a:lnTo>
-                  <a:lnTo>
-                    <a:pt x="3256368" y="2552989"/>
-                  </a:lnTo>
-                  <a:lnTo>
-                    <a:pt x="3334002" y="2614976"/>
-                  </a:lnTo>
-                  <a:lnTo>
-                    <a:pt x="3411636" y="2652169"/>
-                  </a:lnTo>
-                  <a:lnTo>
-                    <a:pt x="3489270" y="2645696"/>
-                  </a:lnTo>
-                  <a:lnTo>
-                    <a:pt x="3566904" y="2639172"/>
-                  </a:lnTo>
-                  <a:lnTo>
-                    <a:pt x="3644538" y="2632598"/>
-                  </a:lnTo>
-                  <a:lnTo>
-                    <a:pt x="3722172" y="2625972"/>
-                  </a:lnTo>
-                  <a:lnTo>
-                    <a:pt x="3799806" y="2619295"/>
-                  </a:lnTo>
-                  <a:lnTo>
-                    <a:pt x="3877440" y="2612566"/>
-                  </a:lnTo>
-                  <a:lnTo>
-                    <a:pt x="3955074" y="2605784"/>
-                  </a:lnTo>
-                  <a:lnTo>
-                    <a:pt x="4032708" y="2598950"/>
-                  </a:lnTo>
-                  <a:lnTo>
-                    <a:pt x="4110342" y="2592062"/>
-                  </a:lnTo>
-                  <a:lnTo>
-                    <a:pt x="4187976" y="2585121"/>
-                  </a:lnTo>
-                  <a:lnTo>
-                    <a:pt x="4265610" y="2578126"/>
-                  </a:lnTo>
-                  <a:lnTo>
-                    <a:pt x="4343244" y="2571076"/>
-                  </a:lnTo>
-                  <a:lnTo>
-                    <a:pt x="4420879" y="2563972"/>
-                  </a:lnTo>
-                  <a:lnTo>
-                    <a:pt x="4498513" y="2556812"/>
-                  </a:lnTo>
-                  <a:lnTo>
-                    <a:pt x="4576147" y="2549597"/>
-                  </a:lnTo>
-                  <a:lnTo>
-                    <a:pt x="4653781" y="2542325"/>
-                  </a:lnTo>
-                  <a:lnTo>
-                    <a:pt x="4731415" y="2534997"/>
-                  </a:lnTo>
-                  <a:lnTo>
-                    <a:pt x="4809049" y="2527611"/>
-                  </a:lnTo>
-                  <a:lnTo>
-                    <a:pt x="4886683" y="2520168"/>
-                  </a:lnTo>
-                  <a:lnTo>
-                    <a:pt x="4964317" y="2512668"/>
-                  </a:lnTo>
-                  <a:lnTo>
-                    <a:pt x="5041951" y="2505108"/>
-                  </a:lnTo>
-                  <a:lnTo>
-                    <a:pt x="5119585" y="2497490"/>
-                  </a:lnTo>
-                  <a:lnTo>
-                    <a:pt x="5197219" y="2489813"/>
-                  </a:lnTo>
-                  <a:lnTo>
-                    <a:pt x="5274853" y="2482076"/>
-                  </a:lnTo>
-                  <a:lnTo>
-                    <a:pt x="5352487" y="2474279"/>
-                  </a:lnTo>
-                  <a:lnTo>
-                    <a:pt x="5430121" y="2466421"/>
-                  </a:lnTo>
-                  <a:lnTo>
-                    <a:pt x="5507755" y="2458501"/>
-                  </a:lnTo>
-                  <a:lnTo>
-                    <a:pt x="5585389" y="2450521"/>
-                  </a:lnTo>
-                  <a:lnTo>
-                    <a:pt x="5663023" y="2442478"/>
-                  </a:lnTo>
-                  <a:lnTo>
-                    <a:pt x="5740657" y="2434372"/>
-                  </a:lnTo>
-                  <a:lnTo>
-                    <a:pt x="5818291" y="2426203"/>
-                  </a:lnTo>
-                  <a:lnTo>
-                    <a:pt x="5895925" y="2417971"/>
-                  </a:lnTo>
-                  <a:lnTo>
-                    <a:pt x="5973559" y="2409675"/>
-                  </a:lnTo>
-                  <a:lnTo>
-                    <a:pt x="6051193" y="2401314"/>
-                  </a:lnTo>
-                  <a:lnTo>
-                    <a:pt x="6128827" y="2392888"/>
-                  </a:lnTo>
-                  <a:lnTo>
-                    <a:pt x="6206462" y="2384396"/>
-                  </a:lnTo>
-                  <a:lnTo>
-                    <a:pt x="6284096" y="2375839"/>
-                  </a:lnTo>
-                  <a:lnTo>
-                    <a:pt x="6361730" y="2367214"/>
-                  </a:lnTo>
-                  <a:lnTo>
-                    <a:pt x="6439364" y="2358523"/>
-                  </a:lnTo>
-                  <a:lnTo>
-                    <a:pt x="6516998" y="2349764"/>
-                  </a:lnTo>
-                  <a:lnTo>
-                    <a:pt x="6594632" y="2340937"/>
-                  </a:lnTo>
-                  <a:lnTo>
-                    <a:pt x="6672266" y="2332041"/>
-                  </a:lnTo>
-                  <a:lnTo>
-                    <a:pt x="6749900" y="2323075"/>
-                  </a:lnTo>
-                  <a:lnTo>
-                    <a:pt x="6827534" y="2314040"/>
-                  </a:lnTo>
-                  <a:lnTo>
-                    <a:pt x="6905168" y="2304935"/>
-                  </a:lnTo>
-                  <a:lnTo>
-                    <a:pt x="6982802" y="2295759"/>
-                  </a:lnTo>
-                  <a:lnTo>
-                    <a:pt x="7060436" y="2286511"/>
-                  </a:lnTo>
-                  <a:lnTo>
-                    <a:pt x="7138070" y="2277191"/>
-                  </a:lnTo>
-                  <a:lnTo>
-                    <a:pt x="7215704" y="2267799"/>
-                  </a:lnTo>
-                  <a:lnTo>
-                    <a:pt x="7293338" y="2258334"/>
-                  </a:lnTo>
-                  <a:lnTo>
-                    <a:pt x="7370972" y="2248795"/>
-                  </a:lnTo>
-                  <a:lnTo>
-                    <a:pt x="7370972" y="3459622"/>
-                  </a:lnTo>
-                  <a:lnTo>
-                    <a:pt x="7293338" y="3457901"/>
-                  </a:lnTo>
-                  <a:lnTo>
-                    <a:pt x="7215704" y="3456057"/>
-                  </a:lnTo>
-                  <a:lnTo>
-                    <a:pt x="7138070" y="3454081"/>
-                  </a:lnTo>
-                  <a:lnTo>
-                    <a:pt x="7060436" y="3451964"/>
-                  </a:lnTo>
-                  <a:lnTo>
-                    <a:pt x="6982802" y="3449697"/>
-                  </a:lnTo>
-                  <a:lnTo>
-                    <a:pt x="6905168" y="3447267"/>
-                  </a:lnTo>
-                  <a:lnTo>
-                    <a:pt x="6827534" y="3444664"/>
-                  </a:lnTo>
-                  <a:lnTo>
-                    <a:pt x="6749900" y="3441876"/>
-                  </a:lnTo>
-                  <a:lnTo>
-                    <a:pt x="6672266" y="3438888"/>
-                  </a:lnTo>
-                  <a:lnTo>
-                    <a:pt x="6594632" y="3435688"/>
-                  </a:lnTo>
-                  <a:lnTo>
-                    <a:pt x="6516998" y="3432259"/>
-                  </a:lnTo>
-                  <a:lnTo>
-                    <a:pt x="6439364" y="3428585"/>
-                  </a:lnTo>
-                  <a:lnTo>
-                    <a:pt x="6361730" y="3424649"/>
-                  </a:lnTo>
-                  <a:lnTo>
-                    <a:pt x="6284096" y="3420433"/>
-                  </a:lnTo>
-                  <a:lnTo>
-                    <a:pt x="6206462" y="3415915"/>
-                  </a:lnTo>
-                  <a:lnTo>
-                    <a:pt x="6128827" y="3411075"/>
-                  </a:lnTo>
-                  <a:lnTo>
-                    <a:pt x="6051193" y="3405890"/>
-                  </a:lnTo>
-                  <a:lnTo>
-                    <a:pt x="5973559" y="3400335"/>
-                  </a:lnTo>
-                  <a:lnTo>
-                    <a:pt x="5895925" y="3394384"/>
-                  </a:lnTo>
-                  <a:lnTo>
-                    <a:pt x="5818291" y="3388007"/>
-                  </a:lnTo>
-                  <a:lnTo>
-                    <a:pt x="5740657" y="3381176"/>
-                  </a:lnTo>
-                  <a:lnTo>
-                    <a:pt x="5663023" y="3373858"/>
-                  </a:lnTo>
-                  <a:lnTo>
-                    <a:pt x="5585389" y="3366017"/>
-                  </a:lnTo>
-                  <a:lnTo>
-                    <a:pt x="5507755" y="3357617"/>
-                  </a:lnTo>
-                  <a:lnTo>
-                    <a:pt x="5430121" y="3348618"/>
-                  </a:lnTo>
-                  <a:lnTo>
-                    <a:pt x="5352487" y="3338976"/>
-                  </a:lnTo>
-                  <a:lnTo>
-                    <a:pt x="5274853" y="3328647"/>
-                  </a:lnTo>
-                  <a:lnTo>
-                    <a:pt x="5197219" y="3317580"/>
-                  </a:lnTo>
-                  <a:lnTo>
-                    <a:pt x="5119585" y="3305724"/>
-                  </a:lnTo>
-                  <a:lnTo>
-                    <a:pt x="5041951" y="3293022"/>
-                  </a:lnTo>
-                  <a:lnTo>
-                    <a:pt x="4964317" y="3279414"/>
-                  </a:lnTo>
-                  <a:lnTo>
-                    <a:pt x="4886683" y="3264834"/>
-                  </a:lnTo>
-                  <a:lnTo>
-                    <a:pt x="4809049" y="3249215"/>
-                  </a:lnTo>
-                  <a:lnTo>
-                    <a:pt x="4731415" y="3232481"/>
-                  </a:lnTo>
-                  <a:lnTo>
-                    <a:pt x="4653781" y="3214553"/>
-                  </a:lnTo>
-                  <a:lnTo>
-                    <a:pt x="4576147" y="3195345"/>
-                  </a:lnTo>
-                  <a:lnTo>
-                    <a:pt x="4498513" y="3174768"/>
-                  </a:lnTo>
-                  <a:lnTo>
-                    <a:pt x="4420879" y="3152722"/>
-                  </a:lnTo>
-                  <a:lnTo>
-                    <a:pt x="4343244" y="3129103"/>
-                  </a:lnTo>
-                  <a:lnTo>
-                    <a:pt x="4265610" y="3103799"/>
-                  </a:lnTo>
-                  <a:lnTo>
-                    <a:pt x="4187976" y="3076689"/>
-                  </a:lnTo>
-                  <a:lnTo>
-                    <a:pt x="4110342" y="3047645"/>
-                  </a:lnTo>
-                  <a:lnTo>
-                    <a:pt x="4032708" y="3016529"/>
-                  </a:lnTo>
-                  <a:lnTo>
-                    <a:pt x="3955074" y="2983193"/>
-                  </a:lnTo>
-                  <a:lnTo>
-                    <a:pt x="3877440" y="2947478"/>
-                  </a:lnTo>
-                  <a:lnTo>
-                    <a:pt x="3799806" y="2909214"/>
-                  </a:lnTo>
-                  <a:lnTo>
-                    <a:pt x="3722172" y="2868221"/>
-                  </a:lnTo>
-                  <a:lnTo>
-                    <a:pt x="3644538" y="2824303"/>
-                  </a:lnTo>
-                  <a:lnTo>
-                    <a:pt x="3566904" y="2777251"/>
-                  </a:lnTo>
-                  <a:lnTo>
-                    <a:pt x="3489270" y="2726841"/>
-                  </a:lnTo>
-                  <a:lnTo>
-                    <a:pt x="3411636" y="2672836"/>
-                  </a:lnTo>
-                  <a:lnTo>
-                    <a:pt x="3334002" y="2658592"/>
-                  </a:lnTo>
-                  <a:lnTo>
-                    <a:pt x="3256368" y="2664966"/>
-                  </a:lnTo>
-                  <a:lnTo>
-                    <a:pt x="3178734" y="2671290"/>
-                  </a:lnTo>
-                  <a:lnTo>
-                    <a:pt x="3101100" y="2677566"/>
-                  </a:lnTo>
-                  <a:lnTo>
-                    <a:pt x="3023466" y="2683793"/>
-                  </a:lnTo>
-                  <a:lnTo>
-                    <a:pt x="2945832" y="2689972"/>
-                  </a:lnTo>
-                  <a:lnTo>
-                    <a:pt x="2868198" y="2696103"/>
-                  </a:lnTo>
-                  <a:lnTo>
-                    <a:pt x="2790564" y="2702187"/>
-                  </a:lnTo>
-                  <a:lnTo>
-                    <a:pt x="2712930" y="2708224"/>
-                  </a:lnTo>
-                  <a:lnTo>
-                    <a:pt x="2635295" y="2714214"/>
-                  </a:lnTo>
-                  <a:lnTo>
-                    <a:pt x="2557661" y="2720158"/>
-                  </a:lnTo>
-                  <a:lnTo>
-                    <a:pt x="2480027" y="2726057"/>
-                  </a:lnTo>
-                  <a:lnTo>
-                    <a:pt x="2402393" y="2731909"/>
-                  </a:lnTo>
-                  <a:lnTo>
-                    <a:pt x="2324759" y="2737716"/>
-                  </a:lnTo>
-                  <a:lnTo>
-                    <a:pt x="2247125" y="2743479"/>
-                  </a:lnTo>
-                  <a:lnTo>
-                    <a:pt x="2169491" y="2749197"/>
-                  </a:lnTo>
-                  <a:lnTo>
-                    <a:pt x="2091857" y="2754871"/>
-                  </a:lnTo>
-                  <a:lnTo>
-                    <a:pt x="2014223" y="2760501"/>
-                  </a:lnTo>
-                  <a:lnTo>
-                    <a:pt x="1936589" y="2766087"/>
-                  </a:lnTo>
-                  <a:lnTo>
-                    <a:pt x="1858955" y="2771630"/>
-                  </a:lnTo>
-                  <a:lnTo>
-                    <a:pt x="1781321" y="2777131"/>
-                  </a:lnTo>
-                  <a:lnTo>
-                    <a:pt x="1703687" y="2782589"/>
-                  </a:lnTo>
-                  <a:lnTo>
-                    <a:pt x="1626053" y="2788005"/>
-                  </a:lnTo>
-                  <a:lnTo>
-                    <a:pt x="1548419" y="2793379"/>
-                  </a:lnTo>
-                  <a:lnTo>
-                    <a:pt x="1470785" y="2798711"/>
-                  </a:lnTo>
-                  <a:lnTo>
-                    <a:pt x="1393151" y="2804003"/>
-                  </a:lnTo>
-                  <a:lnTo>
-                    <a:pt x="1315517" y="2809253"/>
-                  </a:lnTo>
-                  <a:lnTo>
-                    <a:pt x="1237883" y="2814463"/>
-                  </a:lnTo>
-                  <a:lnTo>
-                    <a:pt x="1160249" y="2819633"/>
-                  </a:lnTo>
-                  <a:lnTo>
-                    <a:pt x="1082615" y="2824763"/>
-                  </a:lnTo>
-                  <a:lnTo>
-                    <a:pt x="1004981" y="2829853"/>
-                  </a:lnTo>
-                  <a:lnTo>
-                    <a:pt x="927346" y="2834903"/>
-                  </a:lnTo>
-                  <a:lnTo>
-                    <a:pt x="849712" y="2839915"/>
-                  </a:lnTo>
-                  <a:lnTo>
-                    <a:pt x="772078" y="2844888"/>
-                  </a:lnTo>
-                  <a:lnTo>
-                    <a:pt x="694444" y="2849823"/>
-                  </a:lnTo>
-                  <a:lnTo>
-                    <a:pt x="616810" y="2854719"/>
-                  </a:lnTo>
-                  <a:lnTo>
-                    <a:pt x="539176" y="2859578"/>
-                  </a:lnTo>
-                  <a:lnTo>
-                    <a:pt x="461542" y="2864399"/>
-                  </a:lnTo>
-                  <a:lnTo>
-                    <a:pt x="383908" y="2869183"/>
-                  </a:lnTo>
-                  <a:lnTo>
-                    <a:pt x="306274" y="2873930"/>
-                  </a:lnTo>
-                  <a:lnTo>
-                    <a:pt x="228640" y="2878641"/>
-                  </a:lnTo>
-                  <a:lnTo>
-                    <a:pt x="151006" y="2883315"/>
-                  </a:lnTo>
-                  <a:lnTo>
-                    <a:pt x="73372" y="2887952"/>
-                  </a:lnTo>
-                  <a:lnTo>
-                    <a:pt x="0" y="2892302"/>
+                    <a:pt x="1754576" y="33545"/>
+                  </a:lnTo>
+                  <a:lnTo>
+                    <a:pt x="1831044" y="247719"/>
+                  </a:lnTo>
+                  <a:lnTo>
+                    <a:pt x="1907513" y="447628"/>
+                  </a:lnTo>
+                  <a:lnTo>
+                    <a:pt x="1983981" y="634224"/>
+                  </a:lnTo>
+                  <a:lnTo>
+                    <a:pt x="2060450" y="808393"/>
+                  </a:lnTo>
+                  <a:lnTo>
+                    <a:pt x="2136918" y="970962"/>
+                  </a:lnTo>
+                  <a:lnTo>
+                    <a:pt x="2213386" y="1122704"/>
+                  </a:lnTo>
+                  <a:lnTo>
+                    <a:pt x="2289855" y="1264340"/>
+                  </a:lnTo>
+                  <a:lnTo>
+                    <a:pt x="2366323" y="1396544"/>
+                  </a:lnTo>
+                  <a:lnTo>
+                    <a:pt x="2442792" y="1519943"/>
+                  </a:lnTo>
+                  <a:lnTo>
+                    <a:pt x="2519260" y="1635123"/>
+                  </a:lnTo>
+                  <a:lnTo>
+                    <a:pt x="2595729" y="1742633"/>
+                  </a:lnTo>
+                  <a:lnTo>
+                    <a:pt x="2672197" y="1842983"/>
+                  </a:lnTo>
+                  <a:lnTo>
+                    <a:pt x="2748666" y="1936649"/>
+                  </a:lnTo>
+                  <a:lnTo>
+                    <a:pt x="2825134" y="2024078"/>
+                  </a:lnTo>
+                  <a:lnTo>
+                    <a:pt x="2901602" y="2105684"/>
+                  </a:lnTo>
+                  <a:lnTo>
+                    <a:pt x="2978071" y="2181854"/>
+                  </a:lnTo>
+                  <a:lnTo>
+                    <a:pt x="3054539" y="2252952"/>
+                  </a:lnTo>
+                  <a:lnTo>
+                    <a:pt x="3131008" y="2319315"/>
+                  </a:lnTo>
+                  <a:lnTo>
+                    <a:pt x="3207476" y="2381259"/>
+                  </a:lnTo>
+                  <a:lnTo>
+                    <a:pt x="3283945" y="2439076"/>
+                  </a:lnTo>
+                  <a:lnTo>
+                    <a:pt x="3360413" y="2473767"/>
+                  </a:lnTo>
+                  <a:lnTo>
+                    <a:pt x="3436881" y="2467730"/>
+                  </a:lnTo>
+                  <a:lnTo>
+                    <a:pt x="3513350" y="2461645"/>
+                  </a:lnTo>
+                  <a:lnTo>
+                    <a:pt x="3589818" y="2455513"/>
+                  </a:lnTo>
+                  <a:lnTo>
+                    <a:pt x="3666287" y="2449333"/>
+                  </a:lnTo>
+                  <a:lnTo>
+                    <a:pt x="3742755" y="2443105"/>
+                  </a:lnTo>
+                  <a:lnTo>
+                    <a:pt x="3819224" y="2436828"/>
+                  </a:lnTo>
+                  <a:lnTo>
+                    <a:pt x="3895692" y="2430503"/>
+                  </a:lnTo>
+                  <a:lnTo>
+                    <a:pt x="3972160" y="2424128"/>
+                  </a:lnTo>
+                  <a:lnTo>
+                    <a:pt x="4048629" y="2417704"/>
+                  </a:lnTo>
+                  <a:lnTo>
+                    <a:pt x="4125097" y="2411230"/>
+                  </a:lnTo>
+                  <a:lnTo>
+                    <a:pt x="4201566" y="2404705"/>
+                  </a:lnTo>
+                  <a:lnTo>
+                    <a:pt x="4278034" y="2398130"/>
+                  </a:lnTo>
+                  <a:lnTo>
+                    <a:pt x="4354503" y="2391503"/>
+                  </a:lnTo>
+                  <a:lnTo>
+                    <a:pt x="4430971" y="2384825"/>
+                  </a:lnTo>
+                  <a:lnTo>
+                    <a:pt x="4507439" y="2378095"/>
+                  </a:lnTo>
+                  <a:lnTo>
+                    <a:pt x="4583908" y="2371312"/>
+                  </a:lnTo>
+                  <a:lnTo>
+                    <a:pt x="4660376" y="2364477"/>
+                  </a:lnTo>
+                  <a:lnTo>
+                    <a:pt x="4736845" y="2357588"/>
+                  </a:lnTo>
+                  <a:lnTo>
+                    <a:pt x="4813313" y="2350646"/>
+                  </a:lnTo>
+                  <a:lnTo>
+                    <a:pt x="4889782" y="2343650"/>
+                  </a:lnTo>
+                  <a:lnTo>
+                    <a:pt x="4966250" y="2336599"/>
+                  </a:lnTo>
+                  <a:lnTo>
+                    <a:pt x="5042719" y="2329493"/>
+                  </a:lnTo>
+                  <a:lnTo>
+                    <a:pt x="5119187" y="2322332"/>
+                  </a:lnTo>
+                  <a:lnTo>
+                    <a:pt x="5195655" y="2315116"/>
+                  </a:lnTo>
+                  <a:lnTo>
+                    <a:pt x="5272124" y="2307843"/>
+                  </a:lnTo>
+                  <a:lnTo>
+                    <a:pt x="5348592" y="2300514"/>
+                  </a:lnTo>
+                  <a:lnTo>
+                    <a:pt x="5425061" y="2293127"/>
+                  </a:lnTo>
+                  <a:lnTo>
+                    <a:pt x="5501529" y="2285683"/>
+                  </a:lnTo>
+                  <a:lnTo>
+                    <a:pt x="5577998" y="2278181"/>
+                  </a:lnTo>
+                  <a:lnTo>
+                    <a:pt x="5654466" y="2270621"/>
+                  </a:lnTo>
+                  <a:lnTo>
+                    <a:pt x="5730934" y="2263002"/>
+                  </a:lnTo>
+                  <a:lnTo>
+                    <a:pt x="5807403" y="2255323"/>
+                  </a:lnTo>
+                  <a:lnTo>
+                    <a:pt x="5883871" y="2247585"/>
+                  </a:lnTo>
+                  <a:lnTo>
+                    <a:pt x="5960340" y="2239786"/>
+                  </a:lnTo>
+                  <a:lnTo>
+                    <a:pt x="6036808" y="2231927"/>
+                  </a:lnTo>
+                  <a:lnTo>
+                    <a:pt x="6113277" y="2224007"/>
+                  </a:lnTo>
+                  <a:lnTo>
+                    <a:pt x="6189745" y="2216025"/>
+                  </a:lnTo>
+                  <a:lnTo>
+                    <a:pt x="6266213" y="2207981"/>
+                  </a:lnTo>
+                  <a:lnTo>
+                    <a:pt x="6342682" y="2199874"/>
+                  </a:lnTo>
+                  <a:lnTo>
+                    <a:pt x="6419150" y="2191704"/>
+                  </a:lnTo>
+                  <a:lnTo>
+                    <a:pt x="6495619" y="2183470"/>
+                  </a:lnTo>
+                  <a:lnTo>
+                    <a:pt x="6572087" y="2175173"/>
+                  </a:lnTo>
+                  <a:lnTo>
+                    <a:pt x="6648556" y="2166811"/>
+                  </a:lnTo>
+                  <a:lnTo>
+                    <a:pt x="6725024" y="2158383"/>
+                  </a:lnTo>
+                  <a:lnTo>
+                    <a:pt x="6801492" y="2149890"/>
+                  </a:lnTo>
+                  <a:lnTo>
+                    <a:pt x="6877961" y="2141331"/>
+                  </a:lnTo>
+                  <a:lnTo>
+                    <a:pt x="6954429" y="2132706"/>
+                  </a:lnTo>
+                  <a:lnTo>
+                    <a:pt x="7030898" y="2124013"/>
+                  </a:lnTo>
+                  <a:lnTo>
+                    <a:pt x="7107366" y="2115253"/>
+                  </a:lnTo>
+                  <a:lnTo>
+                    <a:pt x="7183835" y="2106424"/>
+                  </a:lnTo>
+                  <a:lnTo>
+                    <a:pt x="7260303" y="2097527"/>
+                  </a:lnTo>
+                  <a:lnTo>
+                    <a:pt x="7260303" y="3226906"/>
+                  </a:lnTo>
+                  <a:lnTo>
+                    <a:pt x="7183835" y="3225301"/>
+                  </a:lnTo>
+                  <a:lnTo>
+                    <a:pt x="7107366" y="3223580"/>
+                  </a:lnTo>
+                  <a:lnTo>
+                    <a:pt x="7030898" y="3221738"/>
+                  </a:lnTo>
+                  <a:lnTo>
+                    <a:pt x="6954429" y="3219763"/>
+                  </a:lnTo>
+                  <a:lnTo>
+                    <a:pt x="6877961" y="3217648"/>
+                  </a:lnTo>
+                  <a:lnTo>
+                    <a:pt x="6801492" y="3215382"/>
+                  </a:lnTo>
+                  <a:lnTo>
+                    <a:pt x="6725024" y="3212955"/>
+                  </a:lnTo>
+                  <a:lnTo>
+                    <a:pt x="6648556" y="3210354"/>
+                  </a:lnTo>
+                  <a:lnTo>
+                    <a:pt x="6572087" y="3207567"/>
+                  </a:lnTo>
+                  <a:lnTo>
+                    <a:pt x="6495619" y="3204582"/>
+                  </a:lnTo>
+                  <a:lnTo>
+                    <a:pt x="6419150" y="3201383"/>
+                  </a:lnTo>
+                  <a:lnTo>
+                    <a:pt x="6342682" y="3197957"/>
+                  </a:lnTo>
+                  <a:lnTo>
+                    <a:pt x="6266213" y="3194286"/>
+                  </a:lnTo>
+                  <a:lnTo>
+                    <a:pt x="6189745" y="3190353"/>
+                  </a:lnTo>
+                  <a:lnTo>
+                    <a:pt x="6113277" y="3186139"/>
+                  </a:lnTo>
+                  <a:lnTo>
+                    <a:pt x="6036808" y="3181625"/>
+                  </a:lnTo>
+                  <a:lnTo>
+                    <a:pt x="5960340" y="3176788"/>
+                  </a:lnTo>
+                  <a:lnTo>
+                    <a:pt x="5883871" y="3171607"/>
+                  </a:lnTo>
+                  <a:lnTo>
+                    <a:pt x="5807403" y="3166056"/>
+                  </a:lnTo>
+                  <a:lnTo>
+                    <a:pt x="5730934" y="3160109"/>
+                  </a:lnTo>
+                  <a:lnTo>
+                    <a:pt x="5654466" y="3153737"/>
+                  </a:lnTo>
+                  <a:lnTo>
+                    <a:pt x="5577998" y="3146911"/>
+                  </a:lnTo>
+                  <a:lnTo>
+                    <a:pt x="5501529" y="3139598"/>
+                  </a:lnTo>
+                  <a:lnTo>
+                    <a:pt x="5425061" y="3131763"/>
+                  </a:lnTo>
+                  <a:lnTo>
+                    <a:pt x="5348592" y="3123368"/>
+                  </a:lnTo>
+                  <a:lnTo>
+                    <a:pt x="5272124" y="3114375"/>
+                  </a:lnTo>
+                  <a:lnTo>
+                    <a:pt x="5195655" y="3104741"/>
+                  </a:lnTo>
+                  <a:lnTo>
+                    <a:pt x="5119187" y="3094419"/>
+                  </a:lnTo>
+                  <a:lnTo>
+                    <a:pt x="5042719" y="3083360"/>
+                  </a:lnTo>
+                  <a:lnTo>
+                    <a:pt x="4966250" y="3071512"/>
+                  </a:lnTo>
+                  <a:lnTo>
+                    <a:pt x="4889782" y="3058819"/>
+                  </a:lnTo>
+                  <a:lnTo>
+                    <a:pt x="4813313" y="3045221"/>
+                  </a:lnTo>
+                  <a:lnTo>
+                    <a:pt x="4736845" y="3030652"/>
+                  </a:lnTo>
+                  <a:lnTo>
+                    <a:pt x="4660376" y="3015043"/>
+                  </a:lnTo>
+                  <a:lnTo>
+                    <a:pt x="4583908" y="2998321"/>
+                  </a:lnTo>
+                  <a:lnTo>
+                    <a:pt x="4507439" y="2980406"/>
+                  </a:lnTo>
+                  <a:lnTo>
+                    <a:pt x="4430971" y="2961213"/>
+                  </a:lnTo>
+                  <a:lnTo>
+                    <a:pt x="4354503" y="2940650"/>
+                  </a:lnTo>
+                  <a:lnTo>
+                    <a:pt x="4278034" y="2918620"/>
+                  </a:lnTo>
+                  <a:lnTo>
+                    <a:pt x="4201566" y="2895018"/>
+                  </a:lnTo>
+                  <a:lnTo>
+                    <a:pt x="4125097" y="2869731"/>
+                  </a:lnTo>
+                  <a:lnTo>
+                    <a:pt x="4048629" y="2842641"/>
+                  </a:lnTo>
+                  <a:lnTo>
+                    <a:pt x="3972160" y="2813618"/>
+                  </a:lnTo>
+                  <a:lnTo>
+                    <a:pt x="3895692" y="2782524"/>
+                  </a:lnTo>
+                  <a:lnTo>
+                    <a:pt x="3819224" y="2749212"/>
+                  </a:lnTo>
+                  <a:lnTo>
+                    <a:pt x="3742755" y="2713522"/>
+                  </a:lnTo>
+                  <a:lnTo>
+                    <a:pt x="3666287" y="2675286"/>
+                  </a:lnTo>
+                  <a:lnTo>
+                    <a:pt x="3589818" y="2634322"/>
+                  </a:lnTo>
+                  <a:lnTo>
+                    <a:pt x="3513350" y="2590435"/>
+                  </a:lnTo>
+                  <a:lnTo>
+                    <a:pt x="3436881" y="2543417"/>
+                  </a:lnTo>
+                  <a:lnTo>
+                    <a:pt x="3360413" y="2493044"/>
+                  </a:lnTo>
+                  <a:lnTo>
+                    <a:pt x="3283945" y="2479759"/>
+                  </a:lnTo>
+                  <a:lnTo>
+                    <a:pt x="3207476" y="2485704"/>
+                  </a:lnTo>
+                  <a:lnTo>
+                    <a:pt x="3131008" y="2491603"/>
+                  </a:lnTo>
+                  <a:lnTo>
+                    <a:pt x="3054539" y="2497456"/>
+                  </a:lnTo>
+                  <a:lnTo>
+                    <a:pt x="2978071" y="2503264"/>
+                  </a:lnTo>
+                  <a:lnTo>
+                    <a:pt x="2901602" y="2509027"/>
+                  </a:lnTo>
+                  <a:lnTo>
+                    <a:pt x="2825134" y="2514746"/>
+                  </a:lnTo>
+                  <a:lnTo>
+                    <a:pt x="2748666" y="2520421"/>
+                  </a:lnTo>
+                  <a:lnTo>
+                    <a:pt x="2672197" y="2526052"/>
+                  </a:lnTo>
+                  <a:lnTo>
+                    <a:pt x="2595729" y="2531639"/>
+                  </a:lnTo>
+                  <a:lnTo>
+                    <a:pt x="2519260" y="2537183"/>
+                  </a:lnTo>
+                  <a:lnTo>
+                    <a:pt x="2442792" y="2542685"/>
+                  </a:lnTo>
+                  <a:lnTo>
+                    <a:pt x="2366323" y="2548144"/>
+                  </a:lnTo>
+                  <a:lnTo>
+                    <a:pt x="2289855" y="2553560"/>
+                  </a:lnTo>
+                  <a:lnTo>
+                    <a:pt x="2213386" y="2558935"/>
+                  </a:lnTo>
+                  <a:lnTo>
+                    <a:pt x="2136918" y="2564268"/>
+                  </a:lnTo>
+                  <a:lnTo>
+                    <a:pt x="2060450" y="2569561"/>
+                  </a:lnTo>
+                  <a:lnTo>
+                    <a:pt x="1983981" y="2574812"/>
+                  </a:lnTo>
+                  <a:lnTo>
+                    <a:pt x="1907513" y="2580023"/>
+                  </a:lnTo>
+                  <a:lnTo>
+                    <a:pt x="1831044" y="2585193"/>
+                  </a:lnTo>
+                  <a:lnTo>
+                    <a:pt x="1754576" y="2590324"/>
+                  </a:lnTo>
+                  <a:lnTo>
+                    <a:pt x="1678107" y="2595414"/>
+                  </a:lnTo>
+                  <a:lnTo>
+                    <a:pt x="1601639" y="2600466"/>
+                  </a:lnTo>
+                  <a:lnTo>
+                    <a:pt x="1525171" y="2605478"/>
+                  </a:lnTo>
+                  <a:lnTo>
+                    <a:pt x="1448702" y="2610452"/>
+                  </a:lnTo>
+                  <a:lnTo>
+                    <a:pt x="1372234" y="2615388"/>
+                  </a:lnTo>
+                  <a:lnTo>
+                    <a:pt x="1295765" y="2620285"/>
+                  </a:lnTo>
+                  <a:lnTo>
+                    <a:pt x="1219297" y="2625144"/>
+                  </a:lnTo>
+                  <a:lnTo>
+                    <a:pt x="1142828" y="2629966"/>
+                  </a:lnTo>
+                  <a:lnTo>
+                    <a:pt x="1066360" y="2634751"/>
+                  </a:lnTo>
+                  <a:lnTo>
+                    <a:pt x="989892" y="2639499"/>
+                  </a:lnTo>
+                  <a:lnTo>
+                    <a:pt x="913423" y="2644210"/>
+                  </a:lnTo>
+                  <a:lnTo>
+                    <a:pt x="836955" y="2648885"/>
+                  </a:lnTo>
+                  <a:lnTo>
+                    <a:pt x="760486" y="2653523"/>
+                  </a:lnTo>
+                  <a:lnTo>
+                    <a:pt x="684018" y="2658126"/>
+                  </a:lnTo>
+                  <a:lnTo>
+                    <a:pt x="607549" y="2662693"/>
+                  </a:lnTo>
+                  <a:lnTo>
+                    <a:pt x="531081" y="2667225"/>
+                  </a:lnTo>
+                  <a:lnTo>
+                    <a:pt x="454613" y="2671722"/>
+                  </a:lnTo>
+                  <a:lnTo>
+                    <a:pt x="378144" y="2676184"/>
+                  </a:lnTo>
+                  <a:lnTo>
+                    <a:pt x="301676" y="2680612"/>
+                  </a:lnTo>
+                  <a:lnTo>
+                    <a:pt x="225207" y="2685005"/>
+                  </a:lnTo>
+                  <a:lnTo>
+                    <a:pt x="148739" y="2689365"/>
+                  </a:lnTo>
+                  <a:lnTo>
+                    <a:pt x="72270" y="2693690"/>
+                  </a:lnTo>
+                  <a:lnTo>
+                    <a:pt x="0" y="2697747"/>
                   </a:lnTo>
                   <a:close/>
                 </a:path>
@@ -3543,234 +3543,234 @@
           </p:nvSpPr>
           <p:spPr>
             <a:xfrm>
-              <a:off x="2587489" y="2073503"/>
-              <a:ext cx="5601001" cy="2652169"/>
+              <a:off x="2659041" y="2209169"/>
+              <a:ext cx="5516906" cy="2473767"/>
             </a:xfrm>
             <a:custGeom>
               <a:avLst/>
               <a:pathLst>
-                <a:path w="5601001" h="2652169">
+                <a:path w="5516906" h="2473767">
                   <a:moveTo>
                     <a:pt x="0" y="0"/>
                   </a:moveTo>
                   <a:lnTo>
-                    <a:pt x="11349" y="35964"/>
-                  </a:lnTo>
-                  <a:lnTo>
-                    <a:pt x="88983" y="265583"/>
-                  </a:lnTo>
-                  <a:lnTo>
-                    <a:pt x="166617" y="479910"/>
-                  </a:lnTo>
-                  <a:lnTo>
-                    <a:pt x="244252" y="679962"/>
-                  </a:lnTo>
-                  <a:lnTo>
-                    <a:pt x="321886" y="866692"/>
-                  </a:lnTo>
-                  <a:lnTo>
-                    <a:pt x="399520" y="1040985"/>
-                  </a:lnTo>
-                  <a:lnTo>
-                    <a:pt x="477154" y="1203671"/>
-                  </a:lnTo>
-                  <a:lnTo>
-                    <a:pt x="554788" y="1355521"/>
-                  </a:lnTo>
-                  <a:lnTo>
-                    <a:pt x="632422" y="1497259"/>
-                  </a:lnTo>
-                  <a:lnTo>
-                    <a:pt x="710056" y="1629557"/>
-                  </a:lnTo>
-                  <a:lnTo>
-                    <a:pt x="787690" y="1753044"/>
-                  </a:lnTo>
-                  <a:lnTo>
-                    <a:pt x="865324" y="1868307"/>
-                  </a:lnTo>
-                  <a:lnTo>
-                    <a:pt x="942958" y="1975894"/>
-                  </a:lnTo>
-                  <a:lnTo>
-                    <a:pt x="1020592" y="2076316"/>
-                  </a:lnTo>
-                  <a:lnTo>
-                    <a:pt x="1098226" y="2170049"/>
-                  </a:lnTo>
-                  <a:lnTo>
-                    <a:pt x="1175860" y="2257540"/>
-                  </a:lnTo>
-                  <a:lnTo>
-                    <a:pt x="1253494" y="2339204"/>
-                  </a:lnTo>
-                  <a:lnTo>
-                    <a:pt x="1331128" y="2415430"/>
-                  </a:lnTo>
-                  <a:lnTo>
-                    <a:pt x="1408762" y="2486578"/>
-                  </a:lnTo>
-                  <a:lnTo>
-                    <a:pt x="1486396" y="2552989"/>
-                  </a:lnTo>
-                  <a:lnTo>
-                    <a:pt x="1564030" y="2614976"/>
-                  </a:lnTo>
-                  <a:lnTo>
-                    <a:pt x="1641664" y="2652169"/>
-                  </a:lnTo>
-                  <a:lnTo>
-                    <a:pt x="1719298" y="2645696"/>
-                  </a:lnTo>
-                  <a:lnTo>
-                    <a:pt x="1796932" y="2639172"/>
-                  </a:lnTo>
-                  <a:lnTo>
-                    <a:pt x="1874566" y="2632598"/>
-                  </a:lnTo>
-                  <a:lnTo>
-                    <a:pt x="1952201" y="2625972"/>
-                  </a:lnTo>
-                  <a:lnTo>
-                    <a:pt x="2029835" y="2619295"/>
-                  </a:lnTo>
-                  <a:lnTo>
-                    <a:pt x="2107469" y="2612566"/>
-                  </a:lnTo>
-                  <a:lnTo>
-                    <a:pt x="2185103" y="2605784"/>
-                  </a:lnTo>
-                  <a:lnTo>
-                    <a:pt x="2262737" y="2598950"/>
-                  </a:lnTo>
-                  <a:lnTo>
-                    <a:pt x="2340371" y="2592062"/>
-                  </a:lnTo>
-                  <a:lnTo>
-                    <a:pt x="2418005" y="2585121"/>
-                  </a:lnTo>
-                  <a:lnTo>
-                    <a:pt x="2495639" y="2578126"/>
-                  </a:lnTo>
-                  <a:lnTo>
-                    <a:pt x="2573273" y="2571076"/>
-                  </a:lnTo>
-                  <a:lnTo>
-                    <a:pt x="2650907" y="2563972"/>
-                  </a:lnTo>
-                  <a:lnTo>
-                    <a:pt x="2728541" y="2556812"/>
-                  </a:lnTo>
-                  <a:lnTo>
-                    <a:pt x="2806175" y="2549597"/>
-                  </a:lnTo>
-                  <a:lnTo>
-                    <a:pt x="2883809" y="2542325"/>
-                  </a:lnTo>
-                  <a:lnTo>
-                    <a:pt x="2961443" y="2534997"/>
-                  </a:lnTo>
-                  <a:lnTo>
-                    <a:pt x="3039077" y="2527611"/>
-                  </a:lnTo>
-                  <a:lnTo>
-                    <a:pt x="3116711" y="2520168"/>
-                  </a:lnTo>
-                  <a:lnTo>
-                    <a:pt x="3194345" y="2512668"/>
-                  </a:lnTo>
-                  <a:lnTo>
-                    <a:pt x="3271979" y="2505108"/>
-                  </a:lnTo>
-                  <a:lnTo>
-                    <a:pt x="3349613" y="2497490"/>
-                  </a:lnTo>
-                  <a:lnTo>
-                    <a:pt x="3427247" y="2489813"/>
-                  </a:lnTo>
-                  <a:lnTo>
-                    <a:pt x="3504881" y="2482076"/>
-                  </a:lnTo>
-                  <a:lnTo>
-                    <a:pt x="3582515" y="2474279"/>
-                  </a:lnTo>
-                  <a:lnTo>
-                    <a:pt x="3660150" y="2466421"/>
-                  </a:lnTo>
-                  <a:lnTo>
-                    <a:pt x="3737784" y="2458501"/>
-                  </a:lnTo>
-                  <a:lnTo>
-                    <a:pt x="3815418" y="2450521"/>
-                  </a:lnTo>
-                  <a:lnTo>
-                    <a:pt x="3893052" y="2442478"/>
-                  </a:lnTo>
-                  <a:lnTo>
-                    <a:pt x="3970686" y="2434372"/>
-                  </a:lnTo>
-                  <a:lnTo>
-                    <a:pt x="4048320" y="2426203"/>
-                  </a:lnTo>
-                  <a:lnTo>
-                    <a:pt x="4125954" y="2417971"/>
-                  </a:lnTo>
-                  <a:lnTo>
-                    <a:pt x="4203588" y="2409675"/>
-                  </a:lnTo>
-                  <a:lnTo>
-                    <a:pt x="4281222" y="2401314"/>
-                  </a:lnTo>
-                  <a:lnTo>
-                    <a:pt x="4358856" y="2392888"/>
-                  </a:lnTo>
-                  <a:lnTo>
-                    <a:pt x="4436490" y="2384396"/>
-                  </a:lnTo>
-                  <a:lnTo>
-                    <a:pt x="4514124" y="2375839"/>
-                  </a:lnTo>
-                  <a:lnTo>
-                    <a:pt x="4591758" y="2367214"/>
-                  </a:lnTo>
-                  <a:lnTo>
-                    <a:pt x="4669392" y="2358523"/>
-                  </a:lnTo>
-                  <a:lnTo>
-                    <a:pt x="4747026" y="2349764"/>
-                  </a:lnTo>
-                  <a:lnTo>
-                    <a:pt x="4824660" y="2340937"/>
-                  </a:lnTo>
-                  <a:lnTo>
-                    <a:pt x="4902294" y="2332041"/>
-                  </a:lnTo>
-                  <a:lnTo>
-                    <a:pt x="4979928" y="2323075"/>
-                  </a:lnTo>
-                  <a:lnTo>
-                    <a:pt x="5057562" y="2314040"/>
-                  </a:lnTo>
-                  <a:lnTo>
-                    <a:pt x="5135196" y="2304935"/>
-                  </a:lnTo>
-                  <a:lnTo>
-                    <a:pt x="5212830" y="2295759"/>
-                  </a:lnTo>
-                  <a:lnTo>
-                    <a:pt x="5290464" y="2286511"/>
-                  </a:lnTo>
-                  <a:lnTo>
-                    <a:pt x="5368099" y="2277191"/>
-                  </a:lnTo>
-                  <a:lnTo>
-                    <a:pt x="5445733" y="2267799"/>
-                  </a:lnTo>
-                  <a:lnTo>
-                    <a:pt x="5523367" y="2258334"/>
-                  </a:lnTo>
-                  <a:lnTo>
-                    <a:pt x="5601001" y="2248795"/>
+                    <a:pt x="11179" y="33545"/>
+                  </a:lnTo>
+                  <a:lnTo>
+                    <a:pt x="87647" y="247719"/>
+                  </a:lnTo>
+                  <a:lnTo>
+                    <a:pt x="164116" y="447628"/>
+                  </a:lnTo>
+                  <a:lnTo>
+                    <a:pt x="240584" y="634224"/>
+                  </a:lnTo>
+                  <a:lnTo>
+                    <a:pt x="317053" y="808393"/>
+                  </a:lnTo>
+                  <a:lnTo>
+                    <a:pt x="393521" y="970962"/>
+                  </a:lnTo>
+                  <a:lnTo>
+                    <a:pt x="469990" y="1122704"/>
+                  </a:lnTo>
+                  <a:lnTo>
+                    <a:pt x="546458" y="1264340"/>
+                  </a:lnTo>
+                  <a:lnTo>
+                    <a:pt x="622926" y="1396544"/>
+                  </a:lnTo>
+                  <a:lnTo>
+                    <a:pt x="699395" y="1519943"/>
+                  </a:lnTo>
+                  <a:lnTo>
+                    <a:pt x="775863" y="1635123"/>
+                  </a:lnTo>
+                  <a:lnTo>
+                    <a:pt x="852332" y="1742633"/>
+                  </a:lnTo>
+                  <a:lnTo>
+                    <a:pt x="928800" y="1842983"/>
+                  </a:lnTo>
+                  <a:lnTo>
+                    <a:pt x="1005269" y="1936649"/>
+                  </a:lnTo>
+                  <a:lnTo>
+                    <a:pt x="1081737" y="2024078"/>
+                  </a:lnTo>
+                  <a:lnTo>
+                    <a:pt x="1158205" y="2105684"/>
+                  </a:lnTo>
+                  <a:lnTo>
+                    <a:pt x="1234674" y="2181854"/>
+                  </a:lnTo>
+                  <a:lnTo>
+                    <a:pt x="1311142" y="2252952"/>
+                  </a:lnTo>
+                  <a:lnTo>
+                    <a:pt x="1387611" y="2319315"/>
+                  </a:lnTo>
+                  <a:lnTo>
+                    <a:pt x="1464079" y="2381259"/>
+                  </a:lnTo>
+                  <a:lnTo>
+                    <a:pt x="1540548" y="2439076"/>
+                  </a:lnTo>
+                  <a:lnTo>
+                    <a:pt x="1617016" y="2473767"/>
+                  </a:lnTo>
+                  <a:lnTo>
+                    <a:pt x="1693485" y="2467730"/>
+                  </a:lnTo>
+                  <a:lnTo>
+                    <a:pt x="1769953" y="2461645"/>
+                  </a:lnTo>
+                  <a:lnTo>
+                    <a:pt x="1846421" y="2455513"/>
+                  </a:lnTo>
+                  <a:lnTo>
+                    <a:pt x="1922890" y="2449333"/>
+                  </a:lnTo>
+                  <a:lnTo>
+                    <a:pt x="1999358" y="2443105"/>
+                  </a:lnTo>
+                  <a:lnTo>
+                    <a:pt x="2075827" y="2436828"/>
+                  </a:lnTo>
+                  <a:lnTo>
+                    <a:pt x="2152295" y="2430503"/>
+                  </a:lnTo>
+                  <a:lnTo>
+                    <a:pt x="2228764" y="2424128"/>
+                  </a:lnTo>
+                  <a:lnTo>
+                    <a:pt x="2305232" y="2417704"/>
+                  </a:lnTo>
+                  <a:lnTo>
+                    <a:pt x="2381700" y="2411230"/>
+                  </a:lnTo>
+                  <a:lnTo>
+                    <a:pt x="2458169" y="2404705"/>
+                  </a:lnTo>
+                  <a:lnTo>
+                    <a:pt x="2534637" y="2398130"/>
+                  </a:lnTo>
+                  <a:lnTo>
+                    <a:pt x="2611106" y="2391503"/>
+                  </a:lnTo>
+                  <a:lnTo>
+                    <a:pt x="2687574" y="2384825"/>
+                  </a:lnTo>
+                  <a:lnTo>
+                    <a:pt x="2764043" y="2378095"/>
+                  </a:lnTo>
+                  <a:lnTo>
+                    <a:pt x="2840511" y="2371312"/>
+                  </a:lnTo>
+                  <a:lnTo>
+                    <a:pt x="2916979" y="2364477"/>
+                  </a:lnTo>
+                  <a:lnTo>
+                    <a:pt x="2993448" y="2357588"/>
+                  </a:lnTo>
+                  <a:lnTo>
+                    <a:pt x="3069916" y="2350646"/>
+                  </a:lnTo>
+                  <a:lnTo>
+                    <a:pt x="3146385" y="2343650"/>
+                  </a:lnTo>
+                  <a:lnTo>
+                    <a:pt x="3222853" y="2336599"/>
+                  </a:lnTo>
+                  <a:lnTo>
+                    <a:pt x="3299322" y="2329493"/>
+                  </a:lnTo>
+                  <a:lnTo>
+                    <a:pt x="3375790" y="2322332"/>
+                  </a:lnTo>
+                  <a:lnTo>
+                    <a:pt x="3452258" y="2315116"/>
+                  </a:lnTo>
+                  <a:lnTo>
+                    <a:pt x="3528727" y="2307843"/>
+                  </a:lnTo>
+                  <a:lnTo>
+                    <a:pt x="3605195" y="2300514"/>
+                  </a:lnTo>
+                  <a:lnTo>
+                    <a:pt x="3681664" y="2293127"/>
+                  </a:lnTo>
+                  <a:lnTo>
+                    <a:pt x="3758132" y="2285683"/>
+                  </a:lnTo>
+                  <a:lnTo>
+                    <a:pt x="3834601" y="2278181"/>
+                  </a:lnTo>
+                  <a:lnTo>
+                    <a:pt x="3911069" y="2270621"/>
+                  </a:lnTo>
+                  <a:lnTo>
+                    <a:pt x="3987538" y="2263002"/>
+                  </a:lnTo>
+                  <a:lnTo>
+                    <a:pt x="4064006" y="2255323"/>
+                  </a:lnTo>
+                  <a:lnTo>
+                    <a:pt x="4140474" y="2247585"/>
+                  </a:lnTo>
+                  <a:lnTo>
+                    <a:pt x="4216943" y="2239786"/>
+                  </a:lnTo>
+                  <a:lnTo>
+                    <a:pt x="4293411" y="2231927"/>
+                  </a:lnTo>
+                  <a:lnTo>
+                    <a:pt x="4369880" y="2224007"/>
+                  </a:lnTo>
+                  <a:lnTo>
+                    <a:pt x="4446348" y="2216025"/>
+                  </a:lnTo>
+                  <a:lnTo>
+                    <a:pt x="4522817" y="2207981"/>
+                  </a:lnTo>
+                  <a:lnTo>
+                    <a:pt x="4599285" y="2199874"/>
+                  </a:lnTo>
+                  <a:lnTo>
+                    <a:pt x="4675753" y="2191704"/>
+                  </a:lnTo>
+                  <a:lnTo>
+                    <a:pt x="4752222" y="2183470"/>
+                  </a:lnTo>
+                  <a:lnTo>
+                    <a:pt x="4828690" y="2175173"/>
+                  </a:lnTo>
+                  <a:lnTo>
+                    <a:pt x="4905159" y="2166811"/>
+                  </a:lnTo>
+                  <a:lnTo>
+                    <a:pt x="4981627" y="2158383"/>
+                  </a:lnTo>
+                  <a:lnTo>
+                    <a:pt x="5058096" y="2149890"/>
+                  </a:lnTo>
+                  <a:lnTo>
+                    <a:pt x="5134564" y="2141331"/>
+                  </a:lnTo>
+                  <a:lnTo>
+                    <a:pt x="5211032" y="2132706"/>
+                  </a:lnTo>
+                  <a:lnTo>
+                    <a:pt x="5287501" y="2124013"/>
+                  </a:lnTo>
+                  <a:lnTo>
+                    <a:pt x="5363969" y="2115253"/>
+                  </a:lnTo>
+                  <a:lnTo>
+                    <a:pt x="5440438" y="2106424"/>
+                  </a:lnTo>
+                  <a:lnTo>
+                    <a:pt x="5516906" y="2097527"/>
                   </a:lnTo>
                 </a:path>
               </a:pathLst>
@@ -3790,300 +3790,300 @@
           </p:nvSpPr>
           <p:spPr>
             <a:xfrm>
-              <a:off x="817517" y="4732095"/>
-              <a:ext cx="7370972" cy="801029"/>
+              <a:off x="915645" y="4688928"/>
+              <a:ext cx="7260303" cy="747147"/>
             </a:xfrm>
             <a:custGeom>
               <a:avLst/>
               <a:pathLst>
-                <a:path w="7370972" h="801029">
+                <a:path w="7260303" h="747147">
                   <a:moveTo>
-                    <a:pt x="7370972" y="801029"/>
+                    <a:pt x="7260303" y="747147"/>
                   </a:moveTo>
                   <a:lnTo>
-                    <a:pt x="7293338" y="799308"/>
-                  </a:lnTo>
-                  <a:lnTo>
-                    <a:pt x="7215704" y="797464"/>
-                  </a:lnTo>
-                  <a:lnTo>
-                    <a:pt x="7138070" y="795488"/>
-                  </a:lnTo>
-                  <a:lnTo>
-                    <a:pt x="7060436" y="793372"/>
-                  </a:lnTo>
-                  <a:lnTo>
-                    <a:pt x="6982802" y="791104"/>
-                  </a:lnTo>
-                  <a:lnTo>
-                    <a:pt x="6905168" y="788674"/>
-                  </a:lnTo>
-                  <a:lnTo>
-                    <a:pt x="6827534" y="786072"/>
-                  </a:lnTo>
-                  <a:lnTo>
-                    <a:pt x="6749900" y="783283"/>
-                  </a:lnTo>
-                  <a:lnTo>
-                    <a:pt x="6672266" y="780296"/>
-                  </a:lnTo>
-                  <a:lnTo>
-                    <a:pt x="6594632" y="777095"/>
-                  </a:lnTo>
-                  <a:lnTo>
-                    <a:pt x="6516998" y="773666"/>
-                  </a:lnTo>
-                  <a:lnTo>
-                    <a:pt x="6439364" y="769992"/>
-                  </a:lnTo>
-                  <a:lnTo>
-                    <a:pt x="6361730" y="766056"/>
-                  </a:lnTo>
-                  <a:lnTo>
-                    <a:pt x="6284096" y="761840"/>
-                  </a:lnTo>
-                  <a:lnTo>
-                    <a:pt x="6206462" y="757322"/>
-                  </a:lnTo>
-                  <a:lnTo>
-                    <a:pt x="6128827" y="752482"/>
-                  </a:lnTo>
-                  <a:lnTo>
-                    <a:pt x="6051193" y="747297"/>
-                  </a:lnTo>
-                  <a:lnTo>
-                    <a:pt x="5973559" y="741742"/>
-                  </a:lnTo>
-                  <a:lnTo>
-                    <a:pt x="5895925" y="735791"/>
-                  </a:lnTo>
-                  <a:lnTo>
-                    <a:pt x="5818291" y="729415"/>
-                  </a:lnTo>
-                  <a:lnTo>
-                    <a:pt x="5740657" y="722583"/>
-                  </a:lnTo>
-                  <a:lnTo>
-                    <a:pt x="5663023" y="715265"/>
-                  </a:lnTo>
-                  <a:lnTo>
-                    <a:pt x="5585389" y="707424"/>
-                  </a:lnTo>
-                  <a:lnTo>
-                    <a:pt x="5507755" y="699024"/>
-                  </a:lnTo>
-                  <a:lnTo>
-                    <a:pt x="5430121" y="690025"/>
-                  </a:lnTo>
-                  <a:lnTo>
-                    <a:pt x="5352487" y="680383"/>
-                  </a:lnTo>
-                  <a:lnTo>
-                    <a:pt x="5274853" y="670054"/>
-                  </a:lnTo>
-                  <a:lnTo>
-                    <a:pt x="5197219" y="658987"/>
-                  </a:lnTo>
-                  <a:lnTo>
-                    <a:pt x="5119585" y="647131"/>
-                  </a:lnTo>
-                  <a:lnTo>
-                    <a:pt x="5041951" y="634429"/>
-                  </a:lnTo>
-                  <a:lnTo>
-                    <a:pt x="4964317" y="620821"/>
-                  </a:lnTo>
-                  <a:lnTo>
-                    <a:pt x="4886683" y="606241"/>
-                  </a:lnTo>
-                  <a:lnTo>
-                    <a:pt x="4809049" y="590622"/>
-                  </a:lnTo>
-                  <a:lnTo>
-                    <a:pt x="4731415" y="573888"/>
-                  </a:lnTo>
-                  <a:lnTo>
-                    <a:pt x="4653781" y="555960"/>
-                  </a:lnTo>
-                  <a:lnTo>
-                    <a:pt x="4576147" y="536752"/>
-                  </a:lnTo>
-                  <a:lnTo>
-                    <a:pt x="4498513" y="516175"/>
-                  </a:lnTo>
-                  <a:lnTo>
-                    <a:pt x="4420879" y="494129"/>
-                  </a:lnTo>
-                  <a:lnTo>
-                    <a:pt x="4343244" y="470510"/>
-                  </a:lnTo>
-                  <a:lnTo>
-                    <a:pt x="4265610" y="445206"/>
-                  </a:lnTo>
-                  <a:lnTo>
-                    <a:pt x="4187976" y="418096"/>
-                  </a:lnTo>
-                  <a:lnTo>
-                    <a:pt x="4110342" y="389052"/>
-                  </a:lnTo>
-                  <a:lnTo>
-                    <a:pt x="4032708" y="357936"/>
-                  </a:lnTo>
-                  <a:lnTo>
-                    <a:pt x="3955074" y="324600"/>
-                  </a:lnTo>
-                  <a:lnTo>
-                    <a:pt x="3877440" y="288885"/>
-                  </a:lnTo>
-                  <a:lnTo>
-                    <a:pt x="3799806" y="250621"/>
-                  </a:lnTo>
-                  <a:lnTo>
-                    <a:pt x="3722172" y="209628"/>
-                  </a:lnTo>
-                  <a:lnTo>
-                    <a:pt x="3644538" y="165710"/>
-                  </a:lnTo>
-                  <a:lnTo>
-                    <a:pt x="3566904" y="118658"/>
-                  </a:lnTo>
-                  <a:lnTo>
-                    <a:pt x="3489270" y="68249"/>
-                  </a:lnTo>
-                  <a:lnTo>
-                    <a:pt x="3411636" y="14243"/>
-                  </a:lnTo>
-                  <a:lnTo>
-                    <a:pt x="3334002" y="0"/>
-                  </a:lnTo>
-                  <a:lnTo>
-                    <a:pt x="3256368" y="6373"/>
-                  </a:lnTo>
-                  <a:lnTo>
-                    <a:pt x="3178734" y="12698"/>
-                  </a:lnTo>
-                  <a:lnTo>
-                    <a:pt x="3101100" y="18973"/>
-                  </a:lnTo>
-                  <a:lnTo>
-                    <a:pt x="3023466" y="25200"/>
-                  </a:lnTo>
-                  <a:lnTo>
-                    <a:pt x="2945832" y="31379"/>
-                  </a:lnTo>
-                  <a:lnTo>
-                    <a:pt x="2868198" y="37510"/>
-                  </a:lnTo>
-                  <a:lnTo>
-                    <a:pt x="2790564" y="43594"/>
-                  </a:lnTo>
-                  <a:lnTo>
-                    <a:pt x="2712930" y="49631"/>
-                  </a:lnTo>
-                  <a:lnTo>
-                    <a:pt x="2635295" y="55622"/>
-                  </a:lnTo>
-                  <a:lnTo>
-                    <a:pt x="2557661" y="61566"/>
-                  </a:lnTo>
-                  <a:lnTo>
-                    <a:pt x="2480027" y="67464"/>
-                  </a:lnTo>
-                  <a:lnTo>
-                    <a:pt x="2402393" y="73316"/>
-                  </a:lnTo>
-                  <a:lnTo>
-                    <a:pt x="2324759" y="79124"/>
-                  </a:lnTo>
-                  <a:lnTo>
-                    <a:pt x="2247125" y="84886"/>
-                  </a:lnTo>
-                  <a:lnTo>
-                    <a:pt x="2169491" y="90604"/>
-                  </a:lnTo>
-                  <a:lnTo>
-                    <a:pt x="2091857" y="96278"/>
-                  </a:lnTo>
-                  <a:lnTo>
-                    <a:pt x="2014223" y="101908"/>
-                  </a:lnTo>
-                  <a:lnTo>
-                    <a:pt x="1936589" y="107494"/>
-                  </a:lnTo>
-                  <a:lnTo>
-                    <a:pt x="1858955" y="113038"/>
-                  </a:lnTo>
-                  <a:lnTo>
-                    <a:pt x="1781321" y="118538"/>
-                  </a:lnTo>
-                  <a:lnTo>
-                    <a:pt x="1703687" y="123996"/>
-                  </a:lnTo>
-                  <a:lnTo>
-                    <a:pt x="1626053" y="129412"/>
-                  </a:lnTo>
-                  <a:lnTo>
-                    <a:pt x="1548419" y="134786"/>
-                  </a:lnTo>
-                  <a:lnTo>
-                    <a:pt x="1470785" y="140119"/>
-                  </a:lnTo>
-                  <a:lnTo>
-                    <a:pt x="1393151" y="145410"/>
-                  </a:lnTo>
-                  <a:lnTo>
-                    <a:pt x="1315517" y="150660"/>
-                  </a:lnTo>
-                  <a:lnTo>
-                    <a:pt x="1237883" y="155870"/>
-                  </a:lnTo>
-                  <a:lnTo>
-                    <a:pt x="1160249" y="161040"/>
-                  </a:lnTo>
-                  <a:lnTo>
-                    <a:pt x="1082615" y="166170"/>
-                  </a:lnTo>
-                  <a:lnTo>
-                    <a:pt x="1004981" y="171260"/>
-                  </a:lnTo>
-                  <a:lnTo>
-                    <a:pt x="927346" y="176311"/>
-                  </a:lnTo>
-                  <a:lnTo>
-                    <a:pt x="849712" y="181322"/>
-                  </a:lnTo>
-                  <a:lnTo>
-                    <a:pt x="772078" y="186295"/>
-                  </a:lnTo>
-                  <a:lnTo>
-                    <a:pt x="694444" y="191230"/>
-                  </a:lnTo>
-                  <a:lnTo>
-                    <a:pt x="616810" y="196127"/>
-                  </a:lnTo>
-                  <a:lnTo>
-                    <a:pt x="539176" y="200985"/>
-                  </a:lnTo>
-                  <a:lnTo>
-                    <a:pt x="461542" y="205807"/>
-                  </a:lnTo>
-                  <a:lnTo>
-                    <a:pt x="383908" y="210590"/>
-                  </a:lnTo>
-                  <a:lnTo>
-                    <a:pt x="306274" y="215337"/>
-                  </a:lnTo>
-                  <a:lnTo>
-                    <a:pt x="228640" y="220048"/>
-                  </a:lnTo>
-                  <a:lnTo>
-                    <a:pt x="151006" y="224722"/>
-                  </a:lnTo>
-                  <a:lnTo>
-                    <a:pt x="73372" y="229360"/>
-                  </a:lnTo>
-                  <a:lnTo>
-                    <a:pt x="0" y="233709"/>
+                    <a:pt x="7183835" y="745541"/>
+                  </a:lnTo>
+                  <a:lnTo>
+                    <a:pt x="7107366" y="743821"/>
+                  </a:lnTo>
+                  <a:lnTo>
+                    <a:pt x="7030898" y="741979"/>
+                  </a:lnTo>
+                  <a:lnTo>
+                    <a:pt x="6954429" y="740004"/>
+                  </a:lnTo>
+                  <a:lnTo>
+                    <a:pt x="6877961" y="737889"/>
+                  </a:lnTo>
+                  <a:lnTo>
+                    <a:pt x="6801492" y="735623"/>
+                  </a:lnTo>
+                  <a:lnTo>
+                    <a:pt x="6725024" y="733195"/>
+                  </a:lnTo>
+                  <a:lnTo>
+                    <a:pt x="6648556" y="730594"/>
+                  </a:lnTo>
+                  <a:lnTo>
+                    <a:pt x="6572087" y="727808"/>
+                  </a:lnTo>
+                  <a:lnTo>
+                    <a:pt x="6495619" y="724823"/>
+                  </a:lnTo>
+                  <a:lnTo>
+                    <a:pt x="6419150" y="721624"/>
+                  </a:lnTo>
+                  <a:lnTo>
+                    <a:pt x="6342682" y="718198"/>
+                  </a:lnTo>
+                  <a:lnTo>
+                    <a:pt x="6266213" y="714527"/>
+                  </a:lnTo>
+                  <a:lnTo>
+                    <a:pt x="6189745" y="710594"/>
+                  </a:lnTo>
+                  <a:lnTo>
+                    <a:pt x="6113277" y="706380"/>
+                  </a:lnTo>
+                  <a:lnTo>
+                    <a:pt x="6036808" y="701866"/>
+                  </a:lnTo>
+                  <a:lnTo>
+                    <a:pt x="5960340" y="697029"/>
+                  </a:lnTo>
+                  <a:lnTo>
+                    <a:pt x="5883871" y="691848"/>
+                  </a:lnTo>
+                  <a:lnTo>
+                    <a:pt x="5807403" y="686297"/>
+                  </a:lnTo>
+                  <a:lnTo>
+                    <a:pt x="5730934" y="680349"/>
+                  </a:lnTo>
+                  <a:lnTo>
+                    <a:pt x="5654466" y="673978"/>
+                  </a:lnTo>
+                  <a:lnTo>
+                    <a:pt x="5577998" y="667152"/>
+                  </a:lnTo>
+                  <a:lnTo>
+                    <a:pt x="5501529" y="659838"/>
+                  </a:lnTo>
+                  <a:lnTo>
+                    <a:pt x="5425061" y="652003"/>
+                  </a:lnTo>
+                  <a:lnTo>
+                    <a:pt x="5348592" y="643609"/>
+                  </a:lnTo>
+                  <a:lnTo>
+                    <a:pt x="5272124" y="634616"/>
+                  </a:lnTo>
+                  <a:lnTo>
+                    <a:pt x="5195655" y="624982"/>
+                  </a:lnTo>
+                  <a:lnTo>
+                    <a:pt x="5119187" y="614660"/>
+                  </a:lnTo>
+                  <a:lnTo>
+                    <a:pt x="5042719" y="603601"/>
+                  </a:lnTo>
+                  <a:lnTo>
+                    <a:pt x="4966250" y="591753"/>
+                  </a:lnTo>
+                  <a:lnTo>
+                    <a:pt x="4889782" y="579060"/>
+                  </a:lnTo>
+                  <a:lnTo>
+                    <a:pt x="4813313" y="565462"/>
+                  </a:lnTo>
+                  <a:lnTo>
+                    <a:pt x="4736845" y="550893"/>
+                  </a:lnTo>
+                  <a:lnTo>
+                    <a:pt x="4660376" y="535284"/>
+                  </a:lnTo>
+                  <a:lnTo>
+                    <a:pt x="4583908" y="518562"/>
+                  </a:lnTo>
+                  <a:lnTo>
+                    <a:pt x="4507439" y="500647"/>
+                  </a:lnTo>
+                  <a:lnTo>
+                    <a:pt x="4430971" y="481454"/>
+                  </a:lnTo>
+                  <a:lnTo>
+                    <a:pt x="4354503" y="460891"/>
+                  </a:lnTo>
+                  <a:lnTo>
+                    <a:pt x="4278034" y="438860"/>
+                  </a:lnTo>
+                  <a:lnTo>
+                    <a:pt x="4201566" y="415258"/>
+                  </a:lnTo>
+                  <a:lnTo>
+                    <a:pt x="4125097" y="389972"/>
+                  </a:lnTo>
+                  <a:lnTo>
+                    <a:pt x="4048629" y="362882"/>
+                  </a:lnTo>
+                  <a:lnTo>
+                    <a:pt x="3972160" y="333859"/>
+                  </a:lnTo>
+                  <a:lnTo>
+                    <a:pt x="3895692" y="302765"/>
+                  </a:lnTo>
+                  <a:lnTo>
+                    <a:pt x="3819224" y="269452"/>
+                  </a:lnTo>
+                  <a:lnTo>
+                    <a:pt x="3742755" y="233763"/>
+                  </a:lnTo>
+                  <a:lnTo>
+                    <a:pt x="3666287" y="195527"/>
+                  </a:lnTo>
+                  <a:lnTo>
+                    <a:pt x="3589818" y="154563"/>
+                  </a:lnTo>
+                  <a:lnTo>
+                    <a:pt x="3513350" y="110676"/>
+                  </a:lnTo>
+                  <a:lnTo>
+                    <a:pt x="3436881" y="63658"/>
+                  </a:lnTo>
+                  <a:lnTo>
+                    <a:pt x="3360413" y="13285"/>
+                  </a:lnTo>
+                  <a:lnTo>
+                    <a:pt x="3283945" y="0"/>
+                  </a:lnTo>
+                  <a:lnTo>
+                    <a:pt x="3207476" y="5944"/>
+                  </a:lnTo>
+                  <a:lnTo>
+                    <a:pt x="3131008" y="11843"/>
+                  </a:lnTo>
+                  <a:lnTo>
+                    <a:pt x="3054539" y="17697"/>
+                  </a:lnTo>
+                  <a:lnTo>
+                    <a:pt x="2978071" y="23505"/>
+                  </a:lnTo>
+                  <a:lnTo>
+                    <a:pt x="2901602" y="29268"/>
+                  </a:lnTo>
+                  <a:lnTo>
+                    <a:pt x="2825134" y="34987"/>
+                  </a:lnTo>
+                  <a:lnTo>
+                    <a:pt x="2748666" y="40662"/>
+                  </a:lnTo>
+                  <a:lnTo>
+                    <a:pt x="2672197" y="46293"/>
+                  </a:lnTo>
+                  <a:lnTo>
+                    <a:pt x="2595729" y="51880"/>
+                  </a:lnTo>
+                  <a:lnTo>
+                    <a:pt x="2519260" y="57424"/>
+                  </a:lnTo>
+                  <a:lnTo>
+                    <a:pt x="2442792" y="62926"/>
+                  </a:lnTo>
+                  <a:lnTo>
+                    <a:pt x="2366323" y="68384"/>
+                  </a:lnTo>
+                  <a:lnTo>
+                    <a:pt x="2289855" y="73801"/>
+                  </a:lnTo>
+                  <a:lnTo>
+                    <a:pt x="2213386" y="79176"/>
+                  </a:lnTo>
+                  <a:lnTo>
+                    <a:pt x="2136918" y="84509"/>
+                  </a:lnTo>
+                  <a:lnTo>
+                    <a:pt x="2060450" y="89801"/>
+                  </a:lnTo>
+                  <a:lnTo>
+                    <a:pt x="1983981" y="95053"/>
+                  </a:lnTo>
+                  <a:lnTo>
+                    <a:pt x="1907513" y="100263"/>
+                  </a:lnTo>
+                  <a:lnTo>
+                    <a:pt x="1831044" y="105434"/>
+                  </a:lnTo>
+                  <a:lnTo>
+                    <a:pt x="1754576" y="110564"/>
+                  </a:lnTo>
+                  <a:lnTo>
+                    <a:pt x="1678107" y="115655"/>
+                  </a:lnTo>
+                  <a:lnTo>
+                    <a:pt x="1601639" y="120707"/>
+                  </a:lnTo>
+                  <a:lnTo>
+                    <a:pt x="1525171" y="125719"/>
+                  </a:lnTo>
+                  <a:lnTo>
+                    <a:pt x="1448702" y="130693"/>
+                  </a:lnTo>
+                  <a:lnTo>
+                    <a:pt x="1372234" y="135629"/>
+                  </a:lnTo>
+                  <a:lnTo>
+                    <a:pt x="1295765" y="140526"/>
+                  </a:lnTo>
+                  <a:lnTo>
+                    <a:pt x="1219297" y="145385"/>
+                  </a:lnTo>
+                  <a:lnTo>
+                    <a:pt x="1142828" y="150207"/>
+                  </a:lnTo>
+                  <a:lnTo>
+                    <a:pt x="1066360" y="154992"/>
+                  </a:lnTo>
+                  <a:lnTo>
+                    <a:pt x="989892" y="159740"/>
+                  </a:lnTo>
+                  <a:lnTo>
+                    <a:pt x="913423" y="164451"/>
+                  </a:lnTo>
+                  <a:lnTo>
+                    <a:pt x="836955" y="169125"/>
+                  </a:lnTo>
+                  <a:lnTo>
+                    <a:pt x="760486" y="173764"/>
+                  </a:lnTo>
+                  <a:lnTo>
+                    <a:pt x="684018" y="178367"/>
+                  </a:lnTo>
+                  <a:lnTo>
+                    <a:pt x="607549" y="182934"/>
+                  </a:lnTo>
+                  <a:lnTo>
+                    <a:pt x="531081" y="187466"/>
+                  </a:lnTo>
+                  <a:lnTo>
+                    <a:pt x="454613" y="191963"/>
+                  </a:lnTo>
+                  <a:lnTo>
+                    <a:pt x="378144" y="196425"/>
+                  </a:lnTo>
+                  <a:lnTo>
+                    <a:pt x="301676" y="200852"/>
+                  </a:lnTo>
+                  <a:lnTo>
+                    <a:pt x="225207" y="205246"/>
+                  </a:lnTo>
+                  <a:lnTo>
+                    <a:pt x="148739" y="209605"/>
+                  </a:lnTo>
+                  <a:lnTo>
+                    <a:pt x="72270" y="213931"/>
+                  </a:lnTo>
+                  <a:lnTo>
+                    <a:pt x="0" y="217988"/>
                   </a:lnTo>
                 </a:path>
               </a:pathLst>
@@ -4103,300 +4103,300 @@
           </p:nvSpPr>
           <p:spPr>
             <a:xfrm>
-              <a:off x="817517" y="2408554"/>
-              <a:ext cx="7370972" cy="2976090"/>
+              <a:off x="915645" y="2521683"/>
+              <a:ext cx="7260303" cy="2775899"/>
             </a:xfrm>
             <a:custGeom>
               <a:avLst/>
               <a:pathLst>
-                <a:path w="7370972" h="2976090">
+                <a:path w="7260303" h="2775899">
                   <a:moveTo>
                     <a:pt x="0" y="0"/>
                   </a:moveTo>
                   <a:lnTo>
-                    <a:pt x="73372" y="89781"/>
-                  </a:lnTo>
-                  <a:lnTo>
-                    <a:pt x="151006" y="181916"/>
-                  </a:lnTo>
-                  <a:lnTo>
-                    <a:pt x="228640" y="271276"/>
-                  </a:lnTo>
-                  <a:lnTo>
-                    <a:pt x="306274" y="357944"/>
-                  </a:lnTo>
-                  <a:lnTo>
-                    <a:pt x="383908" y="442002"/>
-                  </a:lnTo>
-                  <a:lnTo>
-                    <a:pt x="461542" y="523528"/>
-                  </a:lnTo>
-                  <a:lnTo>
-                    <a:pt x="539176" y="602599"/>
-                  </a:lnTo>
-                  <a:lnTo>
-                    <a:pt x="616810" y="679288"/>
-                  </a:lnTo>
-                  <a:lnTo>
-                    <a:pt x="694444" y="753667"/>
-                  </a:lnTo>
-                  <a:lnTo>
-                    <a:pt x="772078" y="825805"/>
-                  </a:lnTo>
-                  <a:lnTo>
-                    <a:pt x="849712" y="895771"/>
-                  </a:lnTo>
-                  <a:lnTo>
-                    <a:pt x="927346" y="963630"/>
-                  </a:lnTo>
-                  <a:lnTo>
-                    <a:pt x="1004981" y="1029444"/>
-                  </a:lnTo>
-                  <a:lnTo>
-                    <a:pt x="1082615" y="1093276"/>
-                  </a:lnTo>
-                  <a:lnTo>
-                    <a:pt x="1160249" y="1155186"/>
-                  </a:lnTo>
-                  <a:lnTo>
-                    <a:pt x="1237883" y="1215231"/>
-                  </a:lnTo>
-                  <a:lnTo>
-                    <a:pt x="1315517" y="1273467"/>
-                  </a:lnTo>
-                  <a:lnTo>
-                    <a:pt x="1393151" y="1329949"/>
-                  </a:lnTo>
-                  <a:lnTo>
-                    <a:pt x="1470785" y="1384730"/>
-                  </a:lnTo>
-                  <a:lnTo>
-                    <a:pt x="1548419" y="1437861"/>
-                  </a:lnTo>
-                  <a:lnTo>
-                    <a:pt x="1626053" y="1489392"/>
-                  </a:lnTo>
-                  <a:lnTo>
-                    <a:pt x="1703687" y="1539370"/>
-                  </a:lnTo>
-                  <a:lnTo>
-                    <a:pt x="1781321" y="1587843"/>
-                  </a:lnTo>
-                  <a:lnTo>
-                    <a:pt x="1858955" y="1634857"/>
-                  </a:lnTo>
-                  <a:lnTo>
-                    <a:pt x="1936589" y="1680454"/>
-                  </a:lnTo>
-                  <a:lnTo>
-                    <a:pt x="2014223" y="1724677"/>
-                  </a:lnTo>
-                  <a:lnTo>
-                    <a:pt x="2091857" y="1767569"/>
-                  </a:lnTo>
-                  <a:lnTo>
-                    <a:pt x="2169491" y="1809169"/>
-                  </a:lnTo>
-                  <a:lnTo>
-                    <a:pt x="2247125" y="1849515"/>
-                  </a:lnTo>
-                  <a:lnTo>
-                    <a:pt x="2324759" y="1888647"/>
-                  </a:lnTo>
-                  <a:lnTo>
-                    <a:pt x="2402393" y="1926600"/>
-                  </a:lnTo>
-                  <a:lnTo>
-                    <a:pt x="2480027" y="1963410"/>
-                  </a:lnTo>
-                  <a:lnTo>
-                    <a:pt x="2557661" y="1999111"/>
-                  </a:lnTo>
-                  <a:lnTo>
-                    <a:pt x="2635295" y="2033736"/>
-                  </a:lnTo>
-                  <a:lnTo>
-                    <a:pt x="2712930" y="2067319"/>
-                  </a:lnTo>
-                  <a:lnTo>
-                    <a:pt x="2790564" y="2099890"/>
-                  </a:lnTo>
-                  <a:lnTo>
-                    <a:pt x="2868198" y="2131480"/>
-                  </a:lnTo>
-                  <a:lnTo>
-                    <a:pt x="2945832" y="2162119"/>
-                  </a:lnTo>
-                  <a:lnTo>
-                    <a:pt x="3023466" y="2191835"/>
-                  </a:lnTo>
-                  <a:lnTo>
-                    <a:pt x="3101100" y="2220656"/>
-                  </a:lnTo>
-                  <a:lnTo>
-                    <a:pt x="3178734" y="2248608"/>
-                  </a:lnTo>
-                  <a:lnTo>
-                    <a:pt x="3256368" y="2275719"/>
-                  </a:lnTo>
-                  <a:lnTo>
-                    <a:pt x="3334002" y="2302013"/>
-                  </a:lnTo>
-                  <a:lnTo>
-                    <a:pt x="3411636" y="2327515"/>
-                  </a:lnTo>
-                  <a:lnTo>
-                    <a:pt x="3489270" y="2352250"/>
-                  </a:lnTo>
-                  <a:lnTo>
-                    <a:pt x="3566904" y="2376239"/>
-                  </a:lnTo>
-                  <a:lnTo>
-                    <a:pt x="3644538" y="2399505"/>
-                  </a:lnTo>
-                  <a:lnTo>
-                    <a:pt x="3722172" y="2422071"/>
-                  </a:lnTo>
-                  <a:lnTo>
-                    <a:pt x="3799806" y="2443957"/>
-                  </a:lnTo>
-                  <a:lnTo>
-                    <a:pt x="3877440" y="2465184"/>
-                  </a:lnTo>
-                  <a:lnTo>
-                    <a:pt x="3955074" y="2485771"/>
-                  </a:lnTo>
-                  <a:lnTo>
-                    <a:pt x="4032708" y="2505739"/>
-                  </a:lnTo>
-                  <a:lnTo>
-                    <a:pt x="4110342" y="2525105"/>
-                  </a:lnTo>
-                  <a:lnTo>
-                    <a:pt x="4187976" y="2543887"/>
-                  </a:lnTo>
-                  <a:lnTo>
-                    <a:pt x="4265610" y="2562104"/>
-                  </a:lnTo>
-                  <a:lnTo>
-                    <a:pt x="4343244" y="2579772"/>
-                  </a:lnTo>
-                  <a:lnTo>
-                    <a:pt x="4420879" y="2596908"/>
-                  </a:lnTo>
-                  <a:lnTo>
-                    <a:pt x="4498513" y="2613528"/>
-                  </a:lnTo>
-                  <a:lnTo>
-                    <a:pt x="4576147" y="2629648"/>
-                  </a:lnTo>
-                  <a:lnTo>
-                    <a:pt x="4653781" y="2645281"/>
-                  </a:lnTo>
-                  <a:lnTo>
-                    <a:pt x="4731415" y="2660444"/>
-                  </a:lnTo>
-                  <a:lnTo>
-                    <a:pt x="4809049" y="2675150"/>
-                  </a:lnTo>
-                  <a:lnTo>
-                    <a:pt x="4886683" y="2689414"/>
-                  </a:lnTo>
-                  <a:lnTo>
-                    <a:pt x="4964317" y="2703247"/>
-                  </a:lnTo>
-                  <a:lnTo>
-                    <a:pt x="5041951" y="2716664"/>
-                  </a:lnTo>
-                  <a:lnTo>
-                    <a:pt x="5119585" y="2729677"/>
-                  </a:lnTo>
-                  <a:lnTo>
-                    <a:pt x="5197219" y="2742298"/>
-                  </a:lnTo>
-                  <a:lnTo>
-                    <a:pt x="5274853" y="2754539"/>
-                  </a:lnTo>
-                  <a:lnTo>
-                    <a:pt x="5352487" y="2766411"/>
-                  </a:lnTo>
-                  <a:lnTo>
-                    <a:pt x="5430121" y="2777925"/>
-                  </a:lnTo>
-                  <a:lnTo>
-                    <a:pt x="5507755" y="2789093"/>
-                  </a:lnTo>
-                  <a:lnTo>
-                    <a:pt x="5585389" y="2799924"/>
-                  </a:lnTo>
-                  <a:lnTo>
-                    <a:pt x="5663023" y="2810429"/>
-                  </a:lnTo>
-                  <a:lnTo>
-                    <a:pt x="5740657" y="2820618"/>
-                  </a:lnTo>
-                  <a:lnTo>
-                    <a:pt x="5818291" y="2830499"/>
-                  </a:lnTo>
-                  <a:lnTo>
-                    <a:pt x="5895925" y="2840084"/>
-                  </a:lnTo>
-                  <a:lnTo>
-                    <a:pt x="5973559" y="2849379"/>
-                  </a:lnTo>
-                  <a:lnTo>
-                    <a:pt x="6051193" y="2858394"/>
-                  </a:lnTo>
-                  <a:lnTo>
-                    <a:pt x="6128827" y="2867138"/>
-                  </a:lnTo>
-                  <a:lnTo>
-                    <a:pt x="6206462" y="2875619"/>
-                  </a:lnTo>
-                  <a:lnTo>
-                    <a:pt x="6284096" y="2883844"/>
-                  </a:lnTo>
-                  <a:lnTo>
-                    <a:pt x="6361730" y="2891821"/>
-                  </a:lnTo>
-                  <a:lnTo>
-                    <a:pt x="6439364" y="2899558"/>
-                  </a:lnTo>
-                  <a:lnTo>
-                    <a:pt x="6516998" y="2907062"/>
-                  </a:lnTo>
-                  <a:lnTo>
-                    <a:pt x="6594632" y="2914340"/>
-                  </a:lnTo>
-                  <a:lnTo>
-                    <a:pt x="6672266" y="2921399"/>
-                  </a:lnTo>
-                  <a:lnTo>
-                    <a:pt x="6749900" y="2928245"/>
-                  </a:lnTo>
-                  <a:lnTo>
-                    <a:pt x="6827534" y="2934885"/>
-                  </a:lnTo>
-                  <a:lnTo>
-                    <a:pt x="6905168" y="2941325"/>
-                  </a:lnTo>
-                  <a:lnTo>
-                    <a:pt x="6982802" y="2947571"/>
-                  </a:lnTo>
-                  <a:lnTo>
-                    <a:pt x="7060436" y="2953629"/>
-                  </a:lnTo>
-                  <a:lnTo>
-                    <a:pt x="7138070" y="2959505"/>
-                  </a:lnTo>
-                  <a:lnTo>
-                    <a:pt x="7215704" y="2965203"/>
-                  </a:lnTo>
-                  <a:lnTo>
-                    <a:pt x="7293338" y="2970730"/>
-                  </a:lnTo>
-                  <a:lnTo>
-                    <a:pt x="7370972" y="2976090"/>
+                    <a:pt x="72270" y="83742"/>
+                  </a:lnTo>
+                  <a:lnTo>
+                    <a:pt x="148739" y="169679"/>
+                  </a:lnTo>
+                  <a:lnTo>
+                    <a:pt x="225207" y="253028"/>
+                  </a:lnTo>
+                  <a:lnTo>
+                    <a:pt x="301676" y="333867"/>
+                  </a:lnTo>
+                  <a:lnTo>
+                    <a:pt x="378144" y="412270"/>
+                  </a:lnTo>
+                  <a:lnTo>
+                    <a:pt x="454613" y="488313"/>
+                  </a:lnTo>
+                  <a:lnTo>
+                    <a:pt x="531081" y="562064"/>
+                  </a:lnTo>
+                  <a:lnTo>
+                    <a:pt x="607549" y="633595"/>
+                  </a:lnTo>
+                  <a:lnTo>
+                    <a:pt x="684018" y="702970"/>
+                  </a:lnTo>
+                  <a:lnTo>
+                    <a:pt x="760486" y="770257"/>
+                  </a:lnTo>
+                  <a:lnTo>
+                    <a:pt x="836955" y="835516"/>
+                  </a:lnTo>
+                  <a:lnTo>
+                    <a:pt x="913423" y="898810"/>
+                  </a:lnTo>
+                  <a:lnTo>
+                    <a:pt x="989892" y="960197"/>
+                  </a:lnTo>
+                  <a:lnTo>
+                    <a:pt x="1066360" y="1019736"/>
+                  </a:lnTo>
+                  <a:lnTo>
+                    <a:pt x="1142828" y="1077481"/>
+                  </a:lnTo>
+                  <a:lnTo>
+                    <a:pt x="1219297" y="1133487"/>
+                  </a:lnTo>
+                  <a:lnTo>
+                    <a:pt x="1295765" y="1187806"/>
+                  </a:lnTo>
+                  <a:lnTo>
+                    <a:pt x="1372234" y="1240489"/>
+                  </a:lnTo>
+                  <a:lnTo>
+                    <a:pt x="1448702" y="1291585"/>
+                  </a:lnTo>
+                  <a:lnTo>
+                    <a:pt x="1525171" y="1341142"/>
+                  </a:lnTo>
+                  <a:lnTo>
+                    <a:pt x="1601639" y="1389206"/>
+                  </a:lnTo>
+                  <a:lnTo>
+                    <a:pt x="1678107" y="1435822"/>
+                  </a:lnTo>
+                  <a:lnTo>
+                    <a:pt x="1754576" y="1481035"/>
+                  </a:lnTo>
+                  <a:lnTo>
+                    <a:pt x="1831044" y="1524886"/>
+                  </a:lnTo>
+                  <a:lnTo>
+                    <a:pt x="1907513" y="1567416"/>
+                  </a:lnTo>
+                  <a:lnTo>
+                    <a:pt x="1983981" y="1608665"/>
+                  </a:lnTo>
+                  <a:lnTo>
+                    <a:pt x="2060450" y="1648671"/>
+                  </a:lnTo>
+                  <a:lnTo>
+                    <a:pt x="2136918" y="1687473"/>
+                  </a:lnTo>
+                  <a:lnTo>
+                    <a:pt x="2213386" y="1725105"/>
+                  </a:lnTo>
+                  <a:lnTo>
+                    <a:pt x="2289855" y="1761605"/>
+                  </a:lnTo>
+                  <a:lnTo>
+                    <a:pt x="2366323" y="1797005"/>
+                  </a:lnTo>
+                  <a:lnTo>
+                    <a:pt x="2442792" y="1831338"/>
+                  </a:lnTo>
+                  <a:lnTo>
+                    <a:pt x="2519260" y="1864638"/>
+                  </a:lnTo>
+                  <a:lnTo>
+                    <a:pt x="2595729" y="1896934"/>
+                  </a:lnTo>
+                  <a:lnTo>
+                    <a:pt x="2672197" y="1928258"/>
+                  </a:lnTo>
+                  <a:lnTo>
+                    <a:pt x="2748666" y="1958638"/>
+                  </a:lnTo>
+                  <a:lnTo>
+                    <a:pt x="2825134" y="1988103"/>
+                  </a:lnTo>
+                  <a:lnTo>
+                    <a:pt x="2901602" y="2016681"/>
+                  </a:lnTo>
+                  <a:lnTo>
+                    <a:pt x="2978071" y="2044398"/>
+                  </a:lnTo>
+                  <a:lnTo>
+                    <a:pt x="3054539" y="2071280"/>
+                  </a:lnTo>
+                  <a:lnTo>
+                    <a:pt x="3131008" y="2097353"/>
+                  </a:lnTo>
+                  <a:lnTo>
+                    <a:pt x="3207476" y="2122640"/>
+                  </a:lnTo>
+                  <a:lnTo>
+                    <a:pt x="3283945" y="2147165"/>
+                  </a:lnTo>
+                  <a:lnTo>
+                    <a:pt x="3360413" y="2170952"/>
+                  </a:lnTo>
+                  <a:lnTo>
+                    <a:pt x="3436881" y="2194022"/>
+                  </a:lnTo>
+                  <a:lnTo>
+                    <a:pt x="3513350" y="2216398"/>
+                  </a:lnTo>
+                  <a:lnTo>
+                    <a:pt x="3589818" y="2238099"/>
+                  </a:lnTo>
+                  <a:lnTo>
+                    <a:pt x="3666287" y="2259147"/>
+                  </a:lnTo>
+                  <a:lnTo>
+                    <a:pt x="3742755" y="2279561"/>
+                  </a:lnTo>
+                  <a:lnTo>
+                    <a:pt x="3819224" y="2299360"/>
+                  </a:lnTo>
+                  <a:lnTo>
+                    <a:pt x="3895692" y="2318562"/>
+                  </a:lnTo>
+                  <a:lnTo>
+                    <a:pt x="3972160" y="2337187"/>
+                  </a:lnTo>
+                  <a:lnTo>
+                    <a:pt x="4048629" y="2355250"/>
+                  </a:lnTo>
+                  <a:lnTo>
+                    <a:pt x="4125097" y="2372769"/>
+                  </a:lnTo>
+                  <a:lnTo>
+                    <a:pt x="4201566" y="2389761"/>
+                  </a:lnTo>
+                  <a:lnTo>
+                    <a:pt x="4278034" y="2406240"/>
+                  </a:lnTo>
+                  <a:lnTo>
+                    <a:pt x="4354503" y="2422224"/>
+                  </a:lnTo>
+                  <a:lnTo>
+                    <a:pt x="4430971" y="2437726"/>
+                  </a:lnTo>
+                  <a:lnTo>
+                    <a:pt x="4507439" y="2452761"/>
+                  </a:lnTo>
+                  <a:lnTo>
+                    <a:pt x="4583908" y="2467343"/>
+                  </a:lnTo>
+                  <a:lnTo>
+                    <a:pt x="4660376" y="2481486"/>
+                  </a:lnTo>
+                  <a:lnTo>
+                    <a:pt x="4736845" y="2495203"/>
+                  </a:lnTo>
+                  <a:lnTo>
+                    <a:pt x="4813313" y="2508507"/>
+                  </a:lnTo>
+                  <a:lnTo>
+                    <a:pt x="4889782" y="2521410"/>
+                  </a:lnTo>
+                  <a:lnTo>
+                    <a:pt x="4966250" y="2533924"/>
+                  </a:lnTo>
+                  <a:lnTo>
+                    <a:pt x="5042719" y="2546062"/>
+                  </a:lnTo>
+                  <a:lnTo>
+                    <a:pt x="5119187" y="2557834"/>
+                  </a:lnTo>
+                  <a:lnTo>
+                    <a:pt x="5195655" y="2569251"/>
+                  </a:lnTo>
+                  <a:lnTo>
+                    <a:pt x="5272124" y="2580324"/>
+                  </a:lnTo>
+                  <a:lnTo>
+                    <a:pt x="5348592" y="2591064"/>
+                  </a:lnTo>
+                  <a:lnTo>
+                    <a:pt x="5425061" y="2601481"/>
+                  </a:lnTo>
+                  <a:lnTo>
+                    <a:pt x="5501529" y="2611583"/>
+                  </a:lnTo>
+                  <a:lnTo>
+                    <a:pt x="5577998" y="2621382"/>
+                  </a:lnTo>
+                  <a:lnTo>
+                    <a:pt x="5654466" y="2630885"/>
+                  </a:lnTo>
+                  <a:lnTo>
+                    <a:pt x="5730934" y="2640102"/>
+                  </a:lnTo>
+                  <a:lnTo>
+                    <a:pt x="5807403" y="2649042"/>
+                  </a:lnTo>
+                  <a:lnTo>
+                    <a:pt x="5883871" y="2657712"/>
+                  </a:lnTo>
+                  <a:lnTo>
+                    <a:pt x="5960340" y="2666121"/>
+                  </a:lnTo>
+                  <a:lnTo>
+                    <a:pt x="6036808" y="2674276"/>
+                  </a:lnTo>
+                  <a:lnTo>
+                    <a:pt x="6113277" y="2682186"/>
+                  </a:lnTo>
+                  <a:lnTo>
+                    <a:pt x="6189745" y="2689858"/>
+                  </a:lnTo>
+                  <a:lnTo>
+                    <a:pt x="6266213" y="2697299"/>
+                  </a:lnTo>
+                  <a:lnTo>
+                    <a:pt x="6342682" y="2704516"/>
+                  </a:lnTo>
+                  <a:lnTo>
+                    <a:pt x="6419150" y="2711515"/>
+                  </a:lnTo>
+                  <a:lnTo>
+                    <a:pt x="6495619" y="2718303"/>
+                  </a:lnTo>
+                  <a:lnTo>
+                    <a:pt x="6572087" y="2724887"/>
+                  </a:lnTo>
+                  <a:lnTo>
+                    <a:pt x="6648556" y="2731273"/>
+                  </a:lnTo>
+                  <a:lnTo>
+                    <a:pt x="6725024" y="2737466"/>
+                  </a:lnTo>
+                  <a:lnTo>
+                    <a:pt x="6801492" y="2743473"/>
+                  </a:lnTo>
+                  <a:lnTo>
+                    <a:pt x="6877961" y="2749299"/>
+                  </a:lnTo>
+                  <a:lnTo>
+                    <a:pt x="6954429" y="2754949"/>
+                  </a:lnTo>
+                  <a:lnTo>
+                    <a:pt x="7030898" y="2760430"/>
+                  </a:lnTo>
+                  <a:lnTo>
+                    <a:pt x="7107366" y="2765745"/>
+                  </a:lnTo>
+                  <a:lnTo>
+                    <a:pt x="7183835" y="2770900"/>
+                  </a:lnTo>
+                  <a:lnTo>
+                    <a:pt x="7260303" y="2775899"/>
                   </a:lnTo>
                 </a:path>
               </a:pathLst>
@@ -4425,21 +4425,21 @@
           </p:nvSpPr>
           <p:spPr>
             <a:xfrm>
-              <a:off x="817517" y="4727786"/>
-              <a:ext cx="7799693" cy="0"/>
+              <a:off x="915645" y="4684908"/>
+              <a:ext cx="7682587" cy="0"/>
             </a:xfrm>
             <a:custGeom>
               <a:avLst/>
               <a:pathLst>
-                <a:path w="7799693" h="0">
+                <a:path w="7682587" h="0">
                   <a:moveTo>
                     <a:pt x="0" y="0"/>
                   </a:moveTo>
                   <a:lnTo>
-                    <a:pt x="7799693" y="0"/>
-                  </a:lnTo>
-                  <a:lnTo>
-                    <a:pt x="7799693" y="0"/>
+                    <a:pt x="7682587" y="0"/>
+                  </a:lnTo>
+                  <a:lnTo>
+                    <a:pt x="7682587" y="0"/>
                   </a:lnTo>
                 </a:path>
               </a:pathLst>
@@ -4468,15 +4468,15 @@
           </p:nvSpPr>
           <p:spPr>
             <a:xfrm>
-              <a:off x="4203673" y="2073503"/>
-              <a:ext cx="0" cy="3649639"/>
+              <a:off x="4250960" y="2209169"/>
+              <a:ext cx="0" cy="3404141"/>
             </a:xfrm>
             <a:custGeom>
               <a:avLst/>
               <a:pathLst>
-                <a:path w="0" h="3649639">
+                <a:path w="0" h="3404141">
                   <a:moveTo>
-                    <a:pt x="0" y="3649639"/>
+                    <a:pt x="0" y="3404141"/>
                   </a:moveTo>
                   <a:lnTo>
                     <a:pt x="0" y="0"/>
@@ -4511,8 +4511,8 @@
           </p:nvSpPr>
           <p:spPr>
             <a:xfrm>
-              <a:off x="692708" y="5517199"/>
-              <a:ext cx="62179" cy="80101"/>
+              <a:off x="756929" y="5407599"/>
+              <a:ext cx="79004" cy="101955"/>
             </a:xfrm>
             <a:prstGeom prst="rect">
               <a:avLst/>
@@ -4525,7 +4525,7 @@
             <a:p>
               <a:pPr algn="l" marL="0" marR="0" indent="0">
                 <a:lnSpc>
-                  <a:spcPts val="880"/>
+                  <a:spcPts val="1120"/>
                 </a:lnSpc>
                 <a:spcBef>
                   <a:spcPts val="0"/>
@@ -4535,7 +4535,7 @@
                 </a:spcAft>
               </a:pPr>
               <a:r>
-                <a:rPr sz="880">
+                <a:rPr sz="1120">
                   <a:solidFill>
                     <a:srgbClr val="4D4D4D">
                       <a:alpha val="100000"/>
@@ -4557,8 +4557,8 @@
           </p:nvSpPr>
           <p:spPr>
             <a:xfrm>
-              <a:off x="692708" y="4687735"/>
-              <a:ext cx="62179" cy="80101"/>
+              <a:off x="756929" y="4633931"/>
+              <a:ext cx="79004" cy="101955"/>
             </a:xfrm>
             <a:prstGeom prst="rect">
               <a:avLst/>
@@ -4571,7 +4571,7 @@
             <a:p>
               <a:pPr algn="l" marL="0" marR="0" indent="0">
                 <a:lnSpc>
-                  <a:spcPts val="880"/>
+                  <a:spcPts val="1120"/>
                 </a:lnSpc>
                 <a:spcBef>
                   <a:spcPts val="0"/>
@@ -4581,7 +4581,7 @@
                 </a:spcAft>
               </a:pPr>
               <a:r>
-                <a:rPr sz="880">
+                <a:rPr sz="1120">
                   <a:solidFill>
                     <a:srgbClr val="4D4D4D">
                       <a:alpha val="100000"/>
@@ -4603,8 +4603,8 @@
           </p:nvSpPr>
           <p:spPr>
             <a:xfrm>
-              <a:off x="692708" y="3858272"/>
-              <a:ext cx="62179" cy="80101"/>
+              <a:off x="756929" y="3860262"/>
+              <a:ext cx="79004" cy="101955"/>
             </a:xfrm>
             <a:prstGeom prst="rect">
               <a:avLst/>
@@ -4617,7 +4617,7 @@
             <a:p>
               <a:pPr algn="l" marL="0" marR="0" indent="0">
                 <a:lnSpc>
-                  <a:spcPts val="880"/>
+                  <a:spcPts val="1120"/>
                 </a:lnSpc>
                 <a:spcBef>
                   <a:spcPts val="0"/>
@@ -4627,7 +4627,7 @@
                 </a:spcAft>
               </a:pPr>
               <a:r>
-                <a:rPr sz="880">
+                <a:rPr sz="1120">
                   <a:solidFill>
                     <a:srgbClr val="4D4D4D">
                       <a:alpha val="100000"/>
@@ -4649,8 +4649,8 @@
           </p:nvSpPr>
           <p:spPr>
             <a:xfrm>
-              <a:off x="692708" y="3028808"/>
-              <a:ext cx="62179" cy="80101"/>
+              <a:off x="756929" y="3086593"/>
+              <a:ext cx="79004" cy="101955"/>
             </a:xfrm>
             <a:prstGeom prst="rect">
               <a:avLst/>
@@ -4663,7 +4663,7 @@
             <a:p>
               <a:pPr algn="l" marL="0" marR="0" indent="0">
                 <a:lnSpc>
-                  <a:spcPts val="880"/>
+                  <a:spcPts val="1120"/>
                 </a:lnSpc>
                 <a:spcBef>
                   <a:spcPts val="0"/>
@@ -4673,7 +4673,7 @@
                 </a:spcAft>
               </a:pPr>
               <a:r>
-                <a:rPr sz="880">
+                <a:rPr sz="1120">
                   <a:solidFill>
                     <a:srgbClr val="4D4D4D">
                       <a:alpha val="100000"/>
@@ -4695,8 +4695,8 @@
           </p:nvSpPr>
           <p:spPr>
             <a:xfrm>
-              <a:off x="692708" y="2199345"/>
-              <a:ext cx="62179" cy="80101"/>
+              <a:off x="756929" y="2312925"/>
+              <a:ext cx="79004" cy="101955"/>
             </a:xfrm>
             <a:prstGeom prst="rect">
               <a:avLst/>
@@ -4709,7 +4709,7 @@
             <a:p>
               <a:pPr algn="l" marL="0" marR="0" indent="0">
                 <a:lnSpc>
-                  <a:spcPts val="880"/>
+                  <a:spcPts val="1120"/>
                 </a:lnSpc>
                 <a:spcBef>
                   <a:spcPts val="0"/>
@@ -4719,7 +4719,7 @@
                 </a:spcAft>
               </a:pPr>
               <a:r>
-                <a:rPr sz="880">
+                <a:rPr sz="1120">
                   <a:solidFill>
                     <a:srgbClr val="4D4D4D">
                       <a:alpha val="100000"/>
@@ -4741,8 +4741,8 @@
           </p:nvSpPr>
           <p:spPr>
             <a:xfrm>
-              <a:off x="2423864" y="5785772"/>
-              <a:ext cx="155356" cy="80101"/>
+              <a:off x="2475630" y="5693022"/>
+              <a:ext cx="197510" cy="101955"/>
             </a:xfrm>
             <a:prstGeom prst="rect">
               <a:avLst/>
@@ -4755,7 +4755,7 @@
             <a:p>
               <a:pPr algn="l" marL="0" marR="0" indent="0">
                 <a:lnSpc>
-                  <a:spcPts val="880"/>
+                  <a:spcPts val="1120"/>
                 </a:lnSpc>
                 <a:spcBef>
                   <a:spcPts val="0"/>
@@ -4765,7 +4765,7 @@
                 </a:spcAft>
               </a:pPr>
               <a:r>
-                <a:rPr sz="880">
+                <a:rPr sz="1120">
                   <a:solidFill>
                     <a:srgbClr val="4D4D4D">
                       <a:alpha val="100000"/>
@@ -4787,8 +4787,8 @@
           </p:nvSpPr>
           <p:spPr>
             <a:xfrm>
-              <a:off x="4196521" y="5785772"/>
-              <a:ext cx="155356" cy="80101"/>
+              <a:off x="4221672" y="5693022"/>
+              <a:ext cx="197510" cy="101955"/>
             </a:xfrm>
             <a:prstGeom prst="rect">
               <a:avLst/>
@@ -4801,7 +4801,7 @@
             <a:p>
               <a:pPr algn="l" marL="0" marR="0" indent="0">
                 <a:lnSpc>
-                  <a:spcPts val="880"/>
+                  <a:spcPts val="1120"/>
                 </a:lnSpc>
                 <a:spcBef>
                   <a:spcPts val="0"/>
@@ -4811,7 +4811,7 @@
                 </a:spcAft>
               </a:pPr>
               <a:r>
-                <a:rPr sz="880">
+                <a:rPr sz="1120">
                   <a:solidFill>
                     <a:srgbClr val="4D4D4D">
                       <a:alpha val="100000"/>
@@ -4833,8 +4833,8 @@
           </p:nvSpPr>
           <p:spPr>
             <a:xfrm>
-              <a:off x="5969179" y="5785772"/>
-              <a:ext cx="155356" cy="80101"/>
+              <a:off x="5967715" y="5693022"/>
+              <a:ext cx="197510" cy="101955"/>
             </a:xfrm>
             <a:prstGeom prst="rect">
               <a:avLst/>
@@ -4847,7 +4847,7 @@
             <a:p>
               <a:pPr algn="l" marL="0" marR="0" indent="0">
                 <a:lnSpc>
-                  <a:spcPts val="880"/>
+                  <a:spcPts val="1120"/>
                 </a:lnSpc>
                 <a:spcBef>
                   <a:spcPts val="0"/>
@@ -4857,7 +4857,7 @@
                 </a:spcAft>
               </a:pPr>
               <a:r>
-                <a:rPr sz="880">
+                <a:rPr sz="1120">
                   <a:solidFill>
                     <a:srgbClr val="4D4D4D">
                       <a:alpha val="100000"/>
@@ -4879,8 +4879,8 @@
           </p:nvSpPr>
           <p:spPr>
             <a:xfrm>
-              <a:off x="7741836" y="5785772"/>
-              <a:ext cx="155356" cy="80101"/>
+              <a:off x="7713757" y="5693022"/>
+              <a:ext cx="197510" cy="101955"/>
             </a:xfrm>
             <a:prstGeom prst="rect">
               <a:avLst/>
@@ -4893,7 +4893,7 @@
             <a:p>
               <a:pPr algn="l" marL="0" marR="0" indent="0">
                 <a:lnSpc>
-                  <a:spcPts val="880"/>
+                  <a:spcPts val="1120"/>
                 </a:lnSpc>
                 <a:spcBef>
                   <a:spcPts val="0"/>
@@ -4903,7 +4903,7 @@
                 </a:spcAft>
               </a:pPr>
               <a:r>
-                <a:rPr sz="880">
+                <a:rPr sz="1120">
                   <a:solidFill>
                     <a:srgbClr val="4D4D4D">
                       <a:alpha val="100000"/>
@@ -4925,8 +4925,8 @@
           </p:nvSpPr>
           <p:spPr>
             <a:xfrm>
-              <a:off x="3879271" y="5925448"/>
-              <a:ext cx="1676186" cy="100218"/>
+              <a:off x="3690153" y="5870717"/>
+              <a:ext cx="2133569" cy="127558"/>
             </a:xfrm>
             <a:prstGeom prst="rect">
               <a:avLst/>
@@ -4939,7 +4939,7 @@
             <a:p>
               <a:pPr algn="l" marL="0" marR="0" indent="0">
                 <a:lnSpc>
-                  <a:spcPts val="1100"/>
+                  <a:spcPts val="1400"/>
                 </a:lnSpc>
                 <a:spcBef>
                   <a:spcPts val="0"/>
@@ -4949,7 +4949,7 @@
                 </a:spcAft>
               </a:pPr>
               <a:r>
-                <a:rPr sz="1100">
+                <a:rPr sz="1400">
                   <a:solidFill>
                     <a:srgbClr val="000000">
                       <a:alpha val="100000"/>
@@ -4971,8 +4971,8 @@
           </p:nvSpPr>
           <p:spPr>
             <a:xfrm rot="-5400000">
-              <a:off x="68446" y="3848213"/>
-              <a:ext cx="1016904" cy="100218"/>
+              <a:off x="-37527" y="3847460"/>
+              <a:ext cx="1294150" cy="127558"/>
             </a:xfrm>
             <a:prstGeom prst="rect">
               <a:avLst/>
@@ -4985,7 +4985,7 @@
             <a:p>
               <a:pPr algn="l" marL="0" marR="0" indent="0">
                 <a:lnSpc>
-                  <a:spcPts val="1100"/>
+                  <a:spcPts val="1400"/>
                 </a:lnSpc>
                 <a:spcBef>
                   <a:spcPts val="0"/>
@@ -4995,7 +4995,7 @@
                 </a:spcAft>
               </a:pPr>
               <a:r>
-                <a:rPr sz="1100">
+                <a:rPr sz="1400">
                   <a:solidFill>
                     <a:srgbClr val="000000">
                       <a:alpha val="100000"/>
@@ -5017,8 +5017,8 @@
           </p:nvSpPr>
           <p:spPr>
             <a:xfrm>
-              <a:off x="817517" y="1896563"/>
-              <a:ext cx="4166463" cy="82021"/>
+              <a:off x="915645" y="1977589"/>
+              <a:ext cx="5556900" cy="109362"/>
             </a:xfrm>
             <a:prstGeom prst="rect">
               <a:avLst/>
@@ -5031,7 +5031,7 @@
             <a:p>
               <a:pPr algn="l" marL="0" marR="0" indent="0">
                 <a:lnSpc>
-                  <a:spcPts val="900"/>
+                  <a:spcPts val="1200"/>
                 </a:lnSpc>
                 <a:spcBef>
                   <a:spcPts val="0"/>
@@ -5041,7 +5041,7 @@
                 </a:spcAft>
               </a:pPr>
               <a:r>
-                <a:rPr sz="900">
+                <a:rPr sz="1200">
                   <a:solidFill>
                     <a:srgbClr val="404040">
                       <a:alpha val="100000"/>
@@ -5063,8 +5063,8 @@
           </p:nvSpPr>
           <p:spPr>
             <a:xfrm>
-              <a:off x="817517" y="1669789"/>
-              <a:ext cx="1982876" cy="120152"/>
+              <a:off x="915645" y="1688767"/>
+              <a:ext cx="2524749" cy="153070"/>
             </a:xfrm>
             <a:prstGeom prst="rect">
               <a:avLst/>
@@ -5077,7 +5077,7 @@
             <a:p>
               <a:pPr algn="l" marL="0" marR="0" indent="0">
                 <a:lnSpc>
-                  <a:spcPts val="1320"/>
+                  <a:spcPts val="1680"/>
                 </a:lnSpc>
                 <a:spcBef>
                   <a:spcPts val="0"/>
@@ -5087,7 +5087,7 @@
                 </a:spcAft>
               </a:pPr>
               <a:r>
-                <a:rPr sz="1320">
+                <a:rPr sz="1680">
                   <a:solidFill>
                     <a:srgbClr val="000000">
                       <a:alpha val="100000"/>
